--- a/docs/plots/carbo/jx_carbo_linsubhr_ratio_aki2.pptx
+++ b/docs/plots/carbo/jx_carbo_linsubhr_ratio_aki2.pptx
@@ -3003,533 +3003,545 @@
           <p:spPr>
             <a:xfrm>
               <a:off x="817517" y="1896563"/>
-              <a:ext cx="7370972" cy="3604893"/>
+              <a:ext cx="7370972" cy="3581666"/>
             </a:xfrm>
             <a:custGeom>
               <a:avLst/>
               <a:pathLst>
-                <a:path w="7370972" h="3604893">
+                <a:path w="7370972" h="3581666">
                   <a:moveTo>
-                    <a:pt x="1416149" y="0"/>
+                    <a:pt x="1104374" y="0"/>
                   </a:moveTo>
                   <a:lnTo>
-                    <a:pt x="1470785" y="143649"/>
-                  </a:lnTo>
-                  <a:lnTo>
-                    <a:pt x="1548419" y="336546"/>
-                  </a:lnTo>
-                  <a:lnTo>
-                    <a:pt x="1626053" y="518838"/>
-                  </a:lnTo>
-                  <a:lnTo>
-                    <a:pt x="1703687" y="691110"/>
-                  </a:lnTo>
-                  <a:lnTo>
-                    <a:pt x="1781321" y="853912"/>
-                  </a:lnTo>
-                  <a:lnTo>
-                    <a:pt x="1858955" y="1007764"/>
-                  </a:lnTo>
-                  <a:lnTo>
-                    <a:pt x="1936589" y="1153159"/>
-                  </a:lnTo>
-                  <a:lnTo>
-                    <a:pt x="2014223" y="1290561"/>
-                  </a:lnTo>
-                  <a:lnTo>
-                    <a:pt x="2091857" y="1420409"/>
-                  </a:lnTo>
-                  <a:lnTo>
-                    <a:pt x="2169491" y="1543120"/>
-                  </a:lnTo>
-                  <a:lnTo>
-                    <a:pt x="2247125" y="1659085"/>
-                  </a:lnTo>
-                  <a:lnTo>
-                    <a:pt x="2324759" y="1768675"/>
-                  </a:lnTo>
-                  <a:lnTo>
-                    <a:pt x="2402393" y="1872241"/>
-                  </a:lnTo>
-                  <a:lnTo>
-                    <a:pt x="2480027" y="1970113"/>
-                  </a:lnTo>
-                  <a:lnTo>
-                    <a:pt x="2557661" y="2062605"/>
-                  </a:lnTo>
-                  <a:lnTo>
-                    <a:pt x="2635295" y="2150013"/>
-                  </a:lnTo>
-                  <a:lnTo>
-                    <a:pt x="2712930" y="2232616"/>
-                  </a:lnTo>
-                  <a:lnTo>
-                    <a:pt x="2790564" y="2310678"/>
-                  </a:lnTo>
-                  <a:lnTo>
-                    <a:pt x="2868198" y="2384448"/>
-                  </a:lnTo>
-                  <a:lnTo>
-                    <a:pt x="2945832" y="2454164"/>
-                  </a:lnTo>
-                  <a:lnTo>
-                    <a:pt x="3023466" y="2520047"/>
-                  </a:lnTo>
-                  <a:lnTo>
-                    <a:pt x="3101100" y="2582308"/>
-                  </a:lnTo>
-                  <a:lnTo>
-                    <a:pt x="3178734" y="2641146"/>
-                  </a:lnTo>
-                  <a:lnTo>
-                    <a:pt x="3256368" y="2696751"/>
-                  </a:lnTo>
-                  <a:lnTo>
-                    <a:pt x="3334002" y="2749298"/>
-                  </a:lnTo>
-                  <a:lnTo>
-                    <a:pt x="3411636" y="2782209"/>
-                  </a:lnTo>
-                  <a:lnTo>
-                    <a:pt x="3489270" y="2779897"/>
-                  </a:lnTo>
-                  <a:lnTo>
-                    <a:pt x="3566904" y="2777578"/>
-                  </a:lnTo>
-                  <a:lnTo>
-                    <a:pt x="3644538" y="2775254"/>
-                  </a:lnTo>
-                  <a:lnTo>
-                    <a:pt x="3722172" y="2772924"/>
-                  </a:lnTo>
-                  <a:lnTo>
-                    <a:pt x="3799806" y="2770587"/>
-                  </a:lnTo>
-                  <a:lnTo>
-                    <a:pt x="3877440" y="2768244"/>
-                  </a:lnTo>
-                  <a:lnTo>
-                    <a:pt x="3955074" y="2765895"/>
-                  </a:lnTo>
-                  <a:lnTo>
-                    <a:pt x="4032708" y="2763539"/>
-                  </a:lnTo>
-                  <a:lnTo>
-                    <a:pt x="4110342" y="2761178"/>
-                  </a:lnTo>
-                  <a:lnTo>
-                    <a:pt x="4187976" y="2758810"/>
-                  </a:lnTo>
-                  <a:lnTo>
-                    <a:pt x="4265610" y="2756436"/>
-                  </a:lnTo>
-                  <a:lnTo>
-                    <a:pt x="4343244" y="2754055"/>
-                  </a:lnTo>
-                  <a:lnTo>
-                    <a:pt x="4420879" y="2751668"/>
-                  </a:lnTo>
-                  <a:lnTo>
-                    <a:pt x="4498513" y="2749275"/>
-                  </a:lnTo>
-                  <a:lnTo>
-                    <a:pt x="4576147" y="2746875"/>
-                  </a:lnTo>
-                  <a:lnTo>
-                    <a:pt x="4653781" y="2744470"/>
-                  </a:lnTo>
-                  <a:lnTo>
-                    <a:pt x="4731415" y="2742057"/>
-                  </a:lnTo>
-                  <a:lnTo>
-                    <a:pt x="4809049" y="2739639"/>
-                  </a:lnTo>
-                  <a:lnTo>
-                    <a:pt x="4886683" y="2737213"/>
-                  </a:lnTo>
-                  <a:lnTo>
-                    <a:pt x="4964317" y="2734782"/>
-                  </a:lnTo>
-                  <a:lnTo>
-                    <a:pt x="5041951" y="2732344"/>
-                  </a:lnTo>
-                  <a:lnTo>
-                    <a:pt x="5119585" y="2729899"/>
-                  </a:lnTo>
-                  <a:lnTo>
-                    <a:pt x="5197219" y="2727448"/>
-                  </a:lnTo>
-                  <a:lnTo>
-                    <a:pt x="5274853" y="2724991"/>
-                  </a:lnTo>
-                  <a:lnTo>
-                    <a:pt x="5352487" y="2722527"/>
-                  </a:lnTo>
-                  <a:lnTo>
-                    <a:pt x="5430121" y="2720056"/>
-                  </a:lnTo>
-                  <a:lnTo>
-                    <a:pt x="5507755" y="2717579"/>
-                  </a:lnTo>
-                  <a:lnTo>
-                    <a:pt x="5585389" y="2715095"/>
-                  </a:lnTo>
-                  <a:lnTo>
-                    <a:pt x="5663023" y="2712605"/>
-                  </a:lnTo>
-                  <a:lnTo>
-                    <a:pt x="5740657" y="2710108"/>
-                  </a:lnTo>
-                  <a:lnTo>
-                    <a:pt x="5818291" y="2707604"/>
-                  </a:lnTo>
-                  <a:lnTo>
-                    <a:pt x="5895925" y="2705094"/>
-                  </a:lnTo>
-                  <a:lnTo>
-                    <a:pt x="5973559" y="2702577"/>
-                  </a:lnTo>
-                  <a:lnTo>
-                    <a:pt x="6051193" y="2700054"/>
-                  </a:lnTo>
-                  <a:lnTo>
-                    <a:pt x="6128827" y="2697523"/>
-                  </a:lnTo>
-                  <a:lnTo>
-                    <a:pt x="6206462" y="2694986"/>
-                  </a:lnTo>
-                  <a:lnTo>
-                    <a:pt x="6284096" y="2692443"/>
-                  </a:lnTo>
-                  <a:lnTo>
-                    <a:pt x="6361730" y="2689892"/>
-                  </a:lnTo>
-                  <a:lnTo>
-                    <a:pt x="6439364" y="2687335"/>
-                  </a:lnTo>
-                  <a:lnTo>
-                    <a:pt x="6516998" y="2684771"/>
-                  </a:lnTo>
-                  <a:lnTo>
-                    <a:pt x="6594632" y="2682200"/>
-                  </a:lnTo>
-                  <a:lnTo>
-                    <a:pt x="6672266" y="2679622"/>
-                  </a:lnTo>
-                  <a:lnTo>
-                    <a:pt x="6749900" y="2677038"/>
-                  </a:lnTo>
-                  <a:lnTo>
-                    <a:pt x="6827534" y="2674446"/>
-                  </a:lnTo>
-                  <a:lnTo>
-                    <a:pt x="6905168" y="2671848"/>
-                  </a:lnTo>
-                  <a:lnTo>
-                    <a:pt x="6982802" y="2669243"/>
-                  </a:lnTo>
-                  <a:lnTo>
-                    <a:pt x="7060436" y="2666631"/>
-                  </a:lnTo>
-                  <a:lnTo>
-                    <a:pt x="7138070" y="2664012"/>
-                  </a:lnTo>
-                  <a:lnTo>
-                    <a:pt x="7215704" y="2661386"/>
-                  </a:lnTo>
-                  <a:lnTo>
-                    <a:pt x="7293338" y="2658753"/>
-                  </a:lnTo>
-                  <a:lnTo>
-                    <a:pt x="7370972" y="2656113"/>
-                  </a:lnTo>
-                  <a:lnTo>
-                    <a:pt x="7370972" y="3604893"/>
-                  </a:lnTo>
-                  <a:lnTo>
-                    <a:pt x="7293338" y="3602116"/>
-                  </a:lnTo>
-                  <a:lnTo>
-                    <a:pt x="7215704" y="3599176"/>
-                  </a:lnTo>
-                  <a:lnTo>
-                    <a:pt x="7138070" y="3596066"/>
-                  </a:lnTo>
-                  <a:lnTo>
-                    <a:pt x="7060436" y="3592775"/>
-                  </a:lnTo>
-                  <a:lnTo>
-                    <a:pt x="6982802" y="3589293"/>
-                  </a:lnTo>
-                  <a:lnTo>
-                    <a:pt x="6905168" y="3585607"/>
-                  </a:lnTo>
-                  <a:lnTo>
-                    <a:pt x="6827534" y="3581708"/>
-                  </a:lnTo>
-                  <a:lnTo>
-                    <a:pt x="6749900" y="3577582"/>
-                  </a:lnTo>
-                  <a:lnTo>
-                    <a:pt x="6672266" y="3573215"/>
-                  </a:lnTo>
-                  <a:lnTo>
-                    <a:pt x="6594632" y="3568595"/>
-                  </a:lnTo>
-                  <a:lnTo>
-                    <a:pt x="6516998" y="3563706"/>
-                  </a:lnTo>
-                  <a:lnTo>
-                    <a:pt x="6439364" y="3558533"/>
-                  </a:lnTo>
-                  <a:lnTo>
-                    <a:pt x="6361730" y="3553058"/>
-                  </a:lnTo>
-                  <a:lnTo>
-                    <a:pt x="6284096" y="3547265"/>
-                  </a:lnTo>
-                  <a:lnTo>
-                    <a:pt x="6206462" y="3541136"/>
-                  </a:lnTo>
-                  <a:lnTo>
-                    <a:pt x="6128827" y="3534649"/>
-                  </a:lnTo>
-                  <a:lnTo>
-                    <a:pt x="6051193" y="3527785"/>
-                  </a:lnTo>
-                  <a:lnTo>
-                    <a:pt x="5973559" y="3520522"/>
-                  </a:lnTo>
-                  <a:lnTo>
-                    <a:pt x="5895925" y="3512837"/>
-                  </a:lnTo>
-                  <a:lnTo>
-                    <a:pt x="5818291" y="3504705"/>
-                  </a:lnTo>
-                  <a:lnTo>
-                    <a:pt x="5740657" y="3496099"/>
-                  </a:lnTo>
-                  <a:lnTo>
-                    <a:pt x="5663023" y="3486993"/>
-                  </a:lnTo>
-                  <a:lnTo>
-                    <a:pt x="5585389" y="3477357"/>
-                  </a:lnTo>
-                  <a:lnTo>
-                    <a:pt x="5507755" y="3467161"/>
-                  </a:lnTo>
-                  <a:lnTo>
-                    <a:pt x="5430121" y="3456371"/>
-                  </a:lnTo>
-                  <a:lnTo>
-                    <a:pt x="5352487" y="3444954"/>
-                  </a:lnTo>
-                  <a:lnTo>
-                    <a:pt x="5274853" y="3432873"/>
-                  </a:lnTo>
-                  <a:lnTo>
-                    <a:pt x="5197219" y="3420089"/>
-                  </a:lnTo>
-                  <a:lnTo>
-                    <a:pt x="5119585" y="3406561"/>
-                  </a:lnTo>
-                  <a:lnTo>
-                    <a:pt x="5041951" y="3392246"/>
-                  </a:lnTo>
-                  <a:lnTo>
-                    <a:pt x="4964317" y="3377099"/>
-                  </a:lnTo>
-                  <a:lnTo>
-                    <a:pt x="4886683" y="3361071"/>
-                  </a:lnTo>
-                  <a:lnTo>
-                    <a:pt x="4809049" y="3344110"/>
-                  </a:lnTo>
-                  <a:lnTo>
-                    <a:pt x="4731415" y="3326163"/>
-                  </a:lnTo>
-                  <a:lnTo>
-                    <a:pt x="4653781" y="3307172"/>
-                  </a:lnTo>
-                  <a:lnTo>
-                    <a:pt x="4576147" y="3287076"/>
-                  </a:lnTo>
-                  <a:lnTo>
-                    <a:pt x="4498513" y="3265811"/>
-                  </a:lnTo>
-                  <a:lnTo>
-                    <a:pt x="4420879" y="3243309"/>
-                  </a:lnTo>
-                  <a:lnTo>
-                    <a:pt x="4343244" y="3219498"/>
-                  </a:lnTo>
-                  <a:lnTo>
-                    <a:pt x="4265610" y="3194302"/>
-                  </a:lnTo>
-                  <a:lnTo>
-                    <a:pt x="4187976" y="3167640"/>
-                  </a:lnTo>
-                  <a:lnTo>
-                    <a:pt x="4110342" y="3139427"/>
-                  </a:lnTo>
-                  <a:lnTo>
-                    <a:pt x="4032708" y="3109574"/>
-                  </a:lnTo>
-                  <a:lnTo>
-                    <a:pt x="3955074" y="3077983"/>
-                  </a:lnTo>
-                  <a:lnTo>
-                    <a:pt x="3877440" y="3044556"/>
-                  </a:lnTo>
-                  <a:lnTo>
-                    <a:pt x="3799806" y="3009183"/>
-                  </a:lnTo>
-                  <a:lnTo>
-                    <a:pt x="3722172" y="2971753"/>
-                  </a:lnTo>
-                  <a:lnTo>
-                    <a:pt x="3644538" y="2932146"/>
-                  </a:lnTo>
-                  <a:lnTo>
-                    <a:pt x="3566904" y="2890235"/>
-                  </a:lnTo>
-                  <a:lnTo>
-                    <a:pt x="3489270" y="2845886"/>
-                  </a:lnTo>
-                  <a:lnTo>
-                    <a:pt x="3411636" y="2798957"/>
-                  </a:lnTo>
-                  <a:lnTo>
-                    <a:pt x="3334002" y="2784515"/>
-                  </a:lnTo>
-                  <a:lnTo>
-                    <a:pt x="3256368" y="2786814"/>
-                  </a:lnTo>
-                  <a:lnTo>
-                    <a:pt x="3178734" y="2789108"/>
-                  </a:lnTo>
-                  <a:lnTo>
-                    <a:pt x="3101100" y="2791396"/>
-                  </a:lnTo>
-                  <a:lnTo>
-                    <a:pt x="3023466" y="2793677"/>
-                  </a:lnTo>
-                  <a:lnTo>
-                    <a:pt x="2945832" y="2795953"/>
-                  </a:lnTo>
-                  <a:lnTo>
-                    <a:pt x="2868198" y="2798223"/>
-                  </a:lnTo>
-                  <a:lnTo>
-                    <a:pt x="2790564" y="2800486"/>
-                  </a:lnTo>
-                  <a:lnTo>
-                    <a:pt x="2712930" y="2802744"/>
-                  </a:lnTo>
-                  <a:lnTo>
-                    <a:pt x="2635295" y="2804995"/>
-                  </a:lnTo>
-                  <a:lnTo>
-                    <a:pt x="2557661" y="2807241"/>
-                  </a:lnTo>
-                  <a:lnTo>
-                    <a:pt x="2480027" y="2809480"/>
-                  </a:lnTo>
-                  <a:lnTo>
-                    <a:pt x="2402393" y="2811714"/>
-                  </a:lnTo>
-                  <a:lnTo>
-                    <a:pt x="2324759" y="2813942"/>
-                  </a:lnTo>
-                  <a:lnTo>
-                    <a:pt x="2247125" y="2816164"/>
-                  </a:lnTo>
-                  <a:lnTo>
-                    <a:pt x="2169491" y="2818380"/>
-                  </a:lnTo>
-                  <a:lnTo>
-                    <a:pt x="2091857" y="2820590"/>
-                  </a:lnTo>
-                  <a:lnTo>
-                    <a:pt x="2014223" y="2822794"/>
-                  </a:lnTo>
-                  <a:lnTo>
-                    <a:pt x="1936589" y="2824992"/>
-                  </a:lnTo>
-                  <a:lnTo>
-                    <a:pt x="1858955" y="2827185"/>
-                  </a:lnTo>
-                  <a:lnTo>
-                    <a:pt x="1781321" y="2829372"/>
-                  </a:lnTo>
-                  <a:lnTo>
-                    <a:pt x="1703687" y="2831553"/>
-                  </a:lnTo>
-                  <a:lnTo>
-                    <a:pt x="1626053" y="2833728"/>
-                  </a:lnTo>
-                  <a:lnTo>
-                    <a:pt x="1548419" y="2835897"/>
-                  </a:lnTo>
-                  <a:lnTo>
-                    <a:pt x="1470785" y="2838061"/>
-                  </a:lnTo>
-                  <a:lnTo>
-                    <a:pt x="1393151" y="2840219"/>
-                  </a:lnTo>
-                  <a:lnTo>
-                    <a:pt x="1315517" y="2842371"/>
-                  </a:lnTo>
-                  <a:lnTo>
-                    <a:pt x="1237883" y="2844518"/>
-                  </a:lnTo>
-                  <a:lnTo>
-                    <a:pt x="1160249" y="2846659"/>
-                  </a:lnTo>
-                  <a:lnTo>
-                    <a:pt x="1082615" y="2848794"/>
-                  </a:lnTo>
-                  <a:lnTo>
-                    <a:pt x="1004981" y="2850923"/>
-                  </a:lnTo>
-                  <a:lnTo>
-                    <a:pt x="927346" y="2853047"/>
-                  </a:lnTo>
-                  <a:lnTo>
-                    <a:pt x="849712" y="2855166"/>
-                  </a:lnTo>
-                  <a:lnTo>
-                    <a:pt x="772078" y="2857278"/>
-                  </a:lnTo>
-                  <a:lnTo>
-                    <a:pt x="694444" y="2859385"/>
-                  </a:lnTo>
-                  <a:lnTo>
-                    <a:pt x="616810" y="2861487"/>
-                  </a:lnTo>
-                  <a:lnTo>
-                    <a:pt x="539176" y="2863583"/>
-                  </a:lnTo>
-                  <a:lnTo>
-                    <a:pt x="461542" y="2865673"/>
-                  </a:lnTo>
-                  <a:lnTo>
-                    <a:pt x="383908" y="2867758"/>
-                  </a:lnTo>
-                  <a:lnTo>
-                    <a:pt x="306274" y="2869837"/>
-                  </a:lnTo>
-                  <a:lnTo>
-                    <a:pt x="228640" y="2871911"/>
-                  </a:lnTo>
-                  <a:lnTo>
-                    <a:pt x="151006" y="2873979"/>
-                  </a:lnTo>
-                  <a:lnTo>
-                    <a:pt x="73372" y="2876042"/>
-                  </a:lnTo>
-                  <a:lnTo>
-                    <a:pt x="0" y="2877987"/>
+                    <a:pt x="1160249" y="126949"/>
+                  </a:lnTo>
+                  <a:lnTo>
+                    <a:pt x="1237883" y="294934"/>
+                  </a:lnTo>
+                  <a:lnTo>
+                    <a:pt x="1315517" y="454915"/>
+                  </a:lnTo>
+                  <a:lnTo>
+                    <a:pt x="1393151" y="607274"/>
+                  </a:lnTo>
+                  <a:lnTo>
+                    <a:pt x="1470785" y="752374"/>
+                  </a:lnTo>
+                  <a:lnTo>
+                    <a:pt x="1548419" y="890560"/>
+                  </a:lnTo>
+                  <a:lnTo>
+                    <a:pt x="1626053" y="1022162"/>
+                  </a:lnTo>
+                  <a:lnTo>
+                    <a:pt x="1703687" y="1147494"/>
+                  </a:lnTo>
+                  <a:lnTo>
+                    <a:pt x="1781321" y="1266854"/>
+                  </a:lnTo>
+                  <a:lnTo>
+                    <a:pt x="1858955" y="1380527"/>
+                  </a:lnTo>
+                  <a:lnTo>
+                    <a:pt x="1936589" y="1488784"/>
+                  </a:lnTo>
+                  <a:lnTo>
+                    <a:pt x="2014223" y="1591883"/>
+                  </a:lnTo>
+                  <a:lnTo>
+                    <a:pt x="2091857" y="1690070"/>
+                  </a:lnTo>
+                  <a:lnTo>
+                    <a:pt x="2169491" y="1783579"/>
+                  </a:lnTo>
+                  <a:lnTo>
+                    <a:pt x="2247125" y="1872632"/>
+                  </a:lnTo>
+                  <a:lnTo>
+                    <a:pt x="2324759" y="1957442"/>
+                  </a:lnTo>
+                  <a:lnTo>
+                    <a:pt x="2402393" y="2038212"/>
+                  </a:lnTo>
+                  <a:lnTo>
+                    <a:pt x="2480027" y="2115133"/>
+                  </a:lnTo>
+                  <a:lnTo>
+                    <a:pt x="2557661" y="2188389"/>
+                  </a:lnTo>
+                  <a:lnTo>
+                    <a:pt x="2635295" y="2258155"/>
+                  </a:lnTo>
+                  <a:lnTo>
+                    <a:pt x="2712930" y="2324597"/>
+                  </a:lnTo>
+                  <a:lnTo>
+                    <a:pt x="2790564" y="2387873"/>
+                  </a:lnTo>
+                  <a:lnTo>
+                    <a:pt x="2868198" y="2448134"/>
+                  </a:lnTo>
+                  <a:lnTo>
+                    <a:pt x="2945832" y="2505524"/>
+                  </a:lnTo>
+                  <a:lnTo>
+                    <a:pt x="3023466" y="2560179"/>
+                  </a:lnTo>
+                  <a:lnTo>
+                    <a:pt x="3101100" y="2612231"/>
+                  </a:lnTo>
+                  <a:lnTo>
+                    <a:pt x="3178734" y="2661802"/>
+                  </a:lnTo>
+                  <a:lnTo>
+                    <a:pt x="3256368" y="2709012"/>
+                  </a:lnTo>
+                  <a:lnTo>
+                    <a:pt x="3334002" y="2753972"/>
+                  </a:lnTo>
+                  <a:lnTo>
+                    <a:pt x="3411636" y="2777188"/>
+                  </a:lnTo>
+                  <a:lnTo>
+                    <a:pt x="3489270" y="2759347"/>
+                  </a:lnTo>
+                  <a:lnTo>
+                    <a:pt x="3566904" y="2741142"/>
+                  </a:lnTo>
+                  <a:lnTo>
+                    <a:pt x="3644538" y="2722566"/>
+                  </a:lnTo>
+                  <a:lnTo>
+                    <a:pt x="3722172" y="2703612"/>
+                  </a:lnTo>
+                  <a:lnTo>
+                    <a:pt x="3799806" y="2684271"/>
+                  </a:lnTo>
+                  <a:lnTo>
+                    <a:pt x="3877440" y="2664537"/>
+                  </a:lnTo>
+                  <a:lnTo>
+                    <a:pt x="3955074" y="2644400"/>
+                  </a:lnTo>
+                  <a:lnTo>
+                    <a:pt x="4032708" y="2623852"/>
+                  </a:lnTo>
+                  <a:lnTo>
+                    <a:pt x="4110342" y="2602886"/>
+                  </a:lnTo>
+                  <a:lnTo>
+                    <a:pt x="4187976" y="2581493"/>
+                  </a:lnTo>
+                  <a:lnTo>
+                    <a:pt x="4265610" y="2559663"/>
+                  </a:lnTo>
+                  <a:lnTo>
+                    <a:pt x="4343244" y="2537389"/>
+                  </a:lnTo>
+                  <a:lnTo>
+                    <a:pt x="4420879" y="2514661"/>
+                  </a:lnTo>
+                  <a:lnTo>
+                    <a:pt x="4498513" y="2491469"/>
+                  </a:lnTo>
+                  <a:lnTo>
+                    <a:pt x="4576147" y="2467805"/>
+                  </a:lnTo>
+                  <a:lnTo>
+                    <a:pt x="4653781" y="2443659"/>
+                  </a:lnTo>
+                  <a:lnTo>
+                    <a:pt x="4731415" y="2419021"/>
+                  </a:lnTo>
+                  <a:lnTo>
+                    <a:pt x="4809049" y="2393880"/>
+                  </a:lnTo>
+                  <a:lnTo>
+                    <a:pt x="4886683" y="2368227"/>
+                  </a:lnTo>
+                  <a:lnTo>
+                    <a:pt x="4964317" y="2342052"/>
+                  </a:lnTo>
+                  <a:lnTo>
+                    <a:pt x="5041951" y="2315343"/>
+                  </a:lnTo>
+                  <a:lnTo>
+                    <a:pt x="5119585" y="2288089"/>
+                  </a:lnTo>
+                  <a:lnTo>
+                    <a:pt x="5197219" y="2260281"/>
+                  </a:lnTo>
+                  <a:lnTo>
+                    <a:pt x="5274853" y="2231905"/>
+                  </a:lnTo>
+                  <a:lnTo>
+                    <a:pt x="5352487" y="2202951"/>
+                  </a:lnTo>
+                  <a:lnTo>
+                    <a:pt x="5430121" y="2173408"/>
+                  </a:lnTo>
+                  <a:lnTo>
+                    <a:pt x="5507755" y="2143262"/>
+                  </a:lnTo>
+                  <a:lnTo>
+                    <a:pt x="5585389" y="2112501"/>
+                  </a:lnTo>
+                  <a:lnTo>
+                    <a:pt x="5663023" y="2081114"/>
+                  </a:lnTo>
+                  <a:lnTo>
+                    <a:pt x="5740657" y="2049087"/>
+                  </a:lnTo>
+                  <a:lnTo>
+                    <a:pt x="5818291" y="2016408"/>
+                  </a:lnTo>
+                  <a:lnTo>
+                    <a:pt x="5895925" y="1983062"/>
+                  </a:lnTo>
+                  <a:lnTo>
+                    <a:pt x="5973559" y="1949037"/>
+                  </a:lnTo>
+                  <a:lnTo>
+                    <a:pt x="6051193" y="1914319"/>
+                  </a:lnTo>
+                  <a:lnTo>
+                    <a:pt x="6128827" y="1878893"/>
+                  </a:lnTo>
+                  <a:lnTo>
+                    <a:pt x="6206462" y="1842745"/>
+                  </a:lnTo>
+                  <a:lnTo>
+                    <a:pt x="6284096" y="1805860"/>
+                  </a:lnTo>
+                  <a:lnTo>
+                    <a:pt x="6361730" y="1768224"/>
+                  </a:lnTo>
+                  <a:lnTo>
+                    <a:pt x="6439364" y="1729821"/>
+                  </a:lnTo>
+                  <a:lnTo>
+                    <a:pt x="6516998" y="1690635"/>
+                  </a:lnTo>
+                  <a:lnTo>
+                    <a:pt x="6594632" y="1650650"/>
+                  </a:lnTo>
+                  <a:lnTo>
+                    <a:pt x="6672266" y="1609851"/>
+                  </a:lnTo>
+                  <a:lnTo>
+                    <a:pt x="6749900" y="1568220"/>
+                  </a:lnTo>
+                  <a:lnTo>
+                    <a:pt x="6827534" y="1525741"/>
+                  </a:lnTo>
+                  <a:lnTo>
+                    <a:pt x="6905168" y="1482396"/>
+                  </a:lnTo>
+                  <a:lnTo>
+                    <a:pt x="6982802" y="1438167"/>
+                  </a:lnTo>
+                  <a:lnTo>
+                    <a:pt x="7060436" y="1393038"/>
+                  </a:lnTo>
+                  <a:lnTo>
+                    <a:pt x="7138070" y="1346988"/>
+                  </a:lnTo>
+                  <a:lnTo>
+                    <a:pt x="7215704" y="1300001"/>
+                  </a:lnTo>
+                  <a:lnTo>
+                    <a:pt x="7293338" y="1252055"/>
+                  </a:lnTo>
+                  <a:lnTo>
+                    <a:pt x="7370972" y="1203133"/>
+                  </a:lnTo>
+                  <a:lnTo>
+                    <a:pt x="7370972" y="3581666"/>
+                  </a:lnTo>
+                  <a:lnTo>
+                    <a:pt x="7293338" y="3578115"/>
+                  </a:lnTo>
+                  <a:lnTo>
+                    <a:pt x="7215704" y="3574386"/>
+                  </a:lnTo>
+                  <a:lnTo>
+                    <a:pt x="7138070" y="3570471"/>
+                  </a:lnTo>
+                  <a:lnTo>
+                    <a:pt x="7060436" y="3566360"/>
+                  </a:lnTo>
+                  <a:lnTo>
+                    <a:pt x="6982802" y="3562044"/>
+                  </a:lnTo>
+                  <a:lnTo>
+                    <a:pt x="6905168" y="3557511"/>
+                  </a:lnTo>
+                  <a:lnTo>
+                    <a:pt x="6827534" y="3552751"/>
+                  </a:lnTo>
+                  <a:lnTo>
+                    <a:pt x="6749900" y="3547754"/>
+                  </a:lnTo>
+                  <a:lnTo>
+                    <a:pt x="6672266" y="3542506"/>
+                  </a:lnTo>
+                  <a:lnTo>
+                    <a:pt x="6594632" y="3536996"/>
+                  </a:lnTo>
+                  <a:lnTo>
+                    <a:pt x="6516998" y="3531210"/>
+                  </a:lnTo>
+                  <a:lnTo>
+                    <a:pt x="6439364" y="3525135"/>
+                  </a:lnTo>
+                  <a:lnTo>
+                    <a:pt x="6361730" y="3518756"/>
+                  </a:lnTo>
+                  <a:lnTo>
+                    <a:pt x="6284096" y="3512058"/>
+                  </a:lnTo>
+                  <a:lnTo>
+                    <a:pt x="6206462" y="3505024"/>
+                  </a:lnTo>
+                  <a:lnTo>
+                    <a:pt x="6128827" y="3497639"/>
+                  </a:lnTo>
+                  <a:lnTo>
+                    <a:pt x="6051193" y="3489884"/>
+                  </a:lnTo>
+                  <a:lnTo>
+                    <a:pt x="5973559" y="3481741"/>
+                  </a:lnTo>
+                  <a:lnTo>
+                    <a:pt x="5895925" y="3473191"/>
+                  </a:lnTo>
+                  <a:lnTo>
+                    <a:pt x="5818291" y="3464213"/>
+                  </a:lnTo>
+                  <a:lnTo>
+                    <a:pt x="5740657" y="3454786"/>
+                  </a:lnTo>
+                  <a:lnTo>
+                    <a:pt x="5663023" y="3444887"/>
+                  </a:lnTo>
+                  <a:lnTo>
+                    <a:pt x="5585389" y="3434493"/>
+                  </a:lnTo>
+                  <a:lnTo>
+                    <a:pt x="5507755" y="3423579"/>
+                  </a:lnTo>
+                  <a:lnTo>
+                    <a:pt x="5430121" y="3412119"/>
+                  </a:lnTo>
+                  <a:lnTo>
+                    <a:pt x="5352487" y="3400086"/>
+                  </a:lnTo>
+                  <a:lnTo>
+                    <a:pt x="5274853" y="3387451"/>
+                  </a:lnTo>
+                  <a:lnTo>
+                    <a:pt x="5197219" y="3374183"/>
+                  </a:lnTo>
+                  <a:lnTo>
+                    <a:pt x="5119585" y="3360252"/>
+                  </a:lnTo>
+                  <a:lnTo>
+                    <a:pt x="5041951" y="3345624"/>
+                  </a:lnTo>
+                  <a:lnTo>
+                    <a:pt x="4964317" y="3330263"/>
+                  </a:lnTo>
+                  <a:lnTo>
+                    <a:pt x="4886683" y="3314135"/>
+                  </a:lnTo>
+                  <a:lnTo>
+                    <a:pt x="4809049" y="3297199"/>
+                  </a:lnTo>
+                  <a:lnTo>
+                    <a:pt x="4731415" y="3279417"/>
+                  </a:lnTo>
+                  <a:lnTo>
+                    <a:pt x="4653781" y="3260744"/>
+                  </a:lnTo>
+                  <a:lnTo>
+                    <a:pt x="4576147" y="3241138"/>
+                  </a:lnTo>
+                  <a:lnTo>
+                    <a:pt x="4498513" y="3220550"/>
+                  </a:lnTo>
+                  <a:lnTo>
+                    <a:pt x="4420879" y="3198933"/>
+                  </a:lnTo>
+                  <a:lnTo>
+                    <a:pt x="4343244" y="3176234"/>
+                  </a:lnTo>
+                  <a:lnTo>
+                    <a:pt x="4265610" y="3152399"/>
+                  </a:lnTo>
+                  <a:lnTo>
+                    <a:pt x="4187976" y="3127372"/>
+                  </a:lnTo>
+                  <a:lnTo>
+                    <a:pt x="4110342" y="3101093"/>
+                  </a:lnTo>
+                  <a:lnTo>
+                    <a:pt x="4032708" y="3073499"/>
+                  </a:lnTo>
+                  <a:lnTo>
+                    <a:pt x="3955074" y="3044525"/>
+                  </a:lnTo>
+                  <a:lnTo>
+                    <a:pt x="3877440" y="3014101"/>
+                  </a:lnTo>
+                  <a:lnTo>
+                    <a:pt x="3799806" y="2982155"/>
+                  </a:lnTo>
+                  <a:lnTo>
+                    <a:pt x="3722172" y="2948610"/>
+                  </a:lnTo>
+                  <a:lnTo>
+                    <a:pt x="3644538" y="2913388"/>
+                  </a:lnTo>
+                  <a:lnTo>
+                    <a:pt x="3566904" y="2876403"/>
+                  </a:lnTo>
+                  <a:lnTo>
+                    <a:pt x="3489270" y="2837568"/>
+                  </a:lnTo>
+                  <a:lnTo>
+                    <a:pt x="3411636" y="2796790"/>
+                  </a:lnTo>
+                  <a:lnTo>
+                    <a:pt x="3334002" y="2794673"/>
+                  </a:lnTo>
+                  <a:lnTo>
+                    <a:pt x="3256368" y="2811809"/>
+                  </a:lnTo>
+                  <a:lnTo>
+                    <a:pt x="3178734" y="2828602"/>
+                  </a:lnTo>
+                  <a:lnTo>
+                    <a:pt x="3101100" y="2845060"/>
+                  </a:lnTo>
+                  <a:lnTo>
+                    <a:pt x="3023466" y="2861190"/>
+                  </a:lnTo>
+                  <a:lnTo>
+                    <a:pt x="2945832" y="2876997"/>
+                  </a:lnTo>
+                  <a:lnTo>
+                    <a:pt x="2868198" y="2892488"/>
+                  </a:lnTo>
+                  <a:lnTo>
+                    <a:pt x="2790564" y="2907671"/>
+                  </a:lnTo>
+                  <a:lnTo>
+                    <a:pt x="2712930" y="2922549"/>
+                  </a:lnTo>
+                  <a:lnTo>
+                    <a:pt x="2635295" y="2937131"/>
+                  </a:lnTo>
+                  <a:lnTo>
+                    <a:pt x="2557661" y="2951422"/>
+                  </a:lnTo>
+                  <a:lnTo>
+                    <a:pt x="2480027" y="2965427"/>
+                  </a:lnTo>
+                  <a:lnTo>
+                    <a:pt x="2402393" y="2979152"/>
+                  </a:lnTo>
+                  <a:lnTo>
+                    <a:pt x="2324759" y="2992603"/>
+                  </a:lnTo>
+                  <a:lnTo>
+                    <a:pt x="2247125" y="3005786"/>
+                  </a:lnTo>
+                  <a:lnTo>
+                    <a:pt x="2169491" y="3018705"/>
+                  </a:lnTo>
+                  <a:lnTo>
+                    <a:pt x="2091857" y="3031366"/>
+                  </a:lnTo>
+                  <a:lnTo>
+                    <a:pt x="2014223" y="3043775"/>
+                  </a:lnTo>
+                  <a:lnTo>
+                    <a:pt x="1936589" y="3055935"/>
+                  </a:lnTo>
+                  <a:lnTo>
+                    <a:pt x="1858955" y="3067853"/>
+                  </a:lnTo>
+                  <a:lnTo>
+                    <a:pt x="1781321" y="3079533"/>
+                  </a:lnTo>
+                  <a:lnTo>
+                    <a:pt x="1703687" y="3090979"/>
+                  </a:lnTo>
+                  <a:lnTo>
+                    <a:pt x="1626053" y="3102197"/>
+                  </a:lnTo>
+                  <a:lnTo>
+                    <a:pt x="1548419" y="3113190"/>
+                  </a:lnTo>
+                  <a:lnTo>
+                    <a:pt x="1470785" y="3123965"/>
+                  </a:lnTo>
+                  <a:lnTo>
+                    <a:pt x="1393151" y="3134524"/>
+                  </a:lnTo>
+                  <a:lnTo>
+                    <a:pt x="1315517" y="3144872"/>
+                  </a:lnTo>
+                  <a:lnTo>
+                    <a:pt x="1237883" y="3155013"/>
+                  </a:lnTo>
+                  <a:lnTo>
+                    <a:pt x="1160249" y="3164952"/>
+                  </a:lnTo>
+                  <a:lnTo>
+                    <a:pt x="1082615" y="3174692"/>
+                  </a:lnTo>
+                  <a:lnTo>
+                    <a:pt x="1004981" y="3184238"/>
+                  </a:lnTo>
+                  <a:lnTo>
+                    <a:pt x="927346" y="3193593"/>
+                  </a:lnTo>
+                  <a:lnTo>
+                    <a:pt x="849712" y="3202761"/>
+                  </a:lnTo>
+                  <a:lnTo>
+                    <a:pt x="772078" y="3211747"/>
+                  </a:lnTo>
+                  <a:lnTo>
+                    <a:pt x="694444" y="3220552"/>
+                  </a:lnTo>
+                  <a:lnTo>
+                    <a:pt x="616810" y="3229182"/>
+                  </a:lnTo>
+                  <a:lnTo>
+                    <a:pt x="539176" y="3237640"/>
+                  </a:lnTo>
+                  <a:lnTo>
+                    <a:pt x="461542" y="3245928"/>
+                  </a:lnTo>
+                  <a:lnTo>
+                    <a:pt x="383908" y="3254051"/>
+                  </a:lnTo>
+                  <a:lnTo>
+                    <a:pt x="306274" y="3262012"/>
+                  </a:lnTo>
+                  <a:lnTo>
+                    <a:pt x="228640" y="3269814"/>
+                  </a:lnTo>
+                  <a:lnTo>
+                    <a:pt x="151006" y="3277460"/>
+                  </a:lnTo>
+                  <a:lnTo>
+                    <a:pt x="73372" y="3284953"/>
+                  </a:lnTo>
+                  <a:lnTo>
+                    <a:pt x="0" y="3291894"/>
                   </a:lnTo>
                   <a:close/>
                 </a:path>
@@ -3555,246 +3567,258 @@
           </p:nvSpPr>
           <p:spPr>
             <a:xfrm>
-              <a:off x="2233667" y="1896563"/>
-              <a:ext cx="5954822" cy="2782209"/>
+              <a:off x="1921892" y="1896563"/>
+              <a:ext cx="6266597" cy="2777188"/>
             </a:xfrm>
             <a:custGeom>
               <a:avLst/>
               <a:pathLst>
-                <a:path w="5954822" h="2782209">
+                <a:path w="6266597" h="2777188">
                   <a:moveTo>
                     <a:pt x="0" y="0"/>
                   </a:moveTo>
                   <a:lnTo>
-                    <a:pt x="54635" y="143649"/>
-                  </a:lnTo>
-                  <a:lnTo>
-                    <a:pt x="132269" y="336546"/>
-                  </a:lnTo>
-                  <a:lnTo>
-                    <a:pt x="209903" y="518838"/>
-                  </a:lnTo>
-                  <a:lnTo>
-                    <a:pt x="287537" y="691110"/>
-                  </a:lnTo>
-                  <a:lnTo>
-                    <a:pt x="365171" y="853912"/>
-                  </a:lnTo>
-                  <a:lnTo>
-                    <a:pt x="442805" y="1007764"/>
-                  </a:lnTo>
-                  <a:lnTo>
-                    <a:pt x="520439" y="1153159"/>
-                  </a:lnTo>
-                  <a:lnTo>
-                    <a:pt x="598073" y="1290561"/>
-                  </a:lnTo>
-                  <a:lnTo>
-                    <a:pt x="675707" y="1420409"/>
-                  </a:lnTo>
-                  <a:lnTo>
-                    <a:pt x="753341" y="1543120"/>
-                  </a:lnTo>
-                  <a:lnTo>
-                    <a:pt x="830975" y="1659085"/>
-                  </a:lnTo>
-                  <a:lnTo>
-                    <a:pt x="908610" y="1768675"/>
-                  </a:lnTo>
-                  <a:lnTo>
-                    <a:pt x="986244" y="1872241"/>
-                  </a:lnTo>
-                  <a:lnTo>
-                    <a:pt x="1063878" y="1970113"/>
-                  </a:lnTo>
-                  <a:lnTo>
-                    <a:pt x="1141512" y="2062605"/>
-                  </a:lnTo>
-                  <a:lnTo>
-                    <a:pt x="1219146" y="2150013"/>
-                  </a:lnTo>
-                  <a:lnTo>
-                    <a:pt x="1296780" y="2232616"/>
-                  </a:lnTo>
-                  <a:lnTo>
-                    <a:pt x="1374414" y="2310678"/>
-                  </a:lnTo>
-                  <a:lnTo>
-                    <a:pt x="1452048" y="2384448"/>
-                  </a:lnTo>
-                  <a:lnTo>
-                    <a:pt x="1529682" y="2454164"/>
-                  </a:lnTo>
-                  <a:lnTo>
-                    <a:pt x="1607316" y="2520047"/>
-                  </a:lnTo>
-                  <a:lnTo>
-                    <a:pt x="1684950" y="2582308"/>
-                  </a:lnTo>
-                  <a:lnTo>
-                    <a:pt x="1762584" y="2641146"/>
-                  </a:lnTo>
-                  <a:lnTo>
-                    <a:pt x="1840218" y="2696751"/>
-                  </a:lnTo>
-                  <a:lnTo>
-                    <a:pt x="1917852" y="2749298"/>
-                  </a:lnTo>
-                  <a:lnTo>
-                    <a:pt x="1995486" y="2782209"/>
-                  </a:lnTo>
-                  <a:lnTo>
-                    <a:pt x="2073120" y="2779897"/>
-                  </a:lnTo>
-                  <a:lnTo>
-                    <a:pt x="2150754" y="2777578"/>
-                  </a:lnTo>
-                  <a:lnTo>
-                    <a:pt x="2228388" y="2775254"/>
-                  </a:lnTo>
-                  <a:lnTo>
-                    <a:pt x="2306022" y="2772924"/>
-                  </a:lnTo>
-                  <a:lnTo>
-                    <a:pt x="2383656" y="2770587"/>
-                  </a:lnTo>
-                  <a:lnTo>
-                    <a:pt x="2461290" y="2768244"/>
-                  </a:lnTo>
-                  <a:lnTo>
-                    <a:pt x="2538924" y="2765895"/>
-                  </a:lnTo>
-                  <a:lnTo>
-                    <a:pt x="2616559" y="2763539"/>
-                  </a:lnTo>
-                  <a:lnTo>
-                    <a:pt x="2694193" y="2761178"/>
-                  </a:lnTo>
-                  <a:lnTo>
-                    <a:pt x="2771827" y="2758810"/>
-                  </a:lnTo>
-                  <a:lnTo>
-                    <a:pt x="2849461" y="2756436"/>
-                  </a:lnTo>
-                  <a:lnTo>
-                    <a:pt x="2927095" y="2754055"/>
-                  </a:lnTo>
-                  <a:lnTo>
-                    <a:pt x="3004729" y="2751668"/>
-                  </a:lnTo>
-                  <a:lnTo>
-                    <a:pt x="3082363" y="2749275"/>
-                  </a:lnTo>
-                  <a:lnTo>
-                    <a:pt x="3159997" y="2746875"/>
-                  </a:lnTo>
-                  <a:lnTo>
-                    <a:pt x="3237631" y="2744470"/>
-                  </a:lnTo>
-                  <a:lnTo>
-                    <a:pt x="3315265" y="2742057"/>
-                  </a:lnTo>
-                  <a:lnTo>
-                    <a:pt x="3392899" y="2739639"/>
-                  </a:lnTo>
-                  <a:lnTo>
-                    <a:pt x="3470533" y="2737213"/>
-                  </a:lnTo>
-                  <a:lnTo>
-                    <a:pt x="3548167" y="2734782"/>
-                  </a:lnTo>
-                  <a:lnTo>
-                    <a:pt x="3625801" y="2732344"/>
-                  </a:lnTo>
-                  <a:lnTo>
-                    <a:pt x="3703435" y="2729899"/>
-                  </a:lnTo>
-                  <a:lnTo>
-                    <a:pt x="3781069" y="2727448"/>
-                  </a:lnTo>
-                  <a:lnTo>
-                    <a:pt x="3858703" y="2724991"/>
-                  </a:lnTo>
-                  <a:lnTo>
-                    <a:pt x="3936337" y="2722527"/>
-                  </a:lnTo>
-                  <a:lnTo>
-                    <a:pt x="4013971" y="2720056"/>
-                  </a:lnTo>
-                  <a:lnTo>
-                    <a:pt x="4091605" y="2717579"/>
-                  </a:lnTo>
-                  <a:lnTo>
-                    <a:pt x="4169239" y="2715095"/>
-                  </a:lnTo>
-                  <a:lnTo>
-                    <a:pt x="4246873" y="2712605"/>
-                  </a:lnTo>
-                  <a:lnTo>
-                    <a:pt x="4324508" y="2710108"/>
-                  </a:lnTo>
-                  <a:lnTo>
-                    <a:pt x="4402142" y="2707604"/>
-                  </a:lnTo>
-                  <a:lnTo>
-                    <a:pt x="4479776" y="2705094"/>
-                  </a:lnTo>
-                  <a:lnTo>
-                    <a:pt x="4557410" y="2702577"/>
-                  </a:lnTo>
-                  <a:lnTo>
-                    <a:pt x="4635044" y="2700054"/>
-                  </a:lnTo>
-                  <a:lnTo>
-                    <a:pt x="4712678" y="2697523"/>
-                  </a:lnTo>
-                  <a:lnTo>
-                    <a:pt x="4790312" y="2694986"/>
-                  </a:lnTo>
-                  <a:lnTo>
-                    <a:pt x="4867946" y="2692443"/>
-                  </a:lnTo>
-                  <a:lnTo>
-                    <a:pt x="4945580" y="2689892"/>
-                  </a:lnTo>
-                  <a:lnTo>
-                    <a:pt x="5023214" y="2687335"/>
-                  </a:lnTo>
-                  <a:lnTo>
-                    <a:pt x="5100848" y="2684771"/>
-                  </a:lnTo>
-                  <a:lnTo>
-                    <a:pt x="5178482" y="2682200"/>
-                  </a:lnTo>
-                  <a:lnTo>
-                    <a:pt x="5256116" y="2679622"/>
-                  </a:lnTo>
-                  <a:lnTo>
-                    <a:pt x="5333750" y="2677038"/>
-                  </a:lnTo>
-                  <a:lnTo>
-                    <a:pt x="5411384" y="2674446"/>
-                  </a:lnTo>
-                  <a:lnTo>
-                    <a:pt x="5489018" y="2671848"/>
-                  </a:lnTo>
-                  <a:lnTo>
-                    <a:pt x="5566652" y="2669243"/>
-                  </a:lnTo>
-                  <a:lnTo>
-                    <a:pt x="5644286" y="2666631"/>
-                  </a:lnTo>
-                  <a:lnTo>
-                    <a:pt x="5721920" y="2664012"/>
-                  </a:lnTo>
-                  <a:lnTo>
-                    <a:pt x="5799554" y="2661386"/>
-                  </a:lnTo>
-                  <a:lnTo>
-                    <a:pt x="5877188" y="2658753"/>
-                  </a:lnTo>
-                  <a:lnTo>
-                    <a:pt x="5954822" y="2656113"/>
+                    <a:pt x="55874" y="126949"/>
+                  </a:lnTo>
+                  <a:lnTo>
+                    <a:pt x="133508" y="294934"/>
+                  </a:lnTo>
+                  <a:lnTo>
+                    <a:pt x="211142" y="454915"/>
+                  </a:lnTo>
+                  <a:lnTo>
+                    <a:pt x="288776" y="607274"/>
+                  </a:lnTo>
+                  <a:lnTo>
+                    <a:pt x="366410" y="752374"/>
+                  </a:lnTo>
+                  <a:lnTo>
+                    <a:pt x="444044" y="890560"/>
+                  </a:lnTo>
+                  <a:lnTo>
+                    <a:pt x="521678" y="1022162"/>
+                  </a:lnTo>
+                  <a:lnTo>
+                    <a:pt x="599312" y="1147494"/>
+                  </a:lnTo>
+                  <a:lnTo>
+                    <a:pt x="676946" y="1266854"/>
+                  </a:lnTo>
+                  <a:lnTo>
+                    <a:pt x="754580" y="1380527"/>
+                  </a:lnTo>
+                  <a:lnTo>
+                    <a:pt x="832214" y="1488784"/>
+                  </a:lnTo>
+                  <a:lnTo>
+                    <a:pt x="909848" y="1591883"/>
+                  </a:lnTo>
+                  <a:lnTo>
+                    <a:pt x="987482" y="1690070"/>
+                  </a:lnTo>
+                  <a:lnTo>
+                    <a:pt x="1065116" y="1783579"/>
+                  </a:lnTo>
+                  <a:lnTo>
+                    <a:pt x="1142750" y="1872632"/>
+                  </a:lnTo>
+                  <a:lnTo>
+                    <a:pt x="1220384" y="1957442"/>
+                  </a:lnTo>
+                  <a:lnTo>
+                    <a:pt x="1298018" y="2038212"/>
+                  </a:lnTo>
+                  <a:lnTo>
+                    <a:pt x="1375653" y="2115133"/>
+                  </a:lnTo>
+                  <a:lnTo>
+                    <a:pt x="1453287" y="2188389"/>
+                  </a:lnTo>
+                  <a:lnTo>
+                    <a:pt x="1530921" y="2258155"/>
+                  </a:lnTo>
+                  <a:lnTo>
+                    <a:pt x="1608555" y="2324597"/>
+                  </a:lnTo>
+                  <a:lnTo>
+                    <a:pt x="1686189" y="2387873"/>
+                  </a:lnTo>
+                  <a:lnTo>
+                    <a:pt x="1763823" y="2448134"/>
+                  </a:lnTo>
+                  <a:lnTo>
+                    <a:pt x="1841457" y="2505524"/>
+                  </a:lnTo>
+                  <a:lnTo>
+                    <a:pt x="1919091" y="2560179"/>
+                  </a:lnTo>
+                  <a:lnTo>
+                    <a:pt x="1996725" y="2612231"/>
+                  </a:lnTo>
+                  <a:lnTo>
+                    <a:pt x="2074359" y="2661802"/>
+                  </a:lnTo>
+                  <a:lnTo>
+                    <a:pt x="2151993" y="2709012"/>
+                  </a:lnTo>
+                  <a:lnTo>
+                    <a:pt x="2229627" y="2753972"/>
+                  </a:lnTo>
+                  <a:lnTo>
+                    <a:pt x="2307261" y="2777188"/>
+                  </a:lnTo>
+                  <a:lnTo>
+                    <a:pt x="2384895" y="2759347"/>
+                  </a:lnTo>
+                  <a:lnTo>
+                    <a:pt x="2462529" y="2741142"/>
+                  </a:lnTo>
+                  <a:lnTo>
+                    <a:pt x="2540163" y="2722566"/>
+                  </a:lnTo>
+                  <a:lnTo>
+                    <a:pt x="2617797" y="2703612"/>
+                  </a:lnTo>
+                  <a:lnTo>
+                    <a:pt x="2695431" y="2684271"/>
+                  </a:lnTo>
+                  <a:lnTo>
+                    <a:pt x="2773065" y="2664537"/>
+                  </a:lnTo>
+                  <a:lnTo>
+                    <a:pt x="2850699" y="2644400"/>
+                  </a:lnTo>
+                  <a:lnTo>
+                    <a:pt x="2928333" y="2623852"/>
+                  </a:lnTo>
+                  <a:lnTo>
+                    <a:pt x="3005967" y="2602886"/>
+                  </a:lnTo>
+                  <a:lnTo>
+                    <a:pt x="3083602" y="2581493"/>
+                  </a:lnTo>
+                  <a:lnTo>
+                    <a:pt x="3161236" y="2559663"/>
+                  </a:lnTo>
+                  <a:lnTo>
+                    <a:pt x="3238870" y="2537389"/>
+                  </a:lnTo>
+                  <a:lnTo>
+                    <a:pt x="3316504" y="2514661"/>
+                  </a:lnTo>
+                  <a:lnTo>
+                    <a:pt x="3394138" y="2491469"/>
+                  </a:lnTo>
+                  <a:lnTo>
+                    <a:pt x="3471772" y="2467805"/>
+                  </a:lnTo>
+                  <a:lnTo>
+                    <a:pt x="3549406" y="2443659"/>
+                  </a:lnTo>
+                  <a:lnTo>
+                    <a:pt x="3627040" y="2419021"/>
+                  </a:lnTo>
+                  <a:lnTo>
+                    <a:pt x="3704674" y="2393880"/>
+                  </a:lnTo>
+                  <a:lnTo>
+                    <a:pt x="3782308" y="2368227"/>
+                  </a:lnTo>
+                  <a:lnTo>
+                    <a:pt x="3859942" y="2342052"/>
+                  </a:lnTo>
+                  <a:lnTo>
+                    <a:pt x="3937576" y="2315343"/>
+                  </a:lnTo>
+                  <a:lnTo>
+                    <a:pt x="4015210" y="2288089"/>
+                  </a:lnTo>
+                  <a:lnTo>
+                    <a:pt x="4092844" y="2260281"/>
+                  </a:lnTo>
+                  <a:lnTo>
+                    <a:pt x="4170478" y="2231905"/>
+                  </a:lnTo>
+                  <a:lnTo>
+                    <a:pt x="4248112" y="2202951"/>
+                  </a:lnTo>
+                  <a:lnTo>
+                    <a:pt x="4325746" y="2173408"/>
+                  </a:lnTo>
+                  <a:lnTo>
+                    <a:pt x="4403380" y="2143262"/>
+                  </a:lnTo>
+                  <a:lnTo>
+                    <a:pt x="4481014" y="2112501"/>
+                  </a:lnTo>
+                  <a:lnTo>
+                    <a:pt x="4558648" y="2081114"/>
+                  </a:lnTo>
+                  <a:lnTo>
+                    <a:pt x="4636282" y="2049087"/>
+                  </a:lnTo>
+                  <a:lnTo>
+                    <a:pt x="4713916" y="2016408"/>
+                  </a:lnTo>
+                  <a:lnTo>
+                    <a:pt x="4791551" y="1983062"/>
+                  </a:lnTo>
+                  <a:lnTo>
+                    <a:pt x="4869185" y="1949037"/>
+                  </a:lnTo>
+                  <a:lnTo>
+                    <a:pt x="4946819" y="1914319"/>
+                  </a:lnTo>
+                  <a:lnTo>
+                    <a:pt x="5024453" y="1878893"/>
+                  </a:lnTo>
+                  <a:lnTo>
+                    <a:pt x="5102087" y="1842745"/>
+                  </a:lnTo>
+                  <a:lnTo>
+                    <a:pt x="5179721" y="1805860"/>
+                  </a:lnTo>
+                  <a:lnTo>
+                    <a:pt x="5257355" y="1768224"/>
+                  </a:lnTo>
+                  <a:lnTo>
+                    <a:pt x="5334989" y="1729821"/>
+                  </a:lnTo>
+                  <a:lnTo>
+                    <a:pt x="5412623" y="1690635"/>
+                  </a:lnTo>
+                  <a:lnTo>
+                    <a:pt x="5490257" y="1650650"/>
+                  </a:lnTo>
+                  <a:lnTo>
+                    <a:pt x="5567891" y="1609851"/>
+                  </a:lnTo>
+                  <a:lnTo>
+                    <a:pt x="5645525" y="1568220"/>
+                  </a:lnTo>
+                  <a:lnTo>
+                    <a:pt x="5723159" y="1525741"/>
+                  </a:lnTo>
+                  <a:lnTo>
+                    <a:pt x="5800793" y="1482396"/>
+                  </a:lnTo>
+                  <a:lnTo>
+                    <a:pt x="5878427" y="1438167"/>
+                  </a:lnTo>
+                  <a:lnTo>
+                    <a:pt x="5956061" y="1393038"/>
+                  </a:lnTo>
+                  <a:lnTo>
+                    <a:pt x="6033695" y="1346988"/>
+                  </a:lnTo>
+                  <a:lnTo>
+                    <a:pt x="6111329" y="1300001"/>
+                  </a:lnTo>
+                  <a:lnTo>
+                    <a:pt x="6188963" y="1252055"/>
+                  </a:lnTo>
+                  <a:lnTo>
+                    <a:pt x="6266597" y="1203133"/>
                   </a:lnTo>
                 </a:path>
               </a:pathLst>
@@ -3814,300 +3838,300 @@
           </p:nvSpPr>
           <p:spPr>
             <a:xfrm>
-              <a:off x="817517" y="4681078"/>
-              <a:ext cx="7370972" cy="820378"/>
+              <a:off x="817517" y="4691237"/>
+              <a:ext cx="7370972" cy="786992"/>
             </a:xfrm>
             <a:custGeom>
               <a:avLst/>
               <a:pathLst>
-                <a:path w="7370972" h="820378">
+                <a:path w="7370972" h="786992">
                   <a:moveTo>
-                    <a:pt x="7370972" y="820378"/>
+                    <a:pt x="7370972" y="786992"/>
                   </a:moveTo>
                   <a:lnTo>
-                    <a:pt x="7293338" y="817600"/>
-                  </a:lnTo>
-                  <a:lnTo>
-                    <a:pt x="7215704" y="814661"/>
-                  </a:lnTo>
-                  <a:lnTo>
-                    <a:pt x="7138070" y="811551"/>
-                  </a:lnTo>
-                  <a:lnTo>
-                    <a:pt x="7060436" y="808260"/>
-                  </a:lnTo>
-                  <a:lnTo>
-                    <a:pt x="6982802" y="804777"/>
-                  </a:lnTo>
-                  <a:lnTo>
-                    <a:pt x="6905168" y="801092"/>
-                  </a:lnTo>
-                  <a:lnTo>
-                    <a:pt x="6827534" y="797193"/>
-                  </a:lnTo>
-                  <a:lnTo>
-                    <a:pt x="6749900" y="793067"/>
-                  </a:lnTo>
-                  <a:lnTo>
-                    <a:pt x="6672266" y="788700"/>
-                  </a:lnTo>
-                  <a:lnTo>
-                    <a:pt x="6594632" y="784080"/>
-                  </a:lnTo>
-                  <a:lnTo>
-                    <a:pt x="6516998" y="779191"/>
-                  </a:lnTo>
-                  <a:lnTo>
-                    <a:pt x="6439364" y="774017"/>
-                  </a:lnTo>
-                  <a:lnTo>
-                    <a:pt x="6361730" y="768543"/>
-                  </a:lnTo>
-                  <a:lnTo>
-                    <a:pt x="6284096" y="762750"/>
-                  </a:lnTo>
-                  <a:lnTo>
-                    <a:pt x="6206462" y="756620"/>
-                  </a:lnTo>
-                  <a:lnTo>
-                    <a:pt x="6128827" y="750134"/>
-                  </a:lnTo>
-                  <a:lnTo>
-                    <a:pt x="6051193" y="743270"/>
-                  </a:lnTo>
-                  <a:lnTo>
-                    <a:pt x="5973559" y="736007"/>
-                  </a:lnTo>
-                  <a:lnTo>
-                    <a:pt x="5895925" y="728322"/>
-                  </a:lnTo>
-                  <a:lnTo>
-                    <a:pt x="5818291" y="720189"/>
-                  </a:lnTo>
-                  <a:lnTo>
-                    <a:pt x="5740657" y="711584"/>
-                  </a:lnTo>
-                  <a:lnTo>
-                    <a:pt x="5663023" y="702478"/>
-                  </a:lnTo>
-                  <a:lnTo>
-                    <a:pt x="5585389" y="692842"/>
-                  </a:lnTo>
-                  <a:lnTo>
-                    <a:pt x="5507755" y="682645"/>
-                  </a:lnTo>
-                  <a:lnTo>
-                    <a:pt x="5430121" y="671856"/>
-                  </a:lnTo>
-                  <a:lnTo>
-                    <a:pt x="5352487" y="660439"/>
-                  </a:lnTo>
-                  <a:lnTo>
-                    <a:pt x="5274853" y="648358"/>
-                  </a:lnTo>
-                  <a:lnTo>
-                    <a:pt x="5197219" y="635574"/>
-                  </a:lnTo>
-                  <a:lnTo>
-                    <a:pt x="5119585" y="622046"/>
-                  </a:lnTo>
-                  <a:lnTo>
-                    <a:pt x="5041951" y="607731"/>
-                  </a:lnTo>
-                  <a:lnTo>
-                    <a:pt x="4964317" y="592584"/>
-                  </a:lnTo>
-                  <a:lnTo>
-                    <a:pt x="4886683" y="576556"/>
-                  </a:lnTo>
-                  <a:lnTo>
-                    <a:pt x="4809049" y="559595"/>
-                  </a:lnTo>
-                  <a:lnTo>
-                    <a:pt x="4731415" y="541648"/>
-                  </a:lnTo>
-                  <a:lnTo>
-                    <a:pt x="4653781" y="522656"/>
-                  </a:lnTo>
-                  <a:lnTo>
-                    <a:pt x="4576147" y="502560"/>
-                  </a:lnTo>
-                  <a:lnTo>
-                    <a:pt x="4498513" y="481295"/>
-                  </a:lnTo>
-                  <a:lnTo>
-                    <a:pt x="4420879" y="458793"/>
-                  </a:lnTo>
-                  <a:lnTo>
-                    <a:pt x="4343244" y="434982"/>
-                  </a:lnTo>
-                  <a:lnTo>
-                    <a:pt x="4265610" y="409786"/>
-                  </a:lnTo>
-                  <a:lnTo>
-                    <a:pt x="4187976" y="383125"/>
-                  </a:lnTo>
-                  <a:lnTo>
-                    <a:pt x="4110342" y="354912"/>
-                  </a:lnTo>
-                  <a:lnTo>
-                    <a:pt x="4032708" y="325059"/>
-                  </a:lnTo>
-                  <a:lnTo>
-                    <a:pt x="3955074" y="293468"/>
-                  </a:lnTo>
-                  <a:lnTo>
-                    <a:pt x="3877440" y="260040"/>
-                  </a:lnTo>
-                  <a:lnTo>
-                    <a:pt x="3799806" y="224668"/>
-                  </a:lnTo>
-                  <a:lnTo>
-                    <a:pt x="3722172" y="187238"/>
-                  </a:lnTo>
-                  <a:lnTo>
-                    <a:pt x="3644538" y="147631"/>
-                  </a:lnTo>
-                  <a:lnTo>
-                    <a:pt x="3566904" y="105720"/>
-                  </a:lnTo>
-                  <a:lnTo>
-                    <a:pt x="3489270" y="61371"/>
-                  </a:lnTo>
-                  <a:lnTo>
-                    <a:pt x="3411636" y="14442"/>
+                    <a:pt x="7293338" y="783441"/>
+                  </a:lnTo>
+                  <a:lnTo>
+                    <a:pt x="7215704" y="779713"/>
+                  </a:lnTo>
+                  <a:lnTo>
+                    <a:pt x="7138070" y="775797"/>
+                  </a:lnTo>
+                  <a:lnTo>
+                    <a:pt x="7060436" y="771686"/>
+                  </a:lnTo>
+                  <a:lnTo>
+                    <a:pt x="6982802" y="767370"/>
+                  </a:lnTo>
+                  <a:lnTo>
+                    <a:pt x="6905168" y="762837"/>
+                  </a:lnTo>
+                  <a:lnTo>
+                    <a:pt x="6827534" y="758078"/>
+                  </a:lnTo>
+                  <a:lnTo>
+                    <a:pt x="6749900" y="753080"/>
+                  </a:lnTo>
+                  <a:lnTo>
+                    <a:pt x="6672266" y="747832"/>
+                  </a:lnTo>
+                  <a:lnTo>
+                    <a:pt x="6594632" y="742322"/>
+                  </a:lnTo>
+                  <a:lnTo>
+                    <a:pt x="6516998" y="736537"/>
+                  </a:lnTo>
+                  <a:lnTo>
+                    <a:pt x="6439364" y="730461"/>
+                  </a:lnTo>
+                  <a:lnTo>
+                    <a:pt x="6361730" y="724082"/>
+                  </a:lnTo>
+                  <a:lnTo>
+                    <a:pt x="6284096" y="717384"/>
+                  </a:lnTo>
+                  <a:lnTo>
+                    <a:pt x="6206462" y="710350"/>
+                  </a:lnTo>
+                  <a:lnTo>
+                    <a:pt x="6128827" y="702965"/>
+                  </a:lnTo>
+                  <a:lnTo>
+                    <a:pt x="6051193" y="695210"/>
+                  </a:lnTo>
+                  <a:lnTo>
+                    <a:pt x="5973559" y="687067"/>
+                  </a:lnTo>
+                  <a:lnTo>
+                    <a:pt x="5895925" y="678517"/>
+                  </a:lnTo>
+                  <a:lnTo>
+                    <a:pt x="5818291" y="669539"/>
+                  </a:lnTo>
+                  <a:lnTo>
+                    <a:pt x="5740657" y="660112"/>
+                  </a:lnTo>
+                  <a:lnTo>
+                    <a:pt x="5663023" y="650213"/>
+                  </a:lnTo>
+                  <a:lnTo>
+                    <a:pt x="5585389" y="639819"/>
+                  </a:lnTo>
+                  <a:lnTo>
+                    <a:pt x="5507755" y="628905"/>
+                  </a:lnTo>
+                  <a:lnTo>
+                    <a:pt x="5430121" y="617445"/>
+                  </a:lnTo>
+                  <a:lnTo>
+                    <a:pt x="5352487" y="605412"/>
+                  </a:lnTo>
+                  <a:lnTo>
+                    <a:pt x="5274853" y="592777"/>
+                  </a:lnTo>
+                  <a:lnTo>
+                    <a:pt x="5197219" y="579509"/>
+                  </a:lnTo>
+                  <a:lnTo>
+                    <a:pt x="5119585" y="565578"/>
+                  </a:lnTo>
+                  <a:lnTo>
+                    <a:pt x="5041951" y="550950"/>
+                  </a:lnTo>
+                  <a:lnTo>
+                    <a:pt x="4964317" y="535590"/>
+                  </a:lnTo>
+                  <a:lnTo>
+                    <a:pt x="4886683" y="519461"/>
+                  </a:lnTo>
+                  <a:lnTo>
+                    <a:pt x="4809049" y="502526"/>
+                  </a:lnTo>
+                  <a:lnTo>
+                    <a:pt x="4731415" y="484743"/>
+                  </a:lnTo>
+                  <a:lnTo>
+                    <a:pt x="4653781" y="466071"/>
+                  </a:lnTo>
+                  <a:lnTo>
+                    <a:pt x="4576147" y="446464"/>
+                  </a:lnTo>
+                  <a:lnTo>
+                    <a:pt x="4498513" y="425876"/>
+                  </a:lnTo>
+                  <a:lnTo>
+                    <a:pt x="4420879" y="404259"/>
+                  </a:lnTo>
+                  <a:lnTo>
+                    <a:pt x="4343244" y="381560"/>
+                  </a:lnTo>
+                  <a:lnTo>
+                    <a:pt x="4265610" y="357725"/>
+                  </a:lnTo>
+                  <a:lnTo>
+                    <a:pt x="4187976" y="332698"/>
+                  </a:lnTo>
+                  <a:lnTo>
+                    <a:pt x="4110342" y="306419"/>
+                  </a:lnTo>
+                  <a:lnTo>
+                    <a:pt x="4032708" y="278825"/>
+                  </a:lnTo>
+                  <a:lnTo>
+                    <a:pt x="3955074" y="249851"/>
+                  </a:lnTo>
+                  <a:lnTo>
+                    <a:pt x="3877440" y="219427"/>
+                  </a:lnTo>
+                  <a:lnTo>
+                    <a:pt x="3799806" y="187481"/>
+                  </a:lnTo>
+                  <a:lnTo>
+                    <a:pt x="3722172" y="153937"/>
+                  </a:lnTo>
+                  <a:lnTo>
+                    <a:pt x="3644538" y="118714"/>
+                  </a:lnTo>
+                  <a:lnTo>
+                    <a:pt x="3566904" y="81729"/>
+                  </a:lnTo>
+                  <a:lnTo>
+                    <a:pt x="3489270" y="42894"/>
+                  </a:lnTo>
+                  <a:lnTo>
+                    <a:pt x="3411636" y="2116"/>
                   </a:lnTo>
                   <a:lnTo>
                     <a:pt x="3334002" y="0"/>
                   </a:lnTo>
                   <a:lnTo>
-                    <a:pt x="3256368" y="2299"/>
-                  </a:lnTo>
-                  <a:lnTo>
-                    <a:pt x="3178734" y="4593"/>
-                  </a:lnTo>
-                  <a:lnTo>
-                    <a:pt x="3101100" y="6881"/>
-                  </a:lnTo>
-                  <a:lnTo>
-                    <a:pt x="3023466" y="9162"/>
-                  </a:lnTo>
-                  <a:lnTo>
-                    <a:pt x="2945832" y="11438"/>
-                  </a:lnTo>
-                  <a:lnTo>
-                    <a:pt x="2868198" y="13707"/>
-                  </a:lnTo>
-                  <a:lnTo>
-                    <a:pt x="2790564" y="15971"/>
-                  </a:lnTo>
-                  <a:lnTo>
-                    <a:pt x="2712930" y="18228"/>
-                  </a:lnTo>
-                  <a:lnTo>
-                    <a:pt x="2635295" y="20480"/>
-                  </a:lnTo>
-                  <a:lnTo>
-                    <a:pt x="2557661" y="22726"/>
-                  </a:lnTo>
-                  <a:lnTo>
-                    <a:pt x="2480027" y="24965"/>
-                  </a:lnTo>
-                  <a:lnTo>
-                    <a:pt x="2402393" y="27199"/>
-                  </a:lnTo>
-                  <a:lnTo>
-                    <a:pt x="2324759" y="29427"/>
-                  </a:lnTo>
-                  <a:lnTo>
-                    <a:pt x="2247125" y="31648"/>
-                  </a:lnTo>
-                  <a:lnTo>
-                    <a:pt x="2169491" y="33864"/>
-                  </a:lnTo>
-                  <a:lnTo>
-                    <a:pt x="2091857" y="36075"/>
-                  </a:lnTo>
-                  <a:lnTo>
-                    <a:pt x="2014223" y="38279"/>
-                  </a:lnTo>
-                  <a:lnTo>
-                    <a:pt x="1936589" y="40477"/>
-                  </a:lnTo>
-                  <a:lnTo>
-                    <a:pt x="1858955" y="42670"/>
-                  </a:lnTo>
-                  <a:lnTo>
-                    <a:pt x="1781321" y="44857"/>
-                  </a:lnTo>
-                  <a:lnTo>
-                    <a:pt x="1703687" y="47038"/>
-                  </a:lnTo>
-                  <a:lnTo>
-                    <a:pt x="1626053" y="49213"/>
-                  </a:lnTo>
-                  <a:lnTo>
-                    <a:pt x="1548419" y="51382"/>
-                  </a:lnTo>
-                  <a:lnTo>
-                    <a:pt x="1470785" y="53546"/>
-                  </a:lnTo>
-                  <a:lnTo>
-                    <a:pt x="1393151" y="55704"/>
-                  </a:lnTo>
-                  <a:lnTo>
-                    <a:pt x="1315517" y="57856"/>
-                  </a:lnTo>
-                  <a:lnTo>
-                    <a:pt x="1237883" y="60003"/>
-                  </a:lnTo>
-                  <a:lnTo>
-                    <a:pt x="1160249" y="62144"/>
-                  </a:lnTo>
-                  <a:lnTo>
-                    <a:pt x="1082615" y="64279"/>
-                  </a:lnTo>
-                  <a:lnTo>
-                    <a:pt x="1004981" y="66408"/>
-                  </a:lnTo>
-                  <a:lnTo>
-                    <a:pt x="927346" y="68532"/>
-                  </a:lnTo>
-                  <a:lnTo>
-                    <a:pt x="849712" y="70651"/>
-                  </a:lnTo>
-                  <a:lnTo>
-                    <a:pt x="772078" y="72763"/>
-                  </a:lnTo>
-                  <a:lnTo>
-                    <a:pt x="694444" y="74870"/>
-                  </a:lnTo>
-                  <a:lnTo>
-                    <a:pt x="616810" y="76972"/>
-                  </a:lnTo>
-                  <a:lnTo>
-                    <a:pt x="539176" y="79068"/>
-                  </a:lnTo>
-                  <a:lnTo>
-                    <a:pt x="461542" y="81158"/>
-                  </a:lnTo>
-                  <a:lnTo>
-                    <a:pt x="383908" y="83243"/>
-                  </a:lnTo>
-                  <a:lnTo>
-                    <a:pt x="306274" y="85322"/>
-                  </a:lnTo>
-                  <a:lnTo>
-                    <a:pt x="228640" y="87396"/>
-                  </a:lnTo>
-                  <a:lnTo>
-                    <a:pt x="151006" y="89464"/>
-                  </a:lnTo>
-                  <a:lnTo>
-                    <a:pt x="73372" y="91527"/>
-                  </a:lnTo>
-                  <a:lnTo>
-                    <a:pt x="0" y="93471"/>
+                    <a:pt x="3256368" y="17135"/>
+                  </a:lnTo>
+                  <a:lnTo>
+                    <a:pt x="3178734" y="33929"/>
+                  </a:lnTo>
+                  <a:lnTo>
+                    <a:pt x="3101100" y="50387"/>
+                  </a:lnTo>
+                  <a:lnTo>
+                    <a:pt x="3023466" y="66516"/>
+                  </a:lnTo>
+                  <a:lnTo>
+                    <a:pt x="2945832" y="82323"/>
+                  </a:lnTo>
+                  <a:lnTo>
+                    <a:pt x="2868198" y="97815"/>
+                  </a:lnTo>
+                  <a:lnTo>
+                    <a:pt x="2790564" y="112997"/>
+                  </a:lnTo>
+                  <a:lnTo>
+                    <a:pt x="2712930" y="127876"/>
+                  </a:lnTo>
+                  <a:lnTo>
+                    <a:pt x="2635295" y="142457"/>
+                  </a:lnTo>
+                  <a:lnTo>
+                    <a:pt x="2557661" y="156748"/>
+                  </a:lnTo>
+                  <a:lnTo>
+                    <a:pt x="2480027" y="170753"/>
+                  </a:lnTo>
+                  <a:lnTo>
+                    <a:pt x="2402393" y="184478"/>
+                  </a:lnTo>
+                  <a:lnTo>
+                    <a:pt x="2324759" y="197929"/>
+                  </a:lnTo>
+                  <a:lnTo>
+                    <a:pt x="2247125" y="211112"/>
+                  </a:lnTo>
+                  <a:lnTo>
+                    <a:pt x="2169491" y="224031"/>
+                  </a:lnTo>
+                  <a:lnTo>
+                    <a:pt x="2091857" y="236693"/>
+                  </a:lnTo>
+                  <a:lnTo>
+                    <a:pt x="2014223" y="249101"/>
+                  </a:lnTo>
+                  <a:lnTo>
+                    <a:pt x="1936589" y="261261"/>
+                  </a:lnTo>
+                  <a:lnTo>
+                    <a:pt x="1858955" y="273179"/>
+                  </a:lnTo>
+                  <a:lnTo>
+                    <a:pt x="1781321" y="284859"/>
+                  </a:lnTo>
+                  <a:lnTo>
+                    <a:pt x="1703687" y="296305"/>
+                  </a:lnTo>
+                  <a:lnTo>
+                    <a:pt x="1626053" y="307523"/>
+                  </a:lnTo>
+                  <a:lnTo>
+                    <a:pt x="1548419" y="318517"/>
+                  </a:lnTo>
+                  <a:lnTo>
+                    <a:pt x="1470785" y="329291"/>
+                  </a:lnTo>
+                  <a:lnTo>
+                    <a:pt x="1393151" y="339850"/>
+                  </a:lnTo>
+                  <a:lnTo>
+                    <a:pt x="1315517" y="350198"/>
+                  </a:lnTo>
+                  <a:lnTo>
+                    <a:pt x="1237883" y="360339"/>
+                  </a:lnTo>
+                  <a:lnTo>
+                    <a:pt x="1160249" y="370278"/>
+                  </a:lnTo>
+                  <a:lnTo>
+                    <a:pt x="1082615" y="380018"/>
+                  </a:lnTo>
+                  <a:lnTo>
+                    <a:pt x="1004981" y="389564"/>
+                  </a:lnTo>
+                  <a:lnTo>
+                    <a:pt x="927346" y="398919"/>
+                  </a:lnTo>
+                  <a:lnTo>
+                    <a:pt x="849712" y="408088"/>
+                  </a:lnTo>
+                  <a:lnTo>
+                    <a:pt x="772078" y="417073"/>
+                  </a:lnTo>
+                  <a:lnTo>
+                    <a:pt x="694444" y="425879"/>
+                  </a:lnTo>
+                  <a:lnTo>
+                    <a:pt x="616810" y="434509"/>
+                  </a:lnTo>
+                  <a:lnTo>
+                    <a:pt x="539176" y="442966"/>
+                  </a:lnTo>
+                  <a:lnTo>
+                    <a:pt x="461542" y="451255"/>
+                  </a:lnTo>
+                  <a:lnTo>
+                    <a:pt x="383908" y="459378"/>
+                  </a:lnTo>
+                  <a:lnTo>
+                    <a:pt x="306274" y="467339"/>
+                  </a:lnTo>
+                  <a:lnTo>
+                    <a:pt x="228640" y="475140"/>
+                  </a:lnTo>
+                  <a:lnTo>
+                    <a:pt x="151006" y="482786"/>
+                  </a:lnTo>
+                  <a:lnTo>
+                    <a:pt x="73372" y="490280"/>
+                  </a:lnTo>
+                  <a:lnTo>
+                    <a:pt x="0" y="497220"/>
                   </a:lnTo>
                 </a:path>
               </a:pathLst>
@@ -4127,300 +4151,300 @@
           </p:nvSpPr>
           <p:spPr>
             <a:xfrm>
-              <a:off x="817517" y="2732406"/>
-              <a:ext cx="7370972" cy="2598662"/>
+              <a:off x="817517" y="3924949"/>
+              <a:ext cx="7370972" cy="1207292"/>
             </a:xfrm>
             <a:custGeom>
               <a:avLst/>
               <a:pathLst>
-                <a:path w="7370972" h="2598662">
+                <a:path w="7370972" h="1207292">
                   <a:moveTo>
                     <a:pt x="0" y="0"/>
                   </a:moveTo>
                   <a:lnTo>
-                    <a:pt x="73372" y="70875"/>
-                  </a:lnTo>
-                  <a:lnTo>
-                    <a:pt x="151006" y="143874"/>
-                  </a:lnTo>
-                  <a:lnTo>
-                    <a:pt x="228640" y="214932"/>
-                  </a:lnTo>
-                  <a:lnTo>
-                    <a:pt x="306274" y="284100"/>
-                  </a:lnTo>
-                  <a:lnTo>
-                    <a:pt x="383908" y="351431"/>
-                  </a:lnTo>
-                  <a:lnTo>
-                    <a:pt x="461542" y="416971"/>
-                  </a:lnTo>
-                  <a:lnTo>
-                    <a:pt x="539176" y="480769"/>
-                  </a:lnTo>
-                  <a:lnTo>
-                    <a:pt x="616810" y="542870"/>
-                  </a:lnTo>
-                  <a:lnTo>
-                    <a:pt x="694444" y="603321"/>
-                  </a:lnTo>
-                  <a:lnTo>
-                    <a:pt x="772078" y="662165"/>
-                  </a:lnTo>
-                  <a:lnTo>
-                    <a:pt x="849712" y="719445"/>
-                  </a:lnTo>
-                  <a:lnTo>
-                    <a:pt x="927346" y="775201"/>
-                  </a:lnTo>
-                  <a:lnTo>
-                    <a:pt x="1004981" y="829476"/>
-                  </a:lnTo>
-                  <a:lnTo>
-                    <a:pt x="1082615" y="882307"/>
-                  </a:lnTo>
-                  <a:lnTo>
-                    <a:pt x="1160249" y="933735"/>
-                  </a:lnTo>
-                  <a:lnTo>
-                    <a:pt x="1237883" y="983795"/>
-                  </a:lnTo>
-                  <a:lnTo>
-                    <a:pt x="1315517" y="1032524"/>
-                  </a:lnTo>
-                  <a:lnTo>
-                    <a:pt x="1393151" y="1079958"/>
-                  </a:lnTo>
-                  <a:lnTo>
-                    <a:pt x="1470785" y="1126130"/>
-                  </a:lnTo>
-                  <a:lnTo>
-                    <a:pt x="1548419" y="1171076"/>
-                  </a:lnTo>
-                  <a:lnTo>
-                    <a:pt x="1626053" y="1214826"/>
-                  </a:lnTo>
-                  <a:lnTo>
-                    <a:pt x="1703687" y="1257414"/>
-                  </a:lnTo>
-                  <a:lnTo>
-                    <a:pt x="1781321" y="1298869"/>
-                  </a:lnTo>
-                  <a:lnTo>
-                    <a:pt x="1858955" y="1339222"/>
-                  </a:lnTo>
-                  <a:lnTo>
-                    <a:pt x="1936589" y="1378502"/>
-                  </a:lnTo>
-                  <a:lnTo>
-                    <a:pt x="2014223" y="1416738"/>
-                  </a:lnTo>
-                  <a:lnTo>
-                    <a:pt x="2091857" y="1453958"/>
-                  </a:lnTo>
-                  <a:lnTo>
-                    <a:pt x="2169491" y="1490188"/>
-                  </a:lnTo>
-                  <a:lnTo>
-                    <a:pt x="2247125" y="1525455"/>
-                  </a:lnTo>
-                  <a:lnTo>
-                    <a:pt x="2324759" y="1559785"/>
-                  </a:lnTo>
-                  <a:lnTo>
-                    <a:pt x="2402393" y="1593202"/>
-                  </a:lnTo>
-                  <a:lnTo>
-                    <a:pt x="2480027" y="1625730"/>
-                  </a:lnTo>
-                  <a:lnTo>
-                    <a:pt x="2557661" y="1657394"/>
-                  </a:lnTo>
-                  <a:lnTo>
-                    <a:pt x="2635295" y="1688216"/>
-                  </a:lnTo>
-                  <a:lnTo>
-                    <a:pt x="2712930" y="1718219"/>
-                  </a:lnTo>
-                  <a:lnTo>
-                    <a:pt x="2790564" y="1747424"/>
-                  </a:lnTo>
-                  <a:lnTo>
-                    <a:pt x="2868198" y="1775852"/>
-                  </a:lnTo>
-                  <a:lnTo>
-                    <a:pt x="2945832" y="1803525"/>
-                  </a:lnTo>
-                  <a:lnTo>
-                    <a:pt x="3023466" y="1830463"/>
-                  </a:lnTo>
-                  <a:lnTo>
-                    <a:pt x="3101100" y="1856684"/>
-                  </a:lnTo>
-                  <a:lnTo>
-                    <a:pt x="3178734" y="1882208"/>
-                  </a:lnTo>
-                  <a:lnTo>
-                    <a:pt x="3256368" y="1907053"/>
-                  </a:lnTo>
-                  <a:lnTo>
-                    <a:pt x="3334002" y="1931238"/>
-                  </a:lnTo>
-                  <a:lnTo>
-                    <a:pt x="3411636" y="1954780"/>
-                  </a:lnTo>
-                  <a:lnTo>
-                    <a:pt x="3489270" y="1977696"/>
-                  </a:lnTo>
-                  <a:lnTo>
-                    <a:pt x="3566904" y="2000003"/>
-                  </a:lnTo>
-                  <a:lnTo>
-                    <a:pt x="3644538" y="2021717"/>
-                  </a:lnTo>
-                  <a:lnTo>
-                    <a:pt x="3722172" y="2042854"/>
-                  </a:lnTo>
-                  <a:lnTo>
-                    <a:pt x="3799806" y="2063429"/>
-                  </a:lnTo>
-                  <a:lnTo>
-                    <a:pt x="3877440" y="2083457"/>
-                  </a:lnTo>
-                  <a:lnTo>
-                    <a:pt x="3955074" y="2102952"/>
-                  </a:lnTo>
-                  <a:lnTo>
-                    <a:pt x="4032708" y="2121929"/>
-                  </a:lnTo>
-                  <a:lnTo>
-                    <a:pt x="4110342" y="2140402"/>
-                  </a:lnTo>
-                  <a:lnTo>
-                    <a:pt x="4187976" y="2158384"/>
-                  </a:lnTo>
-                  <a:lnTo>
-                    <a:pt x="4265610" y="2175887"/>
-                  </a:lnTo>
-                  <a:lnTo>
-                    <a:pt x="4343244" y="2192925"/>
-                  </a:lnTo>
-                  <a:lnTo>
-                    <a:pt x="4420879" y="2209511"/>
-                  </a:lnTo>
-                  <a:lnTo>
-                    <a:pt x="4498513" y="2225655"/>
-                  </a:lnTo>
-                  <a:lnTo>
-                    <a:pt x="4576147" y="2241370"/>
-                  </a:lnTo>
-                  <a:lnTo>
-                    <a:pt x="4653781" y="2256668"/>
-                  </a:lnTo>
-                  <a:lnTo>
-                    <a:pt x="4731415" y="2271558"/>
-                  </a:lnTo>
-                  <a:lnTo>
-                    <a:pt x="4809049" y="2286053"/>
-                  </a:lnTo>
-                  <a:lnTo>
-                    <a:pt x="4886683" y="2300163"/>
-                  </a:lnTo>
-                  <a:lnTo>
-                    <a:pt x="4964317" y="2313897"/>
-                  </a:lnTo>
-                  <a:lnTo>
-                    <a:pt x="5041951" y="2327267"/>
-                  </a:lnTo>
-                  <a:lnTo>
-                    <a:pt x="5119585" y="2340281"/>
-                  </a:lnTo>
-                  <a:lnTo>
-                    <a:pt x="5197219" y="2352949"/>
-                  </a:lnTo>
-                  <a:lnTo>
-                    <a:pt x="5274853" y="2365280"/>
-                  </a:lnTo>
-                  <a:lnTo>
-                    <a:pt x="5352487" y="2377283"/>
-                  </a:lnTo>
-                  <a:lnTo>
-                    <a:pt x="5430121" y="2388967"/>
-                  </a:lnTo>
-                  <a:lnTo>
-                    <a:pt x="5507755" y="2400341"/>
-                  </a:lnTo>
-                  <a:lnTo>
-                    <a:pt x="5585389" y="2411412"/>
-                  </a:lnTo>
-                  <a:lnTo>
-                    <a:pt x="5663023" y="2422189"/>
-                  </a:lnTo>
-                  <a:lnTo>
-                    <a:pt x="5740657" y="2432680"/>
-                  </a:lnTo>
-                  <a:lnTo>
-                    <a:pt x="5818291" y="2442891"/>
-                  </a:lnTo>
-                  <a:lnTo>
-                    <a:pt x="5895925" y="2452831"/>
-                  </a:lnTo>
-                  <a:lnTo>
-                    <a:pt x="5973559" y="2462507"/>
-                  </a:lnTo>
-                  <a:lnTo>
-                    <a:pt x="6051193" y="2471926"/>
-                  </a:lnTo>
-                  <a:lnTo>
-                    <a:pt x="6128827" y="2481094"/>
-                  </a:lnTo>
-                  <a:lnTo>
-                    <a:pt x="6206462" y="2490019"/>
-                  </a:lnTo>
-                  <a:lnTo>
-                    <a:pt x="6284096" y="2498706"/>
-                  </a:lnTo>
-                  <a:lnTo>
-                    <a:pt x="6361730" y="2507162"/>
-                  </a:lnTo>
-                  <a:lnTo>
-                    <a:pt x="6439364" y="2515394"/>
-                  </a:lnTo>
-                  <a:lnTo>
-                    <a:pt x="6516998" y="2523406"/>
-                  </a:lnTo>
-                  <a:lnTo>
-                    <a:pt x="6594632" y="2531206"/>
-                  </a:lnTo>
-                  <a:lnTo>
-                    <a:pt x="6672266" y="2538798"/>
-                  </a:lnTo>
-                  <a:lnTo>
-                    <a:pt x="6749900" y="2546189"/>
-                  </a:lnTo>
-                  <a:lnTo>
-                    <a:pt x="6827534" y="2553383"/>
-                  </a:lnTo>
-                  <a:lnTo>
-                    <a:pt x="6905168" y="2560386"/>
-                  </a:lnTo>
-                  <a:lnTo>
-                    <a:pt x="6982802" y="2567202"/>
-                  </a:lnTo>
-                  <a:lnTo>
-                    <a:pt x="7060436" y="2573838"/>
-                  </a:lnTo>
-                  <a:lnTo>
-                    <a:pt x="7138070" y="2580297"/>
-                  </a:lnTo>
-                  <a:lnTo>
-                    <a:pt x="7215704" y="2586584"/>
-                  </a:lnTo>
-                  <a:lnTo>
-                    <a:pt x="7293338" y="2592704"/>
-                  </a:lnTo>
-                  <a:lnTo>
-                    <a:pt x="7370972" y="2598662"/>
+                    <a:pt x="73372" y="21845"/>
+                  </a:lnTo>
+                  <a:lnTo>
+                    <a:pt x="151006" y="44632"/>
+                  </a:lnTo>
+                  <a:lnTo>
+                    <a:pt x="228640" y="67094"/>
+                  </a:lnTo>
+                  <a:lnTo>
+                    <a:pt x="306274" y="89236"/>
+                  </a:lnTo>
+                  <a:lnTo>
+                    <a:pt x="383908" y="111064"/>
+                  </a:lnTo>
+                  <a:lnTo>
+                    <a:pt x="461542" y="132582"/>
+                  </a:lnTo>
+                  <a:lnTo>
+                    <a:pt x="539176" y="153793"/>
+                  </a:lnTo>
+                  <a:lnTo>
+                    <a:pt x="616810" y="174703"/>
+                  </a:lnTo>
+                  <a:lnTo>
+                    <a:pt x="694444" y="195315"/>
+                  </a:lnTo>
+                  <a:lnTo>
+                    <a:pt x="772078" y="215635"/>
+                  </a:lnTo>
+                  <a:lnTo>
+                    <a:pt x="849712" y="235665"/>
+                  </a:lnTo>
+                  <a:lnTo>
+                    <a:pt x="927346" y="255411"/>
+                  </a:lnTo>
+                  <a:lnTo>
+                    <a:pt x="1004981" y="274876"/>
+                  </a:lnTo>
+                  <a:lnTo>
+                    <a:pt x="1082615" y="294064"/>
+                  </a:lnTo>
+                  <a:lnTo>
+                    <a:pt x="1160249" y="312979"/>
+                  </a:lnTo>
+                  <a:lnTo>
+                    <a:pt x="1237883" y="331625"/>
+                  </a:lnTo>
+                  <a:lnTo>
+                    <a:pt x="1315517" y="350006"/>
+                  </a:lnTo>
+                  <a:lnTo>
+                    <a:pt x="1393151" y="368126"/>
+                  </a:lnTo>
+                  <a:lnTo>
+                    <a:pt x="1470785" y="385988"/>
+                  </a:lnTo>
+                  <a:lnTo>
+                    <a:pt x="1548419" y="403596"/>
+                  </a:lnTo>
+                  <a:lnTo>
+                    <a:pt x="1626053" y="420954"/>
+                  </a:lnTo>
+                  <a:lnTo>
+                    <a:pt x="1703687" y="438064"/>
+                  </a:lnTo>
+                  <a:lnTo>
+                    <a:pt x="1781321" y="454932"/>
+                  </a:lnTo>
+                  <a:lnTo>
+                    <a:pt x="1858955" y="471560"/>
+                  </a:lnTo>
+                  <a:lnTo>
+                    <a:pt x="1936589" y="487951"/>
+                  </a:lnTo>
+                  <a:lnTo>
+                    <a:pt x="2014223" y="504109"/>
+                  </a:lnTo>
+                  <a:lnTo>
+                    <a:pt x="2091857" y="520037"/>
+                  </a:lnTo>
+                  <a:lnTo>
+                    <a:pt x="2169491" y="535739"/>
+                  </a:lnTo>
+                  <a:lnTo>
+                    <a:pt x="2247125" y="551218"/>
+                  </a:lnTo>
+                  <a:lnTo>
+                    <a:pt x="2324759" y="566476"/>
+                  </a:lnTo>
+                  <a:lnTo>
+                    <a:pt x="2402393" y="581518"/>
+                  </a:lnTo>
+                  <a:lnTo>
+                    <a:pt x="2480027" y="596345"/>
+                  </a:lnTo>
+                  <a:lnTo>
+                    <a:pt x="2557661" y="610962"/>
+                  </a:lnTo>
+                  <a:lnTo>
+                    <a:pt x="2635295" y="625371"/>
+                  </a:lnTo>
+                  <a:lnTo>
+                    <a:pt x="2712930" y="639575"/>
+                  </a:lnTo>
+                  <a:lnTo>
+                    <a:pt x="2790564" y="653577"/>
+                  </a:lnTo>
+                  <a:lnTo>
+                    <a:pt x="2868198" y="667380"/>
+                  </a:lnTo>
+                  <a:lnTo>
+                    <a:pt x="2945832" y="680987"/>
+                  </a:lnTo>
+                  <a:lnTo>
+                    <a:pt x="3023466" y="694400"/>
+                  </a:lnTo>
+                  <a:lnTo>
+                    <a:pt x="3101100" y="707622"/>
+                  </a:lnTo>
+                  <a:lnTo>
+                    <a:pt x="3178734" y="720657"/>
+                  </a:lnTo>
+                  <a:lnTo>
+                    <a:pt x="3256368" y="733506"/>
+                  </a:lnTo>
+                  <a:lnTo>
+                    <a:pt x="3334002" y="746172"/>
+                  </a:lnTo>
+                  <a:lnTo>
+                    <a:pt x="3411636" y="758659"/>
+                  </a:lnTo>
+                  <a:lnTo>
+                    <a:pt x="3489270" y="770967"/>
+                  </a:lnTo>
+                  <a:lnTo>
+                    <a:pt x="3566904" y="783101"/>
+                  </a:lnTo>
+                  <a:lnTo>
+                    <a:pt x="3644538" y="795062"/>
+                  </a:lnTo>
+                  <a:lnTo>
+                    <a:pt x="3722172" y="806853"/>
+                  </a:lnTo>
+                  <a:lnTo>
+                    <a:pt x="3799806" y="818477"/>
+                  </a:lnTo>
+                  <a:lnTo>
+                    <a:pt x="3877440" y="829935"/>
+                  </a:lnTo>
+                  <a:lnTo>
+                    <a:pt x="3955074" y="841230"/>
+                  </a:lnTo>
+                  <a:lnTo>
+                    <a:pt x="4032708" y="852364"/>
+                  </a:lnTo>
+                  <a:lnTo>
+                    <a:pt x="4110342" y="863341"/>
+                  </a:lnTo>
+                  <a:lnTo>
+                    <a:pt x="4187976" y="874161"/>
+                  </a:lnTo>
+                  <a:lnTo>
+                    <a:pt x="4265610" y="884827"/>
+                  </a:lnTo>
+                  <a:lnTo>
+                    <a:pt x="4343244" y="895342"/>
+                  </a:lnTo>
+                  <a:lnTo>
+                    <a:pt x="4420879" y="905707"/>
+                  </a:lnTo>
+                  <a:lnTo>
+                    <a:pt x="4498513" y="915924"/>
+                  </a:lnTo>
+                  <a:lnTo>
+                    <a:pt x="4576147" y="925997"/>
+                  </a:lnTo>
+                  <a:lnTo>
+                    <a:pt x="4653781" y="935926"/>
+                  </a:lnTo>
+                  <a:lnTo>
+                    <a:pt x="4731415" y="945714"/>
+                  </a:lnTo>
+                  <a:lnTo>
+                    <a:pt x="4809049" y="955363"/>
+                  </a:lnTo>
+                  <a:lnTo>
+                    <a:pt x="4886683" y="964874"/>
+                  </a:lnTo>
+                  <a:lnTo>
+                    <a:pt x="4964317" y="974251"/>
+                  </a:lnTo>
+                  <a:lnTo>
+                    <a:pt x="5041951" y="983494"/>
+                  </a:lnTo>
+                  <a:lnTo>
+                    <a:pt x="5119585" y="992605"/>
+                  </a:lnTo>
+                  <a:lnTo>
+                    <a:pt x="5197219" y="1001587"/>
+                  </a:lnTo>
+                  <a:lnTo>
+                    <a:pt x="5274853" y="1010442"/>
+                  </a:lnTo>
+                  <a:lnTo>
+                    <a:pt x="5352487" y="1019170"/>
+                  </a:lnTo>
+                  <a:lnTo>
+                    <a:pt x="5430121" y="1027774"/>
+                  </a:lnTo>
+                  <a:lnTo>
+                    <a:pt x="5507755" y="1036256"/>
+                  </a:lnTo>
+                  <a:lnTo>
+                    <a:pt x="5585389" y="1044618"/>
+                  </a:lnTo>
+                  <a:lnTo>
+                    <a:pt x="5663023" y="1052860"/>
+                  </a:lnTo>
+                  <a:lnTo>
+                    <a:pt x="5740657" y="1060985"/>
+                  </a:lnTo>
+                  <a:lnTo>
+                    <a:pt x="5818291" y="1068995"/>
+                  </a:lnTo>
+                  <a:lnTo>
+                    <a:pt x="5895925" y="1076891"/>
+                  </a:lnTo>
+                  <a:lnTo>
+                    <a:pt x="5973559" y="1084674"/>
+                  </a:lnTo>
+                  <a:lnTo>
+                    <a:pt x="6051193" y="1092347"/>
+                  </a:lnTo>
+                  <a:lnTo>
+                    <a:pt x="6128827" y="1099911"/>
+                  </a:lnTo>
+                  <a:lnTo>
+                    <a:pt x="6206462" y="1107367"/>
+                  </a:lnTo>
+                  <a:lnTo>
+                    <a:pt x="6284096" y="1114717"/>
+                  </a:lnTo>
+                  <a:lnTo>
+                    <a:pt x="6361730" y="1121962"/>
+                  </a:lnTo>
+                  <a:lnTo>
+                    <a:pt x="6439364" y="1129105"/>
+                  </a:lnTo>
+                  <a:lnTo>
+                    <a:pt x="6516998" y="1136146"/>
+                  </a:lnTo>
+                  <a:lnTo>
+                    <a:pt x="6594632" y="1143087"/>
+                  </a:lnTo>
+                  <a:lnTo>
+                    <a:pt x="6672266" y="1149929"/>
+                  </a:lnTo>
+                  <a:lnTo>
+                    <a:pt x="6749900" y="1156674"/>
+                  </a:lnTo>
+                  <a:lnTo>
+                    <a:pt x="6827534" y="1163323"/>
+                  </a:lnTo>
+                  <a:lnTo>
+                    <a:pt x="6905168" y="1169877"/>
+                  </a:lnTo>
+                  <a:lnTo>
+                    <a:pt x="6982802" y="1176339"/>
+                  </a:lnTo>
+                  <a:lnTo>
+                    <a:pt x="7060436" y="1182708"/>
+                  </a:lnTo>
+                  <a:lnTo>
+                    <a:pt x="7138070" y="1188987"/>
+                  </a:lnTo>
+                  <a:lnTo>
+                    <a:pt x="7215704" y="1195176"/>
+                  </a:lnTo>
+                  <a:lnTo>
+                    <a:pt x="7293338" y="1201278"/>
+                  </a:lnTo>
+                  <a:lnTo>
+                    <a:pt x="7370972" y="1207292"/>
                   </a:lnTo>
                 </a:path>
               </a:pathLst>

--- a/docs/plots/carbo/jx_carbo_linsubhr_ratio_aki2.pptx
+++ b/docs/plots/carbo/jx_carbo_linsubhr_ratio_aki2.pptx
@@ -3003,545 +3003,536 @@
           <p:spPr>
             <a:xfrm>
               <a:off x="817517" y="1896563"/>
-              <a:ext cx="7370972" cy="3581666"/>
+              <a:ext cx="7370972" cy="3597845"/>
             </a:xfrm>
             <a:custGeom>
               <a:avLst/>
               <a:pathLst>
-                <a:path w="7370972" h="3581666">
+                <a:path w="7370972" h="3597845">
                   <a:moveTo>
-                    <a:pt x="1104374" y="0"/>
+                    <a:pt x="1317614" y="0"/>
                   </a:moveTo>
                   <a:lnTo>
-                    <a:pt x="1160249" y="126949"/>
-                  </a:lnTo>
-                  <a:lnTo>
-                    <a:pt x="1237883" y="294934"/>
-                  </a:lnTo>
-                  <a:lnTo>
-                    <a:pt x="1315517" y="454915"/>
-                  </a:lnTo>
-                  <a:lnTo>
-                    <a:pt x="1393151" y="607274"/>
-                  </a:lnTo>
-                  <a:lnTo>
-                    <a:pt x="1470785" y="752374"/>
-                  </a:lnTo>
-                  <a:lnTo>
-                    <a:pt x="1548419" y="890560"/>
-                  </a:lnTo>
-                  <a:lnTo>
-                    <a:pt x="1626053" y="1022162"/>
-                  </a:lnTo>
-                  <a:lnTo>
-                    <a:pt x="1703687" y="1147494"/>
-                  </a:lnTo>
-                  <a:lnTo>
-                    <a:pt x="1781321" y="1266854"/>
-                  </a:lnTo>
-                  <a:lnTo>
-                    <a:pt x="1858955" y="1380527"/>
-                  </a:lnTo>
-                  <a:lnTo>
-                    <a:pt x="1936589" y="1488784"/>
-                  </a:lnTo>
-                  <a:lnTo>
-                    <a:pt x="2014223" y="1591883"/>
-                  </a:lnTo>
-                  <a:lnTo>
-                    <a:pt x="2091857" y="1690070"/>
-                  </a:lnTo>
-                  <a:lnTo>
-                    <a:pt x="2169491" y="1783579"/>
-                  </a:lnTo>
-                  <a:lnTo>
-                    <a:pt x="2247125" y="1872632"/>
-                  </a:lnTo>
-                  <a:lnTo>
-                    <a:pt x="2324759" y="1957442"/>
-                  </a:lnTo>
-                  <a:lnTo>
-                    <a:pt x="2402393" y="2038212"/>
-                  </a:lnTo>
-                  <a:lnTo>
-                    <a:pt x="2480027" y="2115133"/>
-                  </a:lnTo>
-                  <a:lnTo>
-                    <a:pt x="2557661" y="2188389"/>
-                  </a:lnTo>
-                  <a:lnTo>
-                    <a:pt x="2635295" y="2258155"/>
-                  </a:lnTo>
-                  <a:lnTo>
-                    <a:pt x="2712930" y="2324597"/>
-                  </a:lnTo>
-                  <a:lnTo>
-                    <a:pt x="2790564" y="2387873"/>
-                  </a:lnTo>
-                  <a:lnTo>
-                    <a:pt x="2868198" y="2448134"/>
-                  </a:lnTo>
-                  <a:lnTo>
-                    <a:pt x="2945832" y="2505524"/>
-                  </a:lnTo>
-                  <a:lnTo>
-                    <a:pt x="3023466" y="2560179"/>
-                  </a:lnTo>
-                  <a:lnTo>
-                    <a:pt x="3101100" y="2612231"/>
-                  </a:lnTo>
-                  <a:lnTo>
-                    <a:pt x="3178734" y="2661802"/>
-                  </a:lnTo>
-                  <a:lnTo>
-                    <a:pt x="3256368" y="2709012"/>
-                  </a:lnTo>
-                  <a:lnTo>
-                    <a:pt x="3334002" y="2753972"/>
-                  </a:lnTo>
-                  <a:lnTo>
-                    <a:pt x="3411636" y="2777188"/>
-                  </a:lnTo>
-                  <a:lnTo>
-                    <a:pt x="3489270" y="2759347"/>
-                  </a:lnTo>
-                  <a:lnTo>
-                    <a:pt x="3566904" y="2741142"/>
-                  </a:lnTo>
-                  <a:lnTo>
-                    <a:pt x="3644538" y="2722566"/>
-                  </a:lnTo>
-                  <a:lnTo>
-                    <a:pt x="3722172" y="2703612"/>
-                  </a:lnTo>
-                  <a:lnTo>
-                    <a:pt x="3799806" y="2684271"/>
-                  </a:lnTo>
-                  <a:lnTo>
-                    <a:pt x="3877440" y="2664537"/>
-                  </a:lnTo>
-                  <a:lnTo>
-                    <a:pt x="3955074" y="2644400"/>
-                  </a:lnTo>
-                  <a:lnTo>
-                    <a:pt x="4032708" y="2623852"/>
-                  </a:lnTo>
-                  <a:lnTo>
-                    <a:pt x="4110342" y="2602886"/>
-                  </a:lnTo>
-                  <a:lnTo>
-                    <a:pt x="4187976" y="2581493"/>
-                  </a:lnTo>
-                  <a:lnTo>
-                    <a:pt x="4265610" y="2559663"/>
-                  </a:lnTo>
-                  <a:lnTo>
-                    <a:pt x="4343244" y="2537389"/>
-                  </a:lnTo>
-                  <a:lnTo>
-                    <a:pt x="4420879" y="2514661"/>
-                  </a:lnTo>
-                  <a:lnTo>
-                    <a:pt x="4498513" y="2491469"/>
-                  </a:lnTo>
-                  <a:lnTo>
-                    <a:pt x="4576147" y="2467805"/>
-                  </a:lnTo>
-                  <a:lnTo>
-                    <a:pt x="4653781" y="2443659"/>
-                  </a:lnTo>
-                  <a:lnTo>
-                    <a:pt x="4731415" y="2419021"/>
-                  </a:lnTo>
-                  <a:lnTo>
-                    <a:pt x="4809049" y="2393880"/>
-                  </a:lnTo>
-                  <a:lnTo>
-                    <a:pt x="4886683" y="2368227"/>
-                  </a:lnTo>
-                  <a:lnTo>
-                    <a:pt x="4964317" y="2342052"/>
-                  </a:lnTo>
-                  <a:lnTo>
-                    <a:pt x="5041951" y="2315343"/>
-                  </a:lnTo>
-                  <a:lnTo>
-                    <a:pt x="5119585" y="2288089"/>
-                  </a:lnTo>
-                  <a:lnTo>
-                    <a:pt x="5197219" y="2260281"/>
-                  </a:lnTo>
-                  <a:lnTo>
-                    <a:pt x="5274853" y="2231905"/>
-                  </a:lnTo>
-                  <a:lnTo>
-                    <a:pt x="5352487" y="2202951"/>
-                  </a:lnTo>
-                  <a:lnTo>
-                    <a:pt x="5430121" y="2173408"/>
-                  </a:lnTo>
-                  <a:lnTo>
-                    <a:pt x="5507755" y="2143262"/>
-                  </a:lnTo>
-                  <a:lnTo>
-                    <a:pt x="5585389" y="2112501"/>
-                  </a:lnTo>
-                  <a:lnTo>
-                    <a:pt x="5663023" y="2081114"/>
-                  </a:lnTo>
-                  <a:lnTo>
-                    <a:pt x="5740657" y="2049087"/>
-                  </a:lnTo>
-                  <a:lnTo>
-                    <a:pt x="5818291" y="2016408"/>
-                  </a:lnTo>
-                  <a:lnTo>
-                    <a:pt x="5895925" y="1983062"/>
-                  </a:lnTo>
-                  <a:lnTo>
-                    <a:pt x="5973559" y="1949037"/>
-                  </a:lnTo>
-                  <a:lnTo>
-                    <a:pt x="6051193" y="1914319"/>
-                  </a:lnTo>
-                  <a:lnTo>
-                    <a:pt x="6128827" y="1878893"/>
-                  </a:lnTo>
-                  <a:lnTo>
-                    <a:pt x="6206462" y="1842745"/>
-                  </a:lnTo>
-                  <a:lnTo>
-                    <a:pt x="6284096" y="1805860"/>
-                  </a:lnTo>
-                  <a:lnTo>
-                    <a:pt x="6361730" y="1768224"/>
-                  </a:lnTo>
-                  <a:lnTo>
-                    <a:pt x="6439364" y="1729821"/>
-                  </a:lnTo>
-                  <a:lnTo>
-                    <a:pt x="6516998" y="1690635"/>
-                  </a:lnTo>
-                  <a:lnTo>
-                    <a:pt x="6594632" y="1650650"/>
-                  </a:lnTo>
-                  <a:lnTo>
-                    <a:pt x="6672266" y="1609851"/>
-                  </a:lnTo>
-                  <a:lnTo>
-                    <a:pt x="6749900" y="1568220"/>
-                  </a:lnTo>
-                  <a:lnTo>
-                    <a:pt x="6827534" y="1525741"/>
-                  </a:lnTo>
-                  <a:lnTo>
-                    <a:pt x="6905168" y="1482396"/>
-                  </a:lnTo>
-                  <a:lnTo>
-                    <a:pt x="6982802" y="1438167"/>
-                  </a:lnTo>
-                  <a:lnTo>
-                    <a:pt x="7060436" y="1393038"/>
-                  </a:lnTo>
-                  <a:lnTo>
-                    <a:pt x="7138070" y="1346988"/>
-                  </a:lnTo>
-                  <a:lnTo>
-                    <a:pt x="7215704" y="1300001"/>
-                  </a:lnTo>
-                  <a:lnTo>
-                    <a:pt x="7293338" y="1252055"/>
-                  </a:lnTo>
-                  <a:lnTo>
-                    <a:pt x="7370972" y="1203133"/>
-                  </a:lnTo>
-                  <a:lnTo>
-                    <a:pt x="7370972" y="3581666"/>
-                  </a:lnTo>
-                  <a:lnTo>
-                    <a:pt x="7293338" y="3578115"/>
-                  </a:lnTo>
-                  <a:lnTo>
-                    <a:pt x="7215704" y="3574386"/>
-                  </a:lnTo>
-                  <a:lnTo>
-                    <a:pt x="7138070" y="3570471"/>
-                  </a:lnTo>
-                  <a:lnTo>
-                    <a:pt x="7060436" y="3566360"/>
-                  </a:lnTo>
-                  <a:lnTo>
-                    <a:pt x="6982802" y="3562044"/>
-                  </a:lnTo>
-                  <a:lnTo>
-                    <a:pt x="6905168" y="3557511"/>
-                  </a:lnTo>
-                  <a:lnTo>
-                    <a:pt x="6827534" y="3552751"/>
-                  </a:lnTo>
-                  <a:lnTo>
-                    <a:pt x="6749900" y="3547754"/>
-                  </a:lnTo>
-                  <a:lnTo>
-                    <a:pt x="6672266" y="3542506"/>
-                  </a:lnTo>
-                  <a:lnTo>
-                    <a:pt x="6594632" y="3536996"/>
-                  </a:lnTo>
-                  <a:lnTo>
-                    <a:pt x="6516998" y="3531210"/>
-                  </a:lnTo>
-                  <a:lnTo>
-                    <a:pt x="6439364" y="3525135"/>
-                  </a:lnTo>
-                  <a:lnTo>
-                    <a:pt x="6361730" y="3518756"/>
-                  </a:lnTo>
-                  <a:lnTo>
-                    <a:pt x="6284096" y="3512058"/>
-                  </a:lnTo>
-                  <a:lnTo>
-                    <a:pt x="6206462" y="3505024"/>
-                  </a:lnTo>
-                  <a:lnTo>
-                    <a:pt x="6128827" y="3497639"/>
-                  </a:lnTo>
-                  <a:lnTo>
-                    <a:pt x="6051193" y="3489884"/>
-                  </a:lnTo>
-                  <a:lnTo>
-                    <a:pt x="5973559" y="3481741"/>
-                  </a:lnTo>
-                  <a:lnTo>
-                    <a:pt x="5895925" y="3473191"/>
-                  </a:lnTo>
-                  <a:lnTo>
-                    <a:pt x="5818291" y="3464213"/>
-                  </a:lnTo>
-                  <a:lnTo>
-                    <a:pt x="5740657" y="3454786"/>
-                  </a:lnTo>
-                  <a:lnTo>
-                    <a:pt x="5663023" y="3444887"/>
-                  </a:lnTo>
-                  <a:lnTo>
-                    <a:pt x="5585389" y="3434493"/>
-                  </a:lnTo>
-                  <a:lnTo>
-                    <a:pt x="5507755" y="3423579"/>
-                  </a:lnTo>
-                  <a:lnTo>
-                    <a:pt x="5430121" y="3412119"/>
-                  </a:lnTo>
-                  <a:lnTo>
-                    <a:pt x="5352487" y="3400086"/>
-                  </a:lnTo>
-                  <a:lnTo>
-                    <a:pt x="5274853" y="3387451"/>
-                  </a:lnTo>
-                  <a:lnTo>
-                    <a:pt x="5197219" y="3374183"/>
-                  </a:lnTo>
-                  <a:lnTo>
-                    <a:pt x="5119585" y="3360252"/>
-                  </a:lnTo>
-                  <a:lnTo>
-                    <a:pt x="5041951" y="3345624"/>
-                  </a:lnTo>
-                  <a:lnTo>
-                    <a:pt x="4964317" y="3330263"/>
-                  </a:lnTo>
-                  <a:lnTo>
-                    <a:pt x="4886683" y="3314135"/>
-                  </a:lnTo>
-                  <a:lnTo>
-                    <a:pt x="4809049" y="3297199"/>
-                  </a:lnTo>
-                  <a:lnTo>
-                    <a:pt x="4731415" y="3279417"/>
-                  </a:lnTo>
-                  <a:lnTo>
-                    <a:pt x="4653781" y="3260744"/>
-                  </a:lnTo>
-                  <a:lnTo>
-                    <a:pt x="4576147" y="3241138"/>
-                  </a:lnTo>
-                  <a:lnTo>
-                    <a:pt x="4498513" y="3220550"/>
-                  </a:lnTo>
-                  <a:lnTo>
-                    <a:pt x="4420879" y="3198933"/>
-                  </a:lnTo>
-                  <a:lnTo>
-                    <a:pt x="4343244" y="3176234"/>
-                  </a:lnTo>
-                  <a:lnTo>
-                    <a:pt x="4265610" y="3152399"/>
-                  </a:lnTo>
-                  <a:lnTo>
-                    <a:pt x="4187976" y="3127372"/>
-                  </a:lnTo>
-                  <a:lnTo>
-                    <a:pt x="4110342" y="3101093"/>
-                  </a:lnTo>
-                  <a:lnTo>
-                    <a:pt x="4032708" y="3073499"/>
-                  </a:lnTo>
-                  <a:lnTo>
-                    <a:pt x="3955074" y="3044525"/>
-                  </a:lnTo>
-                  <a:lnTo>
-                    <a:pt x="3877440" y="3014101"/>
-                  </a:lnTo>
-                  <a:lnTo>
-                    <a:pt x="3799806" y="2982155"/>
-                  </a:lnTo>
-                  <a:lnTo>
-                    <a:pt x="3722172" y="2948610"/>
-                  </a:lnTo>
-                  <a:lnTo>
-                    <a:pt x="3644538" y="2913388"/>
-                  </a:lnTo>
-                  <a:lnTo>
-                    <a:pt x="3566904" y="2876403"/>
-                  </a:lnTo>
-                  <a:lnTo>
-                    <a:pt x="3489270" y="2837568"/>
-                  </a:lnTo>
-                  <a:lnTo>
-                    <a:pt x="3411636" y="2796790"/>
-                  </a:lnTo>
-                  <a:lnTo>
-                    <a:pt x="3334002" y="2794673"/>
-                  </a:lnTo>
-                  <a:lnTo>
-                    <a:pt x="3256368" y="2811809"/>
-                  </a:lnTo>
-                  <a:lnTo>
-                    <a:pt x="3178734" y="2828602"/>
-                  </a:lnTo>
-                  <a:lnTo>
-                    <a:pt x="3101100" y="2845060"/>
-                  </a:lnTo>
-                  <a:lnTo>
-                    <a:pt x="3023466" y="2861190"/>
-                  </a:lnTo>
-                  <a:lnTo>
-                    <a:pt x="2945832" y="2876997"/>
-                  </a:lnTo>
-                  <a:lnTo>
-                    <a:pt x="2868198" y="2892488"/>
-                  </a:lnTo>
-                  <a:lnTo>
-                    <a:pt x="2790564" y="2907671"/>
-                  </a:lnTo>
-                  <a:lnTo>
-                    <a:pt x="2712930" y="2922549"/>
-                  </a:lnTo>
-                  <a:lnTo>
-                    <a:pt x="2635295" y="2937131"/>
-                  </a:lnTo>
-                  <a:lnTo>
-                    <a:pt x="2557661" y="2951422"/>
-                  </a:lnTo>
-                  <a:lnTo>
-                    <a:pt x="2480027" y="2965427"/>
-                  </a:lnTo>
-                  <a:lnTo>
-                    <a:pt x="2402393" y="2979152"/>
-                  </a:lnTo>
-                  <a:lnTo>
-                    <a:pt x="2324759" y="2992603"/>
-                  </a:lnTo>
-                  <a:lnTo>
-                    <a:pt x="2247125" y="3005786"/>
-                  </a:lnTo>
-                  <a:lnTo>
-                    <a:pt x="2169491" y="3018705"/>
-                  </a:lnTo>
-                  <a:lnTo>
-                    <a:pt x="2091857" y="3031366"/>
-                  </a:lnTo>
-                  <a:lnTo>
-                    <a:pt x="2014223" y="3043775"/>
-                  </a:lnTo>
-                  <a:lnTo>
-                    <a:pt x="1936589" y="3055935"/>
-                  </a:lnTo>
-                  <a:lnTo>
-                    <a:pt x="1858955" y="3067853"/>
-                  </a:lnTo>
-                  <a:lnTo>
-                    <a:pt x="1781321" y="3079533"/>
-                  </a:lnTo>
-                  <a:lnTo>
-                    <a:pt x="1703687" y="3090979"/>
-                  </a:lnTo>
-                  <a:lnTo>
-                    <a:pt x="1626053" y="3102197"/>
-                  </a:lnTo>
-                  <a:lnTo>
-                    <a:pt x="1548419" y="3113190"/>
-                  </a:lnTo>
-                  <a:lnTo>
-                    <a:pt x="1470785" y="3123965"/>
-                  </a:lnTo>
-                  <a:lnTo>
-                    <a:pt x="1393151" y="3134524"/>
-                  </a:lnTo>
-                  <a:lnTo>
-                    <a:pt x="1315517" y="3144872"/>
-                  </a:lnTo>
-                  <a:lnTo>
-                    <a:pt x="1237883" y="3155013"/>
-                  </a:lnTo>
-                  <a:lnTo>
-                    <a:pt x="1160249" y="3164952"/>
-                  </a:lnTo>
-                  <a:lnTo>
-                    <a:pt x="1082615" y="3174692"/>
-                  </a:lnTo>
-                  <a:lnTo>
-                    <a:pt x="1004981" y="3184238"/>
-                  </a:lnTo>
-                  <a:lnTo>
-                    <a:pt x="927346" y="3193593"/>
-                  </a:lnTo>
-                  <a:lnTo>
-                    <a:pt x="849712" y="3202761"/>
-                  </a:lnTo>
-                  <a:lnTo>
-                    <a:pt x="772078" y="3211747"/>
-                  </a:lnTo>
-                  <a:lnTo>
-                    <a:pt x="694444" y="3220552"/>
-                  </a:lnTo>
-                  <a:lnTo>
-                    <a:pt x="616810" y="3229182"/>
-                  </a:lnTo>
-                  <a:lnTo>
-                    <a:pt x="539176" y="3237640"/>
-                  </a:lnTo>
-                  <a:lnTo>
-                    <a:pt x="461542" y="3245928"/>
-                  </a:lnTo>
-                  <a:lnTo>
-                    <a:pt x="383908" y="3254051"/>
-                  </a:lnTo>
-                  <a:lnTo>
-                    <a:pt x="306274" y="3262012"/>
-                  </a:lnTo>
-                  <a:lnTo>
-                    <a:pt x="228640" y="3269814"/>
-                  </a:lnTo>
-                  <a:lnTo>
-                    <a:pt x="151006" y="3277460"/>
-                  </a:lnTo>
-                  <a:lnTo>
-                    <a:pt x="73372" y="3284953"/>
-                  </a:lnTo>
-                  <a:lnTo>
-                    <a:pt x="0" y="3291894"/>
+                    <a:pt x="1393151" y="186612"/>
+                  </a:lnTo>
+                  <a:lnTo>
+                    <a:pt x="1470785" y="368349"/>
+                  </a:lnTo>
+                  <a:lnTo>
+                    <a:pt x="1548419" y="540557"/>
+                  </a:lnTo>
+                  <a:lnTo>
+                    <a:pt x="1626053" y="703736"/>
+                  </a:lnTo>
+                  <a:lnTo>
+                    <a:pt x="1703687" y="858358"/>
+                  </a:lnTo>
+                  <a:lnTo>
+                    <a:pt x="1781321" y="1004873"/>
+                  </a:lnTo>
+                  <a:lnTo>
+                    <a:pt x="1858955" y="1143706"/>
+                  </a:lnTo>
+                  <a:lnTo>
+                    <a:pt x="1936589" y="1275259"/>
+                  </a:lnTo>
+                  <a:lnTo>
+                    <a:pt x="2014223" y="1399915"/>
+                  </a:lnTo>
+                  <a:lnTo>
+                    <a:pt x="2091857" y="1518034"/>
+                  </a:lnTo>
+                  <a:lnTo>
+                    <a:pt x="2169491" y="1629959"/>
+                  </a:lnTo>
+                  <a:lnTo>
+                    <a:pt x="2247125" y="1736017"/>
+                  </a:lnTo>
+                  <a:lnTo>
+                    <a:pt x="2324759" y="1836513"/>
+                  </a:lnTo>
+                  <a:lnTo>
+                    <a:pt x="2402393" y="1931739"/>
+                  </a:lnTo>
+                  <a:lnTo>
+                    <a:pt x="2480027" y="2021973"/>
+                  </a:lnTo>
+                  <a:lnTo>
+                    <a:pt x="2557661" y="2107475"/>
+                  </a:lnTo>
+                  <a:lnTo>
+                    <a:pt x="2635295" y="2188494"/>
+                  </a:lnTo>
+                  <a:lnTo>
+                    <a:pt x="2712930" y="2265265"/>
+                  </a:lnTo>
+                  <a:lnTo>
+                    <a:pt x="2790564" y="2338011"/>
+                  </a:lnTo>
+                  <a:lnTo>
+                    <a:pt x="2868198" y="2406942"/>
+                  </a:lnTo>
+                  <a:lnTo>
+                    <a:pt x="2945832" y="2472259"/>
+                  </a:lnTo>
+                  <a:lnTo>
+                    <a:pt x="3023466" y="2534151"/>
+                  </a:lnTo>
+                  <a:lnTo>
+                    <a:pt x="3101100" y="2592798"/>
+                  </a:lnTo>
+                  <a:lnTo>
+                    <a:pt x="3178734" y="2648369"/>
+                  </a:lnTo>
+                  <a:lnTo>
+                    <a:pt x="3256368" y="2701027"/>
+                  </a:lnTo>
+                  <a:lnTo>
+                    <a:pt x="3334002" y="2750924"/>
+                  </a:lnTo>
+                  <a:lnTo>
+                    <a:pt x="3411636" y="2779516"/>
+                  </a:lnTo>
+                  <a:lnTo>
+                    <a:pt x="3489270" y="2768921"/>
+                  </a:lnTo>
+                  <a:lnTo>
+                    <a:pt x="3566904" y="2758197"/>
+                  </a:lnTo>
+                  <a:lnTo>
+                    <a:pt x="3644538" y="2747343"/>
+                  </a:lnTo>
+                  <a:lnTo>
+                    <a:pt x="3722172" y="2736357"/>
+                  </a:lnTo>
+                  <a:lnTo>
+                    <a:pt x="3799806" y="2725237"/>
+                  </a:lnTo>
+                  <a:lnTo>
+                    <a:pt x="3877440" y="2713983"/>
+                  </a:lnTo>
+                  <a:lnTo>
+                    <a:pt x="3955074" y="2702592"/>
+                  </a:lnTo>
+                  <a:lnTo>
+                    <a:pt x="4032708" y="2691063"/>
+                  </a:lnTo>
+                  <a:lnTo>
+                    <a:pt x="4110342" y="2679395"/>
+                  </a:lnTo>
+                  <a:lnTo>
+                    <a:pt x="4187976" y="2667584"/>
+                  </a:lnTo>
+                  <a:lnTo>
+                    <a:pt x="4265610" y="2655630"/>
+                  </a:lnTo>
+                  <a:lnTo>
+                    <a:pt x="4343244" y="2643531"/>
+                  </a:lnTo>
+                  <a:lnTo>
+                    <a:pt x="4420879" y="2631286"/>
+                  </a:lnTo>
+                  <a:lnTo>
+                    <a:pt x="4498513" y="2618891"/>
+                  </a:lnTo>
+                  <a:lnTo>
+                    <a:pt x="4576147" y="2606347"/>
+                  </a:lnTo>
+                  <a:lnTo>
+                    <a:pt x="4653781" y="2593650"/>
+                  </a:lnTo>
+                  <a:lnTo>
+                    <a:pt x="4731415" y="2580799"/>
+                  </a:lnTo>
+                  <a:lnTo>
+                    <a:pt x="4809049" y="2567792"/>
+                  </a:lnTo>
+                  <a:lnTo>
+                    <a:pt x="4886683" y="2554627"/>
+                  </a:lnTo>
+                  <a:lnTo>
+                    <a:pt x="4964317" y="2541302"/>
+                  </a:lnTo>
+                  <a:lnTo>
+                    <a:pt x="5041951" y="2527816"/>
+                  </a:lnTo>
+                  <a:lnTo>
+                    <a:pt x="5119585" y="2514166"/>
+                  </a:lnTo>
+                  <a:lnTo>
+                    <a:pt x="5197219" y="2500351"/>
+                  </a:lnTo>
+                  <a:lnTo>
+                    <a:pt x="5274853" y="2486368"/>
+                  </a:lnTo>
+                  <a:lnTo>
+                    <a:pt x="5352487" y="2472215"/>
+                  </a:lnTo>
+                  <a:lnTo>
+                    <a:pt x="5430121" y="2457890"/>
+                  </a:lnTo>
+                  <a:lnTo>
+                    <a:pt x="5507755" y="2443392"/>
+                  </a:lnTo>
+                  <a:lnTo>
+                    <a:pt x="5585389" y="2428717"/>
+                  </a:lnTo>
+                  <a:lnTo>
+                    <a:pt x="5663023" y="2413865"/>
+                  </a:lnTo>
+                  <a:lnTo>
+                    <a:pt x="5740657" y="2398832"/>
+                  </a:lnTo>
+                  <a:lnTo>
+                    <a:pt x="5818291" y="2383617"/>
+                  </a:lnTo>
+                  <a:lnTo>
+                    <a:pt x="5895925" y="2368217"/>
+                  </a:lnTo>
+                  <a:lnTo>
+                    <a:pt x="5973559" y="2352630"/>
+                  </a:lnTo>
+                  <a:lnTo>
+                    <a:pt x="6051193" y="2336855"/>
+                  </a:lnTo>
+                  <a:lnTo>
+                    <a:pt x="6128827" y="2320887"/>
+                  </a:lnTo>
+                  <a:lnTo>
+                    <a:pt x="6206462" y="2304726"/>
+                  </a:lnTo>
+                  <a:lnTo>
+                    <a:pt x="6284096" y="2288369"/>
+                  </a:lnTo>
+                  <a:lnTo>
+                    <a:pt x="6361730" y="2271814"/>
+                  </a:lnTo>
+                  <a:lnTo>
+                    <a:pt x="6439364" y="2255057"/>
+                  </a:lnTo>
+                  <a:lnTo>
+                    <a:pt x="6516998" y="2238097"/>
+                  </a:lnTo>
+                  <a:lnTo>
+                    <a:pt x="6594632" y="2220932"/>
+                  </a:lnTo>
+                  <a:lnTo>
+                    <a:pt x="6672266" y="2203558"/>
+                  </a:lnTo>
+                  <a:lnTo>
+                    <a:pt x="6749900" y="2185973"/>
+                  </a:lnTo>
+                  <a:lnTo>
+                    <a:pt x="6827534" y="2168174"/>
+                  </a:lnTo>
+                  <a:lnTo>
+                    <a:pt x="6905168" y="2150160"/>
+                  </a:lnTo>
+                  <a:lnTo>
+                    <a:pt x="6982802" y="2131927"/>
+                  </a:lnTo>
+                  <a:lnTo>
+                    <a:pt x="7060436" y="2113473"/>
+                  </a:lnTo>
+                  <a:lnTo>
+                    <a:pt x="7138070" y="2094795"/>
+                  </a:lnTo>
+                  <a:lnTo>
+                    <a:pt x="7215704" y="2075891"/>
+                  </a:lnTo>
+                  <a:lnTo>
+                    <a:pt x="7293338" y="2056757"/>
+                  </a:lnTo>
+                  <a:lnTo>
+                    <a:pt x="7370972" y="2037390"/>
+                  </a:lnTo>
+                  <a:lnTo>
+                    <a:pt x="7370972" y="3597845"/>
+                  </a:lnTo>
+                  <a:lnTo>
+                    <a:pt x="7293338" y="3594813"/>
+                  </a:lnTo>
+                  <a:lnTo>
+                    <a:pt x="7215704" y="3591613"/>
+                  </a:lnTo>
+                  <a:lnTo>
+                    <a:pt x="7138070" y="3588235"/>
+                  </a:lnTo>
+                  <a:lnTo>
+                    <a:pt x="7060436" y="3584671"/>
+                  </a:lnTo>
+                  <a:lnTo>
+                    <a:pt x="6982802" y="3580910"/>
+                  </a:lnTo>
+                  <a:lnTo>
+                    <a:pt x="6905168" y="3576941"/>
+                  </a:lnTo>
+                  <a:lnTo>
+                    <a:pt x="6827534" y="3572752"/>
+                  </a:lnTo>
+                  <a:lnTo>
+                    <a:pt x="6749900" y="3568331"/>
+                  </a:lnTo>
+                  <a:lnTo>
+                    <a:pt x="6672266" y="3563665"/>
+                  </a:lnTo>
+                  <a:lnTo>
+                    <a:pt x="6594632" y="3558742"/>
+                  </a:lnTo>
+                  <a:lnTo>
+                    <a:pt x="6516998" y="3553546"/>
+                  </a:lnTo>
+                  <a:lnTo>
+                    <a:pt x="6439364" y="3548062"/>
+                  </a:lnTo>
+                  <a:lnTo>
+                    <a:pt x="6361730" y="3542275"/>
+                  </a:lnTo>
+                  <a:lnTo>
+                    <a:pt x="6284096" y="3536168"/>
+                  </a:lnTo>
+                  <a:lnTo>
+                    <a:pt x="6206462" y="3529723"/>
+                  </a:lnTo>
+                  <a:lnTo>
+                    <a:pt x="6128827" y="3522921"/>
+                  </a:lnTo>
+                  <a:lnTo>
+                    <a:pt x="6051193" y="3515743"/>
+                  </a:lnTo>
+                  <a:lnTo>
+                    <a:pt x="5973559" y="3508167"/>
+                  </a:lnTo>
+                  <a:lnTo>
+                    <a:pt x="5895925" y="3500173"/>
+                  </a:lnTo>
+                  <a:lnTo>
+                    <a:pt x="5818291" y="3491736"/>
+                  </a:lnTo>
+                  <a:lnTo>
+                    <a:pt x="5740657" y="3482832"/>
+                  </a:lnTo>
+                  <a:lnTo>
+                    <a:pt x="5663023" y="3473435"/>
+                  </a:lnTo>
+                  <a:lnTo>
+                    <a:pt x="5585389" y="3463519"/>
+                  </a:lnTo>
+                  <a:lnTo>
+                    <a:pt x="5507755" y="3453053"/>
+                  </a:lnTo>
+                  <a:lnTo>
+                    <a:pt x="5430121" y="3442009"/>
+                  </a:lnTo>
+                  <a:lnTo>
+                    <a:pt x="5352487" y="3430353"/>
+                  </a:lnTo>
+                  <a:lnTo>
+                    <a:pt x="5274853" y="3418053"/>
+                  </a:lnTo>
+                  <a:lnTo>
+                    <a:pt x="5197219" y="3405072"/>
+                  </a:lnTo>
+                  <a:lnTo>
+                    <a:pt x="5119585" y="3391372"/>
+                  </a:lnTo>
+                  <a:lnTo>
+                    <a:pt x="5041951" y="3376915"/>
+                  </a:lnTo>
+                  <a:lnTo>
+                    <a:pt x="4964317" y="3361658"/>
+                  </a:lnTo>
+                  <a:lnTo>
+                    <a:pt x="4886683" y="3345556"/>
+                  </a:lnTo>
+                  <a:lnTo>
+                    <a:pt x="4809049" y="3328563"/>
+                  </a:lnTo>
+                  <a:lnTo>
+                    <a:pt x="4731415" y="3310630"/>
+                  </a:lnTo>
+                  <a:lnTo>
+                    <a:pt x="4653781" y="3291704"/>
+                  </a:lnTo>
+                  <a:lnTo>
+                    <a:pt x="4576147" y="3271732"/>
+                  </a:lnTo>
+                  <a:lnTo>
+                    <a:pt x="4498513" y="3250654"/>
+                  </a:lnTo>
+                  <a:lnTo>
+                    <a:pt x="4420879" y="3228410"/>
+                  </a:lnTo>
+                  <a:lnTo>
+                    <a:pt x="4343244" y="3204935"/>
+                  </a:lnTo>
+                  <a:lnTo>
+                    <a:pt x="4265610" y="3180161"/>
+                  </a:lnTo>
+                  <a:lnTo>
+                    <a:pt x="4187976" y="3154016"/>
+                  </a:lnTo>
+                  <a:lnTo>
+                    <a:pt x="4110342" y="3126424"/>
+                  </a:lnTo>
+                  <a:lnTo>
+                    <a:pt x="4032708" y="3097306"/>
+                  </a:lnTo>
+                  <a:lnTo>
+                    <a:pt x="3955074" y="3066576"/>
+                  </a:lnTo>
+                  <a:lnTo>
+                    <a:pt x="3877440" y="3034146"/>
+                  </a:lnTo>
+                  <a:lnTo>
+                    <a:pt x="3799806" y="2999921"/>
+                  </a:lnTo>
+                  <a:lnTo>
+                    <a:pt x="3722172" y="2963802"/>
+                  </a:lnTo>
+                  <a:lnTo>
+                    <a:pt x="3644538" y="2925685"/>
+                  </a:lnTo>
+                  <a:lnTo>
+                    <a:pt x="3566904" y="2885459"/>
+                  </a:lnTo>
+                  <a:lnTo>
+                    <a:pt x="3489270" y="2843006"/>
+                  </a:lnTo>
+                  <a:lnTo>
+                    <a:pt x="3411636" y="2798205"/>
+                  </a:lnTo>
+                  <a:lnTo>
+                    <a:pt x="3334002" y="2789985"/>
+                  </a:lnTo>
+                  <a:lnTo>
+                    <a:pt x="3256368" y="2800328"/>
+                  </a:lnTo>
+                  <a:lnTo>
+                    <a:pt x="3178734" y="2810547"/>
+                  </a:lnTo>
+                  <a:lnTo>
+                    <a:pt x="3101100" y="2820643"/>
+                  </a:lnTo>
+                  <a:lnTo>
+                    <a:pt x="3023466" y="2830618"/>
+                  </a:lnTo>
+                  <a:lnTo>
+                    <a:pt x="2945832" y="2840474"/>
+                  </a:lnTo>
+                  <a:lnTo>
+                    <a:pt x="2868198" y="2850212"/>
+                  </a:lnTo>
+                  <a:lnTo>
+                    <a:pt x="2790564" y="2859833"/>
+                  </a:lnTo>
+                  <a:lnTo>
+                    <a:pt x="2712930" y="2869338"/>
+                  </a:lnTo>
+                  <a:lnTo>
+                    <a:pt x="2635295" y="2878730"/>
+                  </a:lnTo>
+                  <a:lnTo>
+                    <a:pt x="2557661" y="2888009"/>
+                  </a:lnTo>
+                  <a:lnTo>
+                    <a:pt x="2480027" y="2897176"/>
+                  </a:lnTo>
+                  <a:lnTo>
+                    <a:pt x="2402393" y="2906234"/>
+                  </a:lnTo>
+                  <a:lnTo>
+                    <a:pt x="2324759" y="2915183"/>
+                  </a:lnTo>
+                  <a:lnTo>
+                    <a:pt x="2247125" y="2924025"/>
+                  </a:lnTo>
+                  <a:lnTo>
+                    <a:pt x="2169491" y="2932761"/>
+                  </a:lnTo>
+                  <a:lnTo>
+                    <a:pt x="2091857" y="2941392"/>
+                  </a:lnTo>
+                  <a:lnTo>
+                    <a:pt x="2014223" y="2949920"/>
+                  </a:lnTo>
+                  <a:lnTo>
+                    <a:pt x="1936589" y="2958345"/>
+                  </a:lnTo>
+                  <a:lnTo>
+                    <a:pt x="1858955" y="2966669"/>
+                  </a:lnTo>
+                  <a:lnTo>
+                    <a:pt x="1781321" y="2974894"/>
+                  </a:lnTo>
+                  <a:lnTo>
+                    <a:pt x="1703687" y="2983020"/>
+                  </a:lnTo>
+                  <a:lnTo>
+                    <a:pt x="1626053" y="2991048"/>
+                  </a:lnTo>
+                  <a:lnTo>
+                    <a:pt x="1548419" y="2998981"/>
+                  </a:lnTo>
+                  <a:lnTo>
+                    <a:pt x="1470785" y="3006818"/>
+                  </a:lnTo>
+                  <a:lnTo>
+                    <a:pt x="1393151" y="3014561"/>
+                  </a:lnTo>
+                  <a:lnTo>
+                    <a:pt x="1315517" y="3022211"/>
+                  </a:lnTo>
+                  <a:lnTo>
+                    <a:pt x="1237883" y="3029770"/>
+                  </a:lnTo>
+                  <a:lnTo>
+                    <a:pt x="1160249" y="3037238"/>
+                  </a:lnTo>
+                  <a:lnTo>
+                    <a:pt x="1082615" y="3044617"/>
+                  </a:lnTo>
+                  <a:lnTo>
+                    <a:pt x="1004981" y="3051907"/>
+                  </a:lnTo>
+                  <a:lnTo>
+                    <a:pt x="927346" y="3059109"/>
+                  </a:lnTo>
+                  <a:lnTo>
+                    <a:pt x="849712" y="3066225"/>
+                  </a:lnTo>
+                  <a:lnTo>
+                    <a:pt x="772078" y="3073256"/>
+                  </a:lnTo>
+                  <a:lnTo>
+                    <a:pt x="694444" y="3080203"/>
+                  </a:lnTo>
+                  <a:lnTo>
+                    <a:pt x="616810" y="3087066"/>
+                  </a:lnTo>
+                  <a:lnTo>
+                    <a:pt x="539176" y="3093847"/>
+                  </a:lnTo>
+                  <a:lnTo>
+                    <a:pt x="461542" y="3100547"/>
+                  </a:lnTo>
+                  <a:lnTo>
+                    <a:pt x="383908" y="3107167"/>
+                  </a:lnTo>
+                  <a:lnTo>
+                    <a:pt x="306274" y="3113707"/>
+                  </a:lnTo>
+                  <a:lnTo>
+                    <a:pt x="228640" y="3120168"/>
+                  </a:lnTo>
+                  <a:lnTo>
+                    <a:pt x="151006" y="3126552"/>
+                  </a:lnTo>
+                  <a:lnTo>
+                    <a:pt x="73372" y="3132860"/>
+                  </a:lnTo>
+                  <a:lnTo>
+                    <a:pt x="0" y="3138750"/>
                   </a:lnTo>
                   <a:close/>
                 </a:path>
@@ -3567,258 +3558,249 @@
           </p:nvSpPr>
           <p:spPr>
             <a:xfrm>
-              <a:off x="1921892" y="1896563"/>
-              <a:ext cx="6266597" cy="2777188"/>
+              <a:off x="2135132" y="1896563"/>
+              <a:ext cx="6053358" cy="2779516"/>
             </a:xfrm>
             <a:custGeom>
               <a:avLst/>
               <a:pathLst>
-                <a:path w="6266597" h="2777188">
+                <a:path w="6053358" h="2779516">
                   <a:moveTo>
                     <a:pt x="0" y="0"/>
                   </a:moveTo>
                   <a:lnTo>
-                    <a:pt x="55874" y="126949"/>
-                  </a:lnTo>
-                  <a:lnTo>
-                    <a:pt x="133508" y="294934"/>
-                  </a:lnTo>
-                  <a:lnTo>
-                    <a:pt x="211142" y="454915"/>
-                  </a:lnTo>
-                  <a:lnTo>
-                    <a:pt x="288776" y="607274"/>
-                  </a:lnTo>
-                  <a:lnTo>
-                    <a:pt x="366410" y="752374"/>
-                  </a:lnTo>
-                  <a:lnTo>
-                    <a:pt x="444044" y="890560"/>
-                  </a:lnTo>
-                  <a:lnTo>
-                    <a:pt x="521678" y="1022162"/>
-                  </a:lnTo>
-                  <a:lnTo>
-                    <a:pt x="599312" y="1147494"/>
-                  </a:lnTo>
-                  <a:lnTo>
-                    <a:pt x="676946" y="1266854"/>
-                  </a:lnTo>
-                  <a:lnTo>
-                    <a:pt x="754580" y="1380527"/>
-                  </a:lnTo>
-                  <a:lnTo>
-                    <a:pt x="832214" y="1488784"/>
-                  </a:lnTo>
-                  <a:lnTo>
-                    <a:pt x="909848" y="1591883"/>
-                  </a:lnTo>
-                  <a:lnTo>
-                    <a:pt x="987482" y="1690070"/>
-                  </a:lnTo>
-                  <a:lnTo>
-                    <a:pt x="1065116" y="1783579"/>
-                  </a:lnTo>
-                  <a:lnTo>
-                    <a:pt x="1142750" y="1872632"/>
-                  </a:lnTo>
-                  <a:lnTo>
-                    <a:pt x="1220384" y="1957442"/>
-                  </a:lnTo>
-                  <a:lnTo>
-                    <a:pt x="1298018" y="2038212"/>
-                  </a:lnTo>
-                  <a:lnTo>
-                    <a:pt x="1375653" y="2115133"/>
-                  </a:lnTo>
-                  <a:lnTo>
-                    <a:pt x="1453287" y="2188389"/>
-                  </a:lnTo>
-                  <a:lnTo>
-                    <a:pt x="1530921" y="2258155"/>
-                  </a:lnTo>
-                  <a:lnTo>
-                    <a:pt x="1608555" y="2324597"/>
-                  </a:lnTo>
-                  <a:lnTo>
-                    <a:pt x="1686189" y="2387873"/>
-                  </a:lnTo>
-                  <a:lnTo>
-                    <a:pt x="1763823" y="2448134"/>
-                  </a:lnTo>
-                  <a:lnTo>
-                    <a:pt x="1841457" y="2505524"/>
-                  </a:lnTo>
-                  <a:lnTo>
-                    <a:pt x="1919091" y="2560179"/>
-                  </a:lnTo>
-                  <a:lnTo>
-                    <a:pt x="1996725" y="2612231"/>
-                  </a:lnTo>
-                  <a:lnTo>
-                    <a:pt x="2074359" y="2661802"/>
-                  </a:lnTo>
-                  <a:lnTo>
-                    <a:pt x="2151993" y="2709012"/>
-                  </a:lnTo>
-                  <a:lnTo>
-                    <a:pt x="2229627" y="2753972"/>
-                  </a:lnTo>
-                  <a:lnTo>
-                    <a:pt x="2307261" y="2777188"/>
-                  </a:lnTo>
-                  <a:lnTo>
-                    <a:pt x="2384895" y="2759347"/>
-                  </a:lnTo>
-                  <a:lnTo>
-                    <a:pt x="2462529" y="2741142"/>
-                  </a:lnTo>
-                  <a:lnTo>
-                    <a:pt x="2540163" y="2722566"/>
-                  </a:lnTo>
-                  <a:lnTo>
-                    <a:pt x="2617797" y="2703612"/>
-                  </a:lnTo>
-                  <a:lnTo>
-                    <a:pt x="2695431" y="2684271"/>
-                  </a:lnTo>
-                  <a:lnTo>
-                    <a:pt x="2773065" y="2664537"/>
-                  </a:lnTo>
-                  <a:lnTo>
-                    <a:pt x="2850699" y="2644400"/>
-                  </a:lnTo>
-                  <a:lnTo>
-                    <a:pt x="2928333" y="2623852"/>
-                  </a:lnTo>
-                  <a:lnTo>
-                    <a:pt x="3005967" y="2602886"/>
-                  </a:lnTo>
-                  <a:lnTo>
-                    <a:pt x="3083602" y="2581493"/>
-                  </a:lnTo>
-                  <a:lnTo>
-                    <a:pt x="3161236" y="2559663"/>
-                  </a:lnTo>
-                  <a:lnTo>
-                    <a:pt x="3238870" y="2537389"/>
-                  </a:lnTo>
-                  <a:lnTo>
-                    <a:pt x="3316504" y="2514661"/>
-                  </a:lnTo>
-                  <a:lnTo>
-                    <a:pt x="3394138" y="2491469"/>
-                  </a:lnTo>
-                  <a:lnTo>
-                    <a:pt x="3471772" y="2467805"/>
-                  </a:lnTo>
-                  <a:lnTo>
-                    <a:pt x="3549406" y="2443659"/>
-                  </a:lnTo>
-                  <a:lnTo>
-                    <a:pt x="3627040" y="2419021"/>
-                  </a:lnTo>
-                  <a:lnTo>
-                    <a:pt x="3704674" y="2393880"/>
-                  </a:lnTo>
-                  <a:lnTo>
-                    <a:pt x="3782308" y="2368227"/>
-                  </a:lnTo>
-                  <a:lnTo>
-                    <a:pt x="3859942" y="2342052"/>
-                  </a:lnTo>
-                  <a:lnTo>
-                    <a:pt x="3937576" y="2315343"/>
-                  </a:lnTo>
-                  <a:lnTo>
-                    <a:pt x="4015210" y="2288089"/>
-                  </a:lnTo>
-                  <a:lnTo>
-                    <a:pt x="4092844" y="2260281"/>
-                  </a:lnTo>
-                  <a:lnTo>
-                    <a:pt x="4170478" y="2231905"/>
-                  </a:lnTo>
-                  <a:lnTo>
-                    <a:pt x="4248112" y="2202951"/>
-                  </a:lnTo>
-                  <a:lnTo>
-                    <a:pt x="4325746" y="2173408"/>
-                  </a:lnTo>
-                  <a:lnTo>
-                    <a:pt x="4403380" y="2143262"/>
-                  </a:lnTo>
-                  <a:lnTo>
-                    <a:pt x="4481014" y="2112501"/>
-                  </a:lnTo>
-                  <a:lnTo>
-                    <a:pt x="4558648" y="2081114"/>
-                  </a:lnTo>
-                  <a:lnTo>
-                    <a:pt x="4636282" y="2049087"/>
-                  </a:lnTo>
-                  <a:lnTo>
-                    <a:pt x="4713916" y="2016408"/>
-                  </a:lnTo>
-                  <a:lnTo>
-                    <a:pt x="4791551" y="1983062"/>
-                  </a:lnTo>
-                  <a:lnTo>
-                    <a:pt x="4869185" y="1949037"/>
-                  </a:lnTo>
-                  <a:lnTo>
-                    <a:pt x="4946819" y="1914319"/>
-                  </a:lnTo>
-                  <a:lnTo>
-                    <a:pt x="5024453" y="1878893"/>
-                  </a:lnTo>
-                  <a:lnTo>
-                    <a:pt x="5102087" y="1842745"/>
-                  </a:lnTo>
-                  <a:lnTo>
-                    <a:pt x="5179721" y="1805860"/>
-                  </a:lnTo>
-                  <a:lnTo>
-                    <a:pt x="5257355" y="1768224"/>
-                  </a:lnTo>
-                  <a:lnTo>
-                    <a:pt x="5334989" y="1729821"/>
-                  </a:lnTo>
-                  <a:lnTo>
-                    <a:pt x="5412623" y="1690635"/>
-                  </a:lnTo>
-                  <a:lnTo>
-                    <a:pt x="5490257" y="1650650"/>
-                  </a:lnTo>
-                  <a:lnTo>
-                    <a:pt x="5567891" y="1609851"/>
-                  </a:lnTo>
-                  <a:lnTo>
-                    <a:pt x="5645525" y="1568220"/>
-                  </a:lnTo>
-                  <a:lnTo>
-                    <a:pt x="5723159" y="1525741"/>
-                  </a:lnTo>
-                  <a:lnTo>
-                    <a:pt x="5800793" y="1482396"/>
-                  </a:lnTo>
-                  <a:lnTo>
-                    <a:pt x="5878427" y="1438167"/>
-                  </a:lnTo>
-                  <a:lnTo>
-                    <a:pt x="5956061" y="1393038"/>
-                  </a:lnTo>
-                  <a:lnTo>
-                    <a:pt x="6033695" y="1346988"/>
-                  </a:lnTo>
-                  <a:lnTo>
-                    <a:pt x="6111329" y="1300001"/>
-                  </a:lnTo>
-                  <a:lnTo>
-                    <a:pt x="6188963" y="1252055"/>
-                  </a:lnTo>
-                  <a:lnTo>
-                    <a:pt x="6266597" y="1203133"/>
+                    <a:pt x="75536" y="186612"/>
+                  </a:lnTo>
+                  <a:lnTo>
+                    <a:pt x="153170" y="368349"/>
+                  </a:lnTo>
+                  <a:lnTo>
+                    <a:pt x="230804" y="540557"/>
+                  </a:lnTo>
+                  <a:lnTo>
+                    <a:pt x="308438" y="703736"/>
+                  </a:lnTo>
+                  <a:lnTo>
+                    <a:pt x="386072" y="858358"/>
+                  </a:lnTo>
+                  <a:lnTo>
+                    <a:pt x="463706" y="1004873"/>
+                  </a:lnTo>
+                  <a:lnTo>
+                    <a:pt x="541340" y="1143706"/>
+                  </a:lnTo>
+                  <a:lnTo>
+                    <a:pt x="618974" y="1275259"/>
+                  </a:lnTo>
+                  <a:lnTo>
+                    <a:pt x="696609" y="1399915"/>
+                  </a:lnTo>
+                  <a:lnTo>
+                    <a:pt x="774243" y="1518034"/>
+                  </a:lnTo>
+                  <a:lnTo>
+                    <a:pt x="851877" y="1629959"/>
+                  </a:lnTo>
+                  <a:lnTo>
+                    <a:pt x="929511" y="1736017"/>
+                  </a:lnTo>
+                  <a:lnTo>
+                    <a:pt x="1007145" y="1836513"/>
+                  </a:lnTo>
+                  <a:lnTo>
+                    <a:pt x="1084779" y="1931739"/>
+                  </a:lnTo>
+                  <a:lnTo>
+                    <a:pt x="1162413" y="2021973"/>
+                  </a:lnTo>
+                  <a:lnTo>
+                    <a:pt x="1240047" y="2107475"/>
+                  </a:lnTo>
+                  <a:lnTo>
+                    <a:pt x="1317681" y="2188494"/>
+                  </a:lnTo>
+                  <a:lnTo>
+                    <a:pt x="1395315" y="2265265"/>
+                  </a:lnTo>
+                  <a:lnTo>
+                    <a:pt x="1472949" y="2338011"/>
+                  </a:lnTo>
+                  <a:lnTo>
+                    <a:pt x="1550583" y="2406942"/>
+                  </a:lnTo>
+                  <a:lnTo>
+                    <a:pt x="1628217" y="2472259"/>
+                  </a:lnTo>
+                  <a:lnTo>
+                    <a:pt x="1705851" y="2534151"/>
+                  </a:lnTo>
+                  <a:lnTo>
+                    <a:pt x="1783485" y="2592798"/>
+                  </a:lnTo>
+                  <a:lnTo>
+                    <a:pt x="1861119" y="2648369"/>
+                  </a:lnTo>
+                  <a:lnTo>
+                    <a:pt x="1938753" y="2701027"/>
+                  </a:lnTo>
+                  <a:lnTo>
+                    <a:pt x="2016387" y="2750924"/>
+                  </a:lnTo>
+                  <a:lnTo>
+                    <a:pt x="2094021" y="2779516"/>
+                  </a:lnTo>
+                  <a:lnTo>
+                    <a:pt x="2171655" y="2768921"/>
+                  </a:lnTo>
+                  <a:lnTo>
+                    <a:pt x="2249289" y="2758197"/>
+                  </a:lnTo>
+                  <a:lnTo>
+                    <a:pt x="2326923" y="2747343"/>
+                  </a:lnTo>
+                  <a:lnTo>
+                    <a:pt x="2404558" y="2736357"/>
+                  </a:lnTo>
+                  <a:lnTo>
+                    <a:pt x="2482192" y="2725237"/>
+                  </a:lnTo>
+                  <a:lnTo>
+                    <a:pt x="2559826" y="2713983"/>
+                  </a:lnTo>
+                  <a:lnTo>
+                    <a:pt x="2637460" y="2702592"/>
+                  </a:lnTo>
+                  <a:lnTo>
+                    <a:pt x="2715094" y="2691063"/>
+                  </a:lnTo>
+                  <a:lnTo>
+                    <a:pt x="2792728" y="2679395"/>
+                  </a:lnTo>
+                  <a:lnTo>
+                    <a:pt x="2870362" y="2667584"/>
+                  </a:lnTo>
+                  <a:lnTo>
+                    <a:pt x="2947996" y="2655630"/>
+                  </a:lnTo>
+                  <a:lnTo>
+                    <a:pt x="3025630" y="2643531"/>
+                  </a:lnTo>
+                  <a:lnTo>
+                    <a:pt x="3103264" y="2631286"/>
+                  </a:lnTo>
+                  <a:lnTo>
+                    <a:pt x="3180898" y="2618891"/>
+                  </a:lnTo>
+                  <a:lnTo>
+                    <a:pt x="3258532" y="2606347"/>
+                  </a:lnTo>
+                  <a:lnTo>
+                    <a:pt x="3336166" y="2593650"/>
+                  </a:lnTo>
+                  <a:lnTo>
+                    <a:pt x="3413800" y="2580799"/>
+                  </a:lnTo>
+                  <a:lnTo>
+                    <a:pt x="3491434" y="2567792"/>
+                  </a:lnTo>
+                  <a:lnTo>
+                    <a:pt x="3569068" y="2554627"/>
+                  </a:lnTo>
+                  <a:lnTo>
+                    <a:pt x="3646702" y="2541302"/>
+                  </a:lnTo>
+                  <a:lnTo>
+                    <a:pt x="3724336" y="2527816"/>
+                  </a:lnTo>
+                  <a:lnTo>
+                    <a:pt x="3801970" y="2514166"/>
+                  </a:lnTo>
+                  <a:lnTo>
+                    <a:pt x="3879604" y="2500351"/>
+                  </a:lnTo>
+                  <a:lnTo>
+                    <a:pt x="3957238" y="2486368"/>
+                  </a:lnTo>
+                  <a:lnTo>
+                    <a:pt x="4034872" y="2472215"/>
+                  </a:lnTo>
+                  <a:lnTo>
+                    <a:pt x="4112507" y="2457890"/>
+                  </a:lnTo>
+                  <a:lnTo>
+                    <a:pt x="4190141" y="2443392"/>
+                  </a:lnTo>
+                  <a:lnTo>
+                    <a:pt x="4267775" y="2428717"/>
+                  </a:lnTo>
+                  <a:lnTo>
+                    <a:pt x="4345409" y="2413865"/>
+                  </a:lnTo>
+                  <a:lnTo>
+                    <a:pt x="4423043" y="2398832"/>
+                  </a:lnTo>
+                  <a:lnTo>
+                    <a:pt x="4500677" y="2383617"/>
+                  </a:lnTo>
+                  <a:lnTo>
+                    <a:pt x="4578311" y="2368217"/>
+                  </a:lnTo>
+                  <a:lnTo>
+                    <a:pt x="4655945" y="2352630"/>
+                  </a:lnTo>
+                  <a:lnTo>
+                    <a:pt x="4733579" y="2336855"/>
+                  </a:lnTo>
+                  <a:lnTo>
+                    <a:pt x="4811213" y="2320887"/>
+                  </a:lnTo>
+                  <a:lnTo>
+                    <a:pt x="4888847" y="2304726"/>
+                  </a:lnTo>
+                  <a:lnTo>
+                    <a:pt x="4966481" y="2288369"/>
+                  </a:lnTo>
+                  <a:lnTo>
+                    <a:pt x="5044115" y="2271814"/>
+                  </a:lnTo>
+                  <a:lnTo>
+                    <a:pt x="5121749" y="2255057"/>
+                  </a:lnTo>
+                  <a:lnTo>
+                    <a:pt x="5199383" y="2238097"/>
+                  </a:lnTo>
+                  <a:lnTo>
+                    <a:pt x="5277017" y="2220932"/>
+                  </a:lnTo>
+                  <a:lnTo>
+                    <a:pt x="5354651" y="2203558"/>
+                  </a:lnTo>
+                  <a:lnTo>
+                    <a:pt x="5432285" y="2185973"/>
+                  </a:lnTo>
+                  <a:lnTo>
+                    <a:pt x="5509919" y="2168174"/>
+                  </a:lnTo>
+                  <a:lnTo>
+                    <a:pt x="5587553" y="2150160"/>
+                  </a:lnTo>
+                  <a:lnTo>
+                    <a:pt x="5665187" y="2131927"/>
+                  </a:lnTo>
+                  <a:lnTo>
+                    <a:pt x="5742821" y="2113473"/>
+                  </a:lnTo>
+                  <a:lnTo>
+                    <a:pt x="5820456" y="2094795"/>
+                  </a:lnTo>
+                  <a:lnTo>
+                    <a:pt x="5898090" y="2075891"/>
+                  </a:lnTo>
+                  <a:lnTo>
+                    <a:pt x="5975724" y="2056757"/>
+                  </a:lnTo>
+                  <a:lnTo>
+                    <a:pt x="6053358" y="2037390"/>
                   </a:lnTo>
                 </a:path>
               </a:pathLst>
@@ -3838,300 +3820,300 @@
           </p:nvSpPr>
           <p:spPr>
             <a:xfrm>
-              <a:off x="817517" y="4691237"/>
-              <a:ext cx="7370972" cy="786992"/>
+              <a:off x="817517" y="4686548"/>
+              <a:ext cx="7370972" cy="807860"/>
             </a:xfrm>
             <a:custGeom>
               <a:avLst/>
               <a:pathLst>
-                <a:path w="7370972" h="786992">
+                <a:path w="7370972" h="807860">
                   <a:moveTo>
-                    <a:pt x="7370972" y="786992"/>
+                    <a:pt x="7370972" y="807860"/>
                   </a:moveTo>
                   <a:lnTo>
-                    <a:pt x="7293338" y="783441"/>
-                  </a:lnTo>
-                  <a:lnTo>
-                    <a:pt x="7215704" y="779713"/>
-                  </a:lnTo>
-                  <a:lnTo>
-                    <a:pt x="7138070" y="775797"/>
-                  </a:lnTo>
-                  <a:lnTo>
-                    <a:pt x="7060436" y="771686"/>
-                  </a:lnTo>
-                  <a:lnTo>
-                    <a:pt x="6982802" y="767370"/>
-                  </a:lnTo>
-                  <a:lnTo>
-                    <a:pt x="6905168" y="762837"/>
-                  </a:lnTo>
-                  <a:lnTo>
-                    <a:pt x="6827534" y="758078"/>
-                  </a:lnTo>
-                  <a:lnTo>
-                    <a:pt x="6749900" y="753080"/>
-                  </a:lnTo>
-                  <a:lnTo>
-                    <a:pt x="6672266" y="747832"/>
-                  </a:lnTo>
-                  <a:lnTo>
-                    <a:pt x="6594632" y="742322"/>
-                  </a:lnTo>
-                  <a:lnTo>
-                    <a:pt x="6516998" y="736537"/>
-                  </a:lnTo>
-                  <a:lnTo>
-                    <a:pt x="6439364" y="730461"/>
-                  </a:lnTo>
-                  <a:lnTo>
-                    <a:pt x="6361730" y="724082"/>
-                  </a:lnTo>
-                  <a:lnTo>
-                    <a:pt x="6284096" y="717384"/>
-                  </a:lnTo>
-                  <a:lnTo>
-                    <a:pt x="6206462" y="710350"/>
-                  </a:lnTo>
-                  <a:lnTo>
-                    <a:pt x="6128827" y="702965"/>
-                  </a:lnTo>
-                  <a:lnTo>
-                    <a:pt x="6051193" y="695210"/>
-                  </a:lnTo>
-                  <a:lnTo>
-                    <a:pt x="5973559" y="687067"/>
-                  </a:lnTo>
-                  <a:lnTo>
-                    <a:pt x="5895925" y="678517"/>
-                  </a:lnTo>
-                  <a:lnTo>
-                    <a:pt x="5818291" y="669539"/>
-                  </a:lnTo>
-                  <a:lnTo>
-                    <a:pt x="5740657" y="660112"/>
-                  </a:lnTo>
-                  <a:lnTo>
-                    <a:pt x="5663023" y="650213"/>
-                  </a:lnTo>
-                  <a:lnTo>
-                    <a:pt x="5585389" y="639819"/>
-                  </a:lnTo>
-                  <a:lnTo>
-                    <a:pt x="5507755" y="628905"/>
-                  </a:lnTo>
-                  <a:lnTo>
-                    <a:pt x="5430121" y="617445"/>
-                  </a:lnTo>
-                  <a:lnTo>
-                    <a:pt x="5352487" y="605412"/>
-                  </a:lnTo>
-                  <a:lnTo>
-                    <a:pt x="5274853" y="592777"/>
-                  </a:lnTo>
-                  <a:lnTo>
-                    <a:pt x="5197219" y="579509"/>
-                  </a:lnTo>
-                  <a:lnTo>
-                    <a:pt x="5119585" y="565578"/>
-                  </a:lnTo>
-                  <a:lnTo>
-                    <a:pt x="5041951" y="550950"/>
-                  </a:lnTo>
-                  <a:lnTo>
-                    <a:pt x="4964317" y="535590"/>
-                  </a:lnTo>
-                  <a:lnTo>
-                    <a:pt x="4886683" y="519461"/>
-                  </a:lnTo>
-                  <a:lnTo>
-                    <a:pt x="4809049" y="502526"/>
-                  </a:lnTo>
-                  <a:lnTo>
-                    <a:pt x="4731415" y="484743"/>
-                  </a:lnTo>
-                  <a:lnTo>
-                    <a:pt x="4653781" y="466071"/>
-                  </a:lnTo>
-                  <a:lnTo>
-                    <a:pt x="4576147" y="446464"/>
-                  </a:lnTo>
-                  <a:lnTo>
-                    <a:pt x="4498513" y="425876"/>
-                  </a:lnTo>
-                  <a:lnTo>
-                    <a:pt x="4420879" y="404259"/>
-                  </a:lnTo>
-                  <a:lnTo>
-                    <a:pt x="4343244" y="381560"/>
-                  </a:lnTo>
-                  <a:lnTo>
-                    <a:pt x="4265610" y="357725"/>
-                  </a:lnTo>
-                  <a:lnTo>
-                    <a:pt x="4187976" y="332698"/>
-                  </a:lnTo>
-                  <a:lnTo>
-                    <a:pt x="4110342" y="306419"/>
-                  </a:lnTo>
-                  <a:lnTo>
-                    <a:pt x="4032708" y="278825"/>
-                  </a:lnTo>
-                  <a:lnTo>
-                    <a:pt x="3955074" y="249851"/>
-                  </a:lnTo>
-                  <a:lnTo>
-                    <a:pt x="3877440" y="219427"/>
-                  </a:lnTo>
-                  <a:lnTo>
-                    <a:pt x="3799806" y="187481"/>
-                  </a:lnTo>
-                  <a:lnTo>
-                    <a:pt x="3722172" y="153937"/>
-                  </a:lnTo>
-                  <a:lnTo>
-                    <a:pt x="3644538" y="118714"/>
-                  </a:lnTo>
-                  <a:lnTo>
-                    <a:pt x="3566904" y="81729"/>
-                  </a:lnTo>
-                  <a:lnTo>
-                    <a:pt x="3489270" y="42894"/>
-                  </a:lnTo>
-                  <a:lnTo>
-                    <a:pt x="3411636" y="2116"/>
+                    <a:pt x="7293338" y="804827"/>
+                  </a:lnTo>
+                  <a:lnTo>
+                    <a:pt x="7215704" y="801627"/>
+                  </a:lnTo>
+                  <a:lnTo>
+                    <a:pt x="7138070" y="798250"/>
+                  </a:lnTo>
+                  <a:lnTo>
+                    <a:pt x="7060436" y="794686"/>
+                  </a:lnTo>
+                  <a:lnTo>
+                    <a:pt x="6982802" y="790925"/>
+                  </a:lnTo>
+                  <a:lnTo>
+                    <a:pt x="6905168" y="786955"/>
+                  </a:lnTo>
+                  <a:lnTo>
+                    <a:pt x="6827534" y="782766"/>
+                  </a:lnTo>
+                  <a:lnTo>
+                    <a:pt x="6749900" y="778346"/>
+                  </a:lnTo>
+                  <a:lnTo>
+                    <a:pt x="6672266" y="773680"/>
+                  </a:lnTo>
+                  <a:lnTo>
+                    <a:pt x="6594632" y="768757"/>
+                  </a:lnTo>
+                  <a:lnTo>
+                    <a:pt x="6516998" y="763561"/>
+                  </a:lnTo>
+                  <a:lnTo>
+                    <a:pt x="6439364" y="758077"/>
+                  </a:lnTo>
+                  <a:lnTo>
+                    <a:pt x="6361730" y="752290"/>
+                  </a:lnTo>
+                  <a:lnTo>
+                    <a:pt x="6284096" y="746183"/>
+                  </a:lnTo>
+                  <a:lnTo>
+                    <a:pt x="6206462" y="739737"/>
+                  </a:lnTo>
+                  <a:lnTo>
+                    <a:pt x="6128827" y="732936"/>
+                  </a:lnTo>
+                  <a:lnTo>
+                    <a:pt x="6051193" y="725757"/>
+                  </a:lnTo>
+                  <a:lnTo>
+                    <a:pt x="5973559" y="718182"/>
+                  </a:lnTo>
+                  <a:lnTo>
+                    <a:pt x="5895925" y="710187"/>
+                  </a:lnTo>
+                  <a:lnTo>
+                    <a:pt x="5818291" y="701750"/>
+                  </a:lnTo>
+                  <a:lnTo>
+                    <a:pt x="5740657" y="692846"/>
+                  </a:lnTo>
+                  <a:lnTo>
+                    <a:pt x="5663023" y="683450"/>
+                  </a:lnTo>
+                  <a:lnTo>
+                    <a:pt x="5585389" y="673533"/>
+                  </a:lnTo>
+                  <a:lnTo>
+                    <a:pt x="5507755" y="663068"/>
+                  </a:lnTo>
+                  <a:lnTo>
+                    <a:pt x="5430121" y="652024"/>
+                  </a:lnTo>
+                  <a:lnTo>
+                    <a:pt x="5352487" y="640368"/>
+                  </a:lnTo>
+                  <a:lnTo>
+                    <a:pt x="5274853" y="628068"/>
+                  </a:lnTo>
+                  <a:lnTo>
+                    <a:pt x="5197219" y="615087"/>
+                  </a:lnTo>
+                  <a:lnTo>
+                    <a:pt x="5119585" y="601387"/>
+                  </a:lnTo>
+                  <a:lnTo>
+                    <a:pt x="5041951" y="586930"/>
+                  </a:lnTo>
+                  <a:lnTo>
+                    <a:pt x="4964317" y="571672"/>
+                  </a:lnTo>
+                  <a:lnTo>
+                    <a:pt x="4886683" y="555570"/>
+                  </a:lnTo>
+                  <a:lnTo>
+                    <a:pt x="4809049" y="538578"/>
+                  </a:lnTo>
+                  <a:lnTo>
+                    <a:pt x="4731415" y="520645"/>
+                  </a:lnTo>
+                  <a:lnTo>
+                    <a:pt x="4653781" y="501719"/>
+                  </a:lnTo>
+                  <a:lnTo>
+                    <a:pt x="4576147" y="481747"/>
+                  </a:lnTo>
+                  <a:lnTo>
+                    <a:pt x="4498513" y="460669"/>
+                  </a:lnTo>
+                  <a:lnTo>
+                    <a:pt x="4420879" y="438425"/>
+                  </a:lnTo>
+                  <a:lnTo>
+                    <a:pt x="4343244" y="414949"/>
+                  </a:lnTo>
+                  <a:lnTo>
+                    <a:pt x="4265610" y="390175"/>
+                  </a:lnTo>
+                  <a:lnTo>
+                    <a:pt x="4187976" y="364030"/>
+                  </a:lnTo>
+                  <a:lnTo>
+                    <a:pt x="4110342" y="336439"/>
+                  </a:lnTo>
+                  <a:lnTo>
+                    <a:pt x="4032708" y="307320"/>
+                  </a:lnTo>
+                  <a:lnTo>
+                    <a:pt x="3955074" y="276591"/>
+                  </a:lnTo>
+                  <a:lnTo>
+                    <a:pt x="3877440" y="244160"/>
+                  </a:lnTo>
+                  <a:lnTo>
+                    <a:pt x="3799806" y="209936"/>
+                  </a:lnTo>
+                  <a:lnTo>
+                    <a:pt x="3722172" y="173817"/>
+                  </a:lnTo>
+                  <a:lnTo>
+                    <a:pt x="3644538" y="135700"/>
+                  </a:lnTo>
+                  <a:lnTo>
+                    <a:pt x="3566904" y="95473"/>
+                  </a:lnTo>
+                  <a:lnTo>
+                    <a:pt x="3489270" y="53021"/>
+                  </a:lnTo>
+                  <a:lnTo>
+                    <a:pt x="3411636" y="8220"/>
                   </a:lnTo>
                   <a:lnTo>
                     <a:pt x="3334002" y="0"/>
                   </a:lnTo>
                   <a:lnTo>
-                    <a:pt x="3256368" y="17135"/>
-                  </a:lnTo>
-                  <a:lnTo>
-                    <a:pt x="3178734" y="33929"/>
-                  </a:lnTo>
-                  <a:lnTo>
-                    <a:pt x="3101100" y="50387"/>
-                  </a:lnTo>
-                  <a:lnTo>
-                    <a:pt x="3023466" y="66516"/>
-                  </a:lnTo>
-                  <a:lnTo>
-                    <a:pt x="2945832" y="82323"/>
-                  </a:lnTo>
-                  <a:lnTo>
-                    <a:pt x="2868198" y="97815"/>
-                  </a:lnTo>
-                  <a:lnTo>
-                    <a:pt x="2790564" y="112997"/>
-                  </a:lnTo>
-                  <a:lnTo>
-                    <a:pt x="2712930" y="127876"/>
-                  </a:lnTo>
-                  <a:lnTo>
-                    <a:pt x="2635295" y="142457"/>
-                  </a:lnTo>
-                  <a:lnTo>
-                    <a:pt x="2557661" y="156748"/>
-                  </a:lnTo>
-                  <a:lnTo>
-                    <a:pt x="2480027" y="170753"/>
-                  </a:lnTo>
-                  <a:lnTo>
-                    <a:pt x="2402393" y="184478"/>
-                  </a:lnTo>
-                  <a:lnTo>
-                    <a:pt x="2324759" y="197929"/>
-                  </a:lnTo>
-                  <a:lnTo>
-                    <a:pt x="2247125" y="211112"/>
-                  </a:lnTo>
-                  <a:lnTo>
-                    <a:pt x="2169491" y="224031"/>
-                  </a:lnTo>
-                  <a:lnTo>
-                    <a:pt x="2091857" y="236693"/>
-                  </a:lnTo>
-                  <a:lnTo>
-                    <a:pt x="2014223" y="249101"/>
-                  </a:lnTo>
-                  <a:lnTo>
-                    <a:pt x="1936589" y="261261"/>
-                  </a:lnTo>
-                  <a:lnTo>
-                    <a:pt x="1858955" y="273179"/>
-                  </a:lnTo>
-                  <a:lnTo>
-                    <a:pt x="1781321" y="284859"/>
-                  </a:lnTo>
-                  <a:lnTo>
-                    <a:pt x="1703687" y="296305"/>
-                  </a:lnTo>
-                  <a:lnTo>
-                    <a:pt x="1626053" y="307523"/>
-                  </a:lnTo>
-                  <a:lnTo>
-                    <a:pt x="1548419" y="318517"/>
-                  </a:lnTo>
-                  <a:lnTo>
-                    <a:pt x="1470785" y="329291"/>
-                  </a:lnTo>
-                  <a:lnTo>
-                    <a:pt x="1393151" y="339850"/>
-                  </a:lnTo>
-                  <a:lnTo>
-                    <a:pt x="1315517" y="350198"/>
-                  </a:lnTo>
-                  <a:lnTo>
-                    <a:pt x="1237883" y="360339"/>
-                  </a:lnTo>
-                  <a:lnTo>
-                    <a:pt x="1160249" y="370278"/>
-                  </a:lnTo>
-                  <a:lnTo>
-                    <a:pt x="1082615" y="380018"/>
-                  </a:lnTo>
-                  <a:lnTo>
-                    <a:pt x="1004981" y="389564"/>
-                  </a:lnTo>
-                  <a:lnTo>
-                    <a:pt x="927346" y="398919"/>
-                  </a:lnTo>
-                  <a:lnTo>
-                    <a:pt x="849712" y="408088"/>
-                  </a:lnTo>
-                  <a:lnTo>
-                    <a:pt x="772078" y="417073"/>
-                  </a:lnTo>
-                  <a:lnTo>
-                    <a:pt x="694444" y="425879"/>
-                  </a:lnTo>
-                  <a:lnTo>
-                    <a:pt x="616810" y="434509"/>
-                  </a:lnTo>
-                  <a:lnTo>
-                    <a:pt x="539176" y="442966"/>
-                  </a:lnTo>
-                  <a:lnTo>
-                    <a:pt x="461542" y="451255"/>
-                  </a:lnTo>
-                  <a:lnTo>
-                    <a:pt x="383908" y="459378"/>
-                  </a:lnTo>
-                  <a:lnTo>
-                    <a:pt x="306274" y="467339"/>
-                  </a:lnTo>
-                  <a:lnTo>
-                    <a:pt x="228640" y="475140"/>
-                  </a:lnTo>
-                  <a:lnTo>
-                    <a:pt x="151006" y="482786"/>
-                  </a:lnTo>
-                  <a:lnTo>
-                    <a:pt x="73372" y="490280"/>
-                  </a:lnTo>
-                  <a:lnTo>
-                    <a:pt x="0" y="497220"/>
+                    <a:pt x="3256368" y="10342"/>
+                  </a:lnTo>
+                  <a:lnTo>
+                    <a:pt x="3178734" y="20561"/>
+                  </a:lnTo>
+                  <a:lnTo>
+                    <a:pt x="3101100" y="30658"/>
+                  </a:lnTo>
+                  <a:lnTo>
+                    <a:pt x="3023466" y="40633"/>
+                  </a:lnTo>
+                  <a:lnTo>
+                    <a:pt x="2945832" y="50489"/>
+                  </a:lnTo>
+                  <a:lnTo>
+                    <a:pt x="2868198" y="60227"/>
+                  </a:lnTo>
+                  <a:lnTo>
+                    <a:pt x="2790564" y="69847"/>
+                  </a:lnTo>
+                  <a:lnTo>
+                    <a:pt x="2712930" y="79353"/>
+                  </a:lnTo>
+                  <a:lnTo>
+                    <a:pt x="2635295" y="88744"/>
+                  </a:lnTo>
+                  <a:lnTo>
+                    <a:pt x="2557661" y="98023"/>
+                  </a:lnTo>
+                  <a:lnTo>
+                    <a:pt x="2480027" y="107191"/>
+                  </a:lnTo>
+                  <a:lnTo>
+                    <a:pt x="2402393" y="116249"/>
+                  </a:lnTo>
+                  <a:lnTo>
+                    <a:pt x="2324759" y="125198"/>
+                  </a:lnTo>
+                  <a:lnTo>
+                    <a:pt x="2247125" y="134040"/>
+                  </a:lnTo>
+                  <a:lnTo>
+                    <a:pt x="2169491" y="142776"/>
+                  </a:lnTo>
+                  <a:lnTo>
+                    <a:pt x="2091857" y="151407"/>
+                  </a:lnTo>
+                  <a:lnTo>
+                    <a:pt x="2014223" y="159934"/>
+                  </a:lnTo>
+                  <a:lnTo>
+                    <a:pt x="1936589" y="168360"/>
+                  </a:lnTo>
+                  <a:lnTo>
+                    <a:pt x="1858955" y="176684"/>
+                  </a:lnTo>
+                  <a:lnTo>
+                    <a:pt x="1781321" y="184909"/>
+                  </a:lnTo>
+                  <a:lnTo>
+                    <a:pt x="1703687" y="193035"/>
+                  </a:lnTo>
+                  <a:lnTo>
+                    <a:pt x="1626053" y="201063"/>
+                  </a:lnTo>
+                  <a:lnTo>
+                    <a:pt x="1548419" y="208995"/>
+                  </a:lnTo>
+                  <a:lnTo>
+                    <a:pt x="1470785" y="216833"/>
+                  </a:lnTo>
+                  <a:lnTo>
+                    <a:pt x="1393151" y="224576"/>
+                  </a:lnTo>
+                  <a:lnTo>
+                    <a:pt x="1315517" y="232226"/>
+                  </a:lnTo>
+                  <a:lnTo>
+                    <a:pt x="1237883" y="239785"/>
+                  </a:lnTo>
+                  <a:lnTo>
+                    <a:pt x="1160249" y="247253"/>
+                  </a:lnTo>
+                  <a:lnTo>
+                    <a:pt x="1082615" y="254631"/>
+                  </a:lnTo>
+                  <a:lnTo>
+                    <a:pt x="1004981" y="261921"/>
+                  </a:lnTo>
+                  <a:lnTo>
+                    <a:pt x="927346" y="269124"/>
+                  </a:lnTo>
+                  <a:lnTo>
+                    <a:pt x="849712" y="276240"/>
+                  </a:lnTo>
+                  <a:lnTo>
+                    <a:pt x="772078" y="283271"/>
+                  </a:lnTo>
+                  <a:lnTo>
+                    <a:pt x="694444" y="290218"/>
+                  </a:lnTo>
+                  <a:lnTo>
+                    <a:pt x="616810" y="297081"/>
+                  </a:lnTo>
+                  <a:lnTo>
+                    <a:pt x="539176" y="303862"/>
+                  </a:lnTo>
+                  <a:lnTo>
+                    <a:pt x="461542" y="310562"/>
+                  </a:lnTo>
+                  <a:lnTo>
+                    <a:pt x="383908" y="317181"/>
+                  </a:lnTo>
+                  <a:lnTo>
+                    <a:pt x="306274" y="323721"/>
+                  </a:lnTo>
+                  <a:lnTo>
+                    <a:pt x="228640" y="330183"/>
+                  </a:lnTo>
+                  <a:lnTo>
+                    <a:pt x="151006" y="336567"/>
+                  </a:lnTo>
+                  <a:lnTo>
+                    <a:pt x="73372" y="342875"/>
+                  </a:lnTo>
+                  <a:lnTo>
+                    <a:pt x="0" y="348765"/>
                   </a:lnTo>
                 </a:path>
               </a:pathLst>
@@ -4151,300 +4133,300 @@
           </p:nvSpPr>
           <p:spPr>
             <a:xfrm>
-              <a:off x="817517" y="3924949"/>
-              <a:ext cx="7370972" cy="1207292"/>
+              <a:off x="817517" y="3385348"/>
+              <a:ext cx="7370972" cy="1866346"/>
             </a:xfrm>
             <a:custGeom>
               <a:avLst/>
               <a:pathLst>
-                <a:path w="7370972" h="1207292">
+                <a:path w="7370972" h="1866346">
                   <a:moveTo>
                     <a:pt x="0" y="0"/>
                   </a:moveTo>
                   <a:lnTo>
-                    <a:pt x="73372" y="21845"/>
-                  </a:lnTo>
-                  <a:lnTo>
-                    <a:pt x="151006" y="44632"/>
-                  </a:lnTo>
-                  <a:lnTo>
-                    <a:pt x="228640" y="67094"/>
-                  </a:lnTo>
-                  <a:lnTo>
-                    <a:pt x="306274" y="89236"/>
-                  </a:lnTo>
-                  <a:lnTo>
-                    <a:pt x="383908" y="111064"/>
-                  </a:lnTo>
-                  <a:lnTo>
-                    <a:pt x="461542" y="132582"/>
-                  </a:lnTo>
-                  <a:lnTo>
-                    <a:pt x="539176" y="153793"/>
-                  </a:lnTo>
-                  <a:lnTo>
-                    <a:pt x="616810" y="174703"/>
-                  </a:lnTo>
-                  <a:lnTo>
-                    <a:pt x="694444" y="195315"/>
-                  </a:lnTo>
-                  <a:lnTo>
-                    <a:pt x="772078" y="215635"/>
-                  </a:lnTo>
-                  <a:lnTo>
-                    <a:pt x="849712" y="235665"/>
-                  </a:lnTo>
-                  <a:lnTo>
-                    <a:pt x="927346" y="255411"/>
-                  </a:lnTo>
-                  <a:lnTo>
-                    <a:pt x="1004981" y="274876"/>
-                  </a:lnTo>
-                  <a:lnTo>
-                    <a:pt x="1082615" y="294064"/>
-                  </a:lnTo>
-                  <a:lnTo>
-                    <a:pt x="1160249" y="312979"/>
-                  </a:lnTo>
-                  <a:lnTo>
-                    <a:pt x="1237883" y="331625"/>
-                  </a:lnTo>
-                  <a:lnTo>
-                    <a:pt x="1315517" y="350006"/>
-                  </a:lnTo>
-                  <a:lnTo>
-                    <a:pt x="1393151" y="368126"/>
-                  </a:lnTo>
-                  <a:lnTo>
-                    <a:pt x="1470785" y="385988"/>
-                  </a:lnTo>
-                  <a:lnTo>
-                    <a:pt x="1548419" y="403596"/>
-                  </a:lnTo>
-                  <a:lnTo>
-                    <a:pt x="1626053" y="420954"/>
-                  </a:lnTo>
-                  <a:lnTo>
-                    <a:pt x="1703687" y="438064"/>
-                  </a:lnTo>
-                  <a:lnTo>
-                    <a:pt x="1781321" y="454932"/>
-                  </a:lnTo>
-                  <a:lnTo>
-                    <a:pt x="1858955" y="471560"/>
-                  </a:lnTo>
-                  <a:lnTo>
-                    <a:pt x="1936589" y="487951"/>
-                  </a:lnTo>
-                  <a:lnTo>
-                    <a:pt x="2014223" y="504109"/>
-                  </a:lnTo>
-                  <a:lnTo>
-                    <a:pt x="2091857" y="520037"/>
-                  </a:lnTo>
-                  <a:lnTo>
-                    <a:pt x="2169491" y="535739"/>
-                  </a:lnTo>
-                  <a:lnTo>
-                    <a:pt x="2247125" y="551218"/>
-                  </a:lnTo>
-                  <a:lnTo>
-                    <a:pt x="2324759" y="566476"/>
-                  </a:lnTo>
-                  <a:lnTo>
-                    <a:pt x="2402393" y="581518"/>
-                  </a:lnTo>
-                  <a:lnTo>
-                    <a:pt x="2480027" y="596345"/>
-                  </a:lnTo>
-                  <a:lnTo>
-                    <a:pt x="2557661" y="610962"/>
-                  </a:lnTo>
-                  <a:lnTo>
-                    <a:pt x="2635295" y="625371"/>
-                  </a:lnTo>
-                  <a:lnTo>
-                    <a:pt x="2712930" y="639575"/>
-                  </a:lnTo>
-                  <a:lnTo>
-                    <a:pt x="2790564" y="653577"/>
-                  </a:lnTo>
-                  <a:lnTo>
-                    <a:pt x="2868198" y="667380"/>
-                  </a:lnTo>
-                  <a:lnTo>
-                    <a:pt x="2945832" y="680987"/>
-                  </a:lnTo>
-                  <a:lnTo>
-                    <a:pt x="3023466" y="694400"/>
-                  </a:lnTo>
-                  <a:lnTo>
-                    <a:pt x="3101100" y="707622"/>
-                  </a:lnTo>
-                  <a:lnTo>
-                    <a:pt x="3178734" y="720657"/>
-                  </a:lnTo>
-                  <a:lnTo>
-                    <a:pt x="3256368" y="733506"/>
-                  </a:lnTo>
-                  <a:lnTo>
-                    <a:pt x="3334002" y="746172"/>
-                  </a:lnTo>
-                  <a:lnTo>
-                    <a:pt x="3411636" y="758659"/>
-                  </a:lnTo>
-                  <a:lnTo>
-                    <a:pt x="3489270" y="770967"/>
-                  </a:lnTo>
-                  <a:lnTo>
-                    <a:pt x="3566904" y="783101"/>
-                  </a:lnTo>
-                  <a:lnTo>
-                    <a:pt x="3644538" y="795062"/>
-                  </a:lnTo>
-                  <a:lnTo>
-                    <a:pt x="3722172" y="806853"/>
-                  </a:lnTo>
-                  <a:lnTo>
-                    <a:pt x="3799806" y="818477"/>
-                  </a:lnTo>
-                  <a:lnTo>
-                    <a:pt x="3877440" y="829935"/>
-                  </a:lnTo>
-                  <a:lnTo>
-                    <a:pt x="3955074" y="841230"/>
-                  </a:lnTo>
-                  <a:lnTo>
-                    <a:pt x="4032708" y="852364"/>
-                  </a:lnTo>
-                  <a:lnTo>
-                    <a:pt x="4110342" y="863341"/>
-                  </a:lnTo>
-                  <a:lnTo>
-                    <a:pt x="4187976" y="874161"/>
-                  </a:lnTo>
-                  <a:lnTo>
-                    <a:pt x="4265610" y="884827"/>
-                  </a:lnTo>
-                  <a:lnTo>
-                    <a:pt x="4343244" y="895342"/>
-                  </a:lnTo>
-                  <a:lnTo>
-                    <a:pt x="4420879" y="905707"/>
-                  </a:lnTo>
-                  <a:lnTo>
-                    <a:pt x="4498513" y="915924"/>
-                  </a:lnTo>
-                  <a:lnTo>
-                    <a:pt x="4576147" y="925997"/>
-                  </a:lnTo>
-                  <a:lnTo>
-                    <a:pt x="4653781" y="935926"/>
-                  </a:lnTo>
-                  <a:lnTo>
-                    <a:pt x="4731415" y="945714"/>
-                  </a:lnTo>
-                  <a:lnTo>
-                    <a:pt x="4809049" y="955363"/>
-                  </a:lnTo>
-                  <a:lnTo>
-                    <a:pt x="4886683" y="964874"/>
-                  </a:lnTo>
-                  <a:lnTo>
-                    <a:pt x="4964317" y="974251"/>
-                  </a:lnTo>
-                  <a:lnTo>
-                    <a:pt x="5041951" y="983494"/>
-                  </a:lnTo>
-                  <a:lnTo>
-                    <a:pt x="5119585" y="992605"/>
-                  </a:lnTo>
-                  <a:lnTo>
-                    <a:pt x="5197219" y="1001587"/>
-                  </a:lnTo>
-                  <a:lnTo>
-                    <a:pt x="5274853" y="1010442"/>
-                  </a:lnTo>
-                  <a:lnTo>
-                    <a:pt x="5352487" y="1019170"/>
-                  </a:lnTo>
-                  <a:lnTo>
-                    <a:pt x="5430121" y="1027774"/>
-                  </a:lnTo>
-                  <a:lnTo>
-                    <a:pt x="5507755" y="1036256"/>
-                  </a:lnTo>
-                  <a:lnTo>
-                    <a:pt x="5585389" y="1044618"/>
-                  </a:lnTo>
-                  <a:lnTo>
-                    <a:pt x="5663023" y="1052860"/>
-                  </a:lnTo>
-                  <a:lnTo>
-                    <a:pt x="5740657" y="1060985"/>
-                  </a:lnTo>
-                  <a:lnTo>
-                    <a:pt x="5818291" y="1068995"/>
-                  </a:lnTo>
-                  <a:lnTo>
-                    <a:pt x="5895925" y="1076891"/>
-                  </a:lnTo>
-                  <a:lnTo>
-                    <a:pt x="5973559" y="1084674"/>
-                  </a:lnTo>
-                  <a:lnTo>
-                    <a:pt x="6051193" y="1092347"/>
-                  </a:lnTo>
-                  <a:lnTo>
-                    <a:pt x="6128827" y="1099911"/>
-                  </a:lnTo>
-                  <a:lnTo>
-                    <a:pt x="6206462" y="1107367"/>
-                  </a:lnTo>
-                  <a:lnTo>
-                    <a:pt x="6284096" y="1114717"/>
-                  </a:lnTo>
-                  <a:lnTo>
-                    <a:pt x="6361730" y="1121962"/>
-                  </a:lnTo>
-                  <a:lnTo>
-                    <a:pt x="6439364" y="1129105"/>
-                  </a:lnTo>
-                  <a:lnTo>
-                    <a:pt x="6516998" y="1136146"/>
-                  </a:lnTo>
-                  <a:lnTo>
-                    <a:pt x="6594632" y="1143087"/>
-                  </a:lnTo>
-                  <a:lnTo>
-                    <a:pt x="6672266" y="1149929"/>
-                  </a:lnTo>
-                  <a:lnTo>
-                    <a:pt x="6749900" y="1156674"/>
-                  </a:lnTo>
-                  <a:lnTo>
-                    <a:pt x="6827534" y="1163323"/>
-                  </a:lnTo>
-                  <a:lnTo>
-                    <a:pt x="6905168" y="1169877"/>
-                  </a:lnTo>
-                  <a:lnTo>
-                    <a:pt x="6982802" y="1176339"/>
-                  </a:lnTo>
-                  <a:lnTo>
-                    <a:pt x="7060436" y="1182708"/>
-                  </a:lnTo>
-                  <a:lnTo>
-                    <a:pt x="7138070" y="1188987"/>
-                  </a:lnTo>
-                  <a:lnTo>
-                    <a:pt x="7215704" y="1195176"/>
-                  </a:lnTo>
-                  <a:lnTo>
-                    <a:pt x="7293338" y="1201278"/>
-                  </a:lnTo>
-                  <a:lnTo>
-                    <a:pt x="7370972" y="1207292"/>
+                    <a:pt x="73372" y="42343"/>
+                  </a:lnTo>
+                  <a:lnTo>
+                    <a:pt x="151006" y="86218"/>
+                  </a:lnTo>
+                  <a:lnTo>
+                    <a:pt x="228640" y="129187"/>
+                  </a:lnTo>
+                  <a:lnTo>
+                    <a:pt x="306274" y="171267"/>
+                  </a:lnTo>
+                  <a:lnTo>
+                    <a:pt x="383908" y="212476"/>
+                  </a:lnTo>
+                  <a:lnTo>
+                    <a:pt x="461542" y="252833"/>
+                  </a:lnTo>
+                  <a:lnTo>
+                    <a:pt x="539176" y="292356"/>
+                  </a:lnTo>
+                  <a:lnTo>
+                    <a:pt x="616810" y="331061"/>
+                  </a:lnTo>
+                  <a:lnTo>
+                    <a:pt x="694444" y="368966"/>
+                  </a:lnTo>
+                  <a:lnTo>
+                    <a:pt x="772078" y="406087"/>
+                  </a:lnTo>
+                  <a:lnTo>
+                    <a:pt x="849712" y="442440"/>
+                  </a:lnTo>
+                  <a:lnTo>
+                    <a:pt x="927346" y="478041"/>
+                  </a:lnTo>
+                  <a:lnTo>
+                    <a:pt x="1004981" y="512906"/>
+                  </a:lnTo>
+                  <a:lnTo>
+                    <a:pt x="1082615" y="547050"/>
+                  </a:lnTo>
+                  <a:lnTo>
+                    <a:pt x="1160249" y="580488"/>
+                  </a:lnTo>
+                  <a:lnTo>
+                    <a:pt x="1237883" y="613234"/>
+                  </a:lnTo>
+                  <a:lnTo>
+                    <a:pt x="1315517" y="645303"/>
+                  </a:lnTo>
+                  <a:lnTo>
+                    <a:pt x="1393151" y="676709"/>
+                  </a:lnTo>
+                  <a:lnTo>
+                    <a:pt x="1470785" y="707465"/>
+                  </a:lnTo>
+                  <a:lnTo>
+                    <a:pt x="1548419" y="737585"/>
+                  </a:lnTo>
+                  <a:lnTo>
+                    <a:pt x="1626053" y="767083"/>
+                  </a:lnTo>
+                  <a:lnTo>
+                    <a:pt x="1703687" y="795970"/>
+                  </a:lnTo>
+                  <a:lnTo>
+                    <a:pt x="1781321" y="824260"/>
+                  </a:lnTo>
+                  <a:lnTo>
+                    <a:pt x="1858955" y="851964"/>
+                  </a:lnTo>
+                  <a:lnTo>
+                    <a:pt x="1936589" y="879096"/>
+                  </a:lnTo>
+                  <a:lnTo>
+                    <a:pt x="2014223" y="905667"/>
+                  </a:lnTo>
+                  <a:lnTo>
+                    <a:pt x="2091857" y="931688"/>
+                  </a:lnTo>
+                  <a:lnTo>
+                    <a:pt x="2169491" y="957171"/>
+                  </a:lnTo>
+                  <a:lnTo>
+                    <a:pt x="2247125" y="982127"/>
+                  </a:lnTo>
+                  <a:lnTo>
+                    <a:pt x="2324759" y="1006566"/>
+                  </a:lnTo>
+                  <a:lnTo>
+                    <a:pt x="2402393" y="1030501"/>
+                  </a:lnTo>
+                  <a:lnTo>
+                    <a:pt x="2480027" y="1053940"/>
+                  </a:lnTo>
+                  <a:lnTo>
+                    <a:pt x="2557661" y="1076895"/>
+                  </a:lnTo>
+                  <a:lnTo>
+                    <a:pt x="2635295" y="1099375"/>
+                  </a:lnTo>
+                  <a:lnTo>
+                    <a:pt x="2712930" y="1121390"/>
+                  </a:lnTo>
+                  <a:lnTo>
+                    <a:pt x="2790564" y="1142949"/>
+                  </a:lnTo>
+                  <a:lnTo>
+                    <a:pt x="2868198" y="1164063"/>
+                  </a:lnTo>
+                  <a:lnTo>
+                    <a:pt x="2945832" y="1184740"/>
+                  </a:lnTo>
+                  <a:lnTo>
+                    <a:pt x="3023466" y="1204990"/>
+                  </a:lnTo>
+                  <a:lnTo>
+                    <a:pt x="3101100" y="1224820"/>
+                  </a:lnTo>
+                  <a:lnTo>
+                    <a:pt x="3178734" y="1244241"/>
+                  </a:lnTo>
+                  <a:lnTo>
+                    <a:pt x="3256368" y="1263260"/>
+                  </a:lnTo>
+                  <a:lnTo>
+                    <a:pt x="3334002" y="1281885"/>
+                  </a:lnTo>
+                  <a:lnTo>
+                    <a:pt x="3411636" y="1300126"/>
+                  </a:lnTo>
+                  <a:lnTo>
+                    <a:pt x="3489270" y="1317989"/>
+                  </a:lnTo>
+                  <a:lnTo>
+                    <a:pt x="3566904" y="1335483"/>
+                  </a:lnTo>
+                  <a:lnTo>
+                    <a:pt x="3644538" y="1352615"/>
+                  </a:lnTo>
+                  <a:lnTo>
+                    <a:pt x="3722172" y="1369392"/>
+                  </a:lnTo>
+                  <a:lnTo>
+                    <a:pt x="3799806" y="1385823"/>
+                  </a:lnTo>
+                  <a:lnTo>
+                    <a:pt x="3877440" y="1401914"/>
+                  </a:lnTo>
+                  <a:lnTo>
+                    <a:pt x="3955074" y="1417672"/>
+                  </a:lnTo>
+                  <a:lnTo>
+                    <a:pt x="4032708" y="1433104"/>
+                  </a:lnTo>
+                  <a:lnTo>
+                    <a:pt x="4110342" y="1448217"/>
+                  </a:lnTo>
+                  <a:lnTo>
+                    <a:pt x="4187976" y="1463017"/>
+                  </a:lnTo>
+                  <a:lnTo>
+                    <a:pt x="4265610" y="1477512"/>
+                  </a:lnTo>
+                  <a:lnTo>
+                    <a:pt x="4343244" y="1491706"/>
+                  </a:lnTo>
+                  <a:lnTo>
+                    <a:pt x="4420879" y="1505607"/>
+                  </a:lnTo>
+                  <a:lnTo>
+                    <a:pt x="4498513" y="1519221"/>
+                  </a:lnTo>
+                  <a:lnTo>
+                    <a:pt x="4576147" y="1532553"/>
+                  </a:lnTo>
+                  <a:lnTo>
+                    <a:pt x="4653781" y="1545609"/>
+                  </a:lnTo>
+                  <a:lnTo>
+                    <a:pt x="4731415" y="1558395"/>
+                  </a:lnTo>
+                  <a:lnTo>
+                    <a:pt x="4809049" y="1570917"/>
+                  </a:lnTo>
+                  <a:lnTo>
+                    <a:pt x="4886683" y="1583180"/>
+                  </a:lnTo>
+                  <a:lnTo>
+                    <a:pt x="4964317" y="1595189"/>
+                  </a:lnTo>
+                  <a:lnTo>
+                    <a:pt x="5041951" y="1606950"/>
+                  </a:lnTo>
+                  <a:lnTo>
+                    <a:pt x="5119585" y="1618468"/>
+                  </a:lnTo>
+                  <a:lnTo>
+                    <a:pt x="5197219" y="1629747"/>
+                  </a:lnTo>
+                  <a:lnTo>
+                    <a:pt x="5274853" y="1640793"/>
+                  </a:lnTo>
+                  <a:lnTo>
+                    <a:pt x="5352487" y="1651611"/>
+                  </a:lnTo>
+                  <a:lnTo>
+                    <a:pt x="5430121" y="1662205"/>
+                  </a:lnTo>
+                  <a:lnTo>
+                    <a:pt x="5507755" y="1672580"/>
+                  </a:lnTo>
+                  <a:lnTo>
+                    <a:pt x="5585389" y="1682740"/>
+                  </a:lnTo>
+                  <a:lnTo>
+                    <a:pt x="5663023" y="1692690"/>
+                  </a:lnTo>
+                  <a:lnTo>
+                    <a:pt x="5740657" y="1702435"/>
+                  </a:lnTo>
+                  <a:lnTo>
+                    <a:pt x="5818291" y="1711977"/>
+                  </a:lnTo>
+                  <a:lnTo>
+                    <a:pt x="5895925" y="1721323"/>
+                  </a:lnTo>
+                  <a:lnTo>
+                    <a:pt x="5973559" y="1730475"/>
+                  </a:lnTo>
+                  <a:lnTo>
+                    <a:pt x="6051193" y="1739438"/>
+                  </a:lnTo>
+                  <a:lnTo>
+                    <a:pt x="6128827" y="1748216"/>
+                  </a:lnTo>
+                  <a:lnTo>
+                    <a:pt x="6206462" y="1756812"/>
+                  </a:lnTo>
+                  <a:lnTo>
+                    <a:pt x="6284096" y="1765230"/>
+                  </a:lnTo>
+                  <a:lnTo>
+                    <a:pt x="6361730" y="1773474"/>
+                  </a:lnTo>
+                  <a:lnTo>
+                    <a:pt x="6439364" y="1781548"/>
+                  </a:lnTo>
+                  <a:lnTo>
+                    <a:pt x="6516998" y="1789455"/>
+                  </a:lnTo>
+                  <a:lnTo>
+                    <a:pt x="6594632" y="1797198"/>
+                  </a:lnTo>
+                  <a:lnTo>
+                    <a:pt x="6672266" y="1804781"/>
+                  </a:lnTo>
+                  <a:lnTo>
+                    <a:pt x="6749900" y="1812207"/>
+                  </a:lnTo>
+                  <a:lnTo>
+                    <a:pt x="6827534" y="1819480"/>
+                  </a:lnTo>
+                  <a:lnTo>
+                    <a:pt x="6905168" y="1826602"/>
+                  </a:lnTo>
+                  <a:lnTo>
+                    <a:pt x="6982802" y="1833577"/>
+                  </a:lnTo>
+                  <a:lnTo>
+                    <a:pt x="7060436" y="1840407"/>
+                  </a:lnTo>
+                  <a:lnTo>
+                    <a:pt x="7138070" y="1847097"/>
+                  </a:lnTo>
+                  <a:lnTo>
+                    <a:pt x="7215704" y="1853648"/>
+                  </a:lnTo>
+                  <a:lnTo>
+                    <a:pt x="7293338" y="1860063"/>
+                  </a:lnTo>
+                  <a:lnTo>
+                    <a:pt x="7370972" y="1866346"/>
                   </a:lnTo>
                 </a:path>
               </a:pathLst>

--- a/docs/plots/carbo/jx_carbo_linsubhr_ratio_aki2.pptx
+++ b/docs/plots/carbo/jx_carbo_linsubhr_ratio_aki2.pptx
@@ -3003,536 +3003,545 @@
           <p:spPr>
             <a:xfrm>
               <a:off x="817517" y="1896563"/>
-              <a:ext cx="7370972" cy="3597845"/>
+              <a:ext cx="7370972" cy="3581666"/>
             </a:xfrm>
             <a:custGeom>
               <a:avLst/>
               <a:pathLst>
-                <a:path w="7370972" h="3597845">
+                <a:path w="7370972" h="3581666">
                   <a:moveTo>
-                    <a:pt x="1317614" y="0"/>
+                    <a:pt x="1104374" y="0"/>
                   </a:moveTo>
                   <a:lnTo>
-                    <a:pt x="1393151" y="186612"/>
-                  </a:lnTo>
-                  <a:lnTo>
-                    <a:pt x="1470785" y="368349"/>
-                  </a:lnTo>
-                  <a:lnTo>
-                    <a:pt x="1548419" y="540557"/>
-                  </a:lnTo>
-                  <a:lnTo>
-                    <a:pt x="1626053" y="703736"/>
-                  </a:lnTo>
-                  <a:lnTo>
-                    <a:pt x="1703687" y="858358"/>
-                  </a:lnTo>
-                  <a:lnTo>
-                    <a:pt x="1781321" y="1004873"/>
-                  </a:lnTo>
-                  <a:lnTo>
-                    <a:pt x="1858955" y="1143706"/>
-                  </a:lnTo>
-                  <a:lnTo>
-                    <a:pt x="1936589" y="1275259"/>
-                  </a:lnTo>
-                  <a:lnTo>
-                    <a:pt x="2014223" y="1399915"/>
-                  </a:lnTo>
-                  <a:lnTo>
-                    <a:pt x="2091857" y="1518034"/>
-                  </a:lnTo>
-                  <a:lnTo>
-                    <a:pt x="2169491" y="1629959"/>
-                  </a:lnTo>
-                  <a:lnTo>
-                    <a:pt x="2247125" y="1736017"/>
-                  </a:lnTo>
-                  <a:lnTo>
-                    <a:pt x="2324759" y="1836513"/>
-                  </a:lnTo>
-                  <a:lnTo>
-                    <a:pt x="2402393" y="1931739"/>
-                  </a:lnTo>
-                  <a:lnTo>
-                    <a:pt x="2480027" y="2021973"/>
-                  </a:lnTo>
-                  <a:lnTo>
-                    <a:pt x="2557661" y="2107475"/>
-                  </a:lnTo>
-                  <a:lnTo>
-                    <a:pt x="2635295" y="2188494"/>
-                  </a:lnTo>
-                  <a:lnTo>
-                    <a:pt x="2712930" y="2265265"/>
-                  </a:lnTo>
-                  <a:lnTo>
-                    <a:pt x="2790564" y="2338011"/>
-                  </a:lnTo>
-                  <a:lnTo>
-                    <a:pt x="2868198" y="2406942"/>
-                  </a:lnTo>
-                  <a:lnTo>
-                    <a:pt x="2945832" y="2472259"/>
-                  </a:lnTo>
-                  <a:lnTo>
-                    <a:pt x="3023466" y="2534151"/>
-                  </a:lnTo>
-                  <a:lnTo>
-                    <a:pt x="3101100" y="2592798"/>
-                  </a:lnTo>
-                  <a:lnTo>
-                    <a:pt x="3178734" y="2648369"/>
-                  </a:lnTo>
-                  <a:lnTo>
-                    <a:pt x="3256368" y="2701027"/>
-                  </a:lnTo>
-                  <a:lnTo>
-                    <a:pt x="3334002" y="2750924"/>
-                  </a:lnTo>
-                  <a:lnTo>
-                    <a:pt x="3411636" y="2779516"/>
-                  </a:lnTo>
-                  <a:lnTo>
-                    <a:pt x="3489270" y="2768921"/>
-                  </a:lnTo>
-                  <a:lnTo>
-                    <a:pt x="3566904" y="2758197"/>
-                  </a:lnTo>
-                  <a:lnTo>
-                    <a:pt x="3644538" y="2747343"/>
-                  </a:lnTo>
-                  <a:lnTo>
-                    <a:pt x="3722172" y="2736357"/>
-                  </a:lnTo>
-                  <a:lnTo>
-                    <a:pt x="3799806" y="2725237"/>
-                  </a:lnTo>
-                  <a:lnTo>
-                    <a:pt x="3877440" y="2713983"/>
-                  </a:lnTo>
-                  <a:lnTo>
-                    <a:pt x="3955074" y="2702592"/>
-                  </a:lnTo>
-                  <a:lnTo>
-                    <a:pt x="4032708" y="2691063"/>
-                  </a:lnTo>
-                  <a:lnTo>
-                    <a:pt x="4110342" y="2679395"/>
-                  </a:lnTo>
-                  <a:lnTo>
-                    <a:pt x="4187976" y="2667584"/>
-                  </a:lnTo>
-                  <a:lnTo>
-                    <a:pt x="4265610" y="2655630"/>
-                  </a:lnTo>
-                  <a:lnTo>
-                    <a:pt x="4343244" y="2643531"/>
-                  </a:lnTo>
-                  <a:lnTo>
-                    <a:pt x="4420879" y="2631286"/>
-                  </a:lnTo>
-                  <a:lnTo>
-                    <a:pt x="4498513" y="2618891"/>
-                  </a:lnTo>
-                  <a:lnTo>
-                    <a:pt x="4576147" y="2606347"/>
-                  </a:lnTo>
-                  <a:lnTo>
-                    <a:pt x="4653781" y="2593650"/>
-                  </a:lnTo>
-                  <a:lnTo>
-                    <a:pt x="4731415" y="2580799"/>
-                  </a:lnTo>
-                  <a:lnTo>
-                    <a:pt x="4809049" y="2567792"/>
-                  </a:lnTo>
-                  <a:lnTo>
-                    <a:pt x="4886683" y="2554627"/>
-                  </a:lnTo>
-                  <a:lnTo>
-                    <a:pt x="4964317" y="2541302"/>
-                  </a:lnTo>
-                  <a:lnTo>
-                    <a:pt x="5041951" y="2527816"/>
-                  </a:lnTo>
-                  <a:lnTo>
-                    <a:pt x="5119585" y="2514166"/>
-                  </a:lnTo>
-                  <a:lnTo>
-                    <a:pt x="5197219" y="2500351"/>
-                  </a:lnTo>
-                  <a:lnTo>
-                    <a:pt x="5274853" y="2486368"/>
-                  </a:lnTo>
-                  <a:lnTo>
-                    <a:pt x="5352487" y="2472215"/>
-                  </a:lnTo>
-                  <a:lnTo>
-                    <a:pt x="5430121" y="2457890"/>
-                  </a:lnTo>
-                  <a:lnTo>
-                    <a:pt x="5507755" y="2443392"/>
-                  </a:lnTo>
-                  <a:lnTo>
-                    <a:pt x="5585389" y="2428717"/>
-                  </a:lnTo>
-                  <a:lnTo>
-                    <a:pt x="5663023" y="2413865"/>
-                  </a:lnTo>
-                  <a:lnTo>
-                    <a:pt x="5740657" y="2398832"/>
-                  </a:lnTo>
-                  <a:lnTo>
-                    <a:pt x="5818291" y="2383617"/>
-                  </a:lnTo>
-                  <a:lnTo>
-                    <a:pt x="5895925" y="2368217"/>
-                  </a:lnTo>
-                  <a:lnTo>
-                    <a:pt x="5973559" y="2352630"/>
-                  </a:lnTo>
-                  <a:lnTo>
-                    <a:pt x="6051193" y="2336855"/>
-                  </a:lnTo>
-                  <a:lnTo>
-                    <a:pt x="6128827" y="2320887"/>
-                  </a:lnTo>
-                  <a:lnTo>
-                    <a:pt x="6206462" y="2304726"/>
-                  </a:lnTo>
-                  <a:lnTo>
-                    <a:pt x="6284096" y="2288369"/>
-                  </a:lnTo>
-                  <a:lnTo>
-                    <a:pt x="6361730" y="2271814"/>
-                  </a:lnTo>
-                  <a:lnTo>
-                    <a:pt x="6439364" y="2255057"/>
-                  </a:lnTo>
-                  <a:lnTo>
-                    <a:pt x="6516998" y="2238097"/>
-                  </a:lnTo>
-                  <a:lnTo>
-                    <a:pt x="6594632" y="2220932"/>
-                  </a:lnTo>
-                  <a:lnTo>
-                    <a:pt x="6672266" y="2203558"/>
-                  </a:lnTo>
-                  <a:lnTo>
-                    <a:pt x="6749900" y="2185973"/>
-                  </a:lnTo>
-                  <a:lnTo>
-                    <a:pt x="6827534" y="2168174"/>
-                  </a:lnTo>
-                  <a:lnTo>
-                    <a:pt x="6905168" y="2150160"/>
-                  </a:lnTo>
-                  <a:lnTo>
-                    <a:pt x="6982802" y="2131927"/>
-                  </a:lnTo>
-                  <a:lnTo>
-                    <a:pt x="7060436" y="2113473"/>
-                  </a:lnTo>
-                  <a:lnTo>
-                    <a:pt x="7138070" y="2094795"/>
-                  </a:lnTo>
-                  <a:lnTo>
-                    <a:pt x="7215704" y="2075891"/>
-                  </a:lnTo>
-                  <a:lnTo>
-                    <a:pt x="7293338" y="2056757"/>
-                  </a:lnTo>
-                  <a:lnTo>
-                    <a:pt x="7370972" y="2037390"/>
-                  </a:lnTo>
-                  <a:lnTo>
-                    <a:pt x="7370972" y="3597845"/>
-                  </a:lnTo>
-                  <a:lnTo>
-                    <a:pt x="7293338" y="3594813"/>
-                  </a:lnTo>
-                  <a:lnTo>
-                    <a:pt x="7215704" y="3591613"/>
-                  </a:lnTo>
-                  <a:lnTo>
-                    <a:pt x="7138070" y="3588235"/>
-                  </a:lnTo>
-                  <a:lnTo>
-                    <a:pt x="7060436" y="3584671"/>
-                  </a:lnTo>
-                  <a:lnTo>
-                    <a:pt x="6982802" y="3580910"/>
-                  </a:lnTo>
-                  <a:lnTo>
-                    <a:pt x="6905168" y="3576941"/>
-                  </a:lnTo>
-                  <a:lnTo>
-                    <a:pt x="6827534" y="3572752"/>
-                  </a:lnTo>
-                  <a:lnTo>
-                    <a:pt x="6749900" y="3568331"/>
-                  </a:lnTo>
-                  <a:lnTo>
-                    <a:pt x="6672266" y="3563665"/>
-                  </a:lnTo>
-                  <a:lnTo>
-                    <a:pt x="6594632" y="3558742"/>
-                  </a:lnTo>
-                  <a:lnTo>
-                    <a:pt x="6516998" y="3553546"/>
-                  </a:lnTo>
-                  <a:lnTo>
-                    <a:pt x="6439364" y="3548062"/>
-                  </a:lnTo>
-                  <a:lnTo>
-                    <a:pt x="6361730" y="3542275"/>
-                  </a:lnTo>
-                  <a:lnTo>
-                    <a:pt x="6284096" y="3536168"/>
-                  </a:lnTo>
-                  <a:lnTo>
-                    <a:pt x="6206462" y="3529723"/>
-                  </a:lnTo>
-                  <a:lnTo>
-                    <a:pt x="6128827" y="3522921"/>
-                  </a:lnTo>
-                  <a:lnTo>
-                    <a:pt x="6051193" y="3515743"/>
-                  </a:lnTo>
-                  <a:lnTo>
-                    <a:pt x="5973559" y="3508167"/>
-                  </a:lnTo>
-                  <a:lnTo>
-                    <a:pt x="5895925" y="3500173"/>
-                  </a:lnTo>
-                  <a:lnTo>
-                    <a:pt x="5818291" y="3491736"/>
-                  </a:lnTo>
-                  <a:lnTo>
-                    <a:pt x="5740657" y="3482832"/>
-                  </a:lnTo>
-                  <a:lnTo>
-                    <a:pt x="5663023" y="3473435"/>
-                  </a:lnTo>
-                  <a:lnTo>
-                    <a:pt x="5585389" y="3463519"/>
-                  </a:lnTo>
-                  <a:lnTo>
-                    <a:pt x="5507755" y="3453053"/>
-                  </a:lnTo>
-                  <a:lnTo>
-                    <a:pt x="5430121" y="3442009"/>
-                  </a:lnTo>
-                  <a:lnTo>
-                    <a:pt x="5352487" y="3430353"/>
-                  </a:lnTo>
-                  <a:lnTo>
-                    <a:pt x="5274853" y="3418053"/>
-                  </a:lnTo>
-                  <a:lnTo>
-                    <a:pt x="5197219" y="3405072"/>
-                  </a:lnTo>
-                  <a:lnTo>
-                    <a:pt x="5119585" y="3391372"/>
-                  </a:lnTo>
-                  <a:lnTo>
-                    <a:pt x="5041951" y="3376915"/>
-                  </a:lnTo>
-                  <a:lnTo>
-                    <a:pt x="4964317" y="3361658"/>
-                  </a:lnTo>
-                  <a:lnTo>
-                    <a:pt x="4886683" y="3345556"/>
-                  </a:lnTo>
-                  <a:lnTo>
-                    <a:pt x="4809049" y="3328563"/>
-                  </a:lnTo>
-                  <a:lnTo>
-                    <a:pt x="4731415" y="3310630"/>
-                  </a:lnTo>
-                  <a:lnTo>
-                    <a:pt x="4653781" y="3291704"/>
-                  </a:lnTo>
-                  <a:lnTo>
-                    <a:pt x="4576147" y="3271732"/>
-                  </a:lnTo>
-                  <a:lnTo>
-                    <a:pt x="4498513" y="3250654"/>
-                  </a:lnTo>
-                  <a:lnTo>
-                    <a:pt x="4420879" y="3228410"/>
-                  </a:lnTo>
-                  <a:lnTo>
-                    <a:pt x="4343244" y="3204935"/>
-                  </a:lnTo>
-                  <a:lnTo>
-                    <a:pt x="4265610" y="3180161"/>
-                  </a:lnTo>
-                  <a:lnTo>
-                    <a:pt x="4187976" y="3154016"/>
-                  </a:lnTo>
-                  <a:lnTo>
-                    <a:pt x="4110342" y="3126424"/>
-                  </a:lnTo>
-                  <a:lnTo>
-                    <a:pt x="4032708" y="3097306"/>
-                  </a:lnTo>
-                  <a:lnTo>
-                    <a:pt x="3955074" y="3066576"/>
-                  </a:lnTo>
-                  <a:lnTo>
-                    <a:pt x="3877440" y="3034146"/>
-                  </a:lnTo>
-                  <a:lnTo>
-                    <a:pt x="3799806" y="2999921"/>
-                  </a:lnTo>
-                  <a:lnTo>
-                    <a:pt x="3722172" y="2963802"/>
-                  </a:lnTo>
-                  <a:lnTo>
-                    <a:pt x="3644538" y="2925685"/>
-                  </a:lnTo>
-                  <a:lnTo>
-                    <a:pt x="3566904" y="2885459"/>
-                  </a:lnTo>
-                  <a:lnTo>
-                    <a:pt x="3489270" y="2843006"/>
-                  </a:lnTo>
-                  <a:lnTo>
-                    <a:pt x="3411636" y="2798205"/>
-                  </a:lnTo>
-                  <a:lnTo>
-                    <a:pt x="3334002" y="2789985"/>
-                  </a:lnTo>
-                  <a:lnTo>
-                    <a:pt x="3256368" y="2800328"/>
-                  </a:lnTo>
-                  <a:lnTo>
-                    <a:pt x="3178734" y="2810547"/>
-                  </a:lnTo>
-                  <a:lnTo>
-                    <a:pt x="3101100" y="2820643"/>
-                  </a:lnTo>
-                  <a:lnTo>
-                    <a:pt x="3023466" y="2830618"/>
-                  </a:lnTo>
-                  <a:lnTo>
-                    <a:pt x="2945832" y="2840474"/>
-                  </a:lnTo>
-                  <a:lnTo>
-                    <a:pt x="2868198" y="2850212"/>
-                  </a:lnTo>
-                  <a:lnTo>
-                    <a:pt x="2790564" y="2859833"/>
-                  </a:lnTo>
-                  <a:lnTo>
-                    <a:pt x="2712930" y="2869338"/>
-                  </a:lnTo>
-                  <a:lnTo>
-                    <a:pt x="2635295" y="2878730"/>
-                  </a:lnTo>
-                  <a:lnTo>
-                    <a:pt x="2557661" y="2888009"/>
-                  </a:lnTo>
-                  <a:lnTo>
-                    <a:pt x="2480027" y="2897176"/>
-                  </a:lnTo>
-                  <a:lnTo>
-                    <a:pt x="2402393" y="2906234"/>
-                  </a:lnTo>
-                  <a:lnTo>
-                    <a:pt x="2324759" y="2915183"/>
-                  </a:lnTo>
-                  <a:lnTo>
-                    <a:pt x="2247125" y="2924025"/>
-                  </a:lnTo>
-                  <a:lnTo>
-                    <a:pt x="2169491" y="2932761"/>
-                  </a:lnTo>
-                  <a:lnTo>
-                    <a:pt x="2091857" y="2941392"/>
-                  </a:lnTo>
-                  <a:lnTo>
-                    <a:pt x="2014223" y="2949920"/>
-                  </a:lnTo>
-                  <a:lnTo>
-                    <a:pt x="1936589" y="2958345"/>
-                  </a:lnTo>
-                  <a:lnTo>
-                    <a:pt x="1858955" y="2966669"/>
-                  </a:lnTo>
-                  <a:lnTo>
-                    <a:pt x="1781321" y="2974894"/>
-                  </a:lnTo>
-                  <a:lnTo>
-                    <a:pt x="1703687" y="2983020"/>
-                  </a:lnTo>
-                  <a:lnTo>
-                    <a:pt x="1626053" y="2991048"/>
-                  </a:lnTo>
-                  <a:lnTo>
-                    <a:pt x="1548419" y="2998981"/>
-                  </a:lnTo>
-                  <a:lnTo>
-                    <a:pt x="1470785" y="3006818"/>
-                  </a:lnTo>
-                  <a:lnTo>
-                    <a:pt x="1393151" y="3014561"/>
-                  </a:lnTo>
-                  <a:lnTo>
-                    <a:pt x="1315517" y="3022211"/>
-                  </a:lnTo>
-                  <a:lnTo>
-                    <a:pt x="1237883" y="3029770"/>
-                  </a:lnTo>
-                  <a:lnTo>
-                    <a:pt x="1160249" y="3037238"/>
-                  </a:lnTo>
-                  <a:lnTo>
-                    <a:pt x="1082615" y="3044617"/>
-                  </a:lnTo>
-                  <a:lnTo>
-                    <a:pt x="1004981" y="3051907"/>
-                  </a:lnTo>
-                  <a:lnTo>
-                    <a:pt x="927346" y="3059109"/>
-                  </a:lnTo>
-                  <a:lnTo>
-                    <a:pt x="849712" y="3066225"/>
-                  </a:lnTo>
-                  <a:lnTo>
-                    <a:pt x="772078" y="3073256"/>
-                  </a:lnTo>
-                  <a:lnTo>
-                    <a:pt x="694444" y="3080203"/>
-                  </a:lnTo>
-                  <a:lnTo>
-                    <a:pt x="616810" y="3087066"/>
-                  </a:lnTo>
-                  <a:lnTo>
-                    <a:pt x="539176" y="3093847"/>
-                  </a:lnTo>
-                  <a:lnTo>
-                    <a:pt x="461542" y="3100547"/>
-                  </a:lnTo>
-                  <a:lnTo>
-                    <a:pt x="383908" y="3107167"/>
-                  </a:lnTo>
-                  <a:lnTo>
-                    <a:pt x="306274" y="3113707"/>
-                  </a:lnTo>
-                  <a:lnTo>
-                    <a:pt x="228640" y="3120168"/>
-                  </a:lnTo>
-                  <a:lnTo>
-                    <a:pt x="151006" y="3126552"/>
-                  </a:lnTo>
-                  <a:lnTo>
-                    <a:pt x="73372" y="3132860"/>
-                  </a:lnTo>
-                  <a:lnTo>
-                    <a:pt x="0" y="3138750"/>
+                    <a:pt x="1160249" y="126949"/>
+                  </a:lnTo>
+                  <a:lnTo>
+                    <a:pt x="1237883" y="294934"/>
+                  </a:lnTo>
+                  <a:lnTo>
+                    <a:pt x="1315517" y="454915"/>
+                  </a:lnTo>
+                  <a:lnTo>
+                    <a:pt x="1393151" y="607274"/>
+                  </a:lnTo>
+                  <a:lnTo>
+                    <a:pt x="1470785" y="752374"/>
+                  </a:lnTo>
+                  <a:lnTo>
+                    <a:pt x="1548419" y="890560"/>
+                  </a:lnTo>
+                  <a:lnTo>
+                    <a:pt x="1626053" y="1022162"/>
+                  </a:lnTo>
+                  <a:lnTo>
+                    <a:pt x="1703687" y="1147494"/>
+                  </a:lnTo>
+                  <a:lnTo>
+                    <a:pt x="1781321" y="1266854"/>
+                  </a:lnTo>
+                  <a:lnTo>
+                    <a:pt x="1858955" y="1380527"/>
+                  </a:lnTo>
+                  <a:lnTo>
+                    <a:pt x="1936589" y="1488784"/>
+                  </a:lnTo>
+                  <a:lnTo>
+                    <a:pt x="2014223" y="1591883"/>
+                  </a:lnTo>
+                  <a:lnTo>
+                    <a:pt x="2091857" y="1690070"/>
+                  </a:lnTo>
+                  <a:lnTo>
+                    <a:pt x="2169491" y="1783579"/>
+                  </a:lnTo>
+                  <a:lnTo>
+                    <a:pt x="2247125" y="1872632"/>
+                  </a:lnTo>
+                  <a:lnTo>
+                    <a:pt x="2324759" y="1957442"/>
+                  </a:lnTo>
+                  <a:lnTo>
+                    <a:pt x="2402393" y="2038212"/>
+                  </a:lnTo>
+                  <a:lnTo>
+                    <a:pt x="2480027" y="2115133"/>
+                  </a:lnTo>
+                  <a:lnTo>
+                    <a:pt x="2557661" y="2188389"/>
+                  </a:lnTo>
+                  <a:lnTo>
+                    <a:pt x="2635295" y="2258155"/>
+                  </a:lnTo>
+                  <a:lnTo>
+                    <a:pt x="2712930" y="2324597"/>
+                  </a:lnTo>
+                  <a:lnTo>
+                    <a:pt x="2790564" y="2387873"/>
+                  </a:lnTo>
+                  <a:lnTo>
+                    <a:pt x="2868198" y="2448134"/>
+                  </a:lnTo>
+                  <a:lnTo>
+                    <a:pt x="2945832" y="2505524"/>
+                  </a:lnTo>
+                  <a:lnTo>
+                    <a:pt x="3023466" y="2560179"/>
+                  </a:lnTo>
+                  <a:lnTo>
+                    <a:pt x="3101100" y="2612231"/>
+                  </a:lnTo>
+                  <a:lnTo>
+                    <a:pt x="3178734" y="2661802"/>
+                  </a:lnTo>
+                  <a:lnTo>
+                    <a:pt x="3256368" y="2709012"/>
+                  </a:lnTo>
+                  <a:lnTo>
+                    <a:pt x="3334002" y="2753972"/>
+                  </a:lnTo>
+                  <a:lnTo>
+                    <a:pt x="3411636" y="2777188"/>
+                  </a:lnTo>
+                  <a:lnTo>
+                    <a:pt x="3489270" y="2759347"/>
+                  </a:lnTo>
+                  <a:lnTo>
+                    <a:pt x="3566904" y="2741142"/>
+                  </a:lnTo>
+                  <a:lnTo>
+                    <a:pt x="3644538" y="2722566"/>
+                  </a:lnTo>
+                  <a:lnTo>
+                    <a:pt x="3722172" y="2703612"/>
+                  </a:lnTo>
+                  <a:lnTo>
+                    <a:pt x="3799806" y="2684271"/>
+                  </a:lnTo>
+                  <a:lnTo>
+                    <a:pt x="3877440" y="2664537"/>
+                  </a:lnTo>
+                  <a:lnTo>
+                    <a:pt x="3955074" y="2644400"/>
+                  </a:lnTo>
+                  <a:lnTo>
+                    <a:pt x="4032708" y="2623852"/>
+                  </a:lnTo>
+                  <a:lnTo>
+                    <a:pt x="4110342" y="2602886"/>
+                  </a:lnTo>
+                  <a:lnTo>
+                    <a:pt x="4187976" y="2581493"/>
+                  </a:lnTo>
+                  <a:lnTo>
+                    <a:pt x="4265610" y="2559663"/>
+                  </a:lnTo>
+                  <a:lnTo>
+                    <a:pt x="4343244" y="2537389"/>
+                  </a:lnTo>
+                  <a:lnTo>
+                    <a:pt x="4420879" y="2514661"/>
+                  </a:lnTo>
+                  <a:lnTo>
+                    <a:pt x="4498513" y="2491469"/>
+                  </a:lnTo>
+                  <a:lnTo>
+                    <a:pt x="4576147" y="2467805"/>
+                  </a:lnTo>
+                  <a:lnTo>
+                    <a:pt x="4653781" y="2443659"/>
+                  </a:lnTo>
+                  <a:lnTo>
+                    <a:pt x="4731415" y="2419021"/>
+                  </a:lnTo>
+                  <a:lnTo>
+                    <a:pt x="4809049" y="2393880"/>
+                  </a:lnTo>
+                  <a:lnTo>
+                    <a:pt x="4886683" y="2368227"/>
+                  </a:lnTo>
+                  <a:lnTo>
+                    <a:pt x="4964317" y="2342052"/>
+                  </a:lnTo>
+                  <a:lnTo>
+                    <a:pt x="5041951" y="2315343"/>
+                  </a:lnTo>
+                  <a:lnTo>
+                    <a:pt x="5119585" y="2288089"/>
+                  </a:lnTo>
+                  <a:lnTo>
+                    <a:pt x="5197219" y="2260281"/>
+                  </a:lnTo>
+                  <a:lnTo>
+                    <a:pt x="5274853" y="2231905"/>
+                  </a:lnTo>
+                  <a:lnTo>
+                    <a:pt x="5352487" y="2202951"/>
+                  </a:lnTo>
+                  <a:lnTo>
+                    <a:pt x="5430121" y="2173408"/>
+                  </a:lnTo>
+                  <a:lnTo>
+                    <a:pt x="5507755" y="2143262"/>
+                  </a:lnTo>
+                  <a:lnTo>
+                    <a:pt x="5585389" y="2112501"/>
+                  </a:lnTo>
+                  <a:lnTo>
+                    <a:pt x="5663023" y="2081114"/>
+                  </a:lnTo>
+                  <a:lnTo>
+                    <a:pt x="5740657" y="2049087"/>
+                  </a:lnTo>
+                  <a:lnTo>
+                    <a:pt x="5818291" y="2016408"/>
+                  </a:lnTo>
+                  <a:lnTo>
+                    <a:pt x="5895925" y="1983062"/>
+                  </a:lnTo>
+                  <a:lnTo>
+                    <a:pt x="5973559" y="1949037"/>
+                  </a:lnTo>
+                  <a:lnTo>
+                    <a:pt x="6051193" y="1914319"/>
+                  </a:lnTo>
+                  <a:lnTo>
+                    <a:pt x="6128827" y="1878893"/>
+                  </a:lnTo>
+                  <a:lnTo>
+                    <a:pt x="6206462" y="1842745"/>
+                  </a:lnTo>
+                  <a:lnTo>
+                    <a:pt x="6284096" y="1805860"/>
+                  </a:lnTo>
+                  <a:lnTo>
+                    <a:pt x="6361730" y="1768224"/>
+                  </a:lnTo>
+                  <a:lnTo>
+                    <a:pt x="6439364" y="1729821"/>
+                  </a:lnTo>
+                  <a:lnTo>
+                    <a:pt x="6516998" y="1690635"/>
+                  </a:lnTo>
+                  <a:lnTo>
+                    <a:pt x="6594632" y="1650650"/>
+                  </a:lnTo>
+                  <a:lnTo>
+                    <a:pt x="6672266" y="1609851"/>
+                  </a:lnTo>
+                  <a:lnTo>
+                    <a:pt x="6749900" y="1568220"/>
+                  </a:lnTo>
+                  <a:lnTo>
+                    <a:pt x="6827534" y="1525741"/>
+                  </a:lnTo>
+                  <a:lnTo>
+                    <a:pt x="6905168" y="1482396"/>
+                  </a:lnTo>
+                  <a:lnTo>
+                    <a:pt x="6982802" y="1438167"/>
+                  </a:lnTo>
+                  <a:lnTo>
+                    <a:pt x="7060436" y="1393038"/>
+                  </a:lnTo>
+                  <a:lnTo>
+                    <a:pt x="7138070" y="1346988"/>
+                  </a:lnTo>
+                  <a:lnTo>
+                    <a:pt x="7215704" y="1300001"/>
+                  </a:lnTo>
+                  <a:lnTo>
+                    <a:pt x="7293338" y="1252055"/>
+                  </a:lnTo>
+                  <a:lnTo>
+                    <a:pt x="7370972" y="1203133"/>
+                  </a:lnTo>
+                  <a:lnTo>
+                    <a:pt x="7370972" y="3581666"/>
+                  </a:lnTo>
+                  <a:lnTo>
+                    <a:pt x="7293338" y="3578115"/>
+                  </a:lnTo>
+                  <a:lnTo>
+                    <a:pt x="7215704" y="3574386"/>
+                  </a:lnTo>
+                  <a:lnTo>
+                    <a:pt x="7138070" y="3570471"/>
+                  </a:lnTo>
+                  <a:lnTo>
+                    <a:pt x="7060436" y="3566360"/>
+                  </a:lnTo>
+                  <a:lnTo>
+                    <a:pt x="6982802" y="3562044"/>
+                  </a:lnTo>
+                  <a:lnTo>
+                    <a:pt x="6905168" y="3557511"/>
+                  </a:lnTo>
+                  <a:lnTo>
+                    <a:pt x="6827534" y="3552751"/>
+                  </a:lnTo>
+                  <a:lnTo>
+                    <a:pt x="6749900" y="3547754"/>
+                  </a:lnTo>
+                  <a:lnTo>
+                    <a:pt x="6672266" y="3542506"/>
+                  </a:lnTo>
+                  <a:lnTo>
+                    <a:pt x="6594632" y="3536996"/>
+                  </a:lnTo>
+                  <a:lnTo>
+                    <a:pt x="6516998" y="3531210"/>
+                  </a:lnTo>
+                  <a:lnTo>
+                    <a:pt x="6439364" y="3525135"/>
+                  </a:lnTo>
+                  <a:lnTo>
+                    <a:pt x="6361730" y="3518756"/>
+                  </a:lnTo>
+                  <a:lnTo>
+                    <a:pt x="6284096" y="3512058"/>
+                  </a:lnTo>
+                  <a:lnTo>
+                    <a:pt x="6206462" y="3505024"/>
+                  </a:lnTo>
+                  <a:lnTo>
+                    <a:pt x="6128827" y="3497639"/>
+                  </a:lnTo>
+                  <a:lnTo>
+                    <a:pt x="6051193" y="3489884"/>
+                  </a:lnTo>
+                  <a:lnTo>
+                    <a:pt x="5973559" y="3481741"/>
+                  </a:lnTo>
+                  <a:lnTo>
+                    <a:pt x="5895925" y="3473191"/>
+                  </a:lnTo>
+                  <a:lnTo>
+                    <a:pt x="5818291" y="3464213"/>
+                  </a:lnTo>
+                  <a:lnTo>
+                    <a:pt x="5740657" y="3454786"/>
+                  </a:lnTo>
+                  <a:lnTo>
+                    <a:pt x="5663023" y="3444887"/>
+                  </a:lnTo>
+                  <a:lnTo>
+                    <a:pt x="5585389" y="3434493"/>
+                  </a:lnTo>
+                  <a:lnTo>
+                    <a:pt x="5507755" y="3423579"/>
+                  </a:lnTo>
+                  <a:lnTo>
+                    <a:pt x="5430121" y="3412119"/>
+                  </a:lnTo>
+                  <a:lnTo>
+                    <a:pt x="5352487" y="3400086"/>
+                  </a:lnTo>
+                  <a:lnTo>
+                    <a:pt x="5274853" y="3387451"/>
+                  </a:lnTo>
+                  <a:lnTo>
+                    <a:pt x="5197219" y="3374183"/>
+                  </a:lnTo>
+                  <a:lnTo>
+                    <a:pt x="5119585" y="3360252"/>
+                  </a:lnTo>
+                  <a:lnTo>
+                    <a:pt x="5041951" y="3345624"/>
+                  </a:lnTo>
+                  <a:lnTo>
+                    <a:pt x="4964317" y="3330263"/>
+                  </a:lnTo>
+                  <a:lnTo>
+                    <a:pt x="4886683" y="3314135"/>
+                  </a:lnTo>
+                  <a:lnTo>
+                    <a:pt x="4809049" y="3297199"/>
+                  </a:lnTo>
+                  <a:lnTo>
+                    <a:pt x="4731415" y="3279417"/>
+                  </a:lnTo>
+                  <a:lnTo>
+                    <a:pt x="4653781" y="3260744"/>
+                  </a:lnTo>
+                  <a:lnTo>
+                    <a:pt x="4576147" y="3241138"/>
+                  </a:lnTo>
+                  <a:lnTo>
+                    <a:pt x="4498513" y="3220550"/>
+                  </a:lnTo>
+                  <a:lnTo>
+                    <a:pt x="4420879" y="3198933"/>
+                  </a:lnTo>
+                  <a:lnTo>
+                    <a:pt x="4343244" y="3176234"/>
+                  </a:lnTo>
+                  <a:lnTo>
+                    <a:pt x="4265610" y="3152399"/>
+                  </a:lnTo>
+                  <a:lnTo>
+                    <a:pt x="4187976" y="3127372"/>
+                  </a:lnTo>
+                  <a:lnTo>
+                    <a:pt x="4110342" y="3101093"/>
+                  </a:lnTo>
+                  <a:lnTo>
+                    <a:pt x="4032708" y="3073499"/>
+                  </a:lnTo>
+                  <a:lnTo>
+                    <a:pt x="3955074" y="3044525"/>
+                  </a:lnTo>
+                  <a:lnTo>
+                    <a:pt x="3877440" y="3014101"/>
+                  </a:lnTo>
+                  <a:lnTo>
+                    <a:pt x="3799806" y="2982155"/>
+                  </a:lnTo>
+                  <a:lnTo>
+                    <a:pt x="3722172" y="2948610"/>
+                  </a:lnTo>
+                  <a:lnTo>
+                    <a:pt x="3644538" y="2913388"/>
+                  </a:lnTo>
+                  <a:lnTo>
+                    <a:pt x="3566904" y="2876403"/>
+                  </a:lnTo>
+                  <a:lnTo>
+                    <a:pt x="3489270" y="2837568"/>
+                  </a:lnTo>
+                  <a:lnTo>
+                    <a:pt x="3411636" y="2796790"/>
+                  </a:lnTo>
+                  <a:lnTo>
+                    <a:pt x="3334002" y="2794673"/>
+                  </a:lnTo>
+                  <a:lnTo>
+                    <a:pt x="3256368" y="2811809"/>
+                  </a:lnTo>
+                  <a:lnTo>
+                    <a:pt x="3178734" y="2828602"/>
+                  </a:lnTo>
+                  <a:lnTo>
+                    <a:pt x="3101100" y="2845060"/>
+                  </a:lnTo>
+                  <a:lnTo>
+                    <a:pt x="3023466" y="2861190"/>
+                  </a:lnTo>
+                  <a:lnTo>
+                    <a:pt x="2945832" y="2876997"/>
+                  </a:lnTo>
+                  <a:lnTo>
+                    <a:pt x="2868198" y="2892488"/>
+                  </a:lnTo>
+                  <a:lnTo>
+                    <a:pt x="2790564" y="2907671"/>
+                  </a:lnTo>
+                  <a:lnTo>
+                    <a:pt x="2712930" y="2922549"/>
+                  </a:lnTo>
+                  <a:lnTo>
+                    <a:pt x="2635295" y="2937131"/>
+                  </a:lnTo>
+                  <a:lnTo>
+                    <a:pt x="2557661" y="2951422"/>
+                  </a:lnTo>
+                  <a:lnTo>
+                    <a:pt x="2480027" y="2965427"/>
+                  </a:lnTo>
+                  <a:lnTo>
+                    <a:pt x="2402393" y="2979152"/>
+                  </a:lnTo>
+                  <a:lnTo>
+                    <a:pt x="2324759" y="2992603"/>
+                  </a:lnTo>
+                  <a:lnTo>
+                    <a:pt x="2247125" y="3005786"/>
+                  </a:lnTo>
+                  <a:lnTo>
+                    <a:pt x="2169491" y="3018705"/>
+                  </a:lnTo>
+                  <a:lnTo>
+                    <a:pt x="2091857" y="3031366"/>
+                  </a:lnTo>
+                  <a:lnTo>
+                    <a:pt x="2014223" y="3043775"/>
+                  </a:lnTo>
+                  <a:lnTo>
+                    <a:pt x="1936589" y="3055935"/>
+                  </a:lnTo>
+                  <a:lnTo>
+                    <a:pt x="1858955" y="3067853"/>
+                  </a:lnTo>
+                  <a:lnTo>
+                    <a:pt x="1781321" y="3079533"/>
+                  </a:lnTo>
+                  <a:lnTo>
+                    <a:pt x="1703687" y="3090979"/>
+                  </a:lnTo>
+                  <a:lnTo>
+                    <a:pt x="1626053" y="3102197"/>
+                  </a:lnTo>
+                  <a:lnTo>
+                    <a:pt x="1548419" y="3113190"/>
+                  </a:lnTo>
+                  <a:lnTo>
+                    <a:pt x="1470785" y="3123965"/>
+                  </a:lnTo>
+                  <a:lnTo>
+                    <a:pt x="1393151" y="3134524"/>
+                  </a:lnTo>
+                  <a:lnTo>
+                    <a:pt x="1315517" y="3144872"/>
+                  </a:lnTo>
+                  <a:lnTo>
+                    <a:pt x="1237883" y="3155013"/>
+                  </a:lnTo>
+                  <a:lnTo>
+                    <a:pt x="1160249" y="3164952"/>
+                  </a:lnTo>
+                  <a:lnTo>
+                    <a:pt x="1082615" y="3174692"/>
+                  </a:lnTo>
+                  <a:lnTo>
+                    <a:pt x="1004981" y="3184238"/>
+                  </a:lnTo>
+                  <a:lnTo>
+                    <a:pt x="927346" y="3193593"/>
+                  </a:lnTo>
+                  <a:lnTo>
+                    <a:pt x="849712" y="3202761"/>
+                  </a:lnTo>
+                  <a:lnTo>
+                    <a:pt x="772078" y="3211747"/>
+                  </a:lnTo>
+                  <a:lnTo>
+                    <a:pt x="694444" y="3220552"/>
+                  </a:lnTo>
+                  <a:lnTo>
+                    <a:pt x="616810" y="3229182"/>
+                  </a:lnTo>
+                  <a:lnTo>
+                    <a:pt x="539176" y="3237640"/>
+                  </a:lnTo>
+                  <a:lnTo>
+                    <a:pt x="461542" y="3245928"/>
+                  </a:lnTo>
+                  <a:lnTo>
+                    <a:pt x="383908" y="3254051"/>
+                  </a:lnTo>
+                  <a:lnTo>
+                    <a:pt x="306274" y="3262012"/>
+                  </a:lnTo>
+                  <a:lnTo>
+                    <a:pt x="228640" y="3269814"/>
+                  </a:lnTo>
+                  <a:lnTo>
+                    <a:pt x="151006" y="3277460"/>
+                  </a:lnTo>
+                  <a:lnTo>
+                    <a:pt x="73372" y="3284953"/>
+                  </a:lnTo>
+                  <a:lnTo>
+                    <a:pt x="0" y="3291894"/>
                   </a:lnTo>
                   <a:close/>
                 </a:path>
@@ -3558,249 +3567,258 @@
           </p:nvSpPr>
           <p:spPr>
             <a:xfrm>
-              <a:off x="2135132" y="1896563"/>
-              <a:ext cx="6053358" cy="2779516"/>
+              <a:off x="1921892" y="1896563"/>
+              <a:ext cx="6266597" cy="2777188"/>
             </a:xfrm>
             <a:custGeom>
               <a:avLst/>
               <a:pathLst>
-                <a:path w="6053358" h="2779516">
+                <a:path w="6266597" h="2777188">
                   <a:moveTo>
                     <a:pt x="0" y="0"/>
                   </a:moveTo>
                   <a:lnTo>
-                    <a:pt x="75536" y="186612"/>
-                  </a:lnTo>
-                  <a:lnTo>
-                    <a:pt x="153170" y="368349"/>
-                  </a:lnTo>
-                  <a:lnTo>
-                    <a:pt x="230804" y="540557"/>
-                  </a:lnTo>
-                  <a:lnTo>
-                    <a:pt x="308438" y="703736"/>
-                  </a:lnTo>
-                  <a:lnTo>
-                    <a:pt x="386072" y="858358"/>
-                  </a:lnTo>
-                  <a:lnTo>
-                    <a:pt x="463706" y="1004873"/>
-                  </a:lnTo>
-                  <a:lnTo>
-                    <a:pt x="541340" y="1143706"/>
-                  </a:lnTo>
-                  <a:lnTo>
-                    <a:pt x="618974" y="1275259"/>
-                  </a:lnTo>
-                  <a:lnTo>
-                    <a:pt x="696609" y="1399915"/>
-                  </a:lnTo>
-                  <a:lnTo>
-                    <a:pt x="774243" y="1518034"/>
-                  </a:lnTo>
-                  <a:lnTo>
-                    <a:pt x="851877" y="1629959"/>
-                  </a:lnTo>
-                  <a:lnTo>
-                    <a:pt x="929511" y="1736017"/>
-                  </a:lnTo>
-                  <a:lnTo>
-                    <a:pt x="1007145" y="1836513"/>
-                  </a:lnTo>
-                  <a:lnTo>
-                    <a:pt x="1084779" y="1931739"/>
-                  </a:lnTo>
-                  <a:lnTo>
-                    <a:pt x="1162413" y="2021973"/>
-                  </a:lnTo>
-                  <a:lnTo>
-                    <a:pt x="1240047" y="2107475"/>
-                  </a:lnTo>
-                  <a:lnTo>
-                    <a:pt x="1317681" y="2188494"/>
-                  </a:lnTo>
-                  <a:lnTo>
-                    <a:pt x="1395315" y="2265265"/>
-                  </a:lnTo>
-                  <a:lnTo>
-                    <a:pt x="1472949" y="2338011"/>
-                  </a:lnTo>
-                  <a:lnTo>
-                    <a:pt x="1550583" y="2406942"/>
-                  </a:lnTo>
-                  <a:lnTo>
-                    <a:pt x="1628217" y="2472259"/>
-                  </a:lnTo>
-                  <a:lnTo>
-                    <a:pt x="1705851" y="2534151"/>
-                  </a:lnTo>
-                  <a:lnTo>
-                    <a:pt x="1783485" y="2592798"/>
-                  </a:lnTo>
-                  <a:lnTo>
-                    <a:pt x="1861119" y="2648369"/>
-                  </a:lnTo>
-                  <a:lnTo>
-                    <a:pt x="1938753" y="2701027"/>
-                  </a:lnTo>
-                  <a:lnTo>
-                    <a:pt x="2016387" y="2750924"/>
-                  </a:lnTo>
-                  <a:lnTo>
-                    <a:pt x="2094021" y="2779516"/>
-                  </a:lnTo>
-                  <a:lnTo>
-                    <a:pt x="2171655" y="2768921"/>
-                  </a:lnTo>
-                  <a:lnTo>
-                    <a:pt x="2249289" y="2758197"/>
-                  </a:lnTo>
-                  <a:lnTo>
-                    <a:pt x="2326923" y="2747343"/>
-                  </a:lnTo>
-                  <a:lnTo>
-                    <a:pt x="2404558" y="2736357"/>
-                  </a:lnTo>
-                  <a:lnTo>
-                    <a:pt x="2482192" y="2725237"/>
-                  </a:lnTo>
-                  <a:lnTo>
-                    <a:pt x="2559826" y="2713983"/>
-                  </a:lnTo>
-                  <a:lnTo>
-                    <a:pt x="2637460" y="2702592"/>
-                  </a:lnTo>
-                  <a:lnTo>
-                    <a:pt x="2715094" y="2691063"/>
-                  </a:lnTo>
-                  <a:lnTo>
-                    <a:pt x="2792728" y="2679395"/>
-                  </a:lnTo>
-                  <a:lnTo>
-                    <a:pt x="2870362" y="2667584"/>
-                  </a:lnTo>
-                  <a:lnTo>
-                    <a:pt x="2947996" y="2655630"/>
-                  </a:lnTo>
-                  <a:lnTo>
-                    <a:pt x="3025630" y="2643531"/>
-                  </a:lnTo>
-                  <a:lnTo>
-                    <a:pt x="3103264" y="2631286"/>
-                  </a:lnTo>
-                  <a:lnTo>
-                    <a:pt x="3180898" y="2618891"/>
-                  </a:lnTo>
-                  <a:lnTo>
-                    <a:pt x="3258532" y="2606347"/>
-                  </a:lnTo>
-                  <a:lnTo>
-                    <a:pt x="3336166" y="2593650"/>
-                  </a:lnTo>
-                  <a:lnTo>
-                    <a:pt x="3413800" y="2580799"/>
-                  </a:lnTo>
-                  <a:lnTo>
-                    <a:pt x="3491434" y="2567792"/>
-                  </a:lnTo>
-                  <a:lnTo>
-                    <a:pt x="3569068" y="2554627"/>
-                  </a:lnTo>
-                  <a:lnTo>
-                    <a:pt x="3646702" y="2541302"/>
-                  </a:lnTo>
-                  <a:lnTo>
-                    <a:pt x="3724336" y="2527816"/>
-                  </a:lnTo>
-                  <a:lnTo>
-                    <a:pt x="3801970" y="2514166"/>
-                  </a:lnTo>
-                  <a:lnTo>
-                    <a:pt x="3879604" y="2500351"/>
-                  </a:lnTo>
-                  <a:lnTo>
-                    <a:pt x="3957238" y="2486368"/>
-                  </a:lnTo>
-                  <a:lnTo>
-                    <a:pt x="4034872" y="2472215"/>
-                  </a:lnTo>
-                  <a:lnTo>
-                    <a:pt x="4112507" y="2457890"/>
-                  </a:lnTo>
-                  <a:lnTo>
-                    <a:pt x="4190141" y="2443392"/>
-                  </a:lnTo>
-                  <a:lnTo>
-                    <a:pt x="4267775" y="2428717"/>
-                  </a:lnTo>
-                  <a:lnTo>
-                    <a:pt x="4345409" y="2413865"/>
-                  </a:lnTo>
-                  <a:lnTo>
-                    <a:pt x="4423043" y="2398832"/>
-                  </a:lnTo>
-                  <a:lnTo>
-                    <a:pt x="4500677" y="2383617"/>
-                  </a:lnTo>
-                  <a:lnTo>
-                    <a:pt x="4578311" y="2368217"/>
-                  </a:lnTo>
-                  <a:lnTo>
-                    <a:pt x="4655945" y="2352630"/>
-                  </a:lnTo>
-                  <a:lnTo>
-                    <a:pt x="4733579" y="2336855"/>
-                  </a:lnTo>
-                  <a:lnTo>
-                    <a:pt x="4811213" y="2320887"/>
-                  </a:lnTo>
-                  <a:lnTo>
-                    <a:pt x="4888847" y="2304726"/>
-                  </a:lnTo>
-                  <a:lnTo>
-                    <a:pt x="4966481" y="2288369"/>
-                  </a:lnTo>
-                  <a:lnTo>
-                    <a:pt x="5044115" y="2271814"/>
-                  </a:lnTo>
-                  <a:lnTo>
-                    <a:pt x="5121749" y="2255057"/>
-                  </a:lnTo>
-                  <a:lnTo>
-                    <a:pt x="5199383" y="2238097"/>
-                  </a:lnTo>
-                  <a:lnTo>
-                    <a:pt x="5277017" y="2220932"/>
-                  </a:lnTo>
-                  <a:lnTo>
-                    <a:pt x="5354651" y="2203558"/>
-                  </a:lnTo>
-                  <a:lnTo>
-                    <a:pt x="5432285" y="2185973"/>
-                  </a:lnTo>
-                  <a:lnTo>
-                    <a:pt x="5509919" y="2168174"/>
-                  </a:lnTo>
-                  <a:lnTo>
-                    <a:pt x="5587553" y="2150160"/>
-                  </a:lnTo>
-                  <a:lnTo>
-                    <a:pt x="5665187" y="2131927"/>
-                  </a:lnTo>
-                  <a:lnTo>
-                    <a:pt x="5742821" y="2113473"/>
-                  </a:lnTo>
-                  <a:lnTo>
-                    <a:pt x="5820456" y="2094795"/>
-                  </a:lnTo>
-                  <a:lnTo>
-                    <a:pt x="5898090" y="2075891"/>
-                  </a:lnTo>
-                  <a:lnTo>
-                    <a:pt x="5975724" y="2056757"/>
-                  </a:lnTo>
-                  <a:lnTo>
-                    <a:pt x="6053358" y="2037390"/>
+                    <a:pt x="55874" y="126949"/>
+                  </a:lnTo>
+                  <a:lnTo>
+                    <a:pt x="133508" y="294934"/>
+                  </a:lnTo>
+                  <a:lnTo>
+                    <a:pt x="211142" y="454915"/>
+                  </a:lnTo>
+                  <a:lnTo>
+                    <a:pt x="288776" y="607274"/>
+                  </a:lnTo>
+                  <a:lnTo>
+                    <a:pt x="366410" y="752374"/>
+                  </a:lnTo>
+                  <a:lnTo>
+                    <a:pt x="444044" y="890560"/>
+                  </a:lnTo>
+                  <a:lnTo>
+                    <a:pt x="521678" y="1022162"/>
+                  </a:lnTo>
+                  <a:lnTo>
+                    <a:pt x="599312" y="1147494"/>
+                  </a:lnTo>
+                  <a:lnTo>
+                    <a:pt x="676946" y="1266854"/>
+                  </a:lnTo>
+                  <a:lnTo>
+                    <a:pt x="754580" y="1380527"/>
+                  </a:lnTo>
+                  <a:lnTo>
+                    <a:pt x="832214" y="1488784"/>
+                  </a:lnTo>
+                  <a:lnTo>
+                    <a:pt x="909848" y="1591883"/>
+                  </a:lnTo>
+                  <a:lnTo>
+                    <a:pt x="987482" y="1690070"/>
+                  </a:lnTo>
+                  <a:lnTo>
+                    <a:pt x="1065116" y="1783579"/>
+                  </a:lnTo>
+                  <a:lnTo>
+                    <a:pt x="1142750" y="1872632"/>
+                  </a:lnTo>
+                  <a:lnTo>
+                    <a:pt x="1220384" y="1957442"/>
+                  </a:lnTo>
+                  <a:lnTo>
+                    <a:pt x="1298018" y="2038212"/>
+                  </a:lnTo>
+                  <a:lnTo>
+                    <a:pt x="1375653" y="2115133"/>
+                  </a:lnTo>
+                  <a:lnTo>
+                    <a:pt x="1453287" y="2188389"/>
+                  </a:lnTo>
+                  <a:lnTo>
+                    <a:pt x="1530921" y="2258155"/>
+                  </a:lnTo>
+                  <a:lnTo>
+                    <a:pt x="1608555" y="2324597"/>
+                  </a:lnTo>
+                  <a:lnTo>
+                    <a:pt x="1686189" y="2387873"/>
+                  </a:lnTo>
+                  <a:lnTo>
+                    <a:pt x="1763823" y="2448134"/>
+                  </a:lnTo>
+                  <a:lnTo>
+                    <a:pt x="1841457" y="2505524"/>
+                  </a:lnTo>
+                  <a:lnTo>
+                    <a:pt x="1919091" y="2560179"/>
+                  </a:lnTo>
+                  <a:lnTo>
+                    <a:pt x="1996725" y="2612231"/>
+                  </a:lnTo>
+                  <a:lnTo>
+                    <a:pt x="2074359" y="2661802"/>
+                  </a:lnTo>
+                  <a:lnTo>
+                    <a:pt x="2151993" y="2709012"/>
+                  </a:lnTo>
+                  <a:lnTo>
+                    <a:pt x="2229627" y="2753972"/>
+                  </a:lnTo>
+                  <a:lnTo>
+                    <a:pt x="2307261" y="2777188"/>
+                  </a:lnTo>
+                  <a:lnTo>
+                    <a:pt x="2384895" y="2759347"/>
+                  </a:lnTo>
+                  <a:lnTo>
+                    <a:pt x="2462529" y="2741142"/>
+                  </a:lnTo>
+                  <a:lnTo>
+                    <a:pt x="2540163" y="2722566"/>
+                  </a:lnTo>
+                  <a:lnTo>
+                    <a:pt x="2617797" y="2703612"/>
+                  </a:lnTo>
+                  <a:lnTo>
+                    <a:pt x="2695431" y="2684271"/>
+                  </a:lnTo>
+                  <a:lnTo>
+                    <a:pt x="2773065" y="2664537"/>
+                  </a:lnTo>
+                  <a:lnTo>
+                    <a:pt x="2850699" y="2644400"/>
+                  </a:lnTo>
+                  <a:lnTo>
+                    <a:pt x="2928333" y="2623852"/>
+                  </a:lnTo>
+                  <a:lnTo>
+                    <a:pt x="3005967" y="2602886"/>
+                  </a:lnTo>
+                  <a:lnTo>
+                    <a:pt x="3083602" y="2581493"/>
+                  </a:lnTo>
+                  <a:lnTo>
+                    <a:pt x="3161236" y="2559663"/>
+                  </a:lnTo>
+                  <a:lnTo>
+                    <a:pt x="3238870" y="2537389"/>
+                  </a:lnTo>
+                  <a:lnTo>
+                    <a:pt x="3316504" y="2514661"/>
+                  </a:lnTo>
+                  <a:lnTo>
+                    <a:pt x="3394138" y="2491469"/>
+                  </a:lnTo>
+                  <a:lnTo>
+                    <a:pt x="3471772" y="2467805"/>
+                  </a:lnTo>
+                  <a:lnTo>
+                    <a:pt x="3549406" y="2443659"/>
+                  </a:lnTo>
+                  <a:lnTo>
+                    <a:pt x="3627040" y="2419021"/>
+                  </a:lnTo>
+                  <a:lnTo>
+                    <a:pt x="3704674" y="2393880"/>
+                  </a:lnTo>
+                  <a:lnTo>
+                    <a:pt x="3782308" y="2368227"/>
+                  </a:lnTo>
+                  <a:lnTo>
+                    <a:pt x="3859942" y="2342052"/>
+                  </a:lnTo>
+                  <a:lnTo>
+                    <a:pt x="3937576" y="2315343"/>
+                  </a:lnTo>
+                  <a:lnTo>
+                    <a:pt x="4015210" y="2288089"/>
+                  </a:lnTo>
+                  <a:lnTo>
+                    <a:pt x="4092844" y="2260281"/>
+                  </a:lnTo>
+                  <a:lnTo>
+                    <a:pt x="4170478" y="2231905"/>
+                  </a:lnTo>
+                  <a:lnTo>
+                    <a:pt x="4248112" y="2202951"/>
+                  </a:lnTo>
+                  <a:lnTo>
+                    <a:pt x="4325746" y="2173408"/>
+                  </a:lnTo>
+                  <a:lnTo>
+                    <a:pt x="4403380" y="2143262"/>
+                  </a:lnTo>
+                  <a:lnTo>
+                    <a:pt x="4481014" y="2112501"/>
+                  </a:lnTo>
+                  <a:lnTo>
+                    <a:pt x="4558648" y="2081114"/>
+                  </a:lnTo>
+                  <a:lnTo>
+                    <a:pt x="4636282" y="2049087"/>
+                  </a:lnTo>
+                  <a:lnTo>
+                    <a:pt x="4713916" y="2016408"/>
+                  </a:lnTo>
+                  <a:lnTo>
+                    <a:pt x="4791551" y="1983062"/>
+                  </a:lnTo>
+                  <a:lnTo>
+                    <a:pt x="4869185" y="1949037"/>
+                  </a:lnTo>
+                  <a:lnTo>
+                    <a:pt x="4946819" y="1914319"/>
+                  </a:lnTo>
+                  <a:lnTo>
+                    <a:pt x="5024453" y="1878893"/>
+                  </a:lnTo>
+                  <a:lnTo>
+                    <a:pt x="5102087" y="1842745"/>
+                  </a:lnTo>
+                  <a:lnTo>
+                    <a:pt x="5179721" y="1805860"/>
+                  </a:lnTo>
+                  <a:lnTo>
+                    <a:pt x="5257355" y="1768224"/>
+                  </a:lnTo>
+                  <a:lnTo>
+                    <a:pt x="5334989" y="1729821"/>
+                  </a:lnTo>
+                  <a:lnTo>
+                    <a:pt x="5412623" y="1690635"/>
+                  </a:lnTo>
+                  <a:lnTo>
+                    <a:pt x="5490257" y="1650650"/>
+                  </a:lnTo>
+                  <a:lnTo>
+                    <a:pt x="5567891" y="1609851"/>
+                  </a:lnTo>
+                  <a:lnTo>
+                    <a:pt x="5645525" y="1568220"/>
+                  </a:lnTo>
+                  <a:lnTo>
+                    <a:pt x="5723159" y="1525741"/>
+                  </a:lnTo>
+                  <a:lnTo>
+                    <a:pt x="5800793" y="1482396"/>
+                  </a:lnTo>
+                  <a:lnTo>
+                    <a:pt x="5878427" y="1438167"/>
+                  </a:lnTo>
+                  <a:lnTo>
+                    <a:pt x="5956061" y="1393038"/>
+                  </a:lnTo>
+                  <a:lnTo>
+                    <a:pt x="6033695" y="1346988"/>
+                  </a:lnTo>
+                  <a:lnTo>
+                    <a:pt x="6111329" y="1300001"/>
+                  </a:lnTo>
+                  <a:lnTo>
+                    <a:pt x="6188963" y="1252055"/>
+                  </a:lnTo>
+                  <a:lnTo>
+                    <a:pt x="6266597" y="1203133"/>
                   </a:lnTo>
                 </a:path>
               </a:pathLst>
@@ -3820,300 +3838,300 @@
           </p:nvSpPr>
           <p:spPr>
             <a:xfrm>
-              <a:off x="817517" y="4686548"/>
-              <a:ext cx="7370972" cy="807860"/>
+              <a:off x="817517" y="4691237"/>
+              <a:ext cx="7370972" cy="786992"/>
             </a:xfrm>
             <a:custGeom>
               <a:avLst/>
               <a:pathLst>
-                <a:path w="7370972" h="807860">
+                <a:path w="7370972" h="786992">
                   <a:moveTo>
-                    <a:pt x="7370972" y="807860"/>
+                    <a:pt x="7370972" y="786992"/>
                   </a:moveTo>
                   <a:lnTo>
-                    <a:pt x="7293338" y="804827"/>
-                  </a:lnTo>
-                  <a:lnTo>
-                    <a:pt x="7215704" y="801627"/>
-                  </a:lnTo>
-                  <a:lnTo>
-                    <a:pt x="7138070" y="798250"/>
-                  </a:lnTo>
-                  <a:lnTo>
-                    <a:pt x="7060436" y="794686"/>
-                  </a:lnTo>
-                  <a:lnTo>
-                    <a:pt x="6982802" y="790925"/>
-                  </a:lnTo>
-                  <a:lnTo>
-                    <a:pt x="6905168" y="786955"/>
-                  </a:lnTo>
-                  <a:lnTo>
-                    <a:pt x="6827534" y="782766"/>
-                  </a:lnTo>
-                  <a:lnTo>
-                    <a:pt x="6749900" y="778346"/>
-                  </a:lnTo>
-                  <a:lnTo>
-                    <a:pt x="6672266" y="773680"/>
-                  </a:lnTo>
-                  <a:lnTo>
-                    <a:pt x="6594632" y="768757"/>
-                  </a:lnTo>
-                  <a:lnTo>
-                    <a:pt x="6516998" y="763561"/>
-                  </a:lnTo>
-                  <a:lnTo>
-                    <a:pt x="6439364" y="758077"/>
-                  </a:lnTo>
-                  <a:lnTo>
-                    <a:pt x="6361730" y="752290"/>
-                  </a:lnTo>
-                  <a:lnTo>
-                    <a:pt x="6284096" y="746183"/>
-                  </a:lnTo>
-                  <a:lnTo>
-                    <a:pt x="6206462" y="739737"/>
-                  </a:lnTo>
-                  <a:lnTo>
-                    <a:pt x="6128827" y="732936"/>
-                  </a:lnTo>
-                  <a:lnTo>
-                    <a:pt x="6051193" y="725757"/>
-                  </a:lnTo>
-                  <a:lnTo>
-                    <a:pt x="5973559" y="718182"/>
-                  </a:lnTo>
-                  <a:lnTo>
-                    <a:pt x="5895925" y="710187"/>
-                  </a:lnTo>
-                  <a:lnTo>
-                    <a:pt x="5818291" y="701750"/>
-                  </a:lnTo>
-                  <a:lnTo>
-                    <a:pt x="5740657" y="692846"/>
-                  </a:lnTo>
-                  <a:lnTo>
-                    <a:pt x="5663023" y="683450"/>
-                  </a:lnTo>
-                  <a:lnTo>
-                    <a:pt x="5585389" y="673533"/>
-                  </a:lnTo>
-                  <a:lnTo>
-                    <a:pt x="5507755" y="663068"/>
-                  </a:lnTo>
-                  <a:lnTo>
-                    <a:pt x="5430121" y="652024"/>
-                  </a:lnTo>
-                  <a:lnTo>
-                    <a:pt x="5352487" y="640368"/>
-                  </a:lnTo>
-                  <a:lnTo>
-                    <a:pt x="5274853" y="628068"/>
-                  </a:lnTo>
-                  <a:lnTo>
-                    <a:pt x="5197219" y="615087"/>
-                  </a:lnTo>
-                  <a:lnTo>
-                    <a:pt x="5119585" y="601387"/>
-                  </a:lnTo>
-                  <a:lnTo>
-                    <a:pt x="5041951" y="586930"/>
-                  </a:lnTo>
-                  <a:lnTo>
-                    <a:pt x="4964317" y="571672"/>
-                  </a:lnTo>
-                  <a:lnTo>
-                    <a:pt x="4886683" y="555570"/>
-                  </a:lnTo>
-                  <a:lnTo>
-                    <a:pt x="4809049" y="538578"/>
-                  </a:lnTo>
-                  <a:lnTo>
-                    <a:pt x="4731415" y="520645"/>
-                  </a:lnTo>
-                  <a:lnTo>
-                    <a:pt x="4653781" y="501719"/>
-                  </a:lnTo>
-                  <a:lnTo>
-                    <a:pt x="4576147" y="481747"/>
-                  </a:lnTo>
-                  <a:lnTo>
-                    <a:pt x="4498513" y="460669"/>
-                  </a:lnTo>
-                  <a:lnTo>
-                    <a:pt x="4420879" y="438425"/>
-                  </a:lnTo>
-                  <a:lnTo>
-                    <a:pt x="4343244" y="414949"/>
-                  </a:lnTo>
-                  <a:lnTo>
-                    <a:pt x="4265610" y="390175"/>
-                  </a:lnTo>
-                  <a:lnTo>
-                    <a:pt x="4187976" y="364030"/>
-                  </a:lnTo>
-                  <a:lnTo>
-                    <a:pt x="4110342" y="336439"/>
-                  </a:lnTo>
-                  <a:lnTo>
-                    <a:pt x="4032708" y="307320"/>
-                  </a:lnTo>
-                  <a:lnTo>
-                    <a:pt x="3955074" y="276591"/>
-                  </a:lnTo>
-                  <a:lnTo>
-                    <a:pt x="3877440" y="244160"/>
-                  </a:lnTo>
-                  <a:lnTo>
-                    <a:pt x="3799806" y="209936"/>
-                  </a:lnTo>
-                  <a:lnTo>
-                    <a:pt x="3722172" y="173817"/>
-                  </a:lnTo>
-                  <a:lnTo>
-                    <a:pt x="3644538" y="135700"/>
-                  </a:lnTo>
-                  <a:lnTo>
-                    <a:pt x="3566904" y="95473"/>
-                  </a:lnTo>
-                  <a:lnTo>
-                    <a:pt x="3489270" y="53021"/>
-                  </a:lnTo>
-                  <a:lnTo>
-                    <a:pt x="3411636" y="8220"/>
+                    <a:pt x="7293338" y="783441"/>
+                  </a:lnTo>
+                  <a:lnTo>
+                    <a:pt x="7215704" y="779713"/>
+                  </a:lnTo>
+                  <a:lnTo>
+                    <a:pt x="7138070" y="775797"/>
+                  </a:lnTo>
+                  <a:lnTo>
+                    <a:pt x="7060436" y="771686"/>
+                  </a:lnTo>
+                  <a:lnTo>
+                    <a:pt x="6982802" y="767370"/>
+                  </a:lnTo>
+                  <a:lnTo>
+                    <a:pt x="6905168" y="762837"/>
+                  </a:lnTo>
+                  <a:lnTo>
+                    <a:pt x="6827534" y="758078"/>
+                  </a:lnTo>
+                  <a:lnTo>
+                    <a:pt x="6749900" y="753080"/>
+                  </a:lnTo>
+                  <a:lnTo>
+                    <a:pt x="6672266" y="747832"/>
+                  </a:lnTo>
+                  <a:lnTo>
+                    <a:pt x="6594632" y="742322"/>
+                  </a:lnTo>
+                  <a:lnTo>
+                    <a:pt x="6516998" y="736537"/>
+                  </a:lnTo>
+                  <a:lnTo>
+                    <a:pt x="6439364" y="730461"/>
+                  </a:lnTo>
+                  <a:lnTo>
+                    <a:pt x="6361730" y="724082"/>
+                  </a:lnTo>
+                  <a:lnTo>
+                    <a:pt x="6284096" y="717384"/>
+                  </a:lnTo>
+                  <a:lnTo>
+                    <a:pt x="6206462" y="710350"/>
+                  </a:lnTo>
+                  <a:lnTo>
+                    <a:pt x="6128827" y="702965"/>
+                  </a:lnTo>
+                  <a:lnTo>
+                    <a:pt x="6051193" y="695210"/>
+                  </a:lnTo>
+                  <a:lnTo>
+                    <a:pt x="5973559" y="687067"/>
+                  </a:lnTo>
+                  <a:lnTo>
+                    <a:pt x="5895925" y="678517"/>
+                  </a:lnTo>
+                  <a:lnTo>
+                    <a:pt x="5818291" y="669539"/>
+                  </a:lnTo>
+                  <a:lnTo>
+                    <a:pt x="5740657" y="660112"/>
+                  </a:lnTo>
+                  <a:lnTo>
+                    <a:pt x="5663023" y="650213"/>
+                  </a:lnTo>
+                  <a:lnTo>
+                    <a:pt x="5585389" y="639819"/>
+                  </a:lnTo>
+                  <a:lnTo>
+                    <a:pt x="5507755" y="628905"/>
+                  </a:lnTo>
+                  <a:lnTo>
+                    <a:pt x="5430121" y="617445"/>
+                  </a:lnTo>
+                  <a:lnTo>
+                    <a:pt x="5352487" y="605412"/>
+                  </a:lnTo>
+                  <a:lnTo>
+                    <a:pt x="5274853" y="592777"/>
+                  </a:lnTo>
+                  <a:lnTo>
+                    <a:pt x="5197219" y="579509"/>
+                  </a:lnTo>
+                  <a:lnTo>
+                    <a:pt x="5119585" y="565578"/>
+                  </a:lnTo>
+                  <a:lnTo>
+                    <a:pt x="5041951" y="550950"/>
+                  </a:lnTo>
+                  <a:lnTo>
+                    <a:pt x="4964317" y="535590"/>
+                  </a:lnTo>
+                  <a:lnTo>
+                    <a:pt x="4886683" y="519461"/>
+                  </a:lnTo>
+                  <a:lnTo>
+                    <a:pt x="4809049" y="502526"/>
+                  </a:lnTo>
+                  <a:lnTo>
+                    <a:pt x="4731415" y="484743"/>
+                  </a:lnTo>
+                  <a:lnTo>
+                    <a:pt x="4653781" y="466071"/>
+                  </a:lnTo>
+                  <a:lnTo>
+                    <a:pt x="4576147" y="446464"/>
+                  </a:lnTo>
+                  <a:lnTo>
+                    <a:pt x="4498513" y="425876"/>
+                  </a:lnTo>
+                  <a:lnTo>
+                    <a:pt x="4420879" y="404259"/>
+                  </a:lnTo>
+                  <a:lnTo>
+                    <a:pt x="4343244" y="381560"/>
+                  </a:lnTo>
+                  <a:lnTo>
+                    <a:pt x="4265610" y="357725"/>
+                  </a:lnTo>
+                  <a:lnTo>
+                    <a:pt x="4187976" y="332698"/>
+                  </a:lnTo>
+                  <a:lnTo>
+                    <a:pt x="4110342" y="306419"/>
+                  </a:lnTo>
+                  <a:lnTo>
+                    <a:pt x="4032708" y="278825"/>
+                  </a:lnTo>
+                  <a:lnTo>
+                    <a:pt x="3955074" y="249851"/>
+                  </a:lnTo>
+                  <a:lnTo>
+                    <a:pt x="3877440" y="219427"/>
+                  </a:lnTo>
+                  <a:lnTo>
+                    <a:pt x="3799806" y="187481"/>
+                  </a:lnTo>
+                  <a:lnTo>
+                    <a:pt x="3722172" y="153937"/>
+                  </a:lnTo>
+                  <a:lnTo>
+                    <a:pt x="3644538" y="118714"/>
+                  </a:lnTo>
+                  <a:lnTo>
+                    <a:pt x="3566904" y="81729"/>
+                  </a:lnTo>
+                  <a:lnTo>
+                    <a:pt x="3489270" y="42894"/>
+                  </a:lnTo>
+                  <a:lnTo>
+                    <a:pt x="3411636" y="2116"/>
                   </a:lnTo>
                   <a:lnTo>
                     <a:pt x="3334002" y="0"/>
                   </a:lnTo>
                   <a:lnTo>
-                    <a:pt x="3256368" y="10342"/>
-                  </a:lnTo>
-                  <a:lnTo>
-                    <a:pt x="3178734" y="20561"/>
-                  </a:lnTo>
-                  <a:lnTo>
-                    <a:pt x="3101100" y="30658"/>
-                  </a:lnTo>
-                  <a:lnTo>
-                    <a:pt x="3023466" y="40633"/>
-                  </a:lnTo>
-                  <a:lnTo>
-                    <a:pt x="2945832" y="50489"/>
-                  </a:lnTo>
-                  <a:lnTo>
-                    <a:pt x="2868198" y="60227"/>
-                  </a:lnTo>
-                  <a:lnTo>
-                    <a:pt x="2790564" y="69847"/>
-                  </a:lnTo>
-                  <a:lnTo>
-                    <a:pt x="2712930" y="79353"/>
-                  </a:lnTo>
-                  <a:lnTo>
-                    <a:pt x="2635295" y="88744"/>
-                  </a:lnTo>
-                  <a:lnTo>
-                    <a:pt x="2557661" y="98023"/>
-                  </a:lnTo>
-                  <a:lnTo>
-                    <a:pt x="2480027" y="107191"/>
-                  </a:lnTo>
-                  <a:lnTo>
-                    <a:pt x="2402393" y="116249"/>
-                  </a:lnTo>
-                  <a:lnTo>
-                    <a:pt x="2324759" y="125198"/>
-                  </a:lnTo>
-                  <a:lnTo>
-                    <a:pt x="2247125" y="134040"/>
-                  </a:lnTo>
-                  <a:lnTo>
-                    <a:pt x="2169491" y="142776"/>
-                  </a:lnTo>
-                  <a:lnTo>
-                    <a:pt x="2091857" y="151407"/>
-                  </a:lnTo>
-                  <a:lnTo>
-                    <a:pt x="2014223" y="159934"/>
-                  </a:lnTo>
-                  <a:lnTo>
-                    <a:pt x="1936589" y="168360"/>
-                  </a:lnTo>
-                  <a:lnTo>
-                    <a:pt x="1858955" y="176684"/>
-                  </a:lnTo>
-                  <a:lnTo>
-                    <a:pt x="1781321" y="184909"/>
-                  </a:lnTo>
-                  <a:lnTo>
-                    <a:pt x="1703687" y="193035"/>
-                  </a:lnTo>
-                  <a:lnTo>
-                    <a:pt x="1626053" y="201063"/>
-                  </a:lnTo>
-                  <a:lnTo>
-                    <a:pt x="1548419" y="208995"/>
-                  </a:lnTo>
-                  <a:lnTo>
-                    <a:pt x="1470785" y="216833"/>
-                  </a:lnTo>
-                  <a:lnTo>
-                    <a:pt x="1393151" y="224576"/>
-                  </a:lnTo>
-                  <a:lnTo>
-                    <a:pt x="1315517" y="232226"/>
-                  </a:lnTo>
-                  <a:lnTo>
-                    <a:pt x="1237883" y="239785"/>
-                  </a:lnTo>
-                  <a:lnTo>
-                    <a:pt x="1160249" y="247253"/>
-                  </a:lnTo>
-                  <a:lnTo>
-                    <a:pt x="1082615" y="254631"/>
-                  </a:lnTo>
-                  <a:lnTo>
-                    <a:pt x="1004981" y="261921"/>
-                  </a:lnTo>
-                  <a:lnTo>
-                    <a:pt x="927346" y="269124"/>
-                  </a:lnTo>
-                  <a:lnTo>
-                    <a:pt x="849712" y="276240"/>
-                  </a:lnTo>
-                  <a:lnTo>
-                    <a:pt x="772078" y="283271"/>
-                  </a:lnTo>
-                  <a:lnTo>
-                    <a:pt x="694444" y="290218"/>
-                  </a:lnTo>
-                  <a:lnTo>
-                    <a:pt x="616810" y="297081"/>
-                  </a:lnTo>
-                  <a:lnTo>
-                    <a:pt x="539176" y="303862"/>
-                  </a:lnTo>
-                  <a:lnTo>
-                    <a:pt x="461542" y="310562"/>
-                  </a:lnTo>
-                  <a:lnTo>
-                    <a:pt x="383908" y="317181"/>
-                  </a:lnTo>
-                  <a:lnTo>
-                    <a:pt x="306274" y="323721"/>
-                  </a:lnTo>
-                  <a:lnTo>
-                    <a:pt x="228640" y="330183"/>
-                  </a:lnTo>
-                  <a:lnTo>
-                    <a:pt x="151006" y="336567"/>
-                  </a:lnTo>
-                  <a:lnTo>
-                    <a:pt x="73372" y="342875"/>
-                  </a:lnTo>
-                  <a:lnTo>
-                    <a:pt x="0" y="348765"/>
+                    <a:pt x="3256368" y="17135"/>
+                  </a:lnTo>
+                  <a:lnTo>
+                    <a:pt x="3178734" y="33929"/>
+                  </a:lnTo>
+                  <a:lnTo>
+                    <a:pt x="3101100" y="50387"/>
+                  </a:lnTo>
+                  <a:lnTo>
+                    <a:pt x="3023466" y="66516"/>
+                  </a:lnTo>
+                  <a:lnTo>
+                    <a:pt x="2945832" y="82323"/>
+                  </a:lnTo>
+                  <a:lnTo>
+                    <a:pt x="2868198" y="97815"/>
+                  </a:lnTo>
+                  <a:lnTo>
+                    <a:pt x="2790564" y="112997"/>
+                  </a:lnTo>
+                  <a:lnTo>
+                    <a:pt x="2712930" y="127876"/>
+                  </a:lnTo>
+                  <a:lnTo>
+                    <a:pt x="2635295" y="142457"/>
+                  </a:lnTo>
+                  <a:lnTo>
+                    <a:pt x="2557661" y="156748"/>
+                  </a:lnTo>
+                  <a:lnTo>
+                    <a:pt x="2480027" y="170753"/>
+                  </a:lnTo>
+                  <a:lnTo>
+                    <a:pt x="2402393" y="184478"/>
+                  </a:lnTo>
+                  <a:lnTo>
+                    <a:pt x="2324759" y="197929"/>
+                  </a:lnTo>
+                  <a:lnTo>
+                    <a:pt x="2247125" y="211112"/>
+                  </a:lnTo>
+                  <a:lnTo>
+                    <a:pt x="2169491" y="224031"/>
+                  </a:lnTo>
+                  <a:lnTo>
+                    <a:pt x="2091857" y="236693"/>
+                  </a:lnTo>
+                  <a:lnTo>
+                    <a:pt x="2014223" y="249101"/>
+                  </a:lnTo>
+                  <a:lnTo>
+                    <a:pt x="1936589" y="261261"/>
+                  </a:lnTo>
+                  <a:lnTo>
+                    <a:pt x="1858955" y="273179"/>
+                  </a:lnTo>
+                  <a:lnTo>
+                    <a:pt x="1781321" y="284859"/>
+                  </a:lnTo>
+                  <a:lnTo>
+                    <a:pt x="1703687" y="296305"/>
+                  </a:lnTo>
+                  <a:lnTo>
+                    <a:pt x="1626053" y="307523"/>
+                  </a:lnTo>
+                  <a:lnTo>
+                    <a:pt x="1548419" y="318517"/>
+                  </a:lnTo>
+                  <a:lnTo>
+                    <a:pt x="1470785" y="329291"/>
+                  </a:lnTo>
+                  <a:lnTo>
+                    <a:pt x="1393151" y="339850"/>
+                  </a:lnTo>
+                  <a:lnTo>
+                    <a:pt x="1315517" y="350198"/>
+                  </a:lnTo>
+                  <a:lnTo>
+                    <a:pt x="1237883" y="360339"/>
+                  </a:lnTo>
+                  <a:lnTo>
+                    <a:pt x="1160249" y="370278"/>
+                  </a:lnTo>
+                  <a:lnTo>
+                    <a:pt x="1082615" y="380018"/>
+                  </a:lnTo>
+                  <a:lnTo>
+                    <a:pt x="1004981" y="389564"/>
+                  </a:lnTo>
+                  <a:lnTo>
+                    <a:pt x="927346" y="398919"/>
+                  </a:lnTo>
+                  <a:lnTo>
+                    <a:pt x="849712" y="408088"/>
+                  </a:lnTo>
+                  <a:lnTo>
+                    <a:pt x="772078" y="417073"/>
+                  </a:lnTo>
+                  <a:lnTo>
+                    <a:pt x="694444" y="425879"/>
+                  </a:lnTo>
+                  <a:lnTo>
+                    <a:pt x="616810" y="434509"/>
+                  </a:lnTo>
+                  <a:lnTo>
+                    <a:pt x="539176" y="442966"/>
+                  </a:lnTo>
+                  <a:lnTo>
+                    <a:pt x="461542" y="451255"/>
+                  </a:lnTo>
+                  <a:lnTo>
+                    <a:pt x="383908" y="459378"/>
+                  </a:lnTo>
+                  <a:lnTo>
+                    <a:pt x="306274" y="467339"/>
+                  </a:lnTo>
+                  <a:lnTo>
+                    <a:pt x="228640" y="475140"/>
+                  </a:lnTo>
+                  <a:lnTo>
+                    <a:pt x="151006" y="482786"/>
+                  </a:lnTo>
+                  <a:lnTo>
+                    <a:pt x="73372" y="490280"/>
+                  </a:lnTo>
+                  <a:lnTo>
+                    <a:pt x="0" y="497220"/>
                   </a:lnTo>
                 </a:path>
               </a:pathLst>
@@ -4133,300 +4151,300 @@
           </p:nvSpPr>
           <p:spPr>
             <a:xfrm>
-              <a:off x="817517" y="3385348"/>
-              <a:ext cx="7370972" cy="1866346"/>
+              <a:off x="817517" y="3924949"/>
+              <a:ext cx="7370972" cy="1207292"/>
             </a:xfrm>
             <a:custGeom>
               <a:avLst/>
               <a:pathLst>
-                <a:path w="7370972" h="1866346">
+                <a:path w="7370972" h="1207292">
                   <a:moveTo>
                     <a:pt x="0" y="0"/>
                   </a:moveTo>
                   <a:lnTo>
-                    <a:pt x="73372" y="42343"/>
-                  </a:lnTo>
-                  <a:lnTo>
-                    <a:pt x="151006" y="86218"/>
-                  </a:lnTo>
-                  <a:lnTo>
-                    <a:pt x="228640" y="129187"/>
-                  </a:lnTo>
-                  <a:lnTo>
-                    <a:pt x="306274" y="171267"/>
-                  </a:lnTo>
-                  <a:lnTo>
-                    <a:pt x="383908" y="212476"/>
-                  </a:lnTo>
-                  <a:lnTo>
-                    <a:pt x="461542" y="252833"/>
-                  </a:lnTo>
-                  <a:lnTo>
-                    <a:pt x="539176" y="292356"/>
-                  </a:lnTo>
-                  <a:lnTo>
-                    <a:pt x="616810" y="331061"/>
-                  </a:lnTo>
-                  <a:lnTo>
-                    <a:pt x="694444" y="368966"/>
-                  </a:lnTo>
-                  <a:lnTo>
-                    <a:pt x="772078" y="406087"/>
-                  </a:lnTo>
-                  <a:lnTo>
-                    <a:pt x="849712" y="442440"/>
-                  </a:lnTo>
-                  <a:lnTo>
-                    <a:pt x="927346" y="478041"/>
-                  </a:lnTo>
-                  <a:lnTo>
-                    <a:pt x="1004981" y="512906"/>
-                  </a:lnTo>
-                  <a:lnTo>
-                    <a:pt x="1082615" y="547050"/>
-                  </a:lnTo>
-                  <a:lnTo>
-                    <a:pt x="1160249" y="580488"/>
-                  </a:lnTo>
-                  <a:lnTo>
-                    <a:pt x="1237883" y="613234"/>
-                  </a:lnTo>
-                  <a:lnTo>
-                    <a:pt x="1315517" y="645303"/>
-                  </a:lnTo>
-                  <a:lnTo>
-                    <a:pt x="1393151" y="676709"/>
-                  </a:lnTo>
-                  <a:lnTo>
-                    <a:pt x="1470785" y="707465"/>
-                  </a:lnTo>
-                  <a:lnTo>
-                    <a:pt x="1548419" y="737585"/>
-                  </a:lnTo>
-                  <a:lnTo>
-                    <a:pt x="1626053" y="767083"/>
-                  </a:lnTo>
-                  <a:lnTo>
-                    <a:pt x="1703687" y="795970"/>
-                  </a:lnTo>
-                  <a:lnTo>
-                    <a:pt x="1781321" y="824260"/>
-                  </a:lnTo>
-                  <a:lnTo>
-                    <a:pt x="1858955" y="851964"/>
-                  </a:lnTo>
-                  <a:lnTo>
-                    <a:pt x="1936589" y="879096"/>
-                  </a:lnTo>
-                  <a:lnTo>
-                    <a:pt x="2014223" y="905667"/>
-                  </a:lnTo>
-                  <a:lnTo>
-                    <a:pt x="2091857" y="931688"/>
-                  </a:lnTo>
-                  <a:lnTo>
-                    <a:pt x="2169491" y="957171"/>
-                  </a:lnTo>
-                  <a:lnTo>
-                    <a:pt x="2247125" y="982127"/>
-                  </a:lnTo>
-                  <a:lnTo>
-                    <a:pt x="2324759" y="1006566"/>
-                  </a:lnTo>
-                  <a:lnTo>
-                    <a:pt x="2402393" y="1030501"/>
-                  </a:lnTo>
-                  <a:lnTo>
-                    <a:pt x="2480027" y="1053940"/>
-                  </a:lnTo>
-                  <a:lnTo>
-                    <a:pt x="2557661" y="1076895"/>
-                  </a:lnTo>
-                  <a:lnTo>
-                    <a:pt x="2635295" y="1099375"/>
-                  </a:lnTo>
-                  <a:lnTo>
-                    <a:pt x="2712930" y="1121390"/>
-                  </a:lnTo>
-                  <a:lnTo>
-                    <a:pt x="2790564" y="1142949"/>
-                  </a:lnTo>
-                  <a:lnTo>
-                    <a:pt x="2868198" y="1164063"/>
-                  </a:lnTo>
-                  <a:lnTo>
-                    <a:pt x="2945832" y="1184740"/>
-                  </a:lnTo>
-                  <a:lnTo>
-                    <a:pt x="3023466" y="1204990"/>
-                  </a:lnTo>
-                  <a:lnTo>
-                    <a:pt x="3101100" y="1224820"/>
-                  </a:lnTo>
-                  <a:lnTo>
-                    <a:pt x="3178734" y="1244241"/>
-                  </a:lnTo>
-                  <a:lnTo>
-                    <a:pt x="3256368" y="1263260"/>
-                  </a:lnTo>
-                  <a:lnTo>
-                    <a:pt x="3334002" y="1281885"/>
-                  </a:lnTo>
-                  <a:lnTo>
-                    <a:pt x="3411636" y="1300126"/>
-                  </a:lnTo>
-                  <a:lnTo>
-                    <a:pt x="3489270" y="1317989"/>
-                  </a:lnTo>
-                  <a:lnTo>
-                    <a:pt x="3566904" y="1335483"/>
-                  </a:lnTo>
-                  <a:lnTo>
-                    <a:pt x="3644538" y="1352615"/>
-                  </a:lnTo>
-                  <a:lnTo>
-                    <a:pt x="3722172" y="1369392"/>
-                  </a:lnTo>
-                  <a:lnTo>
-                    <a:pt x="3799806" y="1385823"/>
-                  </a:lnTo>
-                  <a:lnTo>
-                    <a:pt x="3877440" y="1401914"/>
-                  </a:lnTo>
-                  <a:lnTo>
-                    <a:pt x="3955074" y="1417672"/>
-                  </a:lnTo>
-                  <a:lnTo>
-                    <a:pt x="4032708" y="1433104"/>
-                  </a:lnTo>
-                  <a:lnTo>
-                    <a:pt x="4110342" y="1448217"/>
-                  </a:lnTo>
-                  <a:lnTo>
-                    <a:pt x="4187976" y="1463017"/>
-                  </a:lnTo>
-                  <a:lnTo>
-                    <a:pt x="4265610" y="1477512"/>
-                  </a:lnTo>
-                  <a:lnTo>
-                    <a:pt x="4343244" y="1491706"/>
-                  </a:lnTo>
-                  <a:lnTo>
-                    <a:pt x="4420879" y="1505607"/>
-                  </a:lnTo>
-                  <a:lnTo>
-                    <a:pt x="4498513" y="1519221"/>
-                  </a:lnTo>
-                  <a:lnTo>
-                    <a:pt x="4576147" y="1532553"/>
-                  </a:lnTo>
-                  <a:lnTo>
-                    <a:pt x="4653781" y="1545609"/>
-                  </a:lnTo>
-                  <a:lnTo>
-                    <a:pt x="4731415" y="1558395"/>
-                  </a:lnTo>
-                  <a:lnTo>
-                    <a:pt x="4809049" y="1570917"/>
-                  </a:lnTo>
-                  <a:lnTo>
-                    <a:pt x="4886683" y="1583180"/>
-                  </a:lnTo>
-                  <a:lnTo>
-                    <a:pt x="4964317" y="1595189"/>
-                  </a:lnTo>
-                  <a:lnTo>
-                    <a:pt x="5041951" y="1606950"/>
-                  </a:lnTo>
-                  <a:lnTo>
-                    <a:pt x="5119585" y="1618468"/>
-                  </a:lnTo>
-                  <a:lnTo>
-                    <a:pt x="5197219" y="1629747"/>
-                  </a:lnTo>
-                  <a:lnTo>
-                    <a:pt x="5274853" y="1640793"/>
-                  </a:lnTo>
-                  <a:lnTo>
-                    <a:pt x="5352487" y="1651611"/>
-                  </a:lnTo>
-                  <a:lnTo>
-                    <a:pt x="5430121" y="1662205"/>
-                  </a:lnTo>
-                  <a:lnTo>
-                    <a:pt x="5507755" y="1672580"/>
-                  </a:lnTo>
-                  <a:lnTo>
-                    <a:pt x="5585389" y="1682740"/>
-                  </a:lnTo>
-                  <a:lnTo>
-                    <a:pt x="5663023" y="1692690"/>
-                  </a:lnTo>
-                  <a:lnTo>
-                    <a:pt x="5740657" y="1702435"/>
-                  </a:lnTo>
-                  <a:lnTo>
-                    <a:pt x="5818291" y="1711977"/>
-                  </a:lnTo>
-                  <a:lnTo>
-                    <a:pt x="5895925" y="1721323"/>
-                  </a:lnTo>
-                  <a:lnTo>
-                    <a:pt x="5973559" y="1730475"/>
-                  </a:lnTo>
-                  <a:lnTo>
-                    <a:pt x="6051193" y="1739438"/>
-                  </a:lnTo>
-                  <a:lnTo>
-                    <a:pt x="6128827" y="1748216"/>
-                  </a:lnTo>
-                  <a:lnTo>
-                    <a:pt x="6206462" y="1756812"/>
-                  </a:lnTo>
-                  <a:lnTo>
-                    <a:pt x="6284096" y="1765230"/>
-                  </a:lnTo>
-                  <a:lnTo>
-                    <a:pt x="6361730" y="1773474"/>
-                  </a:lnTo>
-                  <a:lnTo>
-                    <a:pt x="6439364" y="1781548"/>
-                  </a:lnTo>
-                  <a:lnTo>
-                    <a:pt x="6516998" y="1789455"/>
-                  </a:lnTo>
-                  <a:lnTo>
-                    <a:pt x="6594632" y="1797198"/>
-                  </a:lnTo>
-                  <a:lnTo>
-                    <a:pt x="6672266" y="1804781"/>
-                  </a:lnTo>
-                  <a:lnTo>
-                    <a:pt x="6749900" y="1812207"/>
-                  </a:lnTo>
-                  <a:lnTo>
-                    <a:pt x="6827534" y="1819480"/>
-                  </a:lnTo>
-                  <a:lnTo>
-                    <a:pt x="6905168" y="1826602"/>
-                  </a:lnTo>
-                  <a:lnTo>
-                    <a:pt x="6982802" y="1833577"/>
-                  </a:lnTo>
-                  <a:lnTo>
-                    <a:pt x="7060436" y="1840407"/>
-                  </a:lnTo>
-                  <a:lnTo>
-                    <a:pt x="7138070" y="1847097"/>
-                  </a:lnTo>
-                  <a:lnTo>
-                    <a:pt x="7215704" y="1853648"/>
-                  </a:lnTo>
-                  <a:lnTo>
-                    <a:pt x="7293338" y="1860063"/>
-                  </a:lnTo>
-                  <a:lnTo>
-                    <a:pt x="7370972" y="1866346"/>
+                    <a:pt x="73372" y="21845"/>
+                  </a:lnTo>
+                  <a:lnTo>
+                    <a:pt x="151006" y="44632"/>
+                  </a:lnTo>
+                  <a:lnTo>
+                    <a:pt x="228640" y="67094"/>
+                  </a:lnTo>
+                  <a:lnTo>
+                    <a:pt x="306274" y="89236"/>
+                  </a:lnTo>
+                  <a:lnTo>
+                    <a:pt x="383908" y="111064"/>
+                  </a:lnTo>
+                  <a:lnTo>
+                    <a:pt x="461542" y="132582"/>
+                  </a:lnTo>
+                  <a:lnTo>
+                    <a:pt x="539176" y="153793"/>
+                  </a:lnTo>
+                  <a:lnTo>
+                    <a:pt x="616810" y="174703"/>
+                  </a:lnTo>
+                  <a:lnTo>
+                    <a:pt x="694444" y="195315"/>
+                  </a:lnTo>
+                  <a:lnTo>
+                    <a:pt x="772078" y="215635"/>
+                  </a:lnTo>
+                  <a:lnTo>
+                    <a:pt x="849712" y="235665"/>
+                  </a:lnTo>
+                  <a:lnTo>
+                    <a:pt x="927346" y="255411"/>
+                  </a:lnTo>
+                  <a:lnTo>
+                    <a:pt x="1004981" y="274876"/>
+                  </a:lnTo>
+                  <a:lnTo>
+                    <a:pt x="1082615" y="294064"/>
+                  </a:lnTo>
+                  <a:lnTo>
+                    <a:pt x="1160249" y="312979"/>
+                  </a:lnTo>
+                  <a:lnTo>
+                    <a:pt x="1237883" y="331625"/>
+                  </a:lnTo>
+                  <a:lnTo>
+                    <a:pt x="1315517" y="350006"/>
+                  </a:lnTo>
+                  <a:lnTo>
+                    <a:pt x="1393151" y="368126"/>
+                  </a:lnTo>
+                  <a:lnTo>
+                    <a:pt x="1470785" y="385988"/>
+                  </a:lnTo>
+                  <a:lnTo>
+                    <a:pt x="1548419" y="403596"/>
+                  </a:lnTo>
+                  <a:lnTo>
+                    <a:pt x="1626053" y="420954"/>
+                  </a:lnTo>
+                  <a:lnTo>
+                    <a:pt x="1703687" y="438064"/>
+                  </a:lnTo>
+                  <a:lnTo>
+                    <a:pt x="1781321" y="454932"/>
+                  </a:lnTo>
+                  <a:lnTo>
+                    <a:pt x="1858955" y="471560"/>
+                  </a:lnTo>
+                  <a:lnTo>
+                    <a:pt x="1936589" y="487951"/>
+                  </a:lnTo>
+                  <a:lnTo>
+                    <a:pt x="2014223" y="504109"/>
+                  </a:lnTo>
+                  <a:lnTo>
+                    <a:pt x="2091857" y="520037"/>
+                  </a:lnTo>
+                  <a:lnTo>
+                    <a:pt x="2169491" y="535739"/>
+                  </a:lnTo>
+                  <a:lnTo>
+                    <a:pt x="2247125" y="551218"/>
+                  </a:lnTo>
+                  <a:lnTo>
+                    <a:pt x="2324759" y="566476"/>
+                  </a:lnTo>
+                  <a:lnTo>
+                    <a:pt x="2402393" y="581518"/>
+                  </a:lnTo>
+                  <a:lnTo>
+                    <a:pt x="2480027" y="596345"/>
+                  </a:lnTo>
+                  <a:lnTo>
+                    <a:pt x="2557661" y="610962"/>
+                  </a:lnTo>
+                  <a:lnTo>
+                    <a:pt x="2635295" y="625371"/>
+                  </a:lnTo>
+                  <a:lnTo>
+                    <a:pt x="2712930" y="639575"/>
+                  </a:lnTo>
+                  <a:lnTo>
+                    <a:pt x="2790564" y="653577"/>
+                  </a:lnTo>
+                  <a:lnTo>
+                    <a:pt x="2868198" y="667380"/>
+                  </a:lnTo>
+                  <a:lnTo>
+                    <a:pt x="2945832" y="680987"/>
+                  </a:lnTo>
+                  <a:lnTo>
+                    <a:pt x="3023466" y="694400"/>
+                  </a:lnTo>
+                  <a:lnTo>
+                    <a:pt x="3101100" y="707622"/>
+                  </a:lnTo>
+                  <a:lnTo>
+                    <a:pt x="3178734" y="720657"/>
+                  </a:lnTo>
+                  <a:lnTo>
+                    <a:pt x="3256368" y="733506"/>
+                  </a:lnTo>
+                  <a:lnTo>
+                    <a:pt x="3334002" y="746172"/>
+                  </a:lnTo>
+                  <a:lnTo>
+                    <a:pt x="3411636" y="758659"/>
+                  </a:lnTo>
+                  <a:lnTo>
+                    <a:pt x="3489270" y="770967"/>
+                  </a:lnTo>
+                  <a:lnTo>
+                    <a:pt x="3566904" y="783101"/>
+                  </a:lnTo>
+                  <a:lnTo>
+                    <a:pt x="3644538" y="795062"/>
+                  </a:lnTo>
+                  <a:lnTo>
+                    <a:pt x="3722172" y="806853"/>
+                  </a:lnTo>
+                  <a:lnTo>
+                    <a:pt x="3799806" y="818477"/>
+                  </a:lnTo>
+                  <a:lnTo>
+                    <a:pt x="3877440" y="829935"/>
+                  </a:lnTo>
+                  <a:lnTo>
+                    <a:pt x="3955074" y="841230"/>
+                  </a:lnTo>
+                  <a:lnTo>
+                    <a:pt x="4032708" y="852364"/>
+                  </a:lnTo>
+                  <a:lnTo>
+                    <a:pt x="4110342" y="863341"/>
+                  </a:lnTo>
+                  <a:lnTo>
+                    <a:pt x="4187976" y="874161"/>
+                  </a:lnTo>
+                  <a:lnTo>
+                    <a:pt x="4265610" y="884827"/>
+                  </a:lnTo>
+                  <a:lnTo>
+                    <a:pt x="4343244" y="895342"/>
+                  </a:lnTo>
+                  <a:lnTo>
+                    <a:pt x="4420879" y="905707"/>
+                  </a:lnTo>
+                  <a:lnTo>
+                    <a:pt x="4498513" y="915924"/>
+                  </a:lnTo>
+                  <a:lnTo>
+                    <a:pt x="4576147" y="925997"/>
+                  </a:lnTo>
+                  <a:lnTo>
+                    <a:pt x="4653781" y="935926"/>
+                  </a:lnTo>
+                  <a:lnTo>
+                    <a:pt x="4731415" y="945714"/>
+                  </a:lnTo>
+                  <a:lnTo>
+                    <a:pt x="4809049" y="955363"/>
+                  </a:lnTo>
+                  <a:lnTo>
+                    <a:pt x="4886683" y="964874"/>
+                  </a:lnTo>
+                  <a:lnTo>
+                    <a:pt x="4964317" y="974251"/>
+                  </a:lnTo>
+                  <a:lnTo>
+                    <a:pt x="5041951" y="983494"/>
+                  </a:lnTo>
+                  <a:lnTo>
+                    <a:pt x="5119585" y="992605"/>
+                  </a:lnTo>
+                  <a:lnTo>
+                    <a:pt x="5197219" y="1001587"/>
+                  </a:lnTo>
+                  <a:lnTo>
+                    <a:pt x="5274853" y="1010442"/>
+                  </a:lnTo>
+                  <a:lnTo>
+                    <a:pt x="5352487" y="1019170"/>
+                  </a:lnTo>
+                  <a:lnTo>
+                    <a:pt x="5430121" y="1027774"/>
+                  </a:lnTo>
+                  <a:lnTo>
+                    <a:pt x="5507755" y="1036256"/>
+                  </a:lnTo>
+                  <a:lnTo>
+                    <a:pt x="5585389" y="1044618"/>
+                  </a:lnTo>
+                  <a:lnTo>
+                    <a:pt x="5663023" y="1052860"/>
+                  </a:lnTo>
+                  <a:lnTo>
+                    <a:pt x="5740657" y="1060985"/>
+                  </a:lnTo>
+                  <a:lnTo>
+                    <a:pt x="5818291" y="1068995"/>
+                  </a:lnTo>
+                  <a:lnTo>
+                    <a:pt x="5895925" y="1076891"/>
+                  </a:lnTo>
+                  <a:lnTo>
+                    <a:pt x="5973559" y="1084674"/>
+                  </a:lnTo>
+                  <a:lnTo>
+                    <a:pt x="6051193" y="1092347"/>
+                  </a:lnTo>
+                  <a:lnTo>
+                    <a:pt x="6128827" y="1099911"/>
+                  </a:lnTo>
+                  <a:lnTo>
+                    <a:pt x="6206462" y="1107367"/>
+                  </a:lnTo>
+                  <a:lnTo>
+                    <a:pt x="6284096" y="1114717"/>
+                  </a:lnTo>
+                  <a:lnTo>
+                    <a:pt x="6361730" y="1121962"/>
+                  </a:lnTo>
+                  <a:lnTo>
+                    <a:pt x="6439364" y="1129105"/>
+                  </a:lnTo>
+                  <a:lnTo>
+                    <a:pt x="6516998" y="1136146"/>
+                  </a:lnTo>
+                  <a:lnTo>
+                    <a:pt x="6594632" y="1143087"/>
+                  </a:lnTo>
+                  <a:lnTo>
+                    <a:pt x="6672266" y="1149929"/>
+                  </a:lnTo>
+                  <a:lnTo>
+                    <a:pt x="6749900" y="1156674"/>
+                  </a:lnTo>
+                  <a:lnTo>
+                    <a:pt x="6827534" y="1163323"/>
+                  </a:lnTo>
+                  <a:lnTo>
+                    <a:pt x="6905168" y="1169877"/>
+                  </a:lnTo>
+                  <a:lnTo>
+                    <a:pt x="6982802" y="1176339"/>
+                  </a:lnTo>
+                  <a:lnTo>
+                    <a:pt x="7060436" y="1182708"/>
+                  </a:lnTo>
+                  <a:lnTo>
+                    <a:pt x="7138070" y="1188987"/>
+                  </a:lnTo>
+                  <a:lnTo>
+                    <a:pt x="7215704" y="1195176"/>
+                  </a:lnTo>
+                  <a:lnTo>
+                    <a:pt x="7293338" y="1201278"/>
+                  </a:lnTo>
+                  <a:lnTo>
+                    <a:pt x="7370972" y="1207292"/>
                   </a:lnTo>
                 </a:path>
               </a:pathLst>

--- a/docs/plots/carbo/jx_carbo_linsubhr_ratio_aki2.pptx
+++ b/docs/plots/carbo/jx_carbo_linsubhr_ratio_aki2.pptx
@@ -3178,10 +3178,10 @@
                     <a:pt x="5352487" y="2202951"/>
                   </a:lnTo>
                   <a:lnTo>
-                    <a:pt x="5430121" y="2173408"/>
-                  </a:lnTo>
-                  <a:lnTo>
-                    <a:pt x="5507755" y="2143262"/>
+                    <a:pt x="5430121" y="2173407"/>
+                  </a:lnTo>
+                  <a:lnTo>
+                    <a:pt x="5507755" y="2143261"/>
                   </a:lnTo>
                   <a:lnTo>
                     <a:pt x="5585389" y="2112501"/>
@@ -3217,7 +3217,7 @@
                     <a:pt x="6361730" y="1768224"/>
                   </a:lnTo>
                   <a:lnTo>
-                    <a:pt x="6439364" y="1729821"/>
+                    <a:pt x="6439364" y="1729820"/>
                   </a:lnTo>
                   <a:lnTo>
                     <a:pt x="6516998" y="1690635"/>
@@ -3232,28 +3232,28 @@
                     <a:pt x="6749900" y="1568220"/>
                   </a:lnTo>
                   <a:lnTo>
-                    <a:pt x="6827534" y="1525741"/>
-                  </a:lnTo>
-                  <a:lnTo>
-                    <a:pt x="6905168" y="1482396"/>
+                    <a:pt x="6827534" y="1525740"/>
+                  </a:lnTo>
+                  <a:lnTo>
+                    <a:pt x="6905168" y="1482395"/>
                   </a:lnTo>
                   <a:lnTo>
                     <a:pt x="6982802" y="1438167"/>
                   </a:lnTo>
                   <a:lnTo>
-                    <a:pt x="7060436" y="1393038"/>
+                    <a:pt x="7060436" y="1393037"/>
                   </a:lnTo>
                   <a:lnTo>
                     <a:pt x="7138070" y="1346988"/>
                   </a:lnTo>
                   <a:lnTo>
-                    <a:pt x="7215704" y="1300001"/>
+                    <a:pt x="7215704" y="1300000"/>
                   </a:lnTo>
                   <a:lnTo>
                     <a:pt x="7293338" y="1252055"/>
                   </a:lnTo>
                   <a:lnTo>
-                    <a:pt x="7370972" y="1203133"/>
+                    <a:pt x="7370972" y="1203132"/>
                   </a:lnTo>
                   <a:lnTo>
                     <a:pt x="7370972" y="3581666"/>
@@ -3508,7 +3508,7 @@
                     <a:pt x="927346" y="3193593"/>
                   </a:lnTo>
                   <a:lnTo>
-                    <a:pt x="849712" y="3202761"/>
+                    <a:pt x="849712" y="3202762"/>
                   </a:lnTo>
                   <a:lnTo>
                     <a:pt x="772078" y="3211747"/>
@@ -3526,7 +3526,7 @@
                     <a:pt x="461542" y="3245928"/>
                   </a:lnTo>
                   <a:lnTo>
-                    <a:pt x="383908" y="3254051"/>
+                    <a:pt x="383908" y="3254052"/>
                   </a:lnTo>
                   <a:lnTo>
                     <a:pt x="306274" y="3262012"/>
@@ -3629,7 +3629,7 @@
                     <a:pt x="1298018" y="2038212"/>
                   </a:lnTo>
                   <a:lnTo>
-                    <a:pt x="1375653" y="2115133"/>
+                    <a:pt x="1375652" y="2115133"/>
                   </a:lnTo>
                   <a:lnTo>
                     <a:pt x="1453287" y="2188389"/>
@@ -3695,7 +3695,7 @@
                     <a:pt x="3005967" y="2602886"/>
                   </a:lnTo>
                   <a:lnTo>
-                    <a:pt x="3083602" y="2581493"/>
+                    <a:pt x="3083601" y="2581493"/>
                   </a:lnTo>
                   <a:lnTo>
                     <a:pt x="3161236" y="2559663"/>
@@ -3743,10 +3743,10 @@
                     <a:pt x="4248112" y="2202951"/>
                   </a:lnTo>
                   <a:lnTo>
-                    <a:pt x="4325746" y="2173408"/>
-                  </a:lnTo>
-                  <a:lnTo>
-                    <a:pt x="4403380" y="2143262"/>
+                    <a:pt x="4325746" y="2173407"/>
+                  </a:lnTo>
+                  <a:lnTo>
+                    <a:pt x="4403380" y="2143261"/>
                   </a:lnTo>
                   <a:lnTo>
                     <a:pt x="4481014" y="2112501"/>
@@ -3761,7 +3761,7 @@
                     <a:pt x="4713916" y="2016408"/>
                   </a:lnTo>
                   <a:lnTo>
-                    <a:pt x="4791551" y="1983062"/>
+                    <a:pt x="4791550" y="1983062"/>
                   </a:lnTo>
                   <a:lnTo>
                     <a:pt x="4869185" y="1949037"/>
@@ -3782,7 +3782,7 @@
                     <a:pt x="5257355" y="1768224"/>
                   </a:lnTo>
                   <a:lnTo>
-                    <a:pt x="5334989" y="1729821"/>
+                    <a:pt x="5334989" y="1729820"/>
                   </a:lnTo>
                   <a:lnTo>
                     <a:pt x="5412623" y="1690635"/>
@@ -3797,28 +3797,28 @@
                     <a:pt x="5645525" y="1568220"/>
                   </a:lnTo>
                   <a:lnTo>
-                    <a:pt x="5723159" y="1525741"/>
-                  </a:lnTo>
-                  <a:lnTo>
-                    <a:pt x="5800793" y="1482396"/>
+                    <a:pt x="5723159" y="1525740"/>
+                  </a:lnTo>
+                  <a:lnTo>
+                    <a:pt x="5800793" y="1482395"/>
                   </a:lnTo>
                   <a:lnTo>
                     <a:pt x="5878427" y="1438167"/>
                   </a:lnTo>
                   <a:lnTo>
-                    <a:pt x="5956061" y="1393038"/>
+                    <a:pt x="5956061" y="1393037"/>
                   </a:lnTo>
                   <a:lnTo>
                     <a:pt x="6033695" y="1346988"/>
                   </a:lnTo>
                   <a:lnTo>
-                    <a:pt x="6111329" y="1300001"/>
+                    <a:pt x="6111329" y="1300000"/>
                   </a:lnTo>
                   <a:lnTo>
                     <a:pt x="6188963" y="1252055"/>
                   </a:lnTo>
                   <a:lnTo>
-                    <a:pt x="6266597" y="1203133"/>
+                    <a:pt x="6266597" y="1203132"/>
                   </a:lnTo>
                 </a:path>
               </a:pathLst>
@@ -4222,7 +4222,7 @@
                     <a:pt x="1548419" y="403596"/>
                   </a:lnTo>
                   <a:lnTo>
-                    <a:pt x="1626053" y="420954"/>
+                    <a:pt x="1626053" y="420953"/>
                   </a:lnTo>
                   <a:lnTo>
                     <a:pt x="1703687" y="438064"/>
@@ -4231,7 +4231,7 @@
                     <a:pt x="1781321" y="454932"/>
                   </a:lnTo>
                   <a:lnTo>
-                    <a:pt x="1858955" y="471560"/>
+                    <a:pt x="1858955" y="471559"/>
                   </a:lnTo>
                   <a:lnTo>
                     <a:pt x="1936589" y="487951"/>
@@ -4306,7 +4306,7 @@
                     <a:pt x="3722172" y="806853"/>
                   </a:lnTo>
                   <a:lnTo>
-                    <a:pt x="3799806" y="818477"/>
+                    <a:pt x="3799806" y="818476"/>
                   </a:lnTo>
                   <a:lnTo>
                     <a:pt x="3877440" y="829935"/>
@@ -4375,7 +4375,7 @@
                     <a:pt x="5507755" y="1036256"/>
                   </a:lnTo>
                   <a:lnTo>
-                    <a:pt x="5585389" y="1044618"/>
+                    <a:pt x="5585389" y="1044617"/>
                   </a:lnTo>
                   <a:lnTo>
                     <a:pt x="5663023" y="1052860"/>
@@ -4387,7 +4387,7 @@
                     <a:pt x="5818291" y="1068995"/>
                   </a:lnTo>
                   <a:lnTo>
-                    <a:pt x="5895925" y="1076891"/>
+                    <a:pt x="5895925" y="1076890"/>
                   </a:lnTo>
                   <a:lnTo>
                     <a:pt x="5973559" y="1084674"/>
@@ -4396,7 +4396,7 @@
                     <a:pt x="6051193" y="1092347"/>
                   </a:lnTo>
                   <a:lnTo>
-                    <a:pt x="6128827" y="1099911"/>
+                    <a:pt x="6128827" y="1099910"/>
                   </a:lnTo>
                   <a:lnTo>
                     <a:pt x="6206462" y="1107367"/>
@@ -4429,7 +4429,7 @@
                     <a:pt x="6905168" y="1169877"/>
                   </a:lnTo>
                   <a:lnTo>
-                    <a:pt x="6982802" y="1176339"/>
+                    <a:pt x="6982802" y="1176338"/>
                   </a:lnTo>
                   <a:lnTo>
                     <a:pt x="7060436" y="1182708"/>

--- a/docs/plots/carbo/jx_carbo_linsubhr_ratio_aki2.pptx
+++ b/docs/plots/carbo/jx_carbo_linsubhr_ratio_aki2.pptx
@@ -2271,7 +2271,7 @@
           </p:nvSpPr>
           <p:spPr>
             <a:xfrm>
-              <a:off x="817517" y="5114368"/>
+              <a:off x="817517" y="5142518"/>
               <a:ext cx="7799693" cy="0"/>
             </a:xfrm>
             <a:custGeom>
@@ -2314,7 +2314,7 @@
           </p:nvSpPr>
           <p:spPr>
             <a:xfrm>
-              <a:off x="817517" y="4244691"/>
+              <a:off x="817517" y="4313054"/>
               <a:ext cx="7799693" cy="0"/>
             </a:xfrm>
             <a:custGeom>
@@ -2357,7 +2357,7 @@
           </p:nvSpPr>
           <p:spPr>
             <a:xfrm>
-              <a:off x="817517" y="3375014"/>
+              <a:off x="817517" y="3483591"/>
               <a:ext cx="7799693" cy="0"/>
             </a:xfrm>
             <a:custGeom>
@@ -2400,7 +2400,7 @@
           </p:nvSpPr>
           <p:spPr>
             <a:xfrm>
-              <a:off x="817517" y="2505337"/>
+              <a:off x="817517" y="2654127"/>
               <a:ext cx="7799693" cy="0"/>
             </a:xfrm>
             <a:custGeom>
@@ -2443,15 +2443,15 @@
           </p:nvSpPr>
           <p:spPr>
             <a:xfrm>
-              <a:off x="1615213" y="1896563"/>
-              <a:ext cx="0" cy="3826579"/>
+              <a:off x="1615213" y="2073503"/>
+              <a:ext cx="0" cy="3649639"/>
             </a:xfrm>
             <a:custGeom>
               <a:avLst/>
               <a:pathLst>
-                <a:path w="0" h="3826579">
+                <a:path w="0" h="3649639">
                   <a:moveTo>
-                    <a:pt x="0" y="3826579"/>
+                    <a:pt x="0" y="3649639"/>
                   </a:moveTo>
                   <a:lnTo>
                     <a:pt x="0" y="0"/>
@@ -2486,15 +2486,15 @@
           </p:nvSpPr>
           <p:spPr>
             <a:xfrm>
-              <a:off x="3387871" y="1896563"/>
-              <a:ext cx="0" cy="3826579"/>
+              <a:off x="3387871" y="2073503"/>
+              <a:ext cx="0" cy="3649639"/>
             </a:xfrm>
             <a:custGeom>
               <a:avLst/>
               <a:pathLst>
-                <a:path w="0" h="3826579">
+                <a:path w="0" h="3649639">
                   <a:moveTo>
-                    <a:pt x="0" y="3826579"/>
+                    <a:pt x="0" y="3649639"/>
                   </a:moveTo>
                   <a:lnTo>
                     <a:pt x="0" y="0"/>
@@ -2529,15 +2529,15 @@
           </p:nvSpPr>
           <p:spPr>
             <a:xfrm>
-              <a:off x="5160528" y="1896563"/>
-              <a:ext cx="0" cy="3826579"/>
+              <a:off x="5160528" y="2073503"/>
+              <a:ext cx="0" cy="3649639"/>
             </a:xfrm>
             <a:custGeom>
               <a:avLst/>
               <a:pathLst>
-                <a:path w="0" h="3826579">
+                <a:path w="0" h="3649639">
                   <a:moveTo>
-                    <a:pt x="0" y="3826579"/>
+                    <a:pt x="0" y="3649639"/>
                   </a:moveTo>
                   <a:lnTo>
                     <a:pt x="0" y="0"/>
@@ -2572,15 +2572,15 @@
           </p:nvSpPr>
           <p:spPr>
             <a:xfrm>
-              <a:off x="6933186" y="1896563"/>
-              <a:ext cx="0" cy="3826579"/>
+              <a:off x="6933186" y="2073503"/>
+              <a:ext cx="0" cy="3649639"/>
             </a:xfrm>
             <a:custGeom>
               <a:avLst/>
               <a:pathLst>
-                <a:path w="0" h="3826579">
+                <a:path w="0" h="3649639">
                   <a:moveTo>
-                    <a:pt x="0" y="3826579"/>
+                    <a:pt x="0" y="3649639"/>
                   </a:moveTo>
                   <a:lnTo>
                     <a:pt x="0" y="0"/>
@@ -2615,7 +2615,7 @@
           </p:nvSpPr>
           <p:spPr>
             <a:xfrm>
-              <a:off x="817517" y="5549207"/>
+              <a:off x="817517" y="5557249"/>
               <a:ext cx="7799693" cy="0"/>
             </a:xfrm>
             <a:custGeom>
@@ -2658,7 +2658,7 @@
           </p:nvSpPr>
           <p:spPr>
             <a:xfrm>
-              <a:off x="817517" y="4679530"/>
+              <a:off x="817517" y="4727786"/>
               <a:ext cx="7799693" cy="0"/>
             </a:xfrm>
             <a:custGeom>
@@ -2701,7 +2701,7 @@
           </p:nvSpPr>
           <p:spPr>
             <a:xfrm>
-              <a:off x="817517" y="3809853"/>
+              <a:off x="817517" y="3898322"/>
               <a:ext cx="7799693" cy="0"/>
             </a:xfrm>
             <a:custGeom>
@@ -2744,7 +2744,7 @@
           </p:nvSpPr>
           <p:spPr>
             <a:xfrm>
-              <a:off x="817517" y="2940175"/>
+              <a:off x="817517" y="3068859"/>
               <a:ext cx="7799693" cy="0"/>
             </a:xfrm>
             <a:custGeom>
@@ -2787,7 +2787,7 @@
           </p:nvSpPr>
           <p:spPr>
             <a:xfrm>
-              <a:off x="817517" y="2070498"/>
+              <a:off x="817517" y="2239395"/>
               <a:ext cx="7799693" cy="0"/>
             </a:xfrm>
             <a:custGeom>
@@ -2830,15 +2830,15 @@
           </p:nvSpPr>
           <p:spPr>
             <a:xfrm>
-              <a:off x="2501542" y="1896563"/>
-              <a:ext cx="0" cy="3826579"/>
+              <a:off x="2501542" y="2073503"/>
+              <a:ext cx="0" cy="3649639"/>
             </a:xfrm>
             <a:custGeom>
               <a:avLst/>
               <a:pathLst>
-                <a:path w="0" h="3826579">
+                <a:path w="0" h="3649639">
                   <a:moveTo>
-                    <a:pt x="0" y="3826579"/>
+                    <a:pt x="0" y="3649639"/>
                   </a:moveTo>
                   <a:lnTo>
                     <a:pt x="0" y="0"/>
@@ -2873,15 +2873,15 @@
           </p:nvSpPr>
           <p:spPr>
             <a:xfrm>
-              <a:off x="4274200" y="1896563"/>
-              <a:ext cx="0" cy="3826579"/>
+              <a:off x="4274200" y="2073503"/>
+              <a:ext cx="0" cy="3649639"/>
             </a:xfrm>
             <a:custGeom>
               <a:avLst/>
               <a:pathLst>
-                <a:path w="0" h="3826579">
+                <a:path w="0" h="3649639">
                   <a:moveTo>
-                    <a:pt x="0" y="3826579"/>
+                    <a:pt x="0" y="3649639"/>
                   </a:moveTo>
                   <a:lnTo>
                     <a:pt x="0" y="0"/>
@@ -2916,15 +2916,15 @@
           </p:nvSpPr>
           <p:spPr>
             <a:xfrm>
-              <a:off x="6046857" y="1896563"/>
-              <a:ext cx="0" cy="3826579"/>
+              <a:off x="6046857" y="2073503"/>
+              <a:ext cx="0" cy="3649639"/>
             </a:xfrm>
             <a:custGeom>
               <a:avLst/>
               <a:pathLst>
-                <a:path w="0" h="3826579">
+                <a:path w="0" h="3649639">
                   <a:moveTo>
-                    <a:pt x="0" y="3826579"/>
+                    <a:pt x="0" y="3649639"/>
                   </a:moveTo>
                   <a:lnTo>
                     <a:pt x="0" y="0"/>
@@ -2959,15 +2959,15 @@
           </p:nvSpPr>
           <p:spPr>
             <a:xfrm>
-              <a:off x="7819515" y="1896563"/>
-              <a:ext cx="0" cy="3826579"/>
+              <a:off x="7819515" y="2073503"/>
+              <a:ext cx="0" cy="3649639"/>
             </a:xfrm>
             <a:custGeom>
               <a:avLst/>
               <a:pathLst>
-                <a:path w="0" h="3826579">
+                <a:path w="0" h="3649639">
                   <a:moveTo>
-                    <a:pt x="0" y="3826579"/>
+                    <a:pt x="0" y="3649639"/>
                   </a:moveTo>
                   <a:lnTo>
                     <a:pt x="0" y="0"/>
@@ -3002,546 +3002,546 @@
           </p:nvSpPr>
           <p:spPr>
             <a:xfrm>
-              <a:off x="817517" y="1896563"/>
-              <a:ext cx="7370972" cy="3581666"/>
+              <a:off x="817517" y="2073503"/>
+              <a:ext cx="7370972" cy="3416051"/>
             </a:xfrm>
             <a:custGeom>
               <a:avLst/>
               <a:pathLst>
-                <a:path w="7370972" h="3581666">
+                <a:path w="7370972" h="3416051">
                   <a:moveTo>
                     <a:pt x="1104374" y="0"/>
                   </a:moveTo>
                   <a:lnTo>
-                    <a:pt x="1160249" y="126949"/>
-                  </a:lnTo>
-                  <a:lnTo>
-                    <a:pt x="1237883" y="294934"/>
-                  </a:lnTo>
-                  <a:lnTo>
-                    <a:pt x="1315517" y="454915"/>
-                  </a:lnTo>
-                  <a:lnTo>
-                    <a:pt x="1393151" y="607274"/>
-                  </a:lnTo>
-                  <a:lnTo>
-                    <a:pt x="1470785" y="752374"/>
-                  </a:lnTo>
-                  <a:lnTo>
-                    <a:pt x="1548419" y="890560"/>
-                  </a:lnTo>
-                  <a:lnTo>
-                    <a:pt x="1626053" y="1022162"/>
-                  </a:lnTo>
-                  <a:lnTo>
-                    <a:pt x="1703687" y="1147494"/>
-                  </a:lnTo>
-                  <a:lnTo>
-                    <a:pt x="1781321" y="1266854"/>
-                  </a:lnTo>
-                  <a:lnTo>
-                    <a:pt x="1858955" y="1380527"/>
-                  </a:lnTo>
-                  <a:lnTo>
-                    <a:pt x="1936589" y="1488784"/>
-                  </a:lnTo>
-                  <a:lnTo>
-                    <a:pt x="2014223" y="1591883"/>
-                  </a:lnTo>
-                  <a:lnTo>
-                    <a:pt x="2091857" y="1690070"/>
-                  </a:lnTo>
-                  <a:lnTo>
-                    <a:pt x="2169491" y="1783579"/>
-                  </a:lnTo>
-                  <a:lnTo>
-                    <a:pt x="2247125" y="1872632"/>
-                  </a:lnTo>
-                  <a:lnTo>
-                    <a:pt x="2324759" y="1957442"/>
-                  </a:lnTo>
-                  <a:lnTo>
-                    <a:pt x="2402393" y="2038212"/>
-                  </a:lnTo>
-                  <a:lnTo>
-                    <a:pt x="2480027" y="2115133"/>
-                  </a:lnTo>
-                  <a:lnTo>
-                    <a:pt x="2557661" y="2188389"/>
-                  </a:lnTo>
-                  <a:lnTo>
-                    <a:pt x="2635295" y="2258155"/>
-                  </a:lnTo>
-                  <a:lnTo>
-                    <a:pt x="2712930" y="2324597"/>
-                  </a:lnTo>
-                  <a:lnTo>
-                    <a:pt x="2790564" y="2387873"/>
-                  </a:lnTo>
-                  <a:lnTo>
-                    <a:pt x="2868198" y="2448134"/>
-                  </a:lnTo>
-                  <a:lnTo>
-                    <a:pt x="2945832" y="2505524"/>
-                  </a:lnTo>
-                  <a:lnTo>
-                    <a:pt x="3023466" y="2560179"/>
-                  </a:lnTo>
-                  <a:lnTo>
-                    <a:pt x="3101100" y="2612231"/>
-                  </a:lnTo>
-                  <a:lnTo>
-                    <a:pt x="3178734" y="2661802"/>
-                  </a:lnTo>
-                  <a:lnTo>
-                    <a:pt x="3256368" y="2709012"/>
-                  </a:lnTo>
-                  <a:lnTo>
-                    <a:pt x="3334002" y="2753972"/>
-                  </a:lnTo>
-                  <a:lnTo>
-                    <a:pt x="3411636" y="2777188"/>
-                  </a:lnTo>
-                  <a:lnTo>
-                    <a:pt x="3489270" y="2759347"/>
-                  </a:lnTo>
-                  <a:lnTo>
-                    <a:pt x="3566904" y="2741142"/>
-                  </a:lnTo>
-                  <a:lnTo>
-                    <a:pt x="3644538" y="2722566"/>
-                  </a:lnTo>
-                  <a:lnTo>
-                    <a:pt x="3722172" y="2703612"/>
-                  </a:lnTo>
-                  <a:lnTo>
-                    <a:pt x="3799806" y="2684271"/>
-                  </a:lnTo>
-                  <a:lnTo>
-                    <a:pt x="3877440" y="2664537"/>
-                  </a:lnTo>
-                  <a:lnTo>
-                    <a:pt x="3955074" y="2644400"/>
-                  </a:lnTo>
-                  <a:lnTo>
-                    <a:pt x="4032708" y="2623852"/>
-                  </a:lnTo>
-                  <a:lnTo>
-                    <a:pt x="4110342" y="2602886"/>
-                  </a:lnTo>
-                  <a:lnTo>
-                    <a:pt x="4187976" y="2581493"/>
-                  </a:lnTo>
-                  <a:lnTo>
-                    <a:pt x="4265610" y="2559663"/>
-                  </a:lnTo>
-                  <a:lnTo>
-                    <a:pt x="4343244" y="2537389"/>
-                  </a:lnTo>
-                  <a:lnTo>
-                    <a:pt x="4420879" y="2514661"/>
-                  </a:lnTo>
-                  <a:lnTo>
-                    <a:pt x="4498513" y="2491469"/>
-                  </a:lnTo>
-                  <a:lnTo>
-                    <a:pt x="4576147" y="2467805"/>
-                  </a:lnTo>
-                  <a:lnTo>
-                    <a:pt x="4653781" y="2443659"/>
-                  </a:lnTo>
-                  <a:lnTo>
-                    <a:pt x="4731415" y="2419021"/>
-                  </a:lnTo>
-                  <a:lnTo>
-                    <a:pt x="4809049" y="2393880"/>
-                  </a:lnTo>
-                  <a:lnTo>
-                    <a:pt x="4886683" y="2368227"/>
-                  </a:lnTo>
-                  <a:lnTo>
-                    <a:pt x="4964317" y="2342052"/>
-                  </a:lnTo>
-                  <a:lnTo>
-                    <a:pt x="5041951" y="2315343"/>
-                  </a:lnTo>
-                  <a:lnTo>
-                    <a:pt x="5119585" y="2288089"/>
-                  </a:lnTo>
-                  <a:lnTo>
-                    <a:pt x="5197219" y="2260281"/>
-                  </a:lnTo>
-                  <a:lnTo>
-                    <a:pt x="5274853" y="2231905"/>
-                  </a:lnTo>
-                  <a:lnTo>
-                    <a:pt x="5352487" y="2202951"/>
-                  </a:lnTo>
-                  <a:lnTo>
-                    <a:pt x="5430121" y="2173407"/>
-                  </a:lnTo>
-                  <a:lnTo>
-                    <a:pt x="5507755" y="2143261"/>
-                  </a:lnTo>
-                  <a:lnTo>
-                    <a:pt x="5585389" y="2112501"/>
-                  </a:lnTo>
-                  <a:lnTo>
-                    <a:pt x="5663023" y="2081114"/>
-                  </a:lnTo>
-                  <a:lnTo>
-                    <a:pt x="5740657" y="2049087"/>
-                  </a:lnTo>
-                  <a:lnTo>
-                    <a:pt x="5818291" y="2016408"/>
-                  </a:lnTo>
-                  <a:lnTo>
-                    <a:pt x="5895925" y="1983062"/>
-                  </a:lnTo>
-                  <a:lnTo>
-                    <a:pt x="5973559" y="1949037"/>
-                  </a:lnTo>
-                  <a:lnTo>
-                    <a:pt x="6051193" y="1914319"/>
-                  </a:lnTo>
-                  <a:lnTo>
-                    <a:pt x="6128827" y="1878893"/>
-                  </a:lnTo>
-                  <a:lnTo>
-                    <a:pt x="6206462" y="1842745"/>
-                  </a:lnTo>
-                  <a:lnTo>
-                    <a:pt x="6284096" y="1805860"/>
-                  </a:lnTo>
-                  <a:lnTo>
-                    <a:pt x="6361730" y="1768224"/>
-                  </a:lnTo>
-                  <a:lnTo>
-                    <a:pt x="6439364" y="1729820"/>
-                  </a:lnTo>
-                  <a:lnTo>
-                    <a:pt x="6516998" y="1690635"/>
-                  </a:lnTo>
-                  <a:lnTo>
-                    <a:pt x="6594632" y="1650650"/>
-                  </a:lnTo>
-                  <a:lnTo>
-                    <a:pt x="6672266" y="1609851"/>
-                  </a:lnTo>
-                  <a:lnTo>
-                    <a:pt x="6749900" y="1568220"/>
-                  </a:lnTo>
-                  <a:lnTo>
-                    <a:pt x="6827534" y="1525740"/>
-                  </a:lnTo>
-                  <a:lnTo>
-                    <a:pt x="6905168" y="1482395"/>
-                  </a:lnTo>
-                  <a:lnTo>
-                    <a:pt x="6982802" y="1438167"/>
-                  </a:lnTo>
-                  <a:lnTo>
-                    <a:pt x="7060436" y="1393037"/>
-                  </a:lnTo>
-                  <a:lnTo>
-                    <a:pt x="7138070" y="1346988"/>
-                  </a:lnTo>
-                  <a:lnTo>
-                    <a:pt x="7215704" y="1300000"/>
-                  </a:lnTo>
-                  <a:lnTo>
-                    <a:pt x="7293338" y="1252055"/>
-                  </a:lnTo>
-                  <a:lnTo>
-                    <a:pt x="7370972" y="1203132"/>
-                  </a:lnTo>
-                  <a:lnTo>
-                    <a:pt x="7370972" y="3581666"/>
-                  </a:lnTo>
-                  <a:lnTo>
-                    <a:pt x="7293338" y="3578115"/>
-                  </a:lnTo>
-                  <a:lnTo>
-                    <a:pt x="7215704" y="3574386"/>
-                  </a:lnTo>
-                  <a:lnTo>
-                    <a:pt x="7138070" y="3570471"/>
-                  </a:lnTo>
-                  <a:lnTo>
-                    <a:pt x="7060436" y="3566360"/>
-                  </a:lnTo>
-                  <a:lnTo>
-                    <a:pt x="6982802" y="3562044"/>
-                  </a:lnTo>
-                  <a:lnTo>
-                    <a:pt x="6905168" y="3557511"/>
-                  </a:lnTo>
-                  <a:lnTo>
-                    <a:pt x="6827534" y="3552751"/>
-                  </a:lnTo>
-                  <a:lnTo>
-                    <a:pt x="6749900" y="3547754"/>
-                  </a:lnTo>
-                  <a:lnTo>
-                    <a:pt x="6672266" y="3542506"/>
-                  </a:lnTo>
-                  <a:lnTo>
-                    <a:pt x="6594632" y="3536996"/>
-                  </a:lnTo>
-                  <a:lnTo>
-                    <a:pt x="6516998" y="3531210"/>
-                  </a:lnTo>
-                  <a:lnTo>
-                    <a:pt x="6439364" y="3525135"/>
-                  </a:lnTo>
-                  <a:lnTo>
-                    <a:pt x="6361730" y="3518756"/>
-                  </a:lnTo>
-                  <a:lnTo>
-                    <a:pt x="6284096" y="3512058"/>
-                  </a:lnTo>
-                  <a:lnTo>
-                    <a:pt x="6206462" y="3505024"/>
-                  </a:lnTo>
-                  <a:lnTo>
-                    <a:pt x="6128827" y="3497639"/>
-                  </a:lnTo>
-                  <a:lnTo>
-                    <a:pt x="6051193" y="3489884"/>
-                  </a:lnTo>
-                  <a:lnTo>
-                    <a:pt x="5973559" y="3481741"/>
-                  </a:lnTo>
-                  <a:lnTo>
-                    <a:pt x="5895925" y="3473191"/>
-                  </a:lnTo>
-                  <a:lnTo>
-                    <a:pt x="5818291" y="3464213"/>
-                  </a:lnTo>
-                  <a:lnTo>
-                    <a:pt x="5740657" y="3454786"/>
-                  </a:lnTo>
-                  <a:lnTo>
-                    <a:pt x="5663023" y="3444887"/>
-                  </a:lnTo>
-                  <a:lnTo>
-                    <a:pt x="5585389" y="3434493"/>
-                  </a:lnTo>
-                  <a:lnTo>
-                    <a:pt x="5507755" y="3423579"/>
-                  </a:lnTo>
-                  <a:lnTo>
-                    <a:pt x="5430121" y="3412119"/>
-                  </a:lnTo>
-                  <a:lnTo>
-                    <a:pt x="5352487" y="3400086"/>
-                  </a:lnTo>
-                  <a:lnTo>
-                    <a:pt x="5274853" y="3387451"/>
-                  </a:lnTo>
-                  <a:lnTo>
-                    <a:pt x="5197219" y="3374183"/>
-                  </a:lnTo>
-                  <a:lnTo>
-                    <a:pt x="5119585" y="3360252"/>
-                  </a:lnTo>
-                  <a:lnTo>
-                    <a:pt x="5041951" y="3345624"/>
-                  </a:lnTo>
-                  <a:lnTo>
-                    <a:pt x="4964317" y="3330263"/>
-                  </a:lnTo>
-                  <a:lnTo>
-                    <a:pt x="4886683" y="3314135"/>
-                  </a:lnTo>
-                  <a:lnTo>
-                    <a:pt x="4809049" y="3297199"/>
-                  </a:lnTo>
-                  <a:lnTo>
-                    <a:pt x="4731415" y="3279417"/>
-                  </a:lnTo>
-                  <a:lnTo>
-                    <a:pt x="4653781" y="3260744"/>
-                  </a:lnTo>
-                  <a:lnTo>
-                    <a:pt x="4576147" y="3241138"/>
-                  </a:lnTo>
-                  <a:lnTo>
-                    <a:pt x="4498513" y="3220550"/>
-                  </a:lnTo>
-                  <a:lnTo>
-                    <a:pt x="4420879" y="3198933"/>
-                  </a:lnTo>
-                  <a:lnTo>
-                    <a:pt x="4343244" y="3176234"/>
-                  </a:lnTo>
-                  <a:lnTo>
-                    <a:pt x="4265610" y="3152399"/>
-                  </a:lnTo>
-                  <a:lnTo>
-                    <a:pt x="4187976" y="3127372"/>
-                  </a:lnTo>
-                  <a:lnTo>
-                    <a:pt x="4110342" y="3101093"/>
-                  </a:lnTo>
-                  <a:lnTo>
-                    <a:pt x="4032708" y="3073499"/>
-                  </a:lnTo>
-                  <a:lnTo>
-                    <a:pt x="3955074" y="3044525"/>
-                  </a:lnTo>
-                  <a:lnTo>
-                    <a:pt x="3877440" y="3014101"/>
-                  </a:lnTo>
-                  <a:lnTo>
-                    <a:pt x="3799806" y="2982155"/>
-                  </a:lnTo>
-                  <a:lnTo>
-                    <a:pt x="3722172" y="2948610"/>
-                  </a:lnTo>
-                  <a:lnTo>
-                    <a:pt x="3644538" y="2913388"/>
-                  </a:lnTo>
-                  <a:lnTo>
-                    <a:pt x="3566904" y="2876403"/>
-                  </a:lnTo>
-                  <a:lnTo>
-                    <a:pt x="3489270" y="2837568"/>
-                  </a:lnTo>
-                  <a:lnTo>
-                    <a:pt x="3411636" y="2796790"/>
-                  </a:lnTo>
-                  <a:lnTo>
-                    <a:pt x="3334002" y="2794673"/>
-                  </a:lnTo>
-                  <a:lnTo>
-                    <a:pt x="3256368" y="2811809"/>
-                  </a:lnTo>
-                  <a:lnTo>
-                    <a:pt x="3178734" y="2828602"/>
-                  </a:lnTo>
-                  <a:lnTo>
-                    <a:pt x="3101100" y="2845060"/>
-                  </a:lnTo>
-                  <a:lnTo>
-                    <a:pt x="3023466" y="2861190"/>
-                  </a:lnTo>
-                  <a:lnTo>
-                    <a:pt x="2945832" y="2876997"/>
-                  </a:lnTo>
-                  <a:lnTo>
-                    <a:pt x="2868198" y="2892488"/>
-                  </a:lnTo>
-                  <a:lnTo>
-                    <a:pt x="2790564" y="2907671"/>
-                  </a:lnTo>
-                  <a:lnTo>
-                    <a:pt x="2712930" y="2922549"/>
-                  </a:lnTo>
-                  <a:lnTo>
-                    <a:pt x="2635295" y="2937131"/>
-                  </a:lnTo>
-                  <a:lnTo>
-                    <a:pt x="2557661" y="2951422"/>
-                  </a:lnTo>
-                  <a:lnTo>
-                    <a:pt x="2480027" y="2965427"/>
-                  </a:lnTo>
-                  <a:lnTo>
-                    <a:pt x="2402393" y="2979152"/>
-                  </a:lnTo>
-                  <a:lnTo>
-                    <a:pt x="2324759" y="2992603"/>
-                  </a:lnTo>
-                  <a:lnTo>
-                    <a:pt x="2247125" y="3005786"/>
-                  </a:lnTo>
-                  <a:lnTo>
-                    <a:pt x="2169491" y="3018705"/>
-                  </a:lnTo>
-                  <a:lnTo>
-                    <a:pt x="2091857" y="3031366"/>
-                  </a:lnTo>
-                  <a:lnTo>
-                    <a:pt x="2014223" y="3043775"/>
-                  </a:lnTo>
-                  <a:lnTo>
-                    <a:pt x="1936589" y="3055935"/>
-                  </a:lnTo>
-                  <a:lnTo>
-                    <a:pt x="1858955" y="3067853"/>
-                  </a:lnTo>
-                  <a:lnTo>
-                    <a:pt x="1781321" y="3079533"/>
-                  </a:lnTo>
-                  <a:lnTo>
-                    <a:pt x="1703687" y="3090979"/>
-                  </a:lnTo>
-                  <a:lnTo>
-                    <a:pt x="1626053" y="3102197"/>
-                  </a:lnTo>
-                  <a:lnTo>
-                    <a:pt x="1548419" y="3113190"/>
-                  </a:lnTo>
-                  <a:lnTo>
-                    <a:pt x="1470785" y="3123965"/>
-                  </a:lnTo>
-                  <a:lnTo>
-                    <a:pt x="1393151" y="3134524"/>
-                  </a:lnTo>
-                  <a:lnTo>
-                    <a:pt x="1315517" y="3144872"/>
-                  </a:lnTo>
-                  <a:lnTo>
-                    <a:pt x="1237883" y="3155013"/>
-                  </a:lnTo>
-                  <a:lnTo>
-                    <a:pt x="1160249" y="3164952"/>
-                  </a:lnTo>
-                  <a:lnTo>
-                    <a:pt x="1082615" y="3174692"/>
-                  </a:lnTo>
-                  <a:lnTo>
-                    <a:pt x="1004981" y="3184238"/>
-                  </a:lnTo>
-                  <a:lnTo>
-                    <a:pt x="927346" y="3193593"/>
-                  </a:lnTo>
-                  <a:lnTo>
-                    <a:pt x="849712" y="3202762"/>
-                  </a:lnTo>
-                  <a:lnTo>
-                    <a:pt x="772078" y="3211747"/>
-                  </a:lnTo>
-                  <a:lnTo>
-                    <a:pt x="694444" y="3220552"/>
-                  </a:lnTo>
-                  <a:lnTo>
-                    <a:pt x="616810" y="3229182"/>
-                  </a:lnTo>
-                  <a:lnTo>
-                    <a:pt x="539176" y="3237640"/>
-                  </a:lnTo>
-                  <a:lnTo>
-                    <a:pt x="461542" y="3245928"/>
-                  </a:lnTo>
-                  <a:lnTo>
-                    <a:pt x="383908" y="3254052"/>
-                  </a:lnTo>
-                  <a:lnTo>
-                    <a:pt x="306274" y="3262012"/>
-                  </a:lnTo>
-                  <a:lnTo>
-                    <a:pt x="228640" y="3269814"/>
-                  </a:lnTo>
-                  <a:lnTo>
-                    <a:pt x="151006" y="3277460"/>
-                  </a:lnTo>
-                  <a:lnTo>
-                    <a:pt x="73372" y="3284953"/>
-                  </a:lnTo>
-                  <a:lnTo>
-                    <a:pt x="0" y="3291894"/>
+                    <a:pt x="1160249" y="121079"/>
+                  </a:lnTo>
+                  <a:lnTo>
+                    <a:pt x="1237883" y="281296"/>
+                  </a:lnTo>
+                  <a:lnTo>
+                    <a:pt x="1315517" y="433880"/>
+                  </a:lnTo>
+                  <a:lnTo>
+                    <a:pt x="1393151" y="579194"/>
+                  </a:lnTo>
+                  <a:lnTo>
+                    <a:pt x="1470785" y="717584"/>
+                  </a:lnTo>
+                  <a:lnTo>
+                    <a:pt x="1548419" y="849381"/>
+                  </a:lnTo>
+                  <a:lnTo>
+                    <a:pt x="1626053" y="974897"/>
+                  </a:lnTo>
+                  <a:lnTo>
+                    <a:pt x="1703687" y="1094434"/>
+                  </a:lnTo>
+                  <a:lnTo>
+                    <a:pt x="1781321" y="1208275"/>
+                  </a:lnTo>
+                  <a:lnTo>
+                    <a:pt x="1858955" y="1316692"/>
+                  </a:lnTo>
+                  <a:lnTo>
+                    <a:pt x="1936589" y="1419943"/>
+                  </a:lnTo>
+                  <a:lnTo>
+                    <a:pt x="2014223" y="1518275"/>
+                  </a:lnTo>
+                  <a:lnTo>
+                    <a:pt x="2091857" y="1611922"/>
+                  </a:lnTo>
+                  <a:lnTo>
+                    <a:pt x="2169491" y="1701107"/>
+                  </a:lnTo>
+                  <a:lnTo>
+                    <a:pt x="2247125" y="1786042"/>
+                  </a:lnTo>
+                  <a:lnTo>
+                    <a:pt x="2324759" y="1866931"/>
+                  </a:lnTo>
+                  <a:lnTo>
+                    <a:pt x="2402393" y="1943966"/>
+                  </a:lnTo>
+                  <a:lnTo>
+                    <a:pt x="2480027" y="2017330"/>
+                  </a:lnTo>
+                  <a:lnTo>
+                    <a:pt x="2557661" y="2087199"/>
+                  </a:lnTo>
+                  <a:lnTo>
+                    <a:pt x="2635295" y="2153739"/>
+                  </a:lnTo>
+                  <a:lnTo>
+                    <a:pt x="2712930" y="2217108"/>
+                  </a:lnTo>
+                  <a:lnTo>
+                    <a:pt x="2790564" y="2277458"/>
+                  </a:lnTo>
+                  <a:lnTo>
+                    <a:pt x="2868198" y="2334933"/>
+                  </a:lnTo>
+                  <a:lnTo>
+                    <a:pt x="2945832" y="2389669"/>
+                  </a:lnTo>
+                  <a:lnTo>
+                    <a:pt x="3023466" y="2441798"/>
+                  </a:lnTo>
+                  <a:lnTo>
+                    <a:pt x="3101100" y="2491442"/>
+                  </a:lnTo>
+                  <a:lnTo>
+                    <a:pt x="3178734" y="2538722"/>
+                  </a:lnTo>
+                  <a:lnTo>
+                    <a:pt x="3256368" y="2583748"/>
+                  </a:lnTo>
+                  <a:lnTo>
+                    <a:pt x="3334002" y="2626629"/>
+                  </a:lnTo>
+                  <a:lnTo>
+                    <a:pt x="3411636" y="2648772"/>
+                  </a:lnTo>
+                  <a:lnTo>
+                    <a:pt x="3489270" y="2631756"/>
+                  </a:lnTo>
+                  <a:lnTo>
+                    <a:pt x="3566904" y="2614393"/>
+                  </a:lnTo>
+                  <a:lnTo>
+                    <a:pt x="3644538" y="2596676"/>
+                  </a:lnTo>
+                  <a:lnTo>
+                    <a:pt x="3722172" y="2578598"/>
+                  </a:lnTo>
+                  <a:lnTo>
+                    <a:pt x="3799806" y="2560152"/>
+                  </a:lnTo>
+                  <a:lnTo>
+                    <a:pt x="3877440" y="2541329"/>
+                  </a:lnTo>
+                  <a:lnTo>
+                    <a:pt x="3955074" y="2522123"/>
+                  </a:lnTo>
+                  <a:lnTo>
+                    <a:pt x="4032708" y="2502526"/>
+                  </a:lnTo>
+                  <a:lnTo>
+                    <a:pt x="4110342" y="2482529"/>
+                  </a:lnTo>
+                  <a:lnTo>
+                    <a:pt x="4187976" y="2462125"/>
+                  </a:lnTo>
+                  <a:lnTo>
+                    <a:pt x="4265610" y="2441305"/>
+                  </a:lnTo>
+                  <a:lnTo>
+                    <a:pt x="4343244" y="2420061"/>
+                  </a:lnTo>
+                  <a:lnTo>
+                    <a:pt x="4420879" y="2398384"/>
+                  </a:lnTo>
+                  <a:lnTo>
+                    <a:pt x="4498513" y="2376265"/>
+                  </a:lnTo>
+                  <a:lnTo>
+                    <a:pt x="4576147" y="2353695"/>
+                  </a:lnTo>
+                  <a:lnTo>
+                    <a:pt x="4653781" y="2330665"/>
+                  </a:lnTo>
+                  <a:lnTo>
+                    <a:pt x="4731415" y="2307166"/>
+                  </a:lnTo>
+                  <a:lnTo>
+                    <a:pt x="4809049" y="2283188"/>
+                  </a:lnTo>
+                  <a:lnTo>
+                    <a:pt x="4886683" y="2258721"/>
+                  </a:lnTo>
+                  <a:lnTo>
+                    <a:pt x="4964317" y="2233756"/>
+                  </a:lnTo>
+                  <a:lnTo>
+                    <a:pt x="5041951" y="2208282"/>
+                  </a:lnTo>
+                  <a:lnTo>
+                    <a:pt x="5119585" y="2182289"/>
+                  </a:lnTo>
+                  <a:lnTo>
+                    <a:pt x="5197219" y="2155766"/>
+                  </a:lnTo>
+                  <a:lnTo>
+                    <a:pt x="5274853" y="2128703"/>
+                  </a:lnTo>
+                  <a:lnTo>
+                    <a:pt x="5352487" y="2101088"/>
+                  </a:lnTo>
+                  <a:lnTo>
+                    <a:pt x="5430121" y="2072910"/>
+                  </a:lnTo>
+                  <a:lnTo>
+                    <a:pt x="5507755" y="2044158"/>
+                  </a:lnTo>
+                  <a:lnTo>
+                    <a:pt x="5585389" y="2014820"/>
+                  </a:lnTo>
+                  <a:lnTo>
+                    <a:pt x="5663023" y="1984884"/>
+                  </a:lnTo>
+                  <a:lnTo>
+                    <a:pt x="5740657" y="1954338"/>
+                  </a:lnTo>
+                  <a:lnTo>
+                    <a:pt x="5818291" y="1923170"/>
+                  </a:lnTo>
+                  <a:lnTo>
+                    <a:pt x="5895925" y="1891366"/>
+                  </a:lnTo>
+                  <a:lnTo>
+                    <a:pt x="5973559" y="1858914"/>
+                  </a:lnTo>
+                  <a:lnTo>
+                    <a:pt x="6051193" y="1825801"/>
+                  </a:lnTo>
+                  <a:lnTo>
+                    <a:pt x="6128827" y="1792013"/>
+                  </a:lnTo>
+                  <a:lnTo>
+                    <a:pt x="6206462" y="1757537"/>
+                  </a:lnTo>
+                  <a:lnTo>
+                    <a:pt x="6284096" y="1722358"/>
+                  </a:lnTo>
+                  <a:lnTo>
+                    <a:pt x="6361730" y="1686462"/>
+                  </a:lnTo>
+                  <a:lnTo>
+                    <a:pt x="6439364" y="1649834"/>
+                  </a:lnTo>
+                  <a:lnTo>
+                    <a:pt x="6516998" y="1612460"/>
+                  </a:lnTo>
+                  <a:lnTo>
+                    <a:pt x="6594632" y="1574325"/>
+                  </a:lnTo>
+                  <a:lnTo>
+                    <a:pt x="6672266" y="1535412"/>
+                  </a:lnTo>
+                  <a:lnTo>
+                    <a:pt x="6749900" y="1495706"/>
+                  </a:lnTo>
+                  <a:lnTo>
+                    <a:pt x="6827534" y="1455191"/>
+                  </a:lnTo>
+                  <a:lnTo>
+                    <a:pt x="6905168" y="1413850"/>
+                  </a:lnTo>
+                  <a:lnTo>
+                    <a:pt x="6982802" y="1371667"/>
+                  </a:lnTo>
+                  <a:lnTo>
+                    <a:pt x="7060436" y="1328624"/>
+                  </a:lnTo>
+                  <a:lnTo>
+                    <a:pt x="7138070" y="1284704"/>
+                  </a:lnTo>
+                  <a:lnTo>
+                    <a:pt x="7215704" y="1239889"/>
+                  </a:lnTo>
+                  <a:lnTo>
+                    <a:pt x="7293338" y="1194160"/>
+                  </a:lnTo>
+                  <a:lnTo>
+                    <a:pt x="7370972" y="1147500"/>
+                  </a:lnTo>
+                  <a:lnTo>
+                    <a:pt x="7370972" y="3416051"/>
+                  </a:lnTo>
+                  <a:lnTo>
+                    <a:pt x="7293338" y="3412664"/>
+                  </a:lnTo>
+                  <a:lnTo>
+                    <a:pt x="7215704" y="3409108"/>
+                  </a:lnTo>
+                  <a:lnTo>
+                    <a:pt x="7138070" y="3405374"/>
+                  </a:lnTo>
+                  <a:lnTo>
+                    <a:pt x="7060436" y="3401453"/>
+                  </a:lnTo>
+                  <a:lnTo>
+                    <a:pt x="6982802" y="3397336"/>
+                  </a:lnTo>
+                  <a:lnTo>
+                    <a:pt x="6905168" y="3393013"/>
+                  </a:lnTo>
+                  <a:lnTo>
+                    <a:pt x="6827534" y="3388473"/>
+                  </a:lnTo>
+                  <a:lnTo>
+                    <a:pt x="6749900" y="3383707"/>
+                  </a:lnTo>
+                  <a:lnTo>
+                    <a:pt x="6672266" y="3378702"/>
+                  </a:lnTo>
+                  <a:lnTo>
+                    <a:pt x="6594632" y="3373447"/>
+                  </a:lnTo>
+                  <a:lnTo>
+                    <a:pt x="6516998" y="3367928"/>
+                  </a:lnTo>
+                  <a:lnTo>
+                    <a:pt x="6439364" y="3362134"/>
+                  </a:lnTo>
+                  <a:lnTo>
+                    <a:pt x="6361730" y="3356050"/>
+                  </a:lnTo>
+                  <a:lnTo>
+                    <a:pt x="6284096" y="3349661"/>
+                  </a:lnTo>
+                  <a:lnTo>
+                    <a:pt x="6206462" y="3342953"/>
+                  </a:lnTo>
+                  <a:lnTo>
+                    <a:pt x="6128827" y="3335909"/>
+                  </a:lnTo>
+                  <a:lnTo>
+                    <a:pt x="6051193" y="3328513"/>
+                  </a:lnTo>
+                  <a:lnTo>
+                    <a:pt x="5973559" y="3320747"/>
+                  </a:lnTo>
+                  <a:lnTo>
+                    <a:pt x="5895925" y="3312592"/>
+                  </a:lnTo>
+                  <a:lnTo>
+                    <a:pt x="5818291" y="3304029"/>
+                  </a:lnTo>
+                  <a:lnTo>
+                    <a:pt x="5740657" y="3295038"/>
+                  </a:lnTo>
+                  <a:lnTo>
+                    <a:pt x="5663023" y="3285597"/>
+                  </a:lnTo>
+                  <a:lnTo>
+                    <a:pt x="5585389" y="3275683"/>
+                  </a:lnTo>
+                  <a:lnTo>
+                    <a:pt x="5507755" y="3265274"/>
+                  </a:lnTo>
+                  <a:lnTo>
+                    <a:pt x="5430121" y="3254344"/>
+                  </a:lnTo>
+                  <a:lnTo>
+                    <a:pt x="5352487" y="3242867"/>
+                  </a:lnTo>
+                  <a:lnTo>
+                    <a:pt x="5274853" y="3230816"/>
+                  </a:lnTo>
+                  <a:lnTo>
+                    <a:pt x="5197219" y="3218162"/>
+                  </a:lnTo>
+                  <a:lnTo>
+                    <a:pt x="5119585" y="3204875"/>
+                  </a:lnTo>
+                  <a:lnTo>
+                    <a:pt x="5041951" y="3190923"/>
+                  </a:lnTo>
+                  <a:lnTo>
+                    <a:pt x="4964317" y="3176273"/>
+                  </a:lnTo>
+                  <a:lnTo>
+                    <a:pt x="4886683" y="3160890"/>
+                  </a:lnTo>
+                  <a:lnTo>
+                    <a:pt x="4809049" y="3144738"/>
+                  </a:lnTo>
+                  <a:lnTo>
+                    <a:pt x="4731415" y="3127778"/>
+                  </a:lnTo>
+                  <a:lnTo>
+                    <a:pt x="4653781" y="3109969"/>
+                  </a:lnTo>
+                  <a:lnTo>
+                    <a:pt x="4576147" y="3091269"/>
+                  </a:lnTo>
+                  <a:lnTo>
+                    <a:pt x="4498513" y="3071633"/>
+                  </a:lnTo>
+                  <a:lnTo>
+                    <a:pt x="4420879" y="3051015"/>
+                  </a:lnTo>
+                  <a:lnTo>
+                    <a:pt x="4343244" y="3029366"/>
+                  </a:lnTo>
+                  <a:lnTo>
+                    <a:pt x="4265610" y="3006633"/>
+                  </a:lnTo>
+                  <a:lnTo>
+                    <a:pt x="4187976" y="2982764"/>
+                  </a:lnTo>
+                  <a:lnTo>
+                    <a:pt x="4110342" y="2957700"/>
+                  </a:lnTo>
+                  <a:lnTo>
+                    <a:pt x="4032708" y="2931382"/>
+                  </a:lnTo>
+                  <a:lnTo>
+                    <a:pt x="3955074" y="2903747"/>
+                  </a:lnTo>
+                  <a:lnTo>
+                    <a:pt x="3877440" y="2874730"/>
+                  </a:lnTo>
+                  <a:lnTo>
+                    <a:pt x="3799806" y="2844261"/>
+                  </a:lnTo>
+                  <a:lnTo>
+                    <a:pt x="3722172" y="2812268"/>
+                  </a:lnTo>
+                  <a:lnTo>
+                    <a:pt x="3644538" y="2778674"/>
+                  </a:lnTo>
+                  <a:lnTo>
+                    <a:pt x="3566904" y="2743399"/>
+                  </a:lnTo>
+                  <a:lnTo>
+                    <a:pt x="3489270" y="2706360"/>
+                  </a:lnTo>
+                  <a:lnTo>
+                    <a:pt x="3411636" y="2667468"/>
+                  </a:lnTo>
+                  <a:lnTo>
+                    <a:pt x="3334002" y="2665449"/>
+                  </a:lnTo>
+                  <a:lnTo>
+                    <a:pt x="3256368" y="2681792"/>
+                  </a:lnTo>
+                  <a:lnTo>
+                    <a:pt x="3178734" y="2697809"/>
+                  </a:lnTo>
+                  <a:lnTo>
+                    <a:pt x="3101100" y="2713506"/>
+                  </a:lnTo>
+                  <a:lnTo>
+                    <a:pt x="3023466" y="2728889"/>
+                  </a:lnTo>
+                  <a:lnTo>
+                    <a:pt x="2945832" y="2743966"/>
+                  </a:lnTo>
+                  <a:lnTo>
+                    <a:pt x="2868198" y="2758741"/>
+                  </a:lnTo>
+                  <a:lnTo>
+                    <a:pt x="2790564" y="2773221"/>
+                  </a:lnTo>
+                  <a:lnTo>
+                    <a:pt x="2712930" y="2787412"/>
+                  </a:lnTo>
+                  <a:lnTo>
+                    <a:pt x="2635295" y="2801319"/>
+                  </a:lnTo>
+                  <a:lnTo>
+                    <a:pt x="2557661" y="2814949"/>
+                  </a:lnTo>
+                  <a:lnTo>
+                    <a:pt x="2480027" y="2828306"/>
+                  </a:lnTo>
+                  <a:lnTo>
+                    <a:pt x="2402393" y="2841397"/>
+                  </a:lnTo>
+                  <a:lnTo>
+                    <a:pt x="2324759" y="2854226"/>
+                  </a:lnTo>
+                  <a:lnTo>
+                    <a:pt x="2247125" y="2866799"/>
+                  </a:lnTo>
+                  <a:lnTo>
+                    <a:pt x="2169491" y="2879121"/>
+                  </a:lnTo>
+                  <a:lnTo>
+                    <a:pt x="2091857" y="2891197"/>
+                  </a:lnTo>
+                  <a:lnTo>
+                    <a:pt x="2014223" y="2903032"/>
+                  </a:lnTo>
+                  <a:lnTo>
+                    <a:pt x="1936589" y="2914630"/>
+                  </a:lnTo>
+                  <a:lnTo>
+                    <a:pt x="1858955" y="2925997"/>
+                  </a:lnTo>
+                  <a:lnTo>
+                    <a:pt x="1781321" y="2937136"/>
+                  </a:lnTo>
+                  <a:lnTo>
+                    <a:pt x="1703687" y="2948053"/>
+                  </a:lnTo>
+                  <a:lnTo>
+                    <a:pt x="1626053" y="2958752"/>
+                  </a:lnTo>
+                  <a:lnTo>
+                    <a:pt x="1548419" y="2969238"/>
+                  </a:lnTo>
+                  <a:lnTo>
+                    <a:pt x="1470785" y="2979514"/>
+                  </a:lnTo>
+                  <a:lnTo>
+                    <a:pt x="1393151" y="2989584"/>
+                  </a:lnTo>
+                  <a:lnTo>
+                    <a:pt x="1315517" y="2999454"/>
+                  </a:lnTo>
+                  <a:lnTo>
+                    <a:pt x="1237883" y="3009126"/>
+                  </a:lnTo>
+                  <a:lnTo>
+                    <a:pt x="1160249" y="3018606"/>
+                  </a:lnTo>
+                  <a:lnTo>
+                    <a:pt x="1082615" y="3027896"/>
+                  </a:lnTo>
+                  <a:lnTo>
+                    <a:pt x="1004981" y="3037000"/>
+                  </a:lnTo>
+                  <a:lnTo>
+                    <a:pt x="927346" y="3045923"/>
+                  </a:lnTo>
+                  <a:lnTo>
+                    <a:pt x="849712" y="3054667"/>
+                  </a:lnTo>
+                  <a:lnTo>
+                    <a:pt x="772078" y="3063237"/>
+                  </a:lnTo>
+                  <a:lnTo>
+                    <a:pt x="694444" y="3071635"/>
+                  </a:lnTo>
+                  <a:lnTo>
+                    <a:pt x="616810" y="3079866"/>
+                  </a:lnTo>
+                  <a:lnTo>
+                    <a:pt x="539176" y="3087933"/>
+                  </a:lnTo>
+                  <a:lnTo>
+                    <a:pt x="461542" y="3095838"/>
+                  </a:lnTo>
+                  <a:lnTo>
+                    <a:pt x="383908" y="3103585"/>
+                  </a:lnTo>
+                  <a:lnTo>
+                    <a:pt x="306274" y="3111178"/>
+                  </a:lnTo>
+                  <a:lnTo>
+                    <a:pt x="228640" y="3118619"/>
+                  </a:lnTo>
+                  <a:lnTo>
+                    <a:pt x="151006" y="3125912"/>
+                  </a:lnTo>
+                  <a:lnTo>
+                    <a:pt x="73372" y="3133058"/>
+                  </a:lnTo>
+                  <a:lnTo>
+                    <a:pt x="0" y="3139678"/>
                   </a:lnTo>
                   <a:close/>
                 </a:path>
@@ -3567,258 +3567,258 @@
           </p:nvSpPr>
           <p:spPr>
             <a:xfrm>
-              <a:off x="1921892" y="1896563"/>
-              <a:ext cx="6266597" cy="2777188"/>
+              <a:off x="1921892" y="2073503"/>
+              <a:ext cx="6266597" cy="2648772"/>
             </a:xfrm>
             <a:custGeom>
               <a:avLst/>
               <a:pathLst>
-                <a:path w="6266597" h="2777188">
+                <a:path w="6266597" h="2648772">
                   <a:moveTo>
                     <a:pt x="0" y="0"/>
                   </a:moveTo>
                   <a:lnTo>
-                    <a:pt x="55874" y="126949"/>
-                  </a:lnTo>
-                  <a:lnTo>
-                    <a:pt x="133508" y="294934"/>
-                  </a:lnTo>
-                  <a:lnTo>
-                    <a:pt x="211142" y="454915"/>
-                  </a:lnTo>
-                  <a:lnTo>
-                    <a:pt x="288776" y="607274"/>
-                  </a:lnTo>
-                  <a:lnTo>
-                    <a:pt x="366410" y="752374"/>
-                  </a:lnTo>
-                  <a:lnTo>
-                    <a:pt x="444044" y="890560"/>
-                  </a:lnTo>
-                  <a:lnTo>
-                    <a:pt x="521678" y="1022162"/>
-                  </a:lnTo>
-                  <a:lnTo>
-                    <a:pt x="599312" y="1147494"/>
-                  </a:lnTo>
-                  <a:lnTo>
-                    <a:pt x="676946" y="1266854"/>
-                  </a:lnTo>
-                  <a:lnTo>
-                    <a:pt x="754580" y="1380527"/>
-                  </a:lnTo>
-                  <a:lnTo>
-                    <a:pt x="832214" y="1488784"/>
-                  </a:lnTo>
-                  <a:lnTo>
-                    <a:pt x="909848" y="1591883"/>
-                  </a:lnTo>
-                  <a:lnTo>
-                    <a:pt x="987482" y="1690070"/>
-                  </a:lnTo>
-                  <a:lnTo>
-                    <a:pt x="1065116" y="1783579"/>
-                  </a:lnTo>
-                  <a:lnTo>
-                    <a:pt x="1142750" y="1872632"/>
-                  </a:lnTo>
-                  <a:lnTo>
-                    <a:pt x="1220384" y="1957442"/>
-                  </a:lnTo>
-                  <a:lnTo>
-                    <a:pt x="1298018" y="2038212"/>
-                  </a:lnTo>
-                  <a:lnTo>
-                    <a:pt x="1375652" y="2115133"/>
-                  </a:lnTo>
-                  <a:lnTo>
-                    <a:pt x="1453287" y="2188389"/>
-                  </a:lnTo>
-                  <a:lnTo>
-                    <a:pt x="1530921" y="2258155"/>
-                  </a:lnTo>
-                  <a:lnTo>
-                    <a:pt x="1608555" y="2324597"/>
-                  </a:lnTo>
-                  <a:lnTo>
-                    <a:pt x="1686189" y="2387873"/>
-                  </a:lnTo>
-                  <a:lnTo>
-                    <a:pt x="1763823" y="2448134"/>
-                  </a:lnTo>
-                  <a:lnTo>
-                    <a:pt x="1841457" y="2505524"/>
-                  </a:lnTo>
-                  <a:lnTo>
-                    <a:pt x="1919091" y="2560179"/>
-                  </a:lnTo>
-                  <a:lnTo>
-                    <a:pt x="1996725" y="2612231"/>
-                  </a:lnTo>
-                  <a:lnTo>
-                    <a:pt x="2074359" y="2661802"/>
-                  </a:lnTo>
-                  <a:lnTo>
-                    <a:pt x="2151993" y="2709012"/>
-                  </a:lnTo>
-                  <a:lnTo>
-                    <a:pt x="2229627" y="2753972"/>
-                  </a:lnTo>
-                  <a:lnTo>
-                    <a:pt x="2307261" y="2777188"/>
-                  </a:lnTo>
-                  <a:lnTo>
-                    <a:pt x="2384895" y="2759347"/>
-                  </a:lnTo>
-                  <a:lnTo>
-                    <a:pt x="2462529" y="2741142"/>
-                  </a:lnTo>
-                  <a:lnTo>
-                    <a:pt x="2540163" y="2722566"/>
-                  </a:lnTo>
-                  <a:lnTo>
-                    <a:pt x="2617797" y="2703612"/>
-                  </a:lnTo>
-                  <a:lnTo>
-                    <a:pt x="2695431" y="2684271"/>
-                  </a:lnTo>
-                  <a:lnTo>
-                    <a:pt x="2773065" y="2664537"/>
-                  </a:lnTo>
-                  <a:lnTo>
-                    <a:pt x="2850699" y="2644400"/>
-                  </a:lnTo>
-                  <a:lnTo>
-                    <a:pt x="2928333" y="2623852"/>
-                  </a:lnTo>
-                  <a:lnTo>
-                    <a:pt x="3005967" y="2602886"/>
-                  </a:lnTo>
-                  <a:lnTo>
-                    <a:pt x="3083601" y="2581493"/>
-                  </a:lnTo>
-                  <a:lnTo>
-                    <a:pt x="3161236" y="2559663"/>
-                  </a:lnTo>
-                  <a:lnTo>
-                    <a:pt x="3238870" y="2537389"/>
-                  </a:lnTo>
-                  <a:lnTo>
-                    <a:pt x="3316504" y="2514661"/>
-                  </a:lnTo>
-                  <a:lnTo>
-                    <a:pt x="3394138" y="2491469"/>
-                  </a:lnTo>
-                  <a:lnTo>
-                    <a:pt x="3471772" y="2467805"/>
-                  </a:lnTo>
-                  <a:lnTo>
-                    <a:pt x="3549406" y="2443659"/>
-                  </a:lnTo>
-                  <a:lnTo>
-                    <a:pt x="3627040" y="2419021"/>
-                  </a:lnTo>
-                  <a:lnTo>
-                    <a:pt x="3704674" y="2393880"/>
-                  </a:lnTo>
-                  <a:lnTo>
-                    <a:pt x="3782308" y="2368227"/>
-                  </a:lnTo>
-                  <a:lnTo>
-                    <a:pt x="3859942" y="2342052"/>
-                  </a:lnTo>
-                  <a:lnTo>
-                    <a:pt x="3937576" y="2315343"/>
-                  </a:lnTo>
-                  <a:lnTo>
-                    <a:pt x="4015210" y="2288089"/>
-                  </a:lnTo>
-                  <a:lnTo>
-                    <a:pt x="4092844" y="2260281"/>
-                  </a:lnTo>
-                  <a:lnTo>
-                    <a:pt x="4170478" y="2231905"/>
-                  </a:lnTo>
-                  <a:lnTo>
-                    <a:pt x="4248112" y="2202951"/>
-                  </a:lnTo>
-                  <a:lnTo>
-                    <a:pt x="4325746" y="2173407"/>
-                  </a:lnTo>
-                  <a:lnTo>
-                    <a:pt x="4403380" y="2143261"/>
-                  </a:lnTo>
-                  <a:lnTo>
-                    <a:pt x="4481014" y="2112501"/>
-                  </a:lnTo>
-                  <a:lnTo>
-                    <a:pt x="4558648" y="2081114"/>
-                  </a:lnTo>
-                  <a:lnTo>
-                    <a:pt x="4636282" y="2049087"/>
-                  </a:lnTo>
-                  <a:lnTo>
-                    <a:pt x="4713916" y="2016408"/>
-                  </a:lnTo>
-                  <a:lnTo>
-                    <a:pt x="4791550" y="1983062"/>
-                  </a:lnTo>
-                  <a:lnTo>
-                    <a:pt x="4869185" y="1949037"/>
-                  </a:lnTo>
-                  <a:lnTo>
-                    <a:pt x="4946819" y="1914319"/>
-                  </a:lnTo>
-                  <a:lnTo>
-                    <a:pt x="5024453" y="1878893"/>
-                  </a:lnTo>
-                  <a:lnTo>
-                    <a:pt x="5102087" y="1842745"/>
-                  </a:lnTo>
-                  <a:lnTo>
-                    <a:pt x="5179721" y="1805860"/>
-                  </a:lnTo>
-                  <a:lnTo>
-                    <a:pt x="5257355" y="1768224"/>
-                  </a:lnTo>
-                  <a:lnTo>
-                    <a:pt x="5334989" y="1729820"/>
-                  </a:lnTo>
-                  <a:lnTo>
-                    <a:pt x="5412623" y="1690635"/>
-                  </a:lnTo>
-                  <a:lnTo>
-                    <a:pt x="5490257" y="1650650"/>
-                  </a:lnTo>
-                  <a:lnTo>
-                    <a:pt x="5567891" y="1609851"/>
-                  </a:lnTo>
-                  <a:lnTo>
-                    <a:pt x="5645525" y="1568220"/>
-                  </a:lnTo>
-                  <a:lnTo>
-                    <a:pt x="5723159" y="1525740"/>
-                  </a:lnTo>
-                  <a:lnTo>
-                    <a:pt x="5800793" y="1482395"/>
-                  </a:lnTo>
-                  <a:lnTo>
-                    <a:pt x="5878427" y="1438167"/>
-                  </a:lnTo>
-                  <a:lnTo>
-                    <a:pt x="5956061" y="1393037"/>
-                  </a:lnTo>
-                  <a:lnTo>
-                    <a:pt x="6033695" y="1346988"/>
-                  </a:lnTo>
-                  <a:lnTo>
-                    <a:pt x="6111329" y="1300000"/>
-                  </a:lnTo>
-                  <a:lnTo>
-                    <a:pt x="6188963" y="1252055"/>
-                  </a:lnTo>
-                  <a:lnTo>
-                    <a:pt x="6266597" y="1203132"/>
+                    <a:pt x="55874" y="121079"/>
+                  </a:lnTo>
+                  <a:lnTo>
+                    <a:pt x="133508" y="281296"/>
+                  </a:lnTo>
+                  <a:lnTo>
+                    <a:pt x="211142" y="433880"/>
+                  </a:lnTo>
+                  <a:lnTo>
+                    <a:pt x="288776" y="579194"/>
+                  </a:lnTo>
+                  <a:lnTo>
+                    <a:pt x="366410" y="717584"/>
+                  </a:lnTo>
+                  <a:lnTo>
+                    <a:pt x="444044" y="849381"/>
+                  </a:lnTo>
+                  <a:lnTo>
+                    <a:pt x="521678" y="974897"/>
+                  </a:lnTo>
+                  <a:lnTo>
+                    <a:pt x="599312" y="1094434"/>
+                  </a:lnTo>
+                  <a:lnTo>
+                    <a:pt x="676946" y="1208275"/>
+                  </a:lnTo>
+                  <a:lnTo>
+                    <a:pt x="754580" y="1316692"/>
+                  </a:lnTo>
+                  <a:lnTo>
+                    <a:pt x="832214" y="1419943"/>
+                  </a:lnTo>
+                  <a:lnTo>
+                    <a:pt x="909848" y="1518275"/>
+                  </a:lnTo>
+                  <a:lnTo>
+                    <a:pt x="987482" y="1611922"/>
+                  </a:lnTo>
+                  <a:lnTo>
+                    <a:pt x="1065116" y="1701107"/>
+                  </a:lnTo>
+                  <a:lnTo>
+                    <a:pt x="1142750" y="1786042"/>
+                  </a:lnTo>
+                  <a:lnTo>
+                    <a:pt x="1220384" y="1866931"/>
+                  </a:lnTo>
+                  <a:lnTo>
+                    <a:pt x="1298018" y="1943966"/>
+                  </a:lnTo>
+                  <a:lnTo>
+                    <a:pt x="1375652" y="2017330"/>
+                  </a:lnTo>
+                  <a:lnTo>
+                    <a:pt x="1453287" y="2087199"/>
+                  </a:lnTo>
+                  <a:lnTo>
+                    <a:pt x="1530921" y="2153739"/>
+                  </a:lnTo>
+                  <a:lnTo>
+                    <a:pt x="1608555" y="2217108"/>
+                  </a:lnTo>
+                  <a:lnTo>
+                    <a:pt x="1686189" y="2277458"/>
+                  </a:lnTo>
+                  <a:lnTo>
+                    <a:pt x="1763823" y="2334933"/>
+                  </a:lnTo>
+                  <a:lnTo>
+                    <a:pt x="1841457" y="2389669"/>
+                  </a:lnTo>
+                  <a:lnTo>
+                    <a:pt x="1919091" y="2441798"/>
+                  </a:lnTo>
+                  <a:lnTo>
+                    <a:pt x="1996725" y="2491442"/>
+                  </a:lnTo>
+                  <a:lnTo>
+                    <a:pt x="2074359" y="2538722"/>
+                  </a:lnTo>
+                  <a:lnTo>
+                    <a:pt x="2151993" y="2583748"/>
+                  </a:lnTo>
+                  <a:lnTo>
+                    <a:pt x="2229627" y="2626629"/>
+                  </a:lnTo>
+                  <a:lnTo>
+                    <a:pt x="2307261" y="2648772"/>
+                  </a:lnTo>
+                  <a:lnTo>
+                    <a:pt x="2384895" y="2631756"/>
+                  </a:lnTo>
+                  <a:lnTo>
+                    <a:pt x="2462529" y="2614393"/>
+                  </a:lnTo>
+                  <a:lnTo>
+                    <a:pt x="2540163" y="2596676"/>
+                  </a:lnTo>
+                  <a:lnTo>
+                    <a:pt x="2617797" y="2578598"/>
+                  </a:lnTo>
+                  <a:lnTo>
+                    <a:pt x="2695431" y="2560152"/>
+                  </a:lnTo>
+                  <a:lnTo>
+                    <a:pt x="2773065" y="2541329"/>
+                  </a:lnTo>
+                  <a:lnTo>
+                    <a:pt x="2850699" y="2522123"/>
+                  </a:lnTo>
+                  <a:lnTo>
+                    <a:pt x="2928333" y="2502526"/>
+                  </a:lnTo>
+                  <a:lnTo>
+                    <a:pt x="3005967" y="2482529"/>
+                  </a:lnTo>
+                  <a:lnTo>
+                    <a:pt x="3083601" y="2462125"/>
+                  </a:lnTo>
+                  <a:lnTo>
+                    <a:pt x="3161236" y="2441305"/>
+                  </a:lnTo>
+                  <a:lnTo>
+                    <a:pt x="3238870" y="2420061"/>
+                  </a:lnTo>
+                  <a:lnTo>
+                    <a:pt x="3316504" y="2398384"/>
+                  </a:lnTo>
+                  <a:lnTo>
+                    <a:pt x="3394138" y="2376265"/>
+                  </a:lnTo>
+                  <a:lnTo>
+                    <a:pt x="3471772" y="2353695"/>
+                  </a:lnTo>
+                  <a:lnTo>
+                    <a:pt x="3549406" y="2330665"/>
+                  </a:lnTo>
+                  <a:lnTo>
+                    <a:pt x="3627040" y="2307166"/>
+                  </a:lnTo>
+                  <a:lnTo>
+                    <a:pt x="3704674" y="2283188"/>
+                  </a:lnTo>
+                  <a:lnTo>
+                    <a:pt x="3782308" y="2258721"/>
+                  </a:lnTo>
+                  <a:lnTo>
+                    <a:pt x="3859942" y="2233756"/>
+                  </a:lnTo>
+                  <a:lnTo>
+                    <a:pt x="3937576" y="2208282"/>
+                  </a:lnTo>
+                  <a:lnTo>
+                    <a:pt x="4015210" y="2182289"/>
+                  </a:lnTo>
+                  <a:lnTo>
+                    <a:pt x="4092844" y="2155766"/>
+                  </a:lnTo>
+                  <a:lnTo>
+                    <a:pt x="4170478" y="2128703"/>
+                  </a:lnTo>
+                  <a:lnTo>
+                    <a:pt x="4248112" y="2101088"/>
+                  </a:lnTo>
+                  <a:lnTo>
+                    <a:pt x="4325746" y="2072910"/>
+                  </a:lnTo>
+                  <a:lnTo>
+                    <a:pt x="4403380" y="2044158"/>
+                  </a:lnTo>
+                  <a:lnTo>
+                    <a:pt x="4481014" y="2014820"/>
+                  </a:lnTo>
+                  <a:lnTo>
+                    <a:pt x="4558648" y="1984884"/>
+                  </a:lnTo>
+                  <a:lnTo>
+                    <a:pt x="4636282" y="1954338"/>
+                  </a:lnTo>
+                  <a:lnTo>
+                    <a:pt x="4713916" y="1923170"/>
+                  </a:lnTo>
+                  <a:lnTo>
+                    <a:pt x="4791550" y="1891366"/>
+                  </a:lnTo>
+                  <a:lnTo>
+                    <a:pt x="4869185" y="1858914"/>
+                  </a:lnTo>
+                  <a:lnTo>
+                    <a:pt x="4946819" y="1825801"/>
+                  </a:lnTo>
+                  <a:lnTo>
+                    <a:pt x="5024453" y="1792013"/>
+                  </a:lnTo>
+                  <a:lnTo>
+                    <a:pt x="5102087" y="1757537"/>
+                  </a:lnTo>
+                  <a:lnTo>
+                    <a:pt x="5179721" y="1722358"/>
+                  </a:lnTo>
+                  <a:lnTo>
+                    <a:pt x="5257355" y="1686462"/>
+                  </a:lnTo>
+                  <a:lnTo>
+                    <a:pt x="5334989" y="1649834"/>
+                  </a:lnTo>
+                  <a:lnTo>
+                    <a:pt x="5412623" y="1612460"/>
+                  </a:lnTo>
+                  <a:lnTo>
+                    <a:pt x="5490257" y="1574325"/>
+                  </a:lnTo>
+                  <a:lnTo>
+                    <a:pt x="5567891" y="1535412"/>
+                  </a:lnTo>
+                  <a:lnTo>
+                    <a:pt x="5645525" y="1495706"/>
+                  </a:lnTo>
+                  <a:lnTo>
+                    <a:pt x="5723159" y="1455191"/>
+                  </a:lnTo>
+                  <a:lnTo>
+                    <a:pt x="5800793" y="1413850"/>
+                  </a:lnTo>
+                  <a:lnTo>
+                    <a:pt x="5878427" y="1371667"/>
+                  </a:lnTo>
+                  <a:lnTo>
+                    <a:pt x="5956061" y="1328624"/>
+                  </a:lnTo>
+                  <a:lnTo>
+                    <a:pt x="6033695" y="1284704"/>
+                  </a:lnTo>
+                  <a:lnTo>
+                    <a:pt x="6111329" y="1239889"/>
+                  </a:lnTo>
+                  <a:lnTo>
+                    <a:pt x="6188963" y="1194160"/>
+                  </a:lnTo>
+                  <a:lnTo>
+                    <a:pt x="6266597" y="1147500"/>
                   </a:lnTo>
                 </a:path>
               </a:pathLst>
@@ -3838,300 +3838,300 @@
           </p:nvSpPr>
           <p:spPr>
             <a:xfrm>
-              <a:off x="817517" y="4691237"/>
-              <a:ext cx="7370972" cy="786992"/>
+              <a:off x="817517" y="4738952"/>
+              <a:ext cx="7370972" cy="750602"/>
             </a:xfrm>
             <a:custGeom>
               <a:avLst/>
               <a:pathLst>
-                <a:path w="7370972" h="786992">
+                <a:path w="7370972" h="750602">
                   <a:moveTo>
-                    <a:pt x="7370972" y="786992"/>
+                    <a:pt x="7370972" y="750602"/>
                   </a:moveTo>
                   <a:lnTo>
-                    <a:pt x="7293338" y="783441"/>
-                  </a:lnTo>
-                  <a:lnTo>
-                    <a:pt x="7215704" y="779713"/>
-                  </a:lnTo>
-                  <a:lnTo>
-                    <a:pt x="7138070" y="775797"/>
-                  </a:lnTo>
-                  <a:lnTo>
-                    <a:pt x="7060436" y="771686"/>
-                  </a:lnTo>
-                  <a:lnTo>
-                    <a:pt x="6982802" y="767370"/>
-                  </a:lnTo>
-                  <a:lnTo>
-                    <a:pt x="6905168" y="762837"/>
-                  </a:lnTo>
-                  <a:lnTo>
-                    <a:pt x="6827534" y="758078"/>
-                  </a:lnTo>
-                  <a:lnTo>
-                    <a:pt x="6749900" y="753080"/>
-                  </a:lnTo>
-                  <a:lnTo>
-                    <a:pt x="6672266" y="747832"/>
-                  </a:lnTo>
-                  <a:lnTo>
-                    <a:pt x="6594632" y="742322"/>
-                  </a:lnTo>
-                  <a:lnTo>
-                    <a:pt x="6516998" y="736537"/>
-                  </a:lnTo>
-                  <a:lnTo>
-                    <a:pt x="6439364" y="730461"/>
-                  </a:lnTo>
-                  <a:lnTo>
-                    <a:pt x="6361730" y="724082"/>
-                  </a:lnTo>
-                  <a:lnTo>
-                    <a:pt x="6284096" y="717384"/>
-                  </a:lnTo>
-                  <a:lnTo>
-                    <a:pt x="6206462" y="710350"/>
-                  </a:lnTo>
-                  <a:lnTo>
-                    <a:pt x="6128827" y="702965"/>
-                  </a:lnTo>
-                  <a:lnTo>
-                    <a:pt x="6051193" y="695210"/>
-                  </a:lnTo>
-                  <a:lnTo>
-                    <a:pt x="5973559" y="687067"/>
-                  </a:lnTo>
-                  <a:lnTo>
-                    <a:pt x="5895925" y="678517"/>
-                  </a:lnTo>
-                  <a:lnTo>
-                    <a:pt x="5818291" y="669539"/>
-                  </a:lnTo>
-                  <a:lnTo>
-                    <a:pt x="5740657" y="660112"/>
-                  </a:lnTo>
-                  <a:lnTo>
-                    <a:pt x="5663023" y="650213"/>
-                  </a:lnTo>
-                  <a:lnTo>
-                    <a:pt x="5585389" y="639819"/>
-                  </a:lnTo>
-                  <a:lnTo>
-                    <a:pt x="5507755" y="628905"/>
-                  </a:lnTo>
-                  <a:lnTo>
-                    <a:pt x="5430121" y="617445"/>
-                  </a:lnTo>
-                  <a:lnTo>
-                    <a:pt x="5352487" y="605412"/>
-                  </a:lnTo>
-                  <a:lnTo>
-                    <a:pt x="5274853" y="592777"/>
-                  </a:lnTo>
-                  <a:lnTo>
-                    <a:pt x="5197219" y="579509"/>
-                  </a:lnTo>
-                  <a:lnTo>
-                    <a:pt x="5119585" y="565578"/>
-                  </a:lnTo>
-                  <a:lnTo>
-                    <a:pt x="5041951" y="550950"/>
-                  </a:lnTo>
-                  <a:lnTo>
-                    <a:pt x="4964317" y="535590"/>
-                  </a:lnTo>
-                  <a:lnTo>
-                    <a:pt x="4886683" y="519461"/>
-                  </a:lnTo>
-                  <a:lnTo>
-                    <a:pt x="4809049" y="502526"/>
-                  </a:lnTo>
-                  <a:lnTo>
-                    <a:pt x="4731415" y="484743"/>
-                  </a:lnTo>
-                  <a:lnTo>
-                    <a:pt x="4653781" y="466071"/>
-                  </a:lnTo>
-                  <a:lnTo>
-                    <a:pt x="4576147" y="446464"/>
-                  </a:lnTo>
-                  <a:lnTo>
-                    <a:pt x="4498513" y="425876"/>
-                  </a:lnTo>
-                  <a:lnTo>
-                    <a:pt x="4420879" y="404259"/>
-                  </a:lnTo>
-                  <a:lnTo>
-                    <a:pt x="4343244" y="381560"/>
-                  </a:lnTo>
-                  <a:lnTo>
-                    <a:pt x="4265610" y="357725"/>
-                  </a:lnTo>
-                  <a:lnTo>
-                    <a:pt x="4187976" y="332698"/>
-                  </a:lnTo>
-                  <a:lnTo>
-                    <a:pt x="4110342" y="306419"/>
-                  </a:lnTo>
-                  <a:lnTo>
-                    <a:pt x="4032708" y="278825"/>
-                  </a:lnTo>
-                  <a:lnTo>
-                    <a:pt x="3955074" y="249851"/>
-                  </a:lnTo>
-                  <a:lnTo>
-                    <a:pt x="3877440" y="219427"/>
-                  </a:lnTo>
-                  <a:lnTo>
-                    <a:pt x="3799806" y="187481"/>
-                  </a:lnTo>
-                  <a:lnTo>
-                    <a:pt x="3722172" y="153937"/>
-                  </a:lnTo>
-                  <a:lnTo>
-                    <a:pt x="3644538" y="118714"/>
-                  </a:lnTo>
-                  <a:lnTo>
-                    <a:pt x="3566904" y="81729"/>
-                  </a:lnTo>
-                  <a:lnTo>
-                    <a:pt x="3489270" y="42894"/>
-                  </a:lnTo>
-                  <a:lnTo>
-                    <a:pt x="3411636" y="2116"/>
+                    <a:pt x="7293338" y="747215"/>
+                  </a:lnTo>
+                  <a:lnTo>
+                    <a:pt x="7215704" y="743659"/>
+                  </a:lnTo>
+                  <a:lnTo>
+                    <a:pt x="7138070" y="739925"/>
+                  </a:lnTo>
+                  <a:lnTo>
+                    <a:pt x="7060436" y="736004"/>
+                  </a:lnTo>
+                  <a:lnTo>
+                    <a:pt x="6982802" y="731887"/>
+                  </a:lnTo>
+                  <a:lnTo>
+                    <a:pt x="6905168" y="727564"/>
+                  </a:lnTo>
+                  <a:lnTo>
+                    <a:pt x="6827534" y="723024"/>
+                  </a:lnTo>
+                  <a:lnTo>
+                    <a:pt x="6749900" y="718258"/>
+                  </a:lnTo>
+                  <a:lnTo>
+                    <a:pt x="6672266" y="713253"/>
+                  </a:lnTo>
+                  <a:lnTo>
+                    <a:pt x="6594632" y="707998"/>
+                  </a:lnTo>
+                  <a:lnTo>
+                    <a:pt x="6516998" y="702479"/>
+                  </a:lnTo>
+                  <a:lnTo>
+                    <a:pt x="6439364" y="696685"/>
+                  </a:lnTo>
+                  <a:lnTo>
+                    <a:pt x="6361730" y="690601"/>
+                  </a:lnTo>
+                  <a:lnTo>
+                    <a:pt x="6284096" y="684212"/>
+                  </a:lnTo>
+                  <a:lnTo>
+                    <a:pt x="6206462" y="677504"/>
+                  </a:lnTo>
+                  <a:lnTo>
+                    <a:pt x="6128827" y="670460"/>
+                  </a:lnTo>
+                  <a:lnTo>
+                    <a:pt x="6051193" y="663064"/>
+                  </a:lnTo>
+                  <a:lnTo>
+                    <a:pt x="5973559" y="655298"/>
+                  </a:lnTo>
+                  <a:lnTo>
+                    <a:pt x="5895925" y="647143"/>
+                  </a:lnTo>
+                  <a:lnTo>
+                    <a:pt x="5818291" y="638580"/>
+                  </a:lnTo>
+                  <a:lnTo>
+                    <a:pt x="5740657" y="629589"/>
+                  </a:lnTo>
+                  <a:lnTo>
+                    <a:pt x="5663023" y="620148"/>
+                  </a:lnTo>
+                  <a:lnTo>
+                    <a:pt x="5585389" y="610234"/>
+                  </a:lnTo>
+                  <a:lnTo>
+                    <a:pt x="5507755" y="599825"/>
+                  </a:lnTo>
+                  <a:lnTo>
+                    <a:pt x="5430121" y="588895"/>
+                  </a:lnTo>
+                  <a:lnTo>
+                    <a:pt x="5352487" y="577418"/>
+                  </a:lnTo>
+                  <a:lnTo>
+                    <a:pt x="5274853" y="565367"/>
+                  </a:lnTo>
+                  <a:lnTo>
+                    <a:pt x="5197219" y="552713"/>
+                  </a:lnTo>
+                  <a:lnTo>
+                    <a:pt x="5119585" y="539426"/>
+                  </a:lnTo>
+                  <a:lnTo>
+                    <a:pt x="5041951" y="525474"/>
+                  </a:lnTo>
+                  <a:lnTo>
+                    <a:pt x="4964317" y="510824"/>
+                  </a:lnTo>
+                  <a:lnTo>
+                    <a:pt x="4886683" y="495441"/>
+                  </a:lnTo>
+                  <a:lnTo>
+                    <a:pt x="4809049" y="479289"/>
+                  </a:lnTo>
+                  <a:lnTo>
+                    <a:pt x="4731415" y="462329"/>
+                  </a:lnTo>
+                  <a:lnTo>
+                    <a:pt x="4653781" y="444520"/>
+                  </a:lnTo>
+                  <a:lnTo>
+                    <a:pt x="4576147" y="425820"/>
+                  </a:lnTo>
+                  <a:lnTo>
+                    <a:pt x="4498513" y="406184"/>
+                  </a:lnTo>
+                  <a:lnTo>
+                    <a:pt x="4420879" y="385566"/>
+                  </a:lnTo>
+                  <a:lnTo>
+                    <a:pt x="4343244" y="363917"/>
+                  </a:lnTo>
+                  <a:lnTo>
+                    <a:pt x="4265610" y="341184"/>
+                  </a:lnTo>
+                  <a:lnTo>
+                    <a:pt x="4187976" y="317314"/>
+                  </a:lnTo>
+                  <a:lnTo>
+                    <a:pt x="4110342" y="292250"/>
+                  </a:lnTo>
+                  <a:lnTo>
+                    <a:pt x="4032708" y="265933"/>
+                  </a:lnTo>
+                  <a:lnTo>
+                    <a:pt x="3955074" y="238298"/>
+                  </a:lnTo>
+                  <a:lnTo>
+                    <a:pt x="3877440" y="209281"/>
+                  </a:lnTo>
+                  <a:lnTo>
+                    <a:pt x="3799806" y="178812"/>
+                  </a:lnTo>
+                  <a:lnTo>
+                    <a:pt x="3722172" y="146819"/>
+                  </a:lnTo>
+                  <a:lnTo>
+                    <a:pt x="3644538" y="113225"/>
+                  </a:lnTo>
+                  <a:lnTo>
+                    <a:pt x="3566904" y="77950"/>
+                  </a:lnTo>
+                  <a:lnTo>
+                    <a:pt x="3489270" y="40911"/>
+                  </a:lnTo>
+                  <a:lnTo>
+                    <a:pt x="3411636" y="2019"/>
                   </a:lnTo>
                   <a:lnTo>
                     <a:pt x="3334002" y="0"/>
                   </a:lnTo>
                   <a:lnTo>
-                    <a:pt x="3256368" y="17135"/>
-                  </a:lnTo>
-                  <a:lnTo>
-                    <a:pt x="3178734" y="33929"/>
-                  </a:lnTo>
-                  <a:lnTo>
-                    <a:pt x="3101100" y="50387"/>
-                  </a:lnTo>
-                  <a:lnTo>
-                    <a:pt x="3023466" y="66516"/>
-                  </a:lnTo>
-                  <a:lnTo>
-                    <a:pt x="2945832" y="82323"/>
-                  </a:lnTo>
-                  <a:lnTo>
-                    <a:pt x="2868198" y="97815"/>
-                  </a:lnTo>
-                  <a:lnTo>
-                    <a:pt x="2790564" y="112997"/>
-                  </a:lnTo>
-                  <a:lnTo>
-                    <a:pt x="2712930" y="127876"/>
-                  </a:lnTo>
-                  <a:lnTo>
-                    <a:pt x="2635295" y="142457"/>
-                  </a:lnTo>
-                  <a:lnTo>
-                    <a:pt x="2557661" y="156748"/>
-                  </a:lnTo>
-                  <a:lnTo>
-                    <a:pt x="2480027" y="170753"/>
-                  </a:lnTo>
-                  <a:lnTo>
-                    <a:pt x="2402393" y="184478"/>
-                  </a:lnTo>
-                  <a:lnTo>
-                    <a:pt x="2324759" y="197929"/>
-                  </a:lnTo>
-                  <a:lnTo>
-                    <a:pt x="2247125" y="211112"/>
-                  </a:lnTo>
-                  <a:lnTo>
-                    <a:pt x="2169491" y="224031"/>
-                  </a:lnTo>
-                  <a:lnTo>
-                    <a:pt x="2091857" y="236693"/>
-                  </a:lnTo>
-                  <a:lnTo>
-                    <a:pt x="2014223" y="249101"/>
-                  </a:lnTo>
-                  <a:lnTo>
-                    <a:pt x="1936589" y="261261"/>
-                  </a:lnTo>
-                  <a:lnTo>
-                    <a:pt x="1858955" y="273179"/>
-                  </a:lnTo>
-                  <a:lnTo>
-                    <a:pt x="1781321" y="284859"/>
-                  </a:lnTo>
-                  <a:lnTo>
-                    <a:pt x="1703687" y="296305"/>
-                  </a:lnTo>
-                  <a:lnTo>
-                    <a:pt x="1626053" y="307523"/>
-                  </a:lnTo>
-                  <a:lnTo>
-                    <a:pt x="1548419" y="318517"/>
-                  </a:lnTo>
-                  <a:lnTo>
-                    <a:pt x="1470785" y="329291"/>
-                  </a:lnTo>
-                  <a:lnTo>
-                    <a:pt x="1393151" y="339850"/>
-                  </a:lnTo>
-                  <a:lnTo>
-                    <a:pt x="1315517" y="350198"/>
-                  </a:lnTo>
-                  <a:lnTo>
-                    <a:pt x="1237883" y="360339"/>
-                  </a:lnTo>
-                  <a:lnTo>
-                    <a:pt x="1160249" y="370278"/>
-                  </a:lnTo>
-                  <a:lnTo>
-                    <a:pt x="1082615" y="380018"/>
-                  </a:lnTo>
-                  <a:lnTo>
-                    <a:pt x="1004981" y="389564"/>
-                  </a:lnTo>
-                  <a:lnTo>
-                    <a:pt x="927346" y="398919"/>
-                  </a:lnTo>
-                  <a:lnTo>
-                    <a:pt x="849712" y="408088"/>
-                  </a:lnTo>
-                  <a:lnTo>
-                    <a:pt x="772078" y="417073"/>
-                  </a:lnTo>
-                  <a:lnTo>
-                    <a:pt x="694444" y="425879"/>
-                  </a:lnTo>
-                  <a:lnTo>
-                    <a:pt x="616810" y="434509"/>
-                  </a:lnTo>
-                  <a:lnTo>
-                    <a:pt x="539176" y="442966"/>
-                  </a:lnTo>
-                  <a:lnTo>
-                    <a:pt x="461542" y="451255"/>
-                  </a:lnTo>
-                  <a:lnTo>
-                    <a:pt x="383908" y="459378"/>
-                  </a:lnTo>
-                  <a:lnTo>
-                    <a:pt x="306274" y="467339"/>
-                  </a:lnTo>
-                  <a:lnTo>
-                    <a:pt x="228640" y="475140"/>
-                  </a:lnTo>
-                  <a:lnTo>
-                    <a:pt x="151006" y="482786"/>
-                  </a:lnTo>
-                  <a:lnTo>
-                    <a:pt x="73372" y="490280"/>
-                  </a:lnTo>
-                  <a:lnTo>
-                    <a:pt x="0" y="497220"/>
+                    <a:pt x="3256368" y="16343"/>
+                  </a:lnTo>
+                  <a:lnTo>
+                    <a:pt x="3178734" y="32360"/>
+                  </a:lnTo>
+                  <a:lnTo>
+                    <a:pt x="3101100" y="48057"/>
+                  </a:lnTo>
+                  <a:lnTo>
+                    <a:pt x="3023466" y="63440"/>
+                  </a:lnTo>
+                  <a:lnTo>
+                    <a:pt x="2945832" y="78517"/>
+                  </a:lnTo>
+                  <a:lnTo>
+                    <a:pt x="2868198" y="93292"/>
+                  </a:lnTo>
+                  <a:lnTo>
+                    <a:pt x="2790564" y="107772"/>
+                  </a:lnTo>
+                  <a:lnTo>
+                    <a:pt x="2712930" y="121963"/>
+                  </a:lnTo>
+                  <a:lnTo>
+                    <a:pt x="2635295" y="135870"/>
+                  </a:lnTo>
+                  <a:lnTo>
+                    <a:pt x="2557661" y="149500"/>
+                  </a:lnTo>
+                  <a:lnTo>
+                    <a:pt x="2480027" y="162857"/>
+                  </a:lnTo>
+                  <a:lnTo>
+                    <a:pt x="2402393" y="175948"/>
+                  </a:lnTo>
+                  <a:lnTo>
+                    <a:pt x="2324759" y="188777"/>
+                  </a:lnTo>
+                  <a:lnTo>
+                    <a:pt x="2247125" y="201350"/>
+                  </a:lnTo>
+                  <a:lnTo>
+                    <a:pt x="2169491" y="213672"/>
+                  </a:lnTo>
+                  <a:lnTo>
+                    <a:pt x="2091857" y="225748"/>
+                  </a:lnTo>
+                  <a:lnTo>
+                    <a:pt x="2014223" y="237583"/>
+                  </a:lnTo>
+                  <a:lnTo>
+                    <a:pt x="1936589" y="249181"/>
+                  </a:lnTo>
+                  <a:lnTo>
+                    <a:pt x="1858955" y="260547"/>
+                  </a:lnTo>
+                  <a:lnTo>
+                    <a:pt x="1781321" y="271687"/>
+                  </a:lnTo>
+                  <a:lnTo>
+                    <a:pt x="1703687" y="282604"/>
+                  </a:lnTo>
+                  <a:lnTo>
+                    <a:pt x="1626053" y="293303"/>
+                  </a:lnTo>
+                  <a:lnTo>
+                    <a:pt x="1548419" y="303789"/>
+                  </a:lnTo>
+                  <a:lnTo>
+                    <a:pt x="1470785" y="314065"/>
+                  </a:lnTo>
+                  <a:lnTo>
+                    <a:pt x="1393151" y="324135"/>
+                  </a:lnTo>
+                  <a:lnTo>
+                    <a:pt x="1315517" y="334005"/>
+                  </a:lnTo>
+                  <a:lnTo>
+                    <a:pt x="1237883" y="343677"/>
+                  </a:lnTo>
+                  <a:lnTo>
+                    <a:pt x="1160249" y="353157"/>
+                  </a:lnTo>
+                  <a:lnTo>
+                    <a:pt x="1082615" y="362447"/>
+                  </a:lnTo>
+                  <a:lnTo>
+                    <a:pt x="1004981" y="371551"/>
+                  </a:lnTo>
+                  <a:lnTo>
+                    <a:pt x="927346" y="380474"/>
+                  </a:lnTo>
+                  <a:lnTo>
+                    <a:pt x="849712" y="389218"/>
+                  </a:lnTo>
+                  <a:lnTo>
+                    <a:pt x="772078" y="397788"/>
+                  </a:lnTo>
+                  <a:lnTo>
+                    <a:pt x="694444" y="406186"/>
+                  </a:lnTo>
+                  <a:lnTo>
+                    <a:pt x="616810" y="414417"/>
+                  </a:lnTo>
+                  <a:lnTo>
+                    <a:pt x="539176" y="422483"/>
+                  </a:lnTo>
+                  <a:lnTo>
+                    <a:pt x="461542" y="430389"/>
+                  </a:lnTo>
+                  <a:lnTo>
+                    <a:pt x="383908" y="438136"/>
+                  </a:lnTo>
+                  <a:lnTo>
+                    <a:pt x="306274" y="445729"/>
+                  </a:lnTo>
+                  <a:lnTo>
+                    <a:pt x="228640" y="453170"/>
+                  </a:lnTo>
+                  <a:lnTo>
+                    <a:pt x="151006" y="460463"/>
+                  </a:lnTo>
+                  <a:lnTo>
+                    <a:pt x="73372" y="467609"/>
+                  </a:lnTo>
+                  <a:lnTo>
+                    <a:pt x="0" y="474229"/>
                   </a:lnTo>
                 </a:path>
               </a:pathLst>
@@ -4151,300 +4151,300 @@
           </p:nvSpPr>
           <p:spPr>
             <a:xfrm>
-              <a:off x="817517" y="3924949"/>
-              <a:ext cx="7370972" cy="1207292"/>
+              <a:off x="817517" y="4008097"/>
+              <a:ext cx="7370972" cy="1151468"/>
             </a:xfrm>
             <a:custGeom>
               <a:avLst/>
               <a:pathLst>
-                <a:path w="7370972" h="1207292">
+                <a:path w="7370972" h="1151468">
                   <a:moveTo>
                     <a:pt x="0" y="0"/>
                   </a:moveTo>
                   <a:lnTo>
-                    <a:pt x="73372" y="21845"/>
-                  </a:lnTo>
-                  <a:lnTo>
-                    <a:pt x="151006" y="44632"/>
-                  </a:lnTo>
-                  <a:lnTo>
-                    <a:pt x="228640" y="67094"/>
-                  </a:lnTo>
-                  <a:lnTo>
-                    <a:pt x="306274" y="89236"/>
-                  </a:lnTo>
-                  <a:lnTo>
-                    <a:pt x="383908" y="111064"/>
-                  </a:lnTo>
-                  <a:lnTo>
-                    <a:pt x="461542" y="132582"/>
-                  </a:lnTo>
-                  <a:lnTo>
-                    <a:pt x="539176" y="153793"/>
-                  </a:lnTo>
-                  <a:lnTo>
-                    <a:pt x="616810" y="174703"/>
-                  </a:lnTo>
-                  <a:lnTo>
-                    <a:pt x="694444" y="195315"/>
-                  </a:lnTo>
-                  <a:lnTo>
-                    <a:pt x="772078" y="215635"/>
-                  </a:lnTo>
-                  <a:lnTo>
-                    <a:pt x="849712" y="235665"/>
-                  </a:lnTo>
-                  <a:lnTo>
-                    <a:pt x="927346" y="255411"/>
-                  </a:lnTo>
-                  <a:lnTo>
-                    <a:pt x="1004981" y="274876"/>
-                  </a:lnTo>
-                  <a:lnTo>
-                    <a:pt x="1082615" y="294064"/>
-                  </a:lnTo>
-                  <a:lnTo>
-                    <a:pt x="1160249" y="312979"/>
-                  </a:lnTo>
-                  <a:lnTo>
-                    <a:pt x="1237883" y="331625"/>
-                  </a:lnTo>
-                  <a:lnTo>
-                    <a:pt x="1315517" y="350006"/>
-                  </a:lnTo>
-                  <a:lnTo>
-                    <a:pt x="1393151" y="368126"/>
-                  </a:lnTo>
-                  <a:lnTo>
-                    <a:pt x="1470785" y="385988"/>
-                  </a:lnTo>
-                  <a:lnTo>
-                    <a:pt x="1548419" y="403596"/>
-                  </a:lnTo>
-                  <a:lnTo>
-                    <a:pt x="1626053" y="420953"/>
-                  </a:lnTo>
-                  <a:lnTo>
-                    <a:pt x="1703687" y="438064"/>
-                  </a:lnTo>
-                  <a:lnTo>
-                    <a:pt x="1781321" y="454932"/>
-                  </a:lnTo>
-                  <a:lnTo>
-                    <a:pt x="1858955" y="471559"/>
-                  </a:lnTo>
-                  <a:lnTo>
-                    <a:pt x="1936589" y="487951"/>
-                  </a:lnTo>
-                  <a:lnTo>
-                    <a:pt x="2014223" y="504109"/>
-                  </a:lnTo>
-                  <a:lnTo>
-                    <a:pt x="2091857" y="520037"/>
-                  </a:lnTo>
-                  <a:lnTo>
-                    <a:pt x="2169491" y="535739"/>
-                  </a:lnTo>
-                  <a:lnTo>
-                    <a:pt x="2247125" y="551218"/>
-                  </a:lnTo>
-                  <a:lnTo>
-                    <a:pt x="2324759" y="566476"/>
-                  </a:lnTo>
-                  <a:lnTo>
-                    <a:pt x="2402393" y="581518"/>
-                  </a:lnTo>
-                  <a:lnTo>
-                    <a:pt x="2480027" y="596345"/>
-                  </a:lnTo>
-                  <a:lnTo>
-                    <a:pt x="2557661" y="610962"/>
-                  </a:lnTo>
-                  <a:lnTo>
-                    <a:pt x="2635295" y="625371"/>
-                  </a:lnTo>
-                  <a:lnTo>
-                    <a:pt x="2712930" y="639575"/>
-                  </a:lnTo>
-                  <a:lnTo>
-                    <a:pt x="2790564" y="653577"/>
-                  </a:lnTo>
-                  <a:lnTo>
-                    <a:pt x="2868198" y="667380"/>
-                  </a:lnTo>
-                  <a:lnTo>
-                    <a:pt x="2945832" y="680987"/>
-                  </a:lnTo>
-                  <a:lnTo>
-                    <a:pt x="3023466" y="694400"/>
-                  </a:lnTo>
-                  <a:lnTo>
-                    <a:pt x="3101100" y="707622"/>
-                  </a:lnTo>
-                  <a:lnTo>
-                    <a:pt x="3178734" y="720657"/>
-                  </a:lnTo>
-                  <a:lnTo>
-                    <a:pt x="3256368" y="733506"/>
-                  </a:lnTo>
-                  <a:lnTo>
-                    <a:pt x="3334002" y="746172"/>
-                  </a:lnTo>
-                  <a:lnTo>
-                    <a:pt x="3411636" y="758659"/>
-                  </a:lnTo>
-                  <a:lnTo>
-                    <a:pt x="3489270" y="770967"/>
-                  </a:lnTo>
-                  <a:lnTo>
-                    <a:pt x="3566904" y="783101"/>
-                  </a:lnTo>
-                  <a:lnTo>
-                    <a:pt x="3644538" y="795062"/>
-                  </a:lnTo>
-                  <a:lnTo>
-                    <a:pt x="3722172" y="806853"/>
-                  </a:lnTo>
-                  <a:lnTo>
-                    <a:pt x="3799806" y="818476"/>
-                  </a:lnTo>
-                  <a:lnTo>
-                    <a:pt x="3877440" y="829935"/>
-                  </a:lnTo>
-                  <a:lnTo>
-                    <a:pt x="3955074" y="841230"/>
-                  </a:lnTo>
-                  <a:lnTo>
-                    <a:pt x="4032708" y="852364"/>
-                  </a:lnTo>
-                  <a:lnTo>
-                    <a:pt x="4110342" y="863341"/>
-                  </a:lnTo>
-                  <a:lnTo>
-                    <a:pt x="4187976" y="874161"/>
-                  </a:lnTo>
-                  <a:lnTo>
-                    <a:pt x="4265610" y="884827"/>
-                  </a:lnTo>
-                  <a:lnTo>
-                    <a:pt x="4343244" y="895342"/>
-                  </a:lnTo>
-                  <a:lnTo>
-                    <a:pt x="4420879" y="905707"/>
-                  </a:lnTo>
-                  <a:lnTo>
-                    <a:pt x="4498513" y="915924"/>
-                  </a:lnTo>
-                  <a:lnTo>
-                    <a:pt x="4576147" y="925997"/>
-                  </a:lnTo>
-                  <a:lnTo>
-                    <a:pt x="4653781" y="935926"/>
-                  </a:lnTo>
-                  <a:lnTo>
-                    <a:pt x="4731415" y="945714"/>
-                  </a:lnTo>
-                  <a:lnTo>
-                    <a:pt x="4809049" y="955363"/>
-                  </a:lnTo>
-                  <a:lnTo>
-                    <a:pt x="4886683" y="964874"/>
-                  </a:lnTo>
-                  <a:lnTo>
-                    <a:pt x="4964317" y="974251"/>
-                  </a:lnTo>
-                  <a:lnTo>
-                    <a:pt x="5041951" y="983494"/>
-                  </a:lnTo>
-                  <a:lnTo>
-                    <a:pt x="5119585" y="992605"/>
-                  </a:lnTo>
-                  <a:lnTo>
-                    <a:pt x="5197219" y="1001587"/>
-                  </a:lnTo>
-                  <a:lnTo>
-                    <a:pt x="5274853" y="1010442"/>
-                  </a:lnTo>
-                  <a:lnTo>
-                    <a:pt x="5352487" y="1019170"/>
-                  </a:lnTo>
-                  <a:lnTo>
-                    <a:pt x="5430121" y="1027774"/>
-                  </a:lnTo>
-                  <a:lnTo>
-                    <a:pt x="5507755" y="1036256"/>
-                  </a:lnTo>
-                  <a:lnTo>
-                    <a:pt x="5585389" y="1044617"/>
-                  </a:lnTo>
-                  <a:lnTo>
-                    <a:pt x="5663023" y="1052860"/>
-                  </a:lnTo>
-                  <a:lnTo>
-                    <a:pt x="5740657" y="1060985"/>
-                  </a:lnTo>
-                  <a:lnTo>
-                    <a:pt x="5818291" y="1068995"/>
-                  </a:lnTo>
-                  <a:lnTo>
-                    <a:pt x="5895925" y="1076890"/>
-                  </a:lnTo>
-                  <a:lnTo>
-                    <a:pt x="5973559" y="1084674"/>
-                  </a:lnTo>
-                  <a:lnTo>
-                    <a:pt x="6051193" y="1092347"/>
-                  </a:lnTo>
-                  <a:lnTo>
-                    <a:pt x="6128827" y="1099910"/>
-                  </a:lnTo>
-                  <a:lnTo>
-                    <a:pt x="6206462" y="1107367"/>
-                  </a:lnTo>
-                  <a:lnTo>
-                    <a:pt x="6284096" y="1114717"/>
-                  </a:lnTo>
-                  <a:lnTo>
-                    <a:pt x="6361730" y="1121962"/>
-                  </a:lnTo>
-                  <a:lnTo>
-                    <a:pt x="6439364" y="1129105"/>
-                  </a:lnTo>
-                  <a:lnTo>
-                    <a:pt x="6516998" y="1136146"/>
-                  </a:lnTo>
-                  <a:lnTo>
-                    <a:pt x="6594632" y="1143087"/>
-                  </a:lnTo>
-                  <a:lnTo>
-                    <a:pt x="6672266" y="1149929"/>
-                  </a:lnTo>
-                  <a:lnTo>
-                    <a:pt x="6749900" y="1156674"/>
-                  </a:lnTo>
-                  <a:lnTo>
-                    <a:pt x="6827534" y="1163323"/>
-                  </a:lnTo>
-                  <a:lnTo>
-                    <a:pt x="6905168" y="1169877"/>
-                  </a:lnTo>
-                  <a:lnTo>
-                    <a:pt x="6982802" y="1176338"/>
-                  </a:lnTo>
-                  <a:lnTo>
-                    <a:pt x="7060436" y="1182708"/>
-                  </a:lnTo>
-                  <a:lnTo>
-                    <a:pt x="7138070" y="1188987"/>
-                  </a:lnTo>
-                  <a:lnTo>
-                    <a:pt x="7215704" y="1195176"/>
-                  </a:lnTo>
-                  <a:lnTo>
-                    <a:pt x="7293338" y="1201278"/>
-                  </a:lnTo>
-                  <a:lnTo>
-                    <a:pt x="7370972" y="1207292"/>
+                    <a:pt x="73372" y="20835"/>
+                  </a:lnTo>
+                  <a:lnTo>
+                    <a:pt x="151006" y="42568"/>
+                  </a:lnTo>
+                  <a:lnTo>
+                    <a:pt x="228640" y="63991"/>
+                  </a:lnTo>
+                  <a:lnTo>
+                    <a:pt x="306274" y="85110"/>
+                  </a:lnTo>
+                  <a:lnTo>
+                    <a:pt x="383908" y="105929"/>
+                  </a:lnTo>
+                  <a:lnTo>
+                    <a:pt x="461542" y="126451"/>
+                  </a:lnTo>
+                  <a:lnTo>
+                    <a:pt x="539176" y="146682"/>
+                  </a:lnTo>
+                  <a:lnTo>
+                    <a:pt x="616810" y="166625"/>
+                  </a:lnTo>
+                  <a:lnTo>
+                    <a:pt x="694444" y="186284"/>
+                  </a:lnTo>
+                  <a:lnTo>
+                    <a:pt x="772078" y="205664"/>
+                  </a:lnTo>
+                  <a:lnTo>
+                    <a:pt x="849712" y="224768"/>
+                  </a:lnTo>
+                  <a:lnTo>
+                    <a:pt x="927346" y="243601"/>
+                  </a:lnTo>
+                  <a:lnTo>
+                    <a:pt x="1004981" y="262165"/>
+                  </a:lnTo>
+                  <a:lnTo>
+                    <a:pt x="1082615" y="280466"/>
+                  </a:lnTo>
+                  <a:lnTo>
+                    <a:pt x="1160249" y="298507"/>
+                  </a:lnTo>
+                  <a:lnTo>
+                    <a:pt x="1237883" y="316291"/>
+                  </a:lnTo>
+                  <a:lnTo>
+                    <a:pt x="1315517" y="333822"/>
+                  </a:lnTo>
+                  <a:lnTo>
+                    <a:pt x="1393151" y="351104"/>
+                  </a:lnTo>
+                  <a:lnTo>
+                    <a:pt x="1470785" y="368140"/>
+                  </a:lnTo>
+                  <a:lnTo>
+                    <a:pt x="1548419" y="384934"/>
+                  </a:lnTo>
+                  <a:lnTo>
+                    <a:pt x="1626053" y="401489"/>
+                  </a:lnTo>
+                  <a:lnTo>
+                    <a:pt x="1703687" y="417808"/>
+                  </a:lnTo>
+                  <a:lnTo>
+                    <a:pt x="1781321" y="433896"/>
+                  </a:lnTo>
+                  <a:lnTo>
+                    <a:pt x="1858955" y="449755"/>
+                  </a:lnTo>
+                  <a:lnTo>
+                    <a:pt x="1936589" y="465388"/>
+                  </a:lnTo>
+                  <a:lnTo>
+                    <a:pt x="2014223" y="480799"/>
+                  </a:lnTo>
+                  <a:lnTo>
+                    <a:pt x="2091857" y="495991"/>
+                  </a:lnTo>
+                  <a:lnTo>
+                    <a:pt x="2169491" y="510967"/>
+                  </a:lnTo>
+                  <a:lnTo>
+                    <a:pt x="2247125" y="525730"/>
+                  </a:lnTo>
+                  <a:lnTo>
+                    <a:pt x="2324759" y="540282"/>
+                  </a:lnTo>
+                  <a:lnTo>
+                    <a:pt x="2402393" y="554628"/>
+                  </a:lnTo>
+                  <a:lnTo>
+                    <a:pt x="2480027" y="568770"/>
+                  </a:lnTo>
+                  <a:lnTo>
+                    <a:pt x="2557661" y="582711"/>
+                  </a:lnTo>
+                  <a:lnTo>
+                    <a:pt x="2635295" y="596454"/>
+                  </a:lnTo>
+                  <a:lnTo>
+                    <a:pt x="2712930" y="610001"/>
+                  </a:lnTo>
+                  <a:lnTo>
+                    <a:pt x="2790564" y="623356"/>
+                  </a:lnTo>
+                  <a:lnTo>
+                    <a:pt x="2868198" y="636521"/>
+                  </a:lnTo>
+                  <a:lnTo>
+                    <a:pt x="2945832" y="649498"/>
+                  </a:lnTo>
+                  <a:lnTo>
+                    <a:pt x="3023466" y="662291"/>
+                  </a:lnTo>
+                  <a:lnTo>
+                    <a:pt x="3101100" y="674902"/>
+                  </a:lnTo>
+                  <a:lnTo>
+                    <a:pt x="3178734" y="687334"/>
+                  </a:lnTo>
+                  <a:lnTo>
+                    <a:pt x="3256368" y="699589"/>
+                  </a:lnTo>
+                  <a:lnTo>
+                    <a:pt x="3334002" y="711670"/>
+                  </a:lnTo>
+                  <a:lnTo>
+                    <a:pt x="3411636" y="723578"/>
+                  </a:lnTo>
+                  <a:lnTo>
+                    <a:pt x="3489270" y="735318"/>
+                  </a:lnTo>
+                  <a:lnTo>
+                    <a:pt x="3566904" y="746891"/>
+                  </a:lnTo>
+                  <a:lnTo>
+                    <a:pt x="3644538" y="758299"/>
+                  </a:lnTo>
+                  <a:lnTo>
+                    <a:pt x="3722172" y="769544"/>
+                  </a:lnTo>
+                  <a:lnTo>
+                    <a:pt x="3799806" y="780630"/>
+                  </a:lnTo>
+                  <a:lnTo>
+                    <a:pt x="3877440" y="791559"/>
+                  </a:lnTo>
+                  <a:lnTo>
+                    <a:pt x="3955074" y="802332"/>
+                  </a:lnTo>
+                  <a:lnTo>
+                    <a:pt x="4032708" y="812951"/>
+                  </a:lnTo>
+                  <a:lnTo>
+                    <a:pt x="4110342" y="823420"/>
+                  </a:lnTo>
+                  <a:lnTo>
+                    <a:pt x="4187976" y="833740"/>
+                  </a:lnTo>
+                  <a:lnTo>
+                    <a:pt x="4265610" y="843913"/>
+                  </a:lnTo>
+                  <a:lnTo>
+                    <a:pt x="4343244" y="853941"/>
+                  </a:lnTo>
+                  <a:lnTo>
+                    <a:pt x="4420879" y="863827"/>
+                  </a:lnTo>
+                  <a:lnTo>
+                    <a:pt x="4498513" y="873572"/>
+                  </a:lnTo>
+                  <a:lnTo>
+                    <a:pt x="4576147" y="883179"/>
+                  </a:lnTo>
+                  <a:lnTo>
+                    <a:pt x="4653781" y="892649"/>
+                  </a:lnTo>
+                  <a:lnTo>
+                    <a:pt x="4731415" y="901984"/>
+                  </a:lnTo>
+                  <a:lnTo>
+                    <a:pt x="4809049" y="911187"/>
+                  </a:lnTo>
+                  <a:lnTo>
+                    <a:pt x="4886683" y="920259"/>
+                  </a:lnTo>
+                  <a:lnTo>
+                    <a:pt x="4964317" y="929202"/>
+                  </a:lnTo>
+                  <a:lnTo>
+                    <a:pt x="5041951" y="938017"/>
+                  </a:lnTo>
+                  <a:lnTo>
+                    <a:pt x="5119585" y="946708"/>
+                  </a:lnTo>
+                  <a:lnTo>
+                    <a:pt x="5197219" y="955274"/>
+                  </a:lnTo>
+                  <a:lnTo>
+                    <a:pt x="5274853" y="963719"/>
+                  </a:lnTo>
+                  <a:lnTo>
+                    <a:pt x="5352487" y="972044"/>
+                  </a:lnTo>
+                  <a:lnTo>
+                    <a:pt x="5430121" y="980250"/>
+                  </a:lnTo>
+                  <a:lnTo>
+                    <a:pt x="5507755" y="988340"/>
+                  </a:lnTo>
+                  <a:lnTo>
+                    <a:pt x="5585389" y="996315"/>
+                  </a:lnTo>
+                  <a:lnTo>
+                    <a:pt x="5663023" y="1004176"/>
+                  </a:lnTo>
+                  <a:lnTo>
+                    <a:pt x="5740657" y="1011925"/>
+                  </a:lnTo>
+                  <a:lnTo>
+                    <a:pt x="5818291" y="1019565"/>
+                  </a:lnTo>
+                  <a:lnTo>
+                    <a:pt x="5895925" y="1027095"/>
+                  </a:lnTo>
+                  <a:lnTo>
+                    <a:pt x="5973559" y="1034519"/>
+                  </a:lnTo>
+                  <a:lnTo>
+                    <a:pt x="6051193" y="1041837"/>
+                  </a:lnTo>
+                  <a:lnTo>
+                    <a:pt x="6128827" y="1049051"/>
+                  </a:lnTo>
+                  <a:lnTo>
+                    <a:pt x="6206462" y="1056162"/>
+                  </a:lnTo>
+                  <a:lnTo>
+                    <a:pt x="6284096" y="1063173"/>
+                  </a:lnTo>
+                  <a:lnTo>
+                    <a:pt x="6361730" y="1070083"/>
+                  </a:lnTo>
+                  <a:lnTo>
+                    <a:pt x="6439364" y="1076895"/>
+                  </a:lnTo>
+                  <a:lnTo>
+                    <a:pt x="6516998" y="1083611"/>
+                  </a:lnTo>
+                  <a:lnTo>
+                    <a:pt x="6594632" y="1090231"/>
+                  </a:lnTo>
+                  <a:lnTo>
+                    <a:pt x="6672266" y="1096757"/>
+                  </a:lnTo>
+                  <a:lnTo>
+                    <a:pt x="6749900" y="1103190"/>
+                  </a:lnTo>
+                  <a:lnTo>
+                    <a:pt x="6827534" y="1109531"/>
+                  </a:lnTo>
+                  <a:lnTo>
+                    <a:pt x="6905168" y="1115783"/>
+                  </a:lnTo>
+                  <a:lnTo>
+                    <a:pt x="6982802" y="1121945"/>
+                  </a:lnTo>
+                  <a:lnTo>
+                    <a:pt x="7060436" y="1128020"/>
+                  </a:lnTo>
+                  <a:lnTo>
+                    <a:pt x="7138070" y="1134008"/>
+                  </a:lnTo>
+                  <a:lnTo>
+                    <a:pt x="7215704" y="1139912"/>
+                  </a:lnTo>
+                  <a:lnTo>
+                    <a:pt x="7293338" y="1145731"/>
+                  </a:lnTo>
+                  <a:lnTo>
+                    <a:pt x="7370972" y="1151468"/>
                   </a:lnTo>
                 </a:path>
               </a:pathLst>
@@ -4473,7 +4473,7 @@
           </p:nvSpPr>
           <p:spPr>
             <a:xfrm>
-              <a:off x="817517" y="4679530"/>
+              <a:off x="817517" y="4727786"/>
               <a:ext cx="7799693" cy="0"/>
             </a:xfrm>
             <a:custGeom>
@@ -4516,15 +4516,15 @@
           </p:nvSpPr>
           <p:spPr>
             <a:xfrm>
-              <a:off x="4203673" y="1896563"/>
-              <a:ext cx="0" cy="3826579"/>
+              <a:off x="4203673" y="2073503"/>
+              <a:ext cx="0" cy="3649639"/>
             </a:xfrm>
             <a:custGeom>
               <a:avLst/>
               <a:pathLst>
-                <a:path w="0" h="3826579">
+                <a:path w="0" h="3649639">
                   <a:moveTo>
-                    <a:pt x="0" y="3826579"/>
+                    <a:pt x="0" y="3649639"/>
                   </a:moveTo>
                   <a:lnTo>
                     <a:pt x="0" y="0"/>
@@ -4559,7 +4559,7 @@
           </p:nvSpPr>
           <p:spPr>
             <a:xfrm>
-              <a:off x="692708" y="5509156"/>
+              <a:off x="692708" y="5517199"/>
               <a:ext cx="62179" cy="80101"/>
             </a:xfrm>
             <a:prstGeom prst="rect">
@@ -4605,7 +4605,7 @@
           </p:nvSpPr>
           <p:spPr>
             <a:xfrm>
-              <a:off x="692708" y="4639479"/>
+              <a:off x="692708" y="4687735"/>
               <a:ext cx="62179" cy="80101"/>
             </a:xfrm>
             <a:prstGeom prst="rect">
@@ -4651,7 +4651,7 @@
           </p:nvSpPr>
           <p:spPr>
             <a:xfrm>
-              <a:off x="692708" y="3769802"/>
+              <a:off x="692708" y="3858272"/>
               <a:ext cx="62179" cy="80101"/>
             </a:xfrm>
             <a:prstGeom prst="rect">
@@ -4697,7 +4697,7 @@
           </p:nvSpPr>
           <p:spPr>
             <a:xfrm>
-              <a:off x="692708" y="2900125"/>
+              <a:off x="692708" y="3028808"/>
               <a:ext cx="62179" cy="80101"/>
             </a:xfrm>
             <a:prstGeom prst="rect">
@@ -4743,7 +4743,7 @@
           </p:nvSpPr>
           <p:spPr>
             <a:xfrm>
-              <a:off x="692708" y="2030448"/>
+              <a:off x="692708" y="2199345"/>
               <a:ext cx="62179" cy="80101"/>
             </a:xfrm>
             <a:prstGeom prst="rect">
@@ -5019,7 +5019,7 @@
           </p:nvSpPr>
           <p:spPr>
             <a:xfrm rot="-5400000">
-              <a:off x="68446" y="3759743"/>
+              <a:off x="68446" y="3848213"/>
               <a:ext cx="1016904" cy="100218"/>
             </a:xfrm>
             <a:prstGeom prst="rect">
@@ -5060,6 +5060,52 @@
         <p:sp>
           <p:nvSpPr>
             <p:cNvPr id="38" name="tx38"/>
+            <p:cNvSpPr/>
+            <p:nvPr/>
+          </p:nvSpPr>
+          <p:spPr>
+            <a:xfrm>
+              <a:off x="817517" y="1896563"/>
+              <a:ext cx="4166463" cy="82021"/>
+            </a:xfrm>
+            <a:prstGeom prst="rect">
+              <a:avLst/>
+            </a:prstGeom>
+            <a:noFill/>
+          </p:spPr>
+          <p:txBody>
+            <a:bodyPr lIns="0" rIns="0" tIns="0" bIns="0" anchorCtr="1" anchor="ctr" wrap="none"/>
+            <a:lstStyle/>
+            <a:p>
+              <a:pPr algn="l" marL="0" marR="0" indent="0">
+                <a:lnSpc>
+                  <a:spcPts val="900"/>
+                </a:lnSpc>
+                <a:spcBef>
+                  <a:spcPts val="0"/>
+                </a:spcBef>
+                <a:spcAft>
+                  <a:spcPts val="0"/>
+                </a:spcAft>
+              </a:pPr>
+              <a:r>
+                <a:rPr sz="900">
+                  <a:solidFill>
+                    <a:srgbClr val="404040">
+                      <a:alpha val="100000"/>
+                    </a:srgbClr>
+                  </a:solidFill>
+                  <a:latin typeface="Helvetica"/>
+                  <a:cs typeface="Helvetica"/>
+                </a:rPr>
+                <a:t>subHR = 0.85 (95% CI 0.57-1.26), p = 0.416   (per 0.1-unit increase in eGFR ratio)</a:t>
+              </a:r>
+            </a:p>
+          </p:txBody>
+        </p:sp>
+        <p:sp>
+          <p:nvSpPr>
+            <p:cNvPr id="39" name="tx39"/>
             <p:cNvSpPr/>
             <p:nvPr/>
           </p:nvSpPr>

--- a/docs/plots/carbo/jx_carbo_linsubhr_ratio_aki2.pptx
+++ b/docs/plots/carbo/jx_carbo_linsubhr_ratio_aki2.pptx
@@ -2271,26 +2271,26 @@
           </p:nvSpPr>
           <p:spPr>
             <a:xfrm>
-              <a:off x="817517" y="5142518"/>
-              <a:ext cx="7799693" cy="0"/>
+              <a:off x="915645" y="5071743"/>
+              <a:ext cx="7682587" cy="0"/>
             </a:xfrm>
             <a:custGeom>
               <a:avLst/>
               <a:pathLst>
-                <a:path w="7799693" h="0">
+                <a:path w="7682587" h="0">
                   <a:moveTo>
                     <a:pt x="0" y="0"/>
                   </a:moveTo>
                   <a:lnTo>
-                    <a:pt x="7799693" y="0"/>
-                  </a:lnTo>
-                  <a:lnTo>
-                    <a:pt x="7799693" y="0"/>
+                    <a:pt x="7682587" y="0"/>
+                  </a:lnTo>
+                  <a:lnTo>
+                    <a:pt x="7682587" y="0"/>
                   </a:lnTo>
                 </a:path>
               </a:pathLst>
             </a:custGeom>
-            <a:ln w="6775" cap="flat">
+            <a:ln w="8623" cap="flat">
               <a:solidFill>
                 <a:srgbClr val="EBEBEB">
                   <a:alpha val="100000"/>
@@ -2314,26 +2314,26 @@
           </p:nvSpPr>
           <p:spPr>
             <a:xfrm>
-              <a:off x="817517" y="4313054"/>
-              <a:ext cx="7799693" cy="0"/>
+              <a:off x="915645" y="4298074"/>
+              <a:ext cx="7682587" cy="0"/>
             </a:xfrm>
             <a:custGeom>
               <a:avLst/>
               <a:pathLst>
-                <a:path w="7799693" h="0">
+                <a:path w="7682587" h="0">
                   <a:moveTo>
                     <a:pt x="0" y="0"/>
                   </a:moveTo>
                   <a:lnTo>
-                    <a:pt x="7799693" y="0"/>
-                  </a:lnTo>
-                  <a:lnTo>
-                    <a:pt x="7799693" y="0"/>
+                    <a:pt x="7682587" y="0"/>
+                  </a:lnTo>
+                  <a:lnTo>
+                    <a:pt x="7682587" y="0"/>
                   </a:lnTo>
                 </a:path>
               </a:pathLst>
             </a:custGeom>
-            <a:ln w="6775" cap="flat">
+            <a:ln w="8623" cap="flat">
               <a:solidFill>
                 <a:srgbClr val="EBEBEB">
                   <a:alpha val="100000"/>
@@ -2357,26 +2357,26 @@
           </p:nvSpPr>
           <p:spPr>
             <a:xfrm>
-              <a:off x="817517" y="3483591"/>
-              <a:ext cx="7799693" cy="0"/>
+              <a:off x="915645" y="3524405"/>
+              <a:ext cx="7682587" cy="0"/>
             </a:xfrm>
             <a:custGeom>
               <a:avLst/>
               <a:pathLst>
-                <a:path w="7799693" h="0">
+                <a:path w="7682587" h="0">
                   <a:moveTo>
                     <a:pt x="0" y="0"/>
                   </a:moveTo>
                   <a:lnTo>
-                    <a:pt x="7799693" y="0"/>
-                  </a:lnTo>
-                  <a:lnTo>
-                    <a:pt x="7799693" y="0"/>
+                    <a:pt x="7682587" y="0"/>
+                  </a:lnTo>
+                  <a:lnTo>
+                    <a:pt x="7682587" y="0"/>
                   </a:lnTo>
                 </a:path>
               </a:pathLst>
             </a:custGeom>
-            <a:ln w="6775" cap="flat">
+            <a:ln w="8623" cap="flat">
               <a:solidFill>
                 <a:srgbClr val="EBEBEB">
                   <a:alpha val="100000"/>
@@ -2400,26 +2400,26 @@
           </p:nvSpPr>
           <p:spPr>
             <a:xfrm>
-              <a:off x="817517" y="2654127"/>
-              <a:ext cx="7799693" cy="0"/>
+              <a:off x="915645" y="2750737"/>
+              <a:ext cx="7682587" cy="0"/>
             </a:xfrm>
             <a:custGeom>
               <a:avLst/>
               <a:pathLst>
-                <a:path w="7799693" h="0">
+                <a:path w="7682587" h="0">
                   <a:moveTo>
                     <a:pt x="0" y="0"/>
                   </a:moveTo>
                   <a:lnTo>
-                    <a:pt x="7799693" y="0"/>
-                  </a:lnTo>
-                  <a:lnTo>
-                    <a:pt x="7799693" y="0"/>
+                    <a:pt x="7682587" y="0"/>
+                  </a:lnTo>
+                  <a:lnTo>
+                    <a:pt x="7682587" y="0"/>
                   </a:lnTo>
                 </a:path>
               </a:pathLst>
             </a:custGeom>
-            <a:ln w="6775" cap="flat">
+            <a:ln w="8623" cap="flat">
               <a:solidFill>
                 <a:srgbClr val="EBEBEB">
                   <a:alpha val="100000"/>
@@ -2443,15 +2443,15 @@
           </p:nvSpPr>
           <p:spPr>
             <a:xfrm>
-              <a:off x="1615213" y="2073503"/>
-              <a:ext cx="0" cy="3649639"/>
+              <a:off x="1701364" y="2209169"/>
+              <a:ext cx="0" cy="3404141"/>
             </a:xfrm>
             <a:custGeom>
               <a:avLst/>
               <a:pathLst>
-                <a:path w="0" h="3649639">
+                <a:path w="0" h="3404141">
                   <a:moveTo>
-                    <a:pt x="0" y="3649639"/>
+                    <a:pt x="0" y="3404141"/>
                   </a:moveTo>
                   <a:lnTo>
                     <a:pt x="0" y="0"/>
@@ -2462,7 +2462,7 @@
                 </a:path>
               </a:pathLst>
             </a:custGeom>
-            <a:ln w="6775" cap="flat">
+            <a:ln w="8623" cap="flat">
               <a:solidFill>
                 <a:srgbClr val="EBEBEB">
                   <a:alpha val="100000"/>
@@ -2486,15 +2486,15 @@
           </p:nvSpPr>
           <p:spPr>
             <a:xfrm>
-              <a:off x="3387871" y="2073503"/>
-              <a:ext cx="0" cy="3649639"/>
+              <a:off x="3447406" y="2209169"/>
+              <a:ext cx="0" cy="3404141"/>
             </a:xfrm>
             <a:custGeom>
               <a:avLst/>
               <a:pathLst>
-                <a:path w="0" h="3649639">
+                <a:path w="0" h="3404141">
                   <a:moveTo>
-                    <a:pt x="0" y="3649639"/>
+                    <a:pt x="0" y="3404141"/>
                   </a:moveTo>
                   <a:lnTo>
                     <a:pt x="0" y="0"/>
@@ -2505,7 +2505,7 @@
                 </a:path>
               </a:pathLst>
             </a:custGeom>
-            <a:ln w="6775" cap="flat">
+            <a:ln w="8623" cap="flat">
               <a:solidFill>
                 <a:srgbClr val="EBEBEB">
                   <a:alpha val="100000"/>
@@ -2529,15 +2529,15 @@
           </p:nvSpPr>
           <p:spPr>
             <a:xfrm>
-              <a:off x="5160528" y="2073503"/>
-              <a:ext cx="0" cy="3649639"/>
+              <a:off x="5193449" y="2209169"/>
+              <a:ext cx="0" cy="3404141"/>
             </a:xfrm>
             <a:custGeom>
               <a:avLst/>
               <a:pathLst>
-                <a:path w="0" h="3649639">
+                <a:path w="0" h="3404141">
                   <a:moveTo>
-                    <a:pt x="0" y="3649639"/>
+                    <a:pt x="0" y="3404141"/>
                   </a:moveTo>
                   <a:lnTo>
                     <a:pt x="0" y="0"/>
@@ -2548,7 +2548,7 @@
                 </a:path>
               </a:pathLst>
             </a:custGeom>
-            <a:ln w="6775" cap="flat">
+            <a:ln w="8623" cap="flat">
               <a:solidFill>
                 <a:srgbClr val="EBEBEB">
                   <a:alpha val="100000"/>
@@ -2572,15 +2572,15 @@
           </p:nvSpPr>
           <p:spPr>
             <a:xfrm>
-              <a:off x="6933186" y="2073503"/>
-              <a:ext cx="0" cy="3649639"/>
+              <a:off x="6939491" y="2209169"/>
+              <a:ext cx="0" cy="3404141"/>
             </a:xfrm>
             <a:custGeom>
               <a:avLst/>
               <a:pathLst>
-                <a:path w="0" h="3649639">
+                <a:path w="0" h="3404141">
                   <a:moveTo>
-                    <a:pt x="0" y="3649639"/>
+                    <a:pt x="0" y="3404141"/>
                   </a:moveTo>
                   <a:lnTo>
                     <a:pt x="0" y="0"/>
@@ -2591,7 +2591,7 @@
                 </a:path>
               </a:pathLst>
             </a:custGeom>
-            <a:ln w="6775" cap="flat">
+            <a:ln w="8623" cap="flat">
               <a:solidFill>
                 <a:srgbClr val="EBEBEB">
                   <a:alpha val="100000"/>
@@ -2615,26 +2615,26 @@
           </p:nvSpPr>
           <p:spPr>
             <a:xfrm>
-              <a:off x="817517" y="5557249"/>
-              <a:ext cx="7799693" cy="0"/>
+              <a:off x="915645" y="5458577"/>
+              <a:ext cx="7682587" cy="0"/>
             </a:xfrm>
             <a:custGeom>
               <a:avLst/>
               <a:pathLst>
-                <a:path w="7799693" h="0">
+                <a:path w="7682587" h="0">
                   <a:moveTo>
                     <a:pt x="0" y="0"/>
                   </a:moveTo>
                   <a:lnTo>
-                    <a:pt x="7799693" y="0"/>
-                  </a:lnTo>
-                  <a:lnTo>
-                    <a:pt x="7799693" y="0"/>
+                    <a:pt x="7682587" y="0"/>
+                  </a:lnTo>
+                  <a:lnTo>
+                    <a:pt x="7682587" y="0"/>
                   </a:lnTo>
                 </a:path>
               </a:pathLst>
             </a:custGeom>
-            <a:ln w="13550" cap="flat">
+            <a:ln w="17246" cap="flat">
               <a:solidFill>
                 <a:srgbClr val="EBEBEB">
                   <a:alpha val="100000"/>
@@ -2658,26 +2658,26 @@
           </p:nvSpPr>
           <p:spPr>
             <a:xfrm>
-              <a:off x="817517" y="4727786"/>
-              <a:ext cx="7799693" cy="0"/>
+              <a:off x="915645" y="4684908"/>
+              <a:ext cx="7682587" cy="0"/>
             </a:xfrm>
             <a:custGeom>
               <a:avLst/>
               <a:pathLst>
-                <a:path w="7799693" h="0">
+                <a:path w="7682587" h="0">
                   <a:moveTo>
                     <a:pt x="0" y="0"/>
                   </a:moveTo>
                   <a:lnTo>
-                    <a:pt x="7799693" y="0"/>
-                  </a:lnTo>
-                  <a:lnTo>
-                    <a:pt x="7799693" y="0"/>
+                    <a:pt x="7682587" y="0"/>
+                  </a:lnTo>
+                  <a:lnTo>
+                    <a:pt x="7682587" y="0"/>
                   </a:lnTo>
                 </a:path>
               </a:pathLst>
             </a:custGeom>
-            <a:ln w="13550" cap="flat">
+            <a:ln w="17246" cap="flat">
               <a:solidFill>
                 <a:srgbClr val="EBEBEB">
                   <a:alpha val="100000"/>
@@ -2701,26 +2701,26 @@
           </p:nvSpPr>
           <p:spPr>
             <a:xfrm>
-              <a:off x="817517" y="3898322"/>
-              <a:ext cx="7799693" cy="0"/>
+              <a:off x="915645" y="3911240"/>
+              <a:ext cx="7682587" cy="0"/>
             </a:xfrm>
             <a:custGeom>
               <a:avLst/>
               <a:pathLst>
-                <a:path w="7799693" h="0">
+                <a:path w="7682587" h="0">
                   <a:moveTo>
                     <a:pt x="0" y="0"/>
                   </a:moveTo>
                   <a:lnTo>
-                    <a:pt x="7799693" y="0"/>
-                  </a:lnTo>
-                  <a:lnTo>
-                    <a:pt x="7799693" y="0"/>
+                    <a:pt x="7682587" y="0"/>
+                  </a:lnTo>
+                  <a:lnTo>
+                    <a:pt x="7682587" y="0"/>
                   </a:lnTo>
                 </a:path>
               </a:pathLst>
             </a:custGeom>
-            <a:ln w="13550" cap="flat">
+            <a:ln w="17246" cap="flat">
               <a:solidFill>
                 <a:srgbClr val="EBEBEB">
                   <a:alpha val="100000"/>
@@ -2744,26 +2744,26 @@
           </p:nvSpPr>
           <p:spPr>
             <a:xfrm>
-              <a:off x="817517" y="3068859"/>
-              <a:ext cx="7799693" cy="0"/>
+              <a:off x="915645" y="3137571"/>
+              <a:ext cx="7682587" cy="0"/>
             </a:xfrm>
             <a:custGeom>
               <a:avLst/>
               <a:pathLst>
-                <a:path w="7799693" h="0">
+                <a:path w="7682587" h="0">
                   <a:moveTo>
                     <a:pt x="0" y="0"/>
                   </a:moveTo>
                   <a:lnTo>
-                    <a:pt x="7799693" y="0"/>
-                  </a:lnTo>
-                  <a:lnTo>
-                    <a:pt x="7799693" y="0"/>
+                    <a:pt x="7682587" y="0"/>
+                  </a:lnTo>
+                  <a:lnTo>
+                    <a:pt x="7682587" y="0"/>
                   </a:lnTo>
                 </a:path>
               </a:pathLst>
             </a:custGeom>
-            <a:ln w="13550" cap="flat">
+            <a:ln w="17246" cap="flat">
               <a:solidFill>
                 <a:srgbClr val="EBEBEB">
                   <a:alpha val="100000"/>
@@ -2787,26 +2787,26 @@
           </p:nvSpPr>
           <p:spPr>
             <a:xfrm>
-              <a:off x="817517" y="2239395"/>
-              <a:ext cx="7799693" cy="0"/>
+              <a:off x="915645" y="2363903"/>
+              <a:ext cx="7682587" cy="0"/>
             </a:xfrm>
             <a:custGeom>
               <a:avLst/>
               <a:pathLst>
-                <a:path w="7799693" h="0">
+                <a:path w="7682587" h="0">
                   <a:moveTo>
                     <a:pt x="0" y="0"/>
                   </a:moveTo>
                   <a:lnTo>
-                    <a:pt x="7799693" y="0"/>
-                  </a:lnTo>
-                  <a:lnTo>
-                    <a:pt x="7799693" y="0"/>
+                    <a:pt x="7682587" y="0"/>
+                  </a:lnTo>
+                  <a:lnTo>
+                    <a:pt x="7682587" y="0"/>
                   </a:lnTo>
                 </a:path>
               </a:pathLst>
             </a:custGeom>
-            <a:ln w="13550" cap="flat">
+            <a:ln w="17246" cap="flat">
               <a:solidFill>
                 <a:srgbClr val="EBEBEB">
                   <a:alpha val="100000"/>
@@ -2830,15 +2830,15 @@
           </p:nvSpPr>
           <p:spPr>
             <a:xfrm>
-              <a:off x="2501542" y="2073503"/>
-              <a:ext cx="0" cy="3649639"/>
+              <a:off x="2574385" y="2209169"/>
+              <a:ext cx="0" cy="3404141"/>
             </a:xfrm>
             <a:custGeom>
               <a:avLst/>
               <a:pathLst>
-                <a:path w="0" h="3649639">
+                <a:path w="0" h="3404141">
                   <a:moveTo>
-                    <a:pt x="0" y="3649639"/>
+                    <a:pt x="0" y="3404141"/>
                   </a:moveTo>
                   <a:lnTo>
                     <a:pt x="0" y="0"/>
@@ -2849,7 +2849,7 @@
                 </a:path>
               </a:pathLst>
             </a:custGeom>
-            <a:ln w="13550" cap="flat">
+            <a:ln w="17246" cap="flat">
               <a:solidFill>
                 <a:srgbClr val="EBEBEB">
                   <a:alpha val="100000"/>
@@ -2873,15 +2873,15 @@
           </p:nvSpPr>
           <p:spPr>
             <a:xfrm>
-              <a:off x="4274200" y="2073503"/>
-              <a:ext cx="0" cy="3649639"/>
+              <a:off x="4320427" y="2209169"/>
+              <a:ext cx="0" cy="3404141"/>
             </a:xfrm>
             <a:custGeom>
               <a:avLst/>
               <a:pathLst>
-                <a:path w="0" h="3649639">
+                <a:path w="0" h="3404141">
                   <a:moveTo>
-                    <a:pt x="0" y="3649639"/>
+                    <a:pt x="0" y="3404141"/>
                   </a:moveTo>
                   <a:lnTo>
                     <a:pt x="0" y="0"/>
@@ -2892,7 +2892,7 @@
                 </a:path>
               </a:pathLst>
             </a:custGeom>
-            <a:ln w="13550" cap="flat">
+            <a:ln w="17246" cap="flat">
               <a:solidFill>
                 <a:srgbClr val="EBEBEB">
                   <a:alpha val="100000"/>
@@ -2916,15 +2916,15 @@
           </p:nvSpPr>
           <p:spPr>
             <a:xfrm>
-              <a:off x="6046857" y="2073503"/>
-              <a:ext cx="0" cy="3649639"/>
+              <a:off x="6066470" y="2209169"/>
+              <a:ext cx="0" cy="3404141"/>
             </a:xfrm>
             <a:custGeom>
               <a:avLst/>
               <a:pathLst>
-                <a:path w="0" h="3649639">
+                <a:path w="0" h="3404141">
                   <a:moveTo>
-                    <a:pt x="0" y="3649639"/>
+                    <a:pt x="0" y="3404141"/>
                   </a:moveTo>
                   <a:lnTo>
                     <a:pt x="0" y="0"/>
@@ -2935,7 +2935,7 @@
                 </a:path>
               </a:pathLst>
             </a:custGeom>
-            <a:ln w="13550" cap="flat">
+            <a:ln w="17246" cap="flat">
               <a:solidFill>
                 <a:srgbClr val="EBEBEB">
                   <a:alpha val="100000"/>
@@ -2959,15 +2959,15 @@
           </p:nvSpPr>
           <p:spPr>
             <a:xfrm>
-              <a:off x="7819515" y="2073503"/>
-              <a:ext cx="0" cy="3649639"/>
+              <a:off x="7812512" y="2209169"/>
+              <a:ext cx="0" cy="3404141"/>
             </a:xfrm>
             <a:custGeom>
               <a:avLst/>
               <a:pathLst>
-                <a:path w="0" h="3649639">
+                <a:path w="0" h="3404141">
                   <a:moveTo>
-                    <a:pt x="0" y="3649639"/>
+                    <a:pt x="0" y="3404141"/>
                   </a:moveTo>
                   <a:lnTo>
                     <a:pt x="0" y="0"/>
@@ -2978,7 +2978,7 @@
                 </a:path>
               </a:pathLst>
             </a:custGeom>
-            <a:ln w="13550" cap="flat">
+            <a:ln w="17246" cap="flat">
               <a:solidFill>
                 <a:srgbClr val="EBEBEB">
                   <a:alpha val="100000"/>
@@ -3002,546 +3002,546 @@
           </p:nvSpPr>
           <p:spPr>
             <a:xfrm>
-              <a:off x="817517" y="2073503"/>
-              <a:ext cx="7370972" cy="3416051"/>
+              <a:off x="915645" y="2209169"/>
+              <a:ext cx="7260303" cy="3186266"/>
             </a:xfrm>
             <a:custGeom>
               <a:avLst/>
               <a:pathLst>
-                <a:path w="7370972" h="3416051">
+                <a:path w="7260303" h="3186266">
                   <a:moveTo>
-                    <a:pt x="1104374" y="0"/>
+                    <a:pt x="1087793" y="0"/>
                   </a:moveTo>
                   <a:lnTo>
-                    <a:pt x="1160249" y="121079"/>
-                  </a:lnTo>
-                  <a:lnTo>
-                    <a:pt x="1237883" y="281296"/>
-                  </a:lnTo>
-                  <a:lnTo>
-                    <a:pt x="1315517" y="433880"/>
-                  </a:lnTo>
-                  <a:lnTo>
-                    <a:pt x="1393151" y="579194"/>
-                  </a:lnTo>
-                  <a:lnTo>
-                    <a:pt x="1470785" y="717584"/>
-                  </a:lnTo>
-                  <a:lnTo>
-                    <a:pt x="1548419" y="849381"/>
-                  </a:lnTo>
-                  <a:lnTo>
-                    <a:pt x="1626053" y="974897"/>
-                  </a:lnTo>
-                  <a:lnTo>
-                    <a:pt x="1703687" y="1094434"/>
-                  </a:lnTo>
-                  <a:lnTo>
-                    <a:pt x="1781321" y="1208275"/>
-                  </a:lnTo>
-                  <a:lnTo>
-                    <a:pt x="1858955" y="1316692"/>
-                  </a:lnTo>
-                  <a:lnTo>
-                    <a:pt x="1936589" y="1419943"/>
-                  </a:lnTo>
-                  <a:lnTo>
-                    <a:pt x="2014223" y="1518275"/>
-                  </a:lnTo>
-                  <a:lnTo>
-                    <a:pt x="2091857" y="1611922"/>
-                  </a:lnTo>
-                  <a:lnTo>
-                    <a:pt x="2169491" y="1701107"/>
-                  </a:lnTo>
-                  <a:lnTo>
-                    <a:pt x="2247125" y="1786042"/>
-                  </a:lnTo>
-                  <a:lnTo>
-                    <a:pt x="2324759" y="1866931"/>
-                  </a:lnTo>
-                  <a:lnTo>
-                    <a:pt x="2402393" y="1943966"/>
-                  </a:lnTo>
-                  <a:lnTo>
-                    <a:pt x="2480027" y="2017330"/>
-                  </a:lnTo>
-                  <a:lnTo>
-                    <a:pt x="2557661" y="2087199"/>
-                  </a:lnTo>
-                  <a:lnTo>
-                    <a:pt x="2635295" y="2153739"/>
-                  </a:lnTo>
-                  <a:lnTo>
-                    <a:pt x="2712930" y="2217108"/>
-                  </a:lnTo>
-                  <a:lnTo>
-                    <a:pt x="2790564" y="2277458"/>
-                  </a:lnTo>
-                  <a:lnTo>
-                    <a:pt x="2868198" y="2334933"/>
-                  </a:lnTo>
-                  <a:lnTo>
-                    <a:pt x="2945832" y="2389669"/>
-                  </a:lnTo>
-                  <a:lnTo>
-                    <a:pt x="3023466" y="2441798"/>
-                  </a:lnTo>
-                  <a:lnTo>
-                    <a:pt x="3101100" y="2491442"/>
-                  </a:lnTo>
-                  <a:lnTo>
-                    <a:pt x="3178734" y="2538722"/>
-                  </a:lnTo>
-                  <a:lnTo>
-                    <a:pt x="3256368" y="2583748"/>
-                  </a:lnTo>
-                  <a:lnTo>
-                    <a:pt x="3334002" y="2626629"/>
-                  </a:lnTo>
-                  <a:lnTo>
-                    <a:pt x="3411636" y="2648772"/>
-                  </a:lnTo>
-                  <a:lnTo>
-                    <a:pt x="3489270" y="2631756"/>
-                  </a:lnTo>
-                  <a:lnTo>
-                    <a:pt x="3566904" y="2614393"/>
-                  </a:lnTo>
-                  <a:lnTo>
-                    <a:pt x="3644538" y="2596676"/>
-                  </a:lnTo>
-                  <a:lnTo>
-                    <a:pt x="3722172" y="2578598"/>
-                  </a:lnTo>
-                  <a:lnTo>
-                    <a:pt x="3799806" y="2560152"/>
-                  </a:lnTo>
-                  <a:lnTo>
-                    <a:pt x="3877440" y="2541329"/>
-                  </a:lnTo>
-                  <a:lnTo>
-                    <a:pt x="3955074" y="2522123"/>
-                  </a:lnTo>
-                  <a:lnTo>
-                    <a:pt x="4032708" y="2502526"/>
-                  </a:lnTo>
-                  <a:lnTo>
-                    <a:pt x="4110342" y="2482529"/>
-                  </a:lnTo>
-                  <a:lnTo>
-                    <a:pt x="4187976" y="2462125"/>
-                  </a:lnTo>
-                  <a:lnTo>
-                    <a:pt x="4265610" y="2441305"/>
-                  </a:lnTo>
-                  <a:lnTo>
-                    <a:pt x="4343244" y="2420061"/>
-                  </a:lnTo>
-                  <a:lnTo>
-                    <a:pt x="4420879" y="2398384"/>
-                  </a:lnTo>
-                  <a:lnTo>
-                    <a:pt x="4498513" y="2376265"/>
-                  </a:lnTo>
-                  <a:lnTo>
-                    <a:pt x="4576147" y="2353695"/>
-                  </a:lnTo>
-                  <a:lnTo>
-                    <a:pt x="4653781" y="2330665"/>
-                  </a:lnTo>
-                  <a:lnTo>
-                    <a:pt x="4731415" y="2307166"/>
-                  </a:lnTo>
-                  <a:lnTo>
-                    <a:pt x="4809049" y="2283188"/>
-                  </a:lnTo>
-                  <a:lnTo>
-                    <a:pt x="4886683" y="2258721"/>
-                  </a:lnTo>
-                  <a:lnTo>
-                    <a:pt x="4964317" y="2233756"/>
-                  </a:lnTo>
-                  <a:lnTo>
-                    <a:pt x="5041951" y="2208282"/>
-                  </a:lnTo>
-                  <a:lnTo>
-                    <a:pt x="5119585" y="2182289"/>
-                  </a:lnTo>
-                  <a:lnTo>
-                    <a:pt x="5197219" y="2155766"/>
-                  </a:lnTo>
-                  <a:lnTo>
-                    <a:pt x="5274853" y="2128703"/>
-                  </a:lnTo>
-                  <a:lnTo>
-                    <a:pt x="5352487" y="2101088"/>
-                  </a:lnTo>
-                  <a:lnTo>
-                    <a:pt x="5430121" y="2072910"/>
-                  </a:lnTo>
-                  <a:lnTo>
-                    <a:pt x="5507755" y="2044158"/>
-                  </a:lnTo>
-                  <a:lnTo>
-                    <a:pt x="5585389" y="2014820"/>
-                  </a:lnTo>
-                  <a:lnTo>
-                    <a:pt x="5663023" y="1984884"/>
-                  </a:lnTo>
-                  <a:lnTo>
-                    <a:pt x="5740657" y="1954338"/>
-                  </a:lnTo>
-                  <a:lnTo>
-                    <a:pt x="5818291" y="1923170"/>
-                  </a:lnTo>
-                  <a:lnTo>
-                    <a:pt x="5895925" y="1891366"/>
-                  </a:lnTo>
-                  <a:lnTo>
-                    <a:pt x="5973559" y="1858914"/>
-                  </a:lnTo>
-                  <a:lnTo>
-                    <a:pt x="6051193" y="1825801"/>
-                  </a:lnTo>
-                  <a:lnTo>
-                    <a:pt x="6128827" y="1792013"/>
-                  </a:lnTo>
-                  <a:lnTo>
-                    <a:pt x="6206462" y="1757537"/>
-                  </a:lnTo>
-                  <a:lnTo>
-                    <a:pt x="6284096" y="1722358"/>
-                  </a:lnTo>
-                  <a:lnTo>
-                    <a:pt x="6361730" y="1686462"/>
-                  </a:lnTo>
-                  <a:lnTo>
-                    <a:pt x="6439364" y="1649834"/>
-                  </a:lnTo>
-                  <a:lnTo>
-                    <a:pt x="6516998" y="1612460"/>
-                  </a:lnTo>
-                  <a:lnTo>
-                    <a:pt x="6594632" y="1574325"/>
-                  </a:lnTo>
-                  <a:lnTo>
-                    <a:pt x="6672266" y="1535412"/>
-                  </a:lnTo>
-                  <a:lnTo>
-                    <a:pt x="6749900" y="1495706"/>
-                  </a:lnTo>
-                  <a:lnTo>
-                    <a:pt x="6827534" y="1455191"/>
-                  </a:lnTo>
-                  <a:lnTo>
-                    <a:pt x="6905168" y="1413850"/>
-                  </a:lnTo>
-                  <a:lnTo>
-                    <a:pt x="6982802" y="1371667"/>
-                  </a:lnTo>
-                  <a:lnTo>
-                    <a:pt x="7060436" y="1328624"/>
-                  </a:lnTo>
-                  <a:lnTo>
-                    <a:pt x="7138070" y="1284704"/>
-                  </a:lnTo>
-                  <a:lnTo>
-                    <a:pt x="7215704" y="1239889"/>
-                  </a:lnTo>
-                  <a:lnTo>
-                    <a:pt x="7293338" y="1194160"/>
-                  </a:lnTo>
-                  <a:lnTo>
-                    <a:pt x="7370972" y="1147500"/>
-                  </a:lnTo>
-                  <a:lnTo>
-                    <a:pt x="7370972" y="3416051"/>
-                  </a:lnTo>
-                  <a:lnTo>
-                    <a:pt x="7293338" y="3412664"/>
-                  </a:lnTo>
-                  <a:lnTo>
-                    <a:pt x="7215704" y="3409108"/>
-                  </a:lnTo>
-                  <a:lnTo>
-                    <a:pt x="7138070" y="3405374"/>
-                  </a:lnTo>
-                  <a:lnTo>
-                    <a:pt x="7060436" y="3401453"/>
-                  </a:lnTo>
-                  <a:lnTo>
-                    <a:pt x="6982802" y="3397336"/>
-                  </a:lnTo>
-                  <a:lnTo>
-                    <a:pt x="6905168" y="3393013"/>
-                  </a:lnTo>
-                  <a:lnTo>
-                    <a:pt x="6827534" y="3388473"/>
-                  </a:lnTo>
-                  <a:lnTo>
-                    <a:pt x="6749900" y="3383707"/>
-                  </a:lnTo>
-                  <a:lnTo>
-                    <a:pt x="6672266" y="3378702"/>
-                  </a:lnTo>
-                  <a:lnTo>
-                    <a:pt x="6594632" y="3373447"/>
-                  </a:lnTo>
-                  <a:lnTo>
-                    <a:pt x="6516998" y="3367928"/>
-                  </a:lnTo>
-                  <a:lnTo>
-                    <a:pt x="6439364" y="3362134"/>
-                  </a:lnTo>
-                  <a:lnTo>
-                    <a:pt x="6361730" y="3356050"/>
-                  </a:lnTo>
-                  <a:lnTo>
-                    <a:pt x="6284096" y="3349661"/>
-                  </a:lnTo>
-                  <a:lnTo>
-                    <a:pt x="6206462" y="3342953"/>
-                  </a:lnTo>
-                  <a:lnTo>
-                    <a:pt x="6128827" y="3335909"/>
-                  </a:lnTo>
-                  <a:lnTo>
-                    <a:pt x="6051193" y="3328513"/>
-                  </a:lnTo>
-                  <a:lnTo>
-                    <a:pt x="5973559" y="3320747"/>
-                  </a:lnTo>
-                  <a:lnTo>
-                    <a:pt x="5895925" y="3312592"/>
-                  </a:lnTo>
-                  <a:lnTo>
-                    <a:pt x="5818291" y="3304029"/>
-                  </a:lnTo>
-                  <a:lnTo>
-                    <a:pt x="5740657" y="3295038"/>
-                  </a:lnTo>
-                  <a:lnTo>
-                    <a:pt x="5663023" y="3285597"/>
-                  </a:lnTo>
-                  <a:lnTo>
-                    <a:pt x="5585389" y="3275683"/>
-                  </a:lnTo>
-                  <a:lnTo>
-                    <a:pt x="5507755" y="3265274"/>
-                  </a:lnTo>
-                  <a:lnTo>
-                    <a:pt x="5430121" y="3254344"/>
-                  </a:lnTo>
-                  <a:lnTo>
-                    <a:pt x="5352487" y="3242867"/>
-                  </a:lnTo>
-                  <a:lnTo>
-                    <a:pt x="5274853" y="3230816"/>
-                  </a:lnTo>
-                  <a:lnTo>
-                    <a:pt x="5197219" y="3218162"/>
-                  </a:lnTo>
-                  <a:lnTo>
-                    <a:pt x="5119585" y="3204875"/>
-                  </a:lnTo>
-                  <a:lnTo>
-                    <a:pt x="5041951" y="3190923"/>
-                  </a:lnTo>
-                  <a:lnTo>
-                    <a:pt x="4964317" y="3176273"/>
-                  </a:lnTo>
-                  <a:lnTo>
-                    <a:pt x="4886683" y="3160890"/>
-                  </a:lnTo>
-                  <a:lnTo>
-                    <a:pt x="4809049" y="3144738"/>
-                  </a:lnTo>
-                  <a:lnTo>
-                    <a:pt x="4731415" y="3127778"/>
-                  </a:lnTo>
-                  <a:lnTo>
-                    <a:pt x="4653781" y="3109969"/>
-                  </a:lnTo>
-                  <a:lnTo>
-                    <a:pt x="4576147" y="3091269"/>
-                  </a:lnTo>
-                  <a:lnTo>
-                    <a:pt x="4498513" y="3071633"/>
-                  </a:lnTo>
-                  <a:lnTo>
-                    <a:pt x="4420879" y="3051015"/>
-                  </a:lnTo>
-                  <a:lnTo>
-                    <a:pt x="4343244" y="3029366"/>
-                  </a:lnTo>
-                  <a:lnTo>
-                    <a:pt x="4265610" y="3006633"/>
-                  </a:lnTo>
-                  <a:lnTo>
-                    <a:pt x="4187976" y="2982764"/>
-                  </a:lnTo>
-                  <a:lnTo>
-                    <a:pt x="4110342" y="2957700"/>
-                  </a:lnTo>
-                  <a:lnTo>
-                    <a:pt x="4032708" y="2931382"/>
-                  </a:lnTo>
-                  <a:lnTo>
-                    <a:pt x="3955074" y="2903747"/>
-                  </a:lnTo>
-                  <a:lnTo>
-                    <a:pt x="3877440" y="2874730"/>
-                  </a:lnTo>
-                  <a:lnTo>
-                    <a:pt x="3799806" y="2844261"/>
-                  </a:lnTo>
-                  <a:lnTo>
-                    <a:pt x="3722172" y="2812268"/>
-                  </a:lnTo>
-                  <a:lnTo>
-                    <a:pt x="3644538" y="2778674"/>
-                  </a:lnTo>
-                  <a:lnTo>
-                    <a:pt x="3566904" y="2743399"/>
-                  </a:lnTo>
-                  <a:lnTo>
-                    <a:pt x="3489270" y="2706360"/>
-                  </a:lnTo>
-                  <a:lnTo>
-                    <a:pt x="3411636" y="2667468"/>
-                  </a:lnTo>
-                  <a:lnTo>
-                    <a:pt x="3334002" y="2665449"/>
-                  </a:lnTo>
-                  <a:lnTo>
-                    <a:pt x="3256368" y="2681792"/>
-                  </a:lnTo>
-                  <a:lnTo>
-                    <a:pt x="3178734" y="2697809"/>
-                  </a:lnTo>
-                  <a:lnTo>
-                    <a:pt x="3101100" y="2713506"/>
-                  </a:lnTo>
-                  <a:lnTo>
-                    <a:pt x="3023466" y="2728889"/>
-                  </a:lnTo>
-                  <a:lnTo>
-                    <a:pt x="2945832" y="2743966"/>
-                  </a:lnTo>
-                  <a:lnTo>
-                    <a:pt x="2868198" y="2758741"/>
-                  </a:lnTo>
-                  <a:lnTo>
-                    <a:pt x="2790564" y="2773221"/>
-                  </a:lnTo>
-                  <a:lnTo>
-                    <a:pt x="2712930" y="2787412"/>
-                  </a:lnTo>
-                  <a:lnTo>
-                    <a:pt x="2635295" y="2801319"/>
-                  </a:lnTo>
-                  <a:lnTo>
-                    <a:pt x="2557661" y="2814949"/>
-                  </a:lnTo>
-                  <a:lnTo>
-                    <a:pt x="2480027" y="2828306"/>
-                  </a:lnTo>
-                  <a:lnTo>
-                    <a:pt x="2402393" y="2841397"/>
-                  </a:lnTo>
-                  <a:lnTo>
-                    <a:pt x="2324759" y="2854226"/>
-                  </a:lnTo>
-                  <a:lnTo>
-                    <a:pt x="2247125" y="2866799"/>
-                  </a:lnTo>
-                  <a:lnTo>
-                    <a:pt x="2169491" y="2879121"/>
-                  </a:lnTo>
-                  <a:lnTo>
-                    <a:pt x="2091857" y="2891197"/>
-                  </a:lnTo>
-                  <a:lnTo>
-                    <a:pt x="2014223" y="2903032"/>
-                  </a:lnTo>
-                  <a:lnTo>
-                    <a:pt x="1936589" y="2914630"/>
-                  </a:lnTo>
-                  <a:lnTo>
-                    <a:pt x="1858955" y="2925997"/>
-                  </a:lnTo>
-                  <a:lnTo>
-                    <a:pt x="1781321" y="2937136"/>
-                  </a:lnTo>
-                  <a:lnTo>
-                    <a:pt x="1703687" y="2948053"/>
-                  </a:lnTo>
-                  <a:lnTo>
-                    <a:pt x="1626053" y="2958752"/>
-                  </a:lnTo>
-                  <a:lnTo>
-                    <a:pt x="1548419" y="2969238"/>
-                  </a:lnTo>
-                  <a:lnTo>
-                    <a:pt x="1470785" y="2979514"/>
-                  </a:lnTo>
-                  <a:lnTo>
-                    <a:pt x="1393151" y="2989584"/>
-                  </a:lnTo>
-                  <a:lnTo>
-                    <a:pt x="1315517" y="2999454"/>
-                  </a:lnTo>
-                  <a:lnTo>
-                    <a:pt x="1237883" y="3009126"/>
-                  </a:lnTo>
-                  <a:lnTo>
-                    <a:pt x="1160249" y="3018606"/>
-                  </a:lnTo>
-                  <a:lnTo>
-                    <a:pt x="1082615" y="3027896"/>
-                  </a:lnTo>
-                  <a:lnTo>
-                    <a:pt x="1004981" y="3037000"/>
-                  </a:lnTo>
-                  <a:lnTo>
-                    <a:pt x="927346" y="3045923"/>
-                  </a:lnTo>
-                  <a:lnTo>
-                    <a:pt x="849712" y="3054667"/>
-                  </a:lnTo>
-                  <a:lnTo>
-                    <a:pt x="772078" y="3063237"/>
-                  </a:lnTo>
-                  <a:lnTo>
-                    <a:pt x="694444" y="3071635"/>
-                  </a:lnTo>
-                  <a:lnTo>
-                    <a:pt x="616810" y="3079866"/>
-                  </a:lnTo>
-                  <a:lnTo>
-                    <a:pt x="539176" y="3087933"/>
-                  </a:lnTo>
-                  <a:lnTo>
-                    <a:pt x="461542" y="3095838"/>
-                  </a:lnTo>
-                  <a:lnTo>
-                    <a:pt x="383908" y="3103585"/>
-                  </a:lnTo>
-                  <a:lnTo>
-                    <a:pt x="306274" y="3111178"/>
-                  </a:lnTo>
-                  <a:lnTo>
-                    <a:pt x="228640" y="3118619"/>
-                  </a:lnTo>
-                  <a:lnTo>
-                    <a:pt x="151006" y="3125912"/>
-                  </a:lnTo>
-                  <a:lnTo>
-                    <a:pt x="73372" y="3133058"/>
-                  </a:lnTo>
-                  <a:lnTo>
-                    <a:pt x="0" y="3139678"/>
+                    <a:pt x="1142828" y="112934"/>
+                  </a:lnTo>
+                  <a:lnTo>
+                    <a:pt x="1219297" y="262375"/>
+                  </a:lnTo>
+                  <a:lnTo>
+                    <a:pt x="1295765" y="404695"/>
+                  </a:lnTo>
+                  <a:lnTo>
+                    <a:pt x="1372234" y="540234"/>
+                  </a:lnTo>
+                  <a:lnTo>
+                    <a:pt x="1448702" y="669315"/>
+                  </a:lnTo>
+                  <a:lnTo>
+                    <a:pt x="1525171" y="792246"/>
+                  </a:lnTo>
+                  <a:lnTo>
+                    <a:pt x="1601639" y="909320"/>
+                  </a:lnTo>
+                  <a:lnTo>
+                    <a:pt x="1678107" y="1020815"/>
+                  </a:lnTo>
+                  <a:lnTo>
+                    <a:pt x="1754576" y="1126999"/>
+                  </a:lnTo>
+                  <a:lnTo>
+                    <a:pt x="1831044" y="1228123"/>
+                  </a:lnTo>
+                  <a:lnTo>
+                    <a:pt x="1907513" y="1324429"/>
+                  </a:lnTo>
+                  <a:lnTo>
+                    <a:pt x="1983981" y="1416146"/>
+                  </a:lnTo>
+                  <a:lnTo>
+                    <a:pt x="2060450" y="1503494"/>
+                  </a:lnTo>
+                  <a:lnTo>
+                    <a:pt x="2136918" y="1586680"/>
+                  </a:lnTo>
+                  <a:lnTo>
+                    <a:pt x="2213386" y="1665902"/>
+                  </a:lnTo>
+                  <a:lnTo>
+                    <a:pt x="2289855" y="1741349"/>
+                  </a:lnTo>
+                  <a:lnTo>
+                    <a:pt x="2366323" y="1813202"/>
+                  </a:lnTo>
+                  <a:lnTo>
+                    <a:pt x="2442792" y="1881632"/>
+                  </a:lnTo>
+                  <a:lnTo>
+                    <a:pt x="2519260" y="1946801"/>
+                  </a:lnTo>
+                  <a:lnTo>
+                    <a:pt x="2595729" y="2008865"/>
+                  </a:lnTo>
+                  <a:lnTo>
+                    <a:pt x="2672197" y="2067971"/>
+                  </a:lnTo>
+                  <a:lnTo>
+                    <a:pt x="2748666" y="2124262"/>
+                  </a:lnTo>
+                  <a:lnTo>
+                    <a:pt x="2825134" y="2177871"/>
+                  </a:lnTo>
+                  <a:lnTo>
+                    <a:pt x="2901602" y="2228925"/>
+                  </a:lnTo>
+                  <a:lnTo>
+                    <a:pt x="2978071" y="2277547"/>
+                  </a:lnTo>
+                  <a:lnTo>
+                    <a:pt x="3054539" y="2323852"/>
+                  </a:lnTo>
+                  <a:lnTo>
+                    <a:pt x="3131008" y="2367951"/>
+                  </a:lnTo>
+                  <a:lnTo>
+                    <a:pt x="3207476" y="2409949"/>
+                  </a:lnTo>
+                  <a:lnTo>
+                    <a:pt x="3283945" y="2449946"/>
+                  </a:lnTo>
+                  <a:lnTo>
+                    <a:pt x="3360413" y="2470599"/>
+                  </a:lnTo>
+                  <a:lnTo>
+                    <a:pt x="3436881" y="2454727"/>
+                  </a:lnTo>
+                  <a:lnTo>
+                    <a:pt x="3513350" y="2438532"/>
+                  </a:lnTo>
+                  <a:lnTo>
+                    <a:pt x="3589818" y="2422007"/>
+                  </a:lnTo>
+                  <a:lnTo>
+                    <a:pt x="3666287" y="2405145"/>
+                  </a:lnTo>
+                  <a:lnTo>
+                    <a:pt x="3742755" y="2387940"/>
+                  </a:lnTo>
+                  <a:lnTo>
+                    <a:pt x="3819224" y="2370383"/>
+                  </a:lnTo>
+                  <a:lnTo>
+                    <a:pt x="3895692" y="2352469"/>
+                  </a:lnTo>
+                  <a:lnTo>
+                    <a:pt x="3972160" y="2334190"/>
+                  </a:lnTo>
+                  <a:lnTo>
+                    <a:pt x="4048629" y="2315539"/>
+                  </a:lnTo>
+                  <a:lnTo>
+                    <a:pt x="4125097" y="2296507"/>
+                  </a:lnTo>
+                  <a:lnTo>
+                    <a:pt x="4201566" y="2277088"/>
+                  </a:lnTo>
+                  <a:lnTo>
+                    <a:pt x="4278034" y="2257272"/>
+                  </a:lnTo>
+                  <a:lnTo>
+                    <a:pt x="4354503" y="2237053"/>
+                  </a:lnTo>
+                  <a:lnTo>
+                    <a:pt x="4430971" y="2216422"/>
+                  </a:lnTo>
+                  <a:lnTo>
+                    <a:pt x="4507439" y="2195370"/>
+                  </a:lnTo>
+                  <a:lnTo>
+                    <a:pt x="4583908" y="2173890"/>
+                  </a:lnTo>
+                  <a:lnTo>
+                    <a:pt x="4660376" y="2151971"/>
+                  </a:lnTo>
+                  <a:lnTo>
+                    <a:pt x="4736845" y="2129606"/>
+                  </a:lnTo>
+                  <a:lnTo>
+                    <a:pt x="4813313" y="2106785"/>
+                  </a:lnTo>
+                  <a:lnTo>
+                    <a:pt x="4889782" y="2083500"/>
+                  </a:lnTo>
+                  <a:lnTo>
+                    <a:pt x="4966250" y="2059739"/>
+                  </a:lnTo>
+                  <a:lnTo>
+                    <a:pt x="5042719" y="2035494"/>
+                  </a:lnTo>
+                  <a:lnTo>
+                    <a:pt x="5119187" y="2010755"/>
+                  </a:lnTo>
+                  <a:lnTo>
+                    <a:pt x="5195655" y="1985513"/>
+                  </a:lnTo>
+                  <a:lnTo>
+                    <a:pt x="5272124" y="1959755"/>
+                  </a:lnTo>
+                  <a:lnTo>
+                    <a:pt x="5348592" y="1933473"/>
+                  </a:lnTo>
+                  <a:lnTo>
+                    <a:pt x="5425061" y="1906655"/>
+                  </a:lnTo>
+                  <a:lnTo>
+                    <a:pt x="5501529" y="1879290"/>
+                  </a:lnTo>
+                  <a:lnTo>
+                    <a:pt x="5577998" y="1851368"/>
+                  </a:lnTo>
+                  <a:lnTo>
+                    <a:pt x="5654466" y="1822877"/>
+                  </a:lnTo>
+                  <a:lnTo>
+                    <a:pt x="5730934" y="1793805"/>
+                  </a:lnTo>
+                  <a:lnTo>
+                    <a:pt x="5807403" y="1764141"/>
+                  </a:lnTo>
+                  <a:lnTo>
+                    <a:pt x="5883871" y="1733872"/>
+                  </a:lnTo>
+                  <a:lnTo>
+                    <a:pt x="5960340" y="1702986"/>
+                  </a:lnTo>
+                  <a:lnTo>
+                    <a:pt x="6036808" y="1671471"/>
+                  </a:lnTo>
+                  <a:lnTo>
+                    <a:pt x="6113277" y="1639314"/>
+                  </a:lnTo>
+                  <a:lnTo>
+                    <a:pt x="6189745" y="1606501"/>
+                  </a:lnTo>
+                  <a:lnTo>
+                    <a:pt x="6266213" y="1573020"/>
+                  </a:lnTo>
+                  <a:lnTo>
+                    <a:pt x="6342682" y="1538856"/>
+                  </a:lnTo>
+                  <a:lnTo>
+                    <a:pt x="6419150" y="1503996"/>
+                  </a:lnTo>
+                  <a:lnTo>
+                    <a:pt x="6495619" y="1468425"/>
+                  </a:lnTo>
+                  <a:lnTo>
+                    <a:pt x="6572087" y="1432130"/>
+                  </a:lnTo>
+                  <a:lnTo>
+                    <a:pt x="6648556" y="1395095"/>
+                  </a:lnTo>
+                  <a:lnTo>
+                    <a:pt x="6725024" y="1357305"/>
+                  </a:lnTo>
+                  <a:lnTo>
+                    <a:pt x="6801492" y="1318745"/>
+                  </a:lnTo>
+                  <a:lnTo>
+                    <a:pt x="6877961" y="1279400"/>
+                  </a:lnTo>
+                  <a:lnTo>
+                    <a:pt x="6954429" y="1239252"/>
+                  </a:lnTo>
+                  <a:lnTo>
+                    <a:pt x="7030898" y="1198286"/>
+                  </a:lnTo>
+                  <a:lnTo>
+                    <a:pt x="7107366" y="1156486"/>
+                  </a:lnTo>
+                  <a:lnTo>
+                    <a:pt x="7183835" y="1113833"/>
+                  </a:lnTo>
+                  <a:lnTo>
+                    <a:pt x="7260303" y="1070312"/>
+                  </a:lnTo>
+                  <a:lnTo>
+                    <a:pt x="7260303" y="3186266"/>
+                  </a:lnTo>
+                  <a:lnTo>
+                    <a:pt x="7183835" y="3183107"/>
+                  </a:lnTo>
+                  <a:lnTo>
+                    <a:pt x="7107366" y="3179790"/>
+                  </a:lnTo>
+                  <a:lnTo>
+                    <a:pt x="7030898" y="3176307"/>
+                  </a:lnTo>
+                  <a:lnTo>
+                    <a:pt x="6954429" y="3172650"/>
+                  </a:lnTo>
+                  <a:lnTo>
+                    <a:pt x="6877961" y="3168810"/>
+                  </a:lnTo>
+                  <a:lnTo>
+                    <a:pt x="6801492" y="3164777"/>
+                  </a:lnTo>
+                  <a:lnTo>
+                    <a:pt x="6725024" y="3160543"/>
+                  </a:lnTo>
+                  <a:lnTo>
+                    <a:pt x="6648556" y="3156097"/>
+                  </a:lnTo>
+                  <a:lnTo>
+                    <a:pt x="6572087" y="3151429"/>
+                  </a:lnTo>
+                  <a:lnTo>
+                    <a:pt x="6495619" y="3146527"/>
+                  </a:lnTo>
+                  <a:lnTo>
+                    <a:pt x="6419150" y="3141380"/>
+                  </a:lnTo>
+                  <a:lnTo>
+                    <a:pt x="6342682" y="3135976"/>
+                  </a:lnTo>
+                  <a:lnTo>
+                    <a:pt x="6266213" y="3130301"/>
+                  </a:lnTo>
+                  <a:lnTo>
+                    <a:pt x="6189745" y="3124342"/>
+                  </a:lnTo>
+                  <a:lnTo>
+                    <a:pt x="6113277" y="3118085"/>
+                  </a:lnTo>
+                  <a:lnTo>
+                    <a:pt x="6036808" y="3111515"/>
+                  </a:lnTo>
+                  <a:lnTo>
+                    <a:pt x="5960340" y="3104616"/>
+                  </a:lnTo>
+                  <a:lnTo>
+                    <a:pt x="5883871" y="3097372"/>
+                  </a:lnTo>
+                  <a:lnTo>
+                    <a:pt x="5807403" y="3089766"/>
+                  </a:lnTo>
+                  <a:lnTo>
+                    <a:pt x="5730934" y="3081779"/>
+                  </a:lnTo>
+                  <a:lnTo>
+                    <a:pt x="5654466" y="3073393"/>
+                  </a:lnTo>
+                  <a:lnTo>
+                    <a:pt x="5577998" y="3064587"/>
+                  </a:lnTo>
+                  <a:lnTo>
+                    <a:pt x="5501529" y="3055340"/>
+                  </a:lnTo>
+                  <a:lnTo>
+                    <a:pt x="5425061" y="3045631"/>
+                  </a:lnTo>
+                  <a:lnTo>
+                    <a:pt x="5348592" y="3035436"/>
+                  </a:lnTo>
+                  <a:lnTo>
+                    <a:pt x="5272124" y="3024731"/>
+                  </a:lnTo>
+                  <a:lnTo>
+                    <a:pt x="5195655" y="3013491"/>
+                  </a:lnTo>
+                  <a:lnTo>
+                    <a:pt x="5119187" y="3001688"/>
+                  </a:lnTo>
+                  <a:lnTo>
+                    <a:pt x="5042719" y="2989295"/>
+                  </a:lnTo>
+                  <a:lnTo>
+                    <a:pt x="4966250" y="2976281"/>
+                  </a:lnTo>
+                  <a:lnTo>
+                    <a:pt x="4889782" y="2962617"/>
+                  </a:lnTo>
+                  <a:lnTo>
+                    <a:pt x="4813313" y="2948269"/>
+                  </a:lnTo>
+                  <a:lnTo>
+                    <a:pt x="4736845" y="2933203"/>
+                  </a:lnTo>
+                  <a:lnTo>
+                    <a:pt x="4660376" y="2917384"/>
+                  </a:lnTo>
+                  <a:lnTo>
+                    <a:pt x="4583908" y="2900772"/>
+                  </a:lnTo>
+                  <a:lnTo>
+                    <a:pt x="4507439" y="2883330"/>
+                  </a:lnTo>
+                  <a:lnTo>
+                    <a:pt x="4430971" y="2865016"/>
+                  </a:lnTo>
+                  <a:lnTo>
+                    <a:pt x="4354503" y="2845785"/>
+                  </a:lnTo>
+                  <a:lnTo>
+                    <a:pt x="4278034" y="2825592"/>
+                  </a:lnTo>
+                  <a:lnTo>
+                    <a:pt x="4201566" y="2804388"/>
+                  </a:lnTo>
+                  <a:lnTo>
+                    <a:pt x="4125097" y="2782124"/>
+                  </a:lnTo>
+                  <a:lnTo>
+                    <a:pt x="4048629" y="2758746"/>
+                  </a:lnTo>
+                  <a:lnTo>
+                    <a:pt x="3972160" y="2734198"/>
+                  </a:lnTo>
+                  <a:lnTo>
+                    <a:pt x="3895692" y="2708423"/>
+                  </a:lnTo>
+                  <a:lnTo>
+                    <a:pt x="3819224" y="2681357"/>
+                  </a:lnTo>
+                  <a:lnTo>
+                    <a:pt x="3742755" y="2652938"/>
+                  </a:lnTo>
+                  <a:lnTo>
+                    <a:pt x="3666287" y="2623097"/>
+                  </a:lnTo>
+                  <a:lnTo>
+                    <a:pt x="3589818" y="2591763"/>
+                  </a:lnTo>
+                  <a:lnTo>
+                    <a:pt x="3513350" y="2558861"/>
+                  </a:lnTo>
+                  <a:lnTo>
+                    <a:pt x="3436881" y="2524313"/>
+                  </a:lnTo>
+                  <a:lnTo>
+                    <a:pt x="3360413" y="2488037"/>
+                  </a:lnTo>
+                  <a:lnTo>
+                    <a:pt x="3283945" y="2486154"/>
+                  </a:lnTo>
+                  <a:lnTo>
+                    <a:pt x="3207476" y="2501398"/>
+                  </a:lnTo>
+                  <a:lnTo>
+                    <a:pt x="3131008" y="2516337"/>
+                  </a:lnTo>
+                  <a:lnTo>
+                    <a:pt x="3054539" y="2530978"/>
+                  </a:lnTo>
+                  <a:lnTo>
+                    <a:pt x="2978071" y="2545327"/>
+                  </a:lnTo>
+                  <a:lnTo>
+                    <a:pt x="2901602" y="2559389"/>
+                  </a:lnTo>
+                  <a:lnTo>
+                    <a:pt x="2825134" y="2573170"/>
+                  </a:lnTo>
+                  <a:lnTo>
+                    <a:pt x="2748666" y="2586677"/>
+                  </a:lnTo>
+                  <a:lnTo>
+                    <a:pt x="2672197" y="2599913"/>
+                  </a:lnTo>
+                  <a:lnTo>
+                    <a:pt x="2595729" y="2612885"/>
+                  </a:lnTo>
+                  <a:lnTo>
+                    <a:pt x="2519260" y="2625598"/>
+                  </a:lnTo>
+                  <a:lnTo>
+                    <a:pt x="2442792" y="2638057"/>
+                  </a:lnTo>
+                  <a:lnTo>
+                    <a:pt x="2366323" y="2650267"/>
+                  </a:lnTo>
+                  <a:lnTo>
+                    <a:pt x="2289855" y="2662233"/>
+                  </a:lnTo>
+                  <a:lnTo>
+                    <a:pt x="2213386" y="2673960"/>
+                  </a:lnTo>
+                  <a:lnTo>
+                    <a:pt x="2136918" y="2685453"/>
+                  </a:lnTo>
+                  <a:lnTo>
+                    <a:pt x="2060450" y="2696717"/>
+                  </a:lnTo>
+                  <a:lnTo>
+                    <a:pt x="1983981" y="2707755"/>
+                  </a:lnTo>
+                  <a:lnTo>
+                    <a:pt x="1907513" y="2718573"/>
+                  </a:lnTo>
+                  <a:lnTo>
+                    <a:pt x="1831044" y="2729175"/>
+                  </a:lnTo>
+                  <a:lnTo>
+                    <a:pt x="1754576" y="2739566"/>
+                  </a:lnTo>
+                  <a:lnTo>
+                    <a:pt x="1678107" y="2749748"/>
+                  </a:lnTo>
+                  <a:lnTo>
+                    <a:pt x="1601639" y="2759728"/>
+                  </a:lnTo>
+                  <a:lnTo>
+                    <a:pt x="1525171" y="2769508"/>
+                  </a:lnTo>
+                  <a:lnTo>
+                    <a:pt x="1448702" y="2779093"/>
+                  </a:lnTo>
+                  <a:lnTo>
+                    <a:pt x="1372234" y="2788486"/>
+                  </a:lnTo>
+                  <a:lnTo>
+                    <a:pt x="1295765" y="2797692"/>
+                  </a:lnTo>
+                  <a:lnTo>
+                    <a:pt x="1219297" y="2806713"/>
+                  </a:lnTo>
+                  <a:lnTo>
+                    <a:pt x="1142828" y="2815555"/>
+                  </a:lnTo>
+                  <a:lnTo>
+                    <a:pt x="1066360" y="2824220"/>
+                  </a:lnTo>
+                  <a:lnTo>
+                    <a:pt x="989892" y="2832712"/>
+                  </a:lnTo>
+                  <a:lnTo>
+                    <a:pt x="913423" y="2841035"/>
+                  </a:lnTo>
+                  <a:lnTo>
+                    <a:pt x="836955" y="2849191"/>
+                  </a:lnTo>
+                  <a:lnTo>
+                    <a:pt x="760486" y="2857184"/>
+                  </a:lnTo>
+                  <a:lnTo>
+                    <a:pt x="684018" y="2865018"/>
+                  </a:lnTo>
+                  <a:lnTo>
+                    <a:pt x="607549" y="2872695"/>
+                  </a:lnTo>
+                  <a:lnTo>
+                    <a:pt x="531081" y="2880219"/>
+                  </a:lnTo>
+                  <a:lnTo>
+                    <a:pt x="454613" y="2887592"/>
+                  </a:lnTo>
+                  <a:lnTo>
+                    <a:pt x="378144" y="2894819"/>
+                  </a:lnTo>
+                  <a:lnTo>
+                    <a:pt x="301676" y="2901901"/>
+                  </a:lnTo>
+                  <a:lnTo>
+                    <a:pt x="225207" y="2908841"/>
+                  </a:lnTo>
+                  <a:lnTo>
+                    <a:pt x="148739" y="2915643"/>
+                  </a:lnTo>
+                  <a:lnTo>
+                    <a:pt x="72270" y="2922309"/>
+                  </a:lnTo>
+                  <a:lnTo>
+                    <a:pt x="0" y="2928483"/>
                   </a:lnTo>
                   <a:close/>
                 </a:path>
@@ -3567,258 +3567,258 @@
           </p:nvSpPr>
           <p:spPr>
             <a:xfrm>
-              <a:off x="1921892" y="2073503"/>
-              <a:ext cx="6266597" cy="2648772"/>
+              <a:off x="2003438" y="2209169"/>
+              <a:ext cx="6172509" cy="2470599"/>
             </a:xfrm>
             <a:custGeom>
               <a:avLst/>
               <a:pathLst>
-                <a:path w="6266597" h="2648772">
+                <a:path w="6172509" h="2470599">
                   <a:moveTo>
                     <a:pt x="0" y="0"/>
                   </a:moveTo>
                   <a:lnTo>
-                    <a:pt x="55874" y="121079"/>
-                  </a:lnTo>
-                  <a:lnTo>
-                    <a:pt x="133508" y="281296"/>
-                  </a:lnTo>
-                  <a:lnTo>
-                    <a:pt x="211142" y="433880"/>
-                  </a:lnTo>
-                  <a:lnTo>
-                    <a:pt x="288776" y="579194"/>
-                  </a:lnTo>
-                  <a:lnTo>
-                    <a:pt x="366410" y="717584"/>
-                  </a:lnTo>
-                  <a:lnTo>
-                    <a:pt x="444044" y="849381"/>
-                  </a:lnTo>
-                  <a:lnTo>
-                    <a:pt x="521678" y="974897"/>
-                  </a:lnTo>
-                  <a:lnTo>
-                    <a:pt x="599312" y="1094434"/>
-                  </a:lnTo>
-                  <a:lnTo>
-                    <a:pt x="676946" y="1208275"/>
-                  </a:lnTo>
-                  <a:lnTo>
-                    <a:pt x="754580" y="1316692"/>
-                  </a:lnTo>
-                  <a:lnTo>
-                    <a:pt x="832214" y="1419943"/>
-                  </a:lnTo>
-                  <a:lnTo>
-                    <a:pt x="909848" y="1518275"/>
-                  </a:lnTo>
-                  <a:lnTo>
-                    <a:pt x="987482" y="1611922"/>
-                  </a:lnTo>
-                  <a:lnTo>
-                    <a:pt x="1065116" y="1701107"/>
-                  </a:lnTo>
-                  <a:lnTo>
-                    <a:pt x="1142750" y="1786042"/>
-                  </a:lnTo>
-                  <a:lnTo>
-                    <a:pt x="1220384" y="1866931"/>
-                  </a:lnTo>
-                  <a:lnTo>
-                    <a:pt x="1298018" y="1943966"/>
-                  </a:lnTo>
-                  <a:lnTo>
-                    <a:pt x="1375652" y="2017330"/>
-                  </a:lnTo>
-                  <a:lnTo>
-                    <a:pt x="1453287" y="2087199"/>
-                  </a:lnTo>
-                  <a:lnTo>
-                    <a:pt x="1530921" y="2153739"/>
-                  </a:lnTo>
-                  <a:lnTo>
-                    <a:pt x="1608555" y="2217108"/>
-                  </a:lnTo>
-                  <a:lnTo>
-                    <a:pt x="1686189" y="2277458"/>
-                  </a:lnTo>
-                  <a:lnTo>
-                    <a:pt x="1763823" y="2334933"/>
-                  </a:lnTo>
-                  <a:lnTo>
-                    <a:pt x="1841457" y="2389669"/>
-                  </a:lnTo>
-                  <a:lnTo>
-                    <a:pt x="1919091" y="2441798"/>
-                  </a:lnTo>
-                  <a:lnTo>
-                    <a:pt x="1996725" y="2491442"/>
-                  </a:lnTo>
-                  <a:lnTo>
-                    <a:pt x="2074359" y="2538722"/>
-                  </a:lnTo>
-                  <a:lnTo>
-                    <a:pt x="2151993" y="2583748"/>
-                  </a:lnTo>
-                  <a:lnTo>
-                    <a:pt x="2229627" y="2626629"/>
-                  </a:lnTo>
-                  <a:lnTo>
-                    <a:pt x="2307261" y="2648772"/>
-                  </a:lnTo>
-                  <a:lnTo>
-                    <a:pt x="2384895" y="2631756"/>
-                  </a:lnTo>
-                  <a:lnTo>
-                    <a:pt x="2462529" y="2614393"/>
-                  </a:lnTo>
-                  <a:lnTo>
-                    <a:pt x="2540163" y="2596676"/>
-                  </a:lnTo>
-                  <a:lnTo>
-                    <a:pt x="2617797" y="2578598"/>
-                  </a:lnTo>
-                  <a:lnTo>
-                    <a:pt x="2695431" y="2560152"/>
-                  </a:lnTo>
-                  <a:lnTo>
-                    <a:pt x="2773065" y="2541329"/>
-                  </a:lnTo>
-                  <a:lnTo>
-                    <a:pt x="2850699" y="2522123"/>
-                  </a:lnTo>
-                  <a:lnTo>
-                    <a:pt x="2928333" y="2502526"/>
-                  </a:lnTo>
-                  <a:lnTo>
-                    <a:pt x="3005967" y="2482529"/>
-                  </a:lnTo>
-                  <a:lnTo>
-                    <a:pt x="3083601" y="2462125"/>
-                  </a:lnTo>
-                  <a:lnTo>
-                    <a:pt x="3161236" y="2441305"/>
-                  </a:lnTo>
-                  <a:lnTo>
-                    <a:pt x="3238870" y="2420061"/>
-                  </a:lnTo>
-                  <a:lnTo>
-                    <a:pt x="3316504" y="2398384"/>
-                  </a:lnTo>
-                  <a:lnTo>
-                    <a:pt x="3394138" y="2376265"/>
-                  </a:lnTo>
-                  <a:lnTo>
-                    <a:pt x="3471772" y="2353695"/>
-                  </a:lnTo>
-                  <a:lnTo>
-                    <a:pt x="3549406" y="2330665"/>
-                  </a:lnTo>
-                  <a:lnTo>
-                    <a:pt x="3627040" y="2307166"/>
-                  </a:lnTo>
-                  <a:lnTo>
-                    <a:pt x="3704674" y="2283188"/>
-                  </a:lnTo>
-                  <a:lnTo>
-                    <a:pt x="3782308" y="2258721"/>
-                  </a:lnTo>
-                  <a:lnTo>
-                    <a:pt x="3859942" y="2233756"/>
-                  </a:lnTo>
-                  <a:lnTo>
-                    <a:pt x="3937576" y="2208282"/>
-                  </a:lnTo>
-                  <a:lnTo>
-                    <a:pt x="4015210" y="2182289"/>
-                  </a:lnTo>
-                  <a:lnTo>
-                    <a:pt x="4092844" y="2155766"/>
-                  </a:lnTo>
-                  <a:lnTo>
-                    <a:pt x="4170478" y="2128703"/>
-                  </a:lnTo>
-                  <a:lnTo>
-                    <a:pt x="4248112" y="2101088"/>
-                  </a:lnTo>
-                  <a:lnTo>
-                    <a:pt x="4325746" y="2072910"/>
-                  </a:lnTo>
-                  <a:lnTo>
-                    <a:pt x="4403380" y="2044158"/>
-                  </a:lnTo>
-                  <a:lnTo>
-                    <a:pt x="4481014" y="2014820"/>
-                  </a:lnTo>
-                  <a:lnTo>
-                    <a:pt x="4558648" y="1984884"/>
-                  </a:lnTo>
-                  <a:lnTo>
-                    <a:pt x="4636282" y="1954338"/>
-                  </a:lnTo>
-                  <a:lnTo>
-                    <a:pt x="4713916" y="1923170"/>
-                  </a:lnTo>
-                  <a:lnTo>
-                    <a:pt x="4791550" y="1891366"/>
-                  </a:lnTo>
-                  <a:lnTo>
-                    <a:pt x="4869185" y="1858914"/>
-                  </a:lnTo>
-                  <a:lnTo>
-                    <a:pt x="4946819" y="1825801"/>
-                  </a:lnTo>
-                  <a:lnTo>
-                    <a:pt x="5024453" y="1792013"/>
-                  </a:lnTo>
-                  <a:lnTo>
-                    <a:pt x="5102087" y="1757537"/>
-                  </a:lnTo>
-                  <a:lnTo>
-                    <a:pt x="5179721" y="1722358"/>
-                  </a:lnTo>
-                  <a:lnTo>
-                    <a:pt x="5257355" y="1686462"/>
-                  </a:lnTo>
-                  <a:lnTo>
-                    <a:pt x="5334989" y="1649834"/>
-                  </a:lnTo>
-                  <a:lnTo>
-                    <a:pt x="5412623" y="1612460"/>
-                  </a:lnTo>
-                  <a:lnTo>
-                    <a:pt x="5490257" y="1574325"/>
-                  </a:lnTo>
-                  <a:lnTo>
-                    <a:pt x="5567891" y="1535412"/>
-                  </a:lnTo>
-                  <a:lnTo>
-                    <a:pt x="5645525" y="1495706"/>
-                  </a:lnTo>
-                  <a:lnTo>
-                    <a:pt x="5723159" y="1455191"/>
-                  </a:lnTo>
-                  <a:lnTo>
-                    <a:pt x="5800793" y="1413850"/>
-                  </a:lnTo>
-                  <a:lnTo>
-                    <a:pt x="5878427" y="1371667"/>
-                  </a:lnTo>
-                  <a:lnTo>
-                    <a:pt x="5956061" y="1328624"/>
-                  </a:lnTo>
-                  <a:lnTo>
-                    <a:pt x="6033695" y="1284704"/>
-                  </a:lnTo>
-                  <a:lnTo>
-                    <a:pt x="6111329" y="1239889"/>
-                  </a:lnTo>
-                  <a:lnTo>
-                    <a:pt x="6188963" y="1194160"/>
-                  </a:lnTo>
-                  <a:lnTo>
-                    <a:pt x="6266597" y="1147500"/>
+                    <a:pt x="55035" y="112934"/>
+                  </a:lnTo>
+                  <a:lnTo>
+                    <a:pt x="131503" y="262375"/>
+                  </a:lnTo>
+                  <a:lnTo>
+                    <a:pt x="207972" y="404695"/>
+                  </a:lnTo>
+                  <a:lnTo>
+                    <a:pt x="284440" y="540234"/>
+                  </a:lnTo>
+                  <a:lnTo>
+                    <a:pt x="360909" y="669315"/>
+                  </a:lnTo>
+                  <a:lnTo>
+                    <a:pt x="437377" y="792246"/>
+                  </a:lnTo>
+                  <a:lnTo>
+                    <a:pt x="513845" y="909320"/>
+                  </a:lnTo>
+                  <a:lnTo>
+                    <a:pt x="590314" y="1020815"/>
+                  </a:lnTo>
+                  <a:lnTo>
+                    <a:pt x="666782" y="1126999"/>
+                  </a:lnTo>
+                  <a:lnTo>
+                    <a:pt x="743251" y="1228123"/>
+                  </a:lnTo>
+                  <a:lnTo>
+                    <a:pt x="819719" y="1324429"/>
+                  </a:lnTo>
+                  <a:lnTo>
+                    <a:pt x="896188" y="1416146"/>
+                  </a:lnTo>
+                  <a:lnTo>
+                    <a:pt x="972656" y="1503494"/>
+                  </a:lnTo>
+                  <a:lnTo>
+                    <a:pt x="1049124" y="1586680"/>
+                  </a:lnTo>
+                  <a:lnTo>
+                    <a:pt x="1125593" y="1665902"/>
+                  </a:lnTo>
+                  <a:lnTo>
+                    <a:pt x="1202061" y="1741349"/>
+                  </a:lnTo>
+                  <a:lnTo>
+                    <a:pt x="1278530" y="1813202"/>
+                  </a:lnTo>
+                  <a:lnTo>
+                    <a:pt x="1354998" y="1881632"/>
+                  </a:lnTo>
+                  <a:lnTo>
+                    <a:pt x="1431467" y="1946801"/>
+                  </a:lnTo>
+                  <a:lnTo>
+                    <a:pt x="1507935" y="2008865"/>
+                  </a:lnTo>
+                  <a:lnTo>
+                    <a:pt x="1584403" y="2067971"/>
+                  </a:lnTo>
+                  <a:lnTo>
+                    <a:pt x="1660872" y="2124262"/>
+                  </a:lnTo>
+                  <a:lnTo>
+                    <a:pt x="1737340" y="2177871"/>
+                  </a:lnTo>
+                  <a:lnTo>
+                    <a:pt x="1813809" y="2228925"/>
+                  </a:lnTo>
+                  <a:lnTo>
+                    <a:pt x="1890277" y="2277547"/>
+                  </a:lnTo>
+                  <a:lnTo>
+                    <a:pt x="1966746" y="2323852"/>
+                  </a:lnTo>
+                  <a:lnTo>
+                    <a:pt x="2043214" y="2367951"/>
+                  </a:lnTo>
+                  <a:lnTo>
+                    <a:pt x="2119683" y="2409949"/>
+                  </a:lnTo>
+                  <a:lnTo>
+                    <a:pt x="2196151" y="2449946"/>
+                  </a:lnTo>
+                  <a:lnTo>
+                    <a:pt x="2272619" y="2470599"/>
+                  </a:lnTo>
+                  <a:lnTo>
+                    <a:pt x="2349088" y="2454727"/>
+                  </a:lnTo>
+                  <a:lnTo>
+                    <a:pt x="2425556" y="2438532"/>
+                  </a:lnTo>
+                  <a:lnTo>
+                    <a:pt x="2502025" y="2422007"/>
+                  </a:lnTo>
+                  <a:lnTo>
+                    <a:pt x="2578493" y="2405145"/>
+                  </a:lnTo>
+                  <a:lnTo>
+                    <a:pt x="2654962" y="2387940"/>
+                  </a:lnTo>
+                  <a:lnTo>
+                    <a:pt x="2731430" y="2370383"/>
+                  </a:lnTo>
+                  <a:lnTo>
+                    <a:pt x="2807898" y="2352469"/>
+                  </a:lnTo>
+                  <a:lnTo>
+                    <a:pt x="2884367" y="2334190"/>
+                  </a:lnTo>
+                  <a:lnTo>
+                    <a:pt x="2960835" y="2315539"/>
+                  </a:lnTo>
+                  <a:lnTo>
+                    <a:pt x="3037304" y="2296507"/>
+                  </a:lnTo>
+                  <a:lnTo>
+                    <a:pt x="3113772" y="2277088"/>
+                  </a:lnTo>
+                  <a:lnTo>
+                    <a:pt x="3190241" y="2257272"/>
+                  </a:lnTo>
+                  <a:lnTo>
+                    <a:pt x="3266709" y="2237053"/>
+                  </a:lnTo>
+                  <a:lnTo>
+                    <a:pt x="3343177" y="2216422"/>
+                  </a:lnTo>
+                  <a:lnTo>
+                    <a:pt x="3419646" y="2195370"/>
+                  </a:lnTo>
+                  <a:lnTo>
+                    <a:pt x="3496114" y="2173890"/>
+                  </a:lnTo>
+                  <a:lnTo>
+                    <a:pt x="3572583" y="2151971"/>
+                  </a:lnTo>
+                  <a:lnTo>
+                    <a:pt x="3649051" y="2129606"/>
+                  </a:lnTo>
+                  <a:lnTo>
+                    <a:pt x="3725520" y="2106785"/>
+                  </a:lnTo>
+                  <a:lnTo>
+                    <a:pt x="3801988" y="2083500"/>
+                  </a:lnTo>
+                  <a:lnTo>
+                    <a:pt x="3878456" y="2059739"/>
+                  </a:lnTo>
+                  <a:lnTo>
+                    <a:pt x="3954925" y="2035494"/>
+                  </a:lnTo>
+                  <a:lnTo>
+                    <a:pt x="4031393" y="2010755"/>
+                  </a:lnTo>
+                  <a:lnTo>
+                    <a:pt x="4107862" y="1985513"/>
+                  </a:lnTo>
+                  <a:lnTo>
+                    <a:pt x="4184330" y="1959755"/>
+                  </a:lnTo>
+                  <a:lnTo>
+                    <a:pt x="4260799" y="1933473"/>
+                  </a:lnTo>
+                  <a:lnTo>
+                    <a:pt x="4337267" y="1906655"/>
+                  </a:lnTo>
+                  <a:lnTo>
+                    <a:pt x="4413736" y="1879290"/>
+                  </a:lnTo>
+                  <a:lnTo>
+                    <a:pt x="4490204" y="1851368"/>
+                  </a:lnTo>
+                  <a:lnTo>
+                    <a:pt x="4566672" y="1822877"/>
+                  </a:lnTo>
+                  <a:lnTo>
+                    <a:pt x="4643141" y="1793805"/>
+                  </a:lnTo>
+                  <a:lnTo>
+                    <a:pt x="4719609" y="1764141"/>
+                  </a:lnTo>
+                  <a:lnTo>
+                    <a:pt x="4796078" y="1733872"/>
+                  </a:lnTo>
+                  <a:lnTo>
+                    <a:pt x="4872546" y="1702986"/>
+                  </a:lnTo>
+                  <a:lnTo>
+                    <a:pt x="4949015" y="1671471"/>
+                  </a:lnTo>
+                  <a:lnTo>
+                    <a:pt x="5025483" y="1639314"/>
+                  </a:lnTo>
+                  <a:lnTo>
+                    <a:pt x="5101951" y="1606501"/>
+                  </a:lnTo>
+                  <a:lnTo>
+                    <a:pt x="5178420" y="1573020"/>
+                  </a:lnTo>
+                  <a:lnTo>
+                    <a:pt x="5254888" y="1538856"/>
+                  </a:lnTo>
+                  <a:lnTo>
+                    <a:pt x="5331357" y="1503996"/>
+                  </a:lnTo>
+                  <a:lnTo>
+                    <a:pt x="5407825" y="1468425"/>
+                  </a:lnTo>
+                  <a:lnTo>
+                    <a:pt x="5484294" y="1432130"/>
+                  </a:lnTo>
+                  <a:lnTo>
+                    <a:pt x="5560762" y="1395095"/>
+                  </a:lnTo>
+                  <a:lnTo>
+                    <a:pt x="5637230" y="1357305"/>
+                  </a:lnTo>
+                  <a:lnTo>
+                    <a:pt x="5713699" y="1318745"/>
+                  </a:lnTo>
+                  <a:lnTo>
+                    <a:pt x="5790167" y="1279400"/>
+                  </a:lnTo>
+                  <a:lnTo>
+                    <a:pt x="5866636" y="1239252"/>
+                  </a:lnTo>
+                  <a:lnTo>
+                    <a:pt x="5943104" y="1198286"/>
+                  </a:lnTo>
+                  <a:lnTo>
+                    <a:pt x="6019573" y="1156486"/>
+                  </a:lnTo>
+                  <a:lnTo>
+                    <a:pt x="6096041" y="1113833"/>
+                  </a:lnTo>
+                  <a:lnTo>
+                    <a:pt x="6172509" y="1070312"/>
                   </a:lnTo>
                 </a:path>
               </a:pathLst>
@@ -3838,300 +3838,300 @@
           </p:nvSpPr>
           <p:spPr>
             <a:xfrm>
-              <a:off x="817517" y="4738952"/>
-              <a:ext cx="7370972" cy="750602"/>
+              <a:off x="915645" y="4695323"/>
+              <a:ext cx="7260303" cy="700112"/>
             </a:xfrm>
             <a:custGeom>
               <a:avLst/>
               <a:pathLst>
-                <a:path w="7370972" h="750602">
+                <a:path w="7260303" h="700112">
                   <a:moveTo>
-                    <a:pt x="7370972" y="750602"/>
+                    <a:pt x="7260303" y="700112"/>
                   </a:moveTo>
                   <a:lnTo>
-                    <a:pt x="7293338" y="747215"/>
-                  </a:lnTo>
-                  <a:lnTo>
-                    <a:pt x="7215704" y="743659"/>
-                  </a:lnTo>
-                  <a:lnTo>
-                    <a:pt x="7138070" y="739925"/>
-                  </a:lnTo>
-                  <a:lnTo>
-                    <a:pt x="7060436" y="736004"/>
-                  </a:lnTo>
-                  <a:lnTo>
-                    <a:pt x="6982802" y="731887"/>
-                  </a:lnTo>
-                  <a:lnTo>
-                    <a:pt x="6905168" y="727564"/>
-                  </a:lnTo>
-                  <a:lnTo>
-                    <a:pt x="6827534" y="723024"/>
-                  </a:lnTo>
-                  <a:lnTo>
-                    <a:pt x="6749900" y="718258"/>
-                  </a:lnTo>
-                  <a:lnTo>
-                    <a:pt x="6672266" y="713253"/>
-                  </a:lnTo>
-                  <a:lnTo>
-                    <a:pt x="6594632" y="707998"/>
-                  </a:lnTo>
-                  <a:lnTo>
-                    <a:pt x="6516998" y="702479"/>
-                  </a:lnTo>
-                  <a:lnTo>
-                    <a:pt x="6439364" y="696685"/>
-                  </a:lnTo>
-                  <a:lnTo>
-                    <a:pt x="6361730" y="690601"/>
-                  </a:lnTo>
-                  <a:lnTo>
-                    <a:pt x="6284096" y="684212"/>
-                  </a:lnTo>
-                  <a:lnTo>
-                    <a:pt x="6206462" y="677504"/>
-                  </a:lnTo>
-                  <a:lnTo>
-                    <a:pt x="6128827" y="670460"/>
-                  </a:lnTo>
-                  <a:lnTo>
-                    <a:pt x="6051193" y="663064"/>
-                  </a:lnTo>
-                  <a:lnTo>
-                    <a:pt x="5973559" y="655298"/>
-                  </a:lnTo>
-                  <a:lnTo>
-                    <a:pt x="5895925" y="647143"/>
-                  </a:lnTo>
-                  <a:lnTo>
-                    <a:pt x="5818291" y="638580"/>
-                  </a:lnTo>
-                  <a:lnTo>
-                    <a:pt x="5740657" y="629589"/>
-                  </a:lnTo>
-                  <a:lnTo>
-                    <a:pt x="5663023" y="620148"/>
-                  </a:lnTo>
-                  <a:lnTo>
-                    <a:pt x="5585389" y="610234"/>
-                  </a:lnTo>
-                  <a:lnTo>
-                    <a:pt x="5507755" y="599825"/>
-                  </a:lnTo>
-                  <a:lnTo>
-                    <a:pt x="5430121" y="588895"/>
-                  </a:lnTo>
-                  <a:lnTo>
-                    <a:pt x="5352487" y="577418"/>
-                  </a:lnTo>
-                  <a:lnTo>
-                    <a:pt x="5274853" y="565367"/>
-                  </a:lnTo>
-                  <a:lnTo>
-                    <a:pt x="5197219" y="552713"/>
-                  </a:lnTo>
-                  <a:lnTo>
-                    <a:pt x="5119585" y="539426"/>
-                  </a:lnTo>
-                  <a:lnTo>
-                    <a:pt x="5041951" y="525474"/>
-                  </a:lnTo>
-                  <a:lnTo>
-                    <a:pt x="4964317" y="510824"/>
-                  </a:lnTo>
-                  <a:lnTo>
-                    <a:pt x="4886683" y="495441"/>
-                  </a:lnTo>
-                  <a:lnTo>
-                    <a:pt x="4809049" y="479289"/>
-                  </a:lnTo>
-                  <a:lnTo>
-                    <a:pt x="4731415" y="462329"/>
-                  </a:lnTo>
-                  <a:lnTo>
-                    <a:pt x="4653781" y="444520"/>
-                  </a:lnTo>
-                  <a:lnTo>
-                    <a:pt x="4576147" y="425820"/>
-                  </a:lnTo>
-                  <a:lnTo>
-                    <a:pt x="4498513" y="406184"/>
-                  </a:lnTo>
-                  <a:lnTo>
-                    <a:pt x="4420879" y="385566"/>
-                  </a:lnTo>
-                  <a:lnTo>
-                    <a:pt x="4343244" y="363917"/>
-                  </a:lnTo>
-                  <a:lnTo>
-                    <a:pt x="4265610" y="341184"/>
-                  </a:lnTo>
-                  <a:lnTo>
-                    <a:pt x="4187976" y="317314"/>
-                  </a:lnTo>
-                  <a:lnTo>
-                    <a:pt x="4110342" y="292250"/>
-                  </a:lnTo>
-                  <a:lnTo>
-                    <a:pt x="4032708" y="265933"/>
-                  </a:lnTo>
-                  <a:lnTo>
-                    <a:pt x="3955074" y="238298"/>
-                  </a:lnTo>
-                  <a:lnTo>
-                    <a:pt x="3877440" y="209281"/>
-                  </a:lnTo>
-                  <a:lnTo>
-                    <a:pt x="3799806" y="178812"/>
-                  </a:lnTo>
-                  <a:lnTo>
-                    <a:pt x="3722172" y="146819"/>
-                  </a:lnTo>
-                  <a:lnTo>
-                    <a:pt x="3644538" y="113225"/>
-                  </a:lnTo>
-                  <a:lnTo>
-                    <a:pt x="3566904" y="77950"/>
-                  </a:lnTo>
-                  <a:lnTo>
-                    <a:pt x="3489270" y="40911"/>
-                  </a:lnTo>
-                  <a:lnTo>
-                    <a:pt x="3411636" y="2019"/>
-                  </a:lnTo>
-                  <a:lnTo>
-                    <a:pt x="3334002" y="0"/>
-                  </a:lnTo>
-                  <a:lnTo>
-                    <a:pt x="3256368" y="16343"/>
-                  </a:lnTo>
-                  <a:lnTo>
-                    <a:pt x="3178734" y="32360"/>
-                  </a:lnTo>
-                  <a:lnTo>
-                    <a:pt x="3101100" y="48057"/>
-                  </a:lnTo>
-                  <a:lnTo>
-                    <a:pt x="3023466" y="63440"/>
-                  </a:lnTo>
-                  <a:lnTo>
-                    <a:pt x="2945832" y="78517"/>
-                  </a:lnTo>
-                  <a:lnTo>
-                    <a:pt x="2868198" y="93292"/>
-                  </a:lnTo>
-                  <a:lnTo>
-                    <a:pt x="2790564" y="107772"/>
-                  </a:lnTo>
-                  <a:lnTo>
-                    <a:pt x="2712930" y="121963"/>
-                  </a:lnTo>
-                  <a:lnTo>
-                    <a:pt x="2635295" y="135870"/>
-                  </a:lnTo>
-                  <a:lnTo>
-                    <a:pt x="2557661" y="149500"/>
-                  </a:lnTo>
-                  <a:lnTo>
-                    <a:pt x="2480027" y="162857"/>
-                  </a:lnTo>
-                  <a:lnTo>
-                    <a:pt x="2402393" y="175948"/>
-                  </a:lnTo>
-                  <a:lnTo>
-                    <a:pt x="2324759" y="188777"/>
-                  </a:lnTo>
-                  <a:lnTo>
-                    <a:pt x="2247125" y="201350"/>
-                  </a:lnTo>
-                  <a:lnTo>
-                    <a:pt x="2169491" y="213672"/>
-                  </a:lnTo>
-                  <a:lnTo>
-                    <a:pt x="2091857" y="225748"/>
-                  </a:lnTo>
-                  <a:lnTo>
-                    <a:pt x="2014223" y="237583"/>
-                  </a:lnTo>
-                  <a:lnTo>
-                    <a:pt x="1936589" y="249181"/>
-                  </a:lnTo>
-                  <a:lnTo>
-                    <a:pt x="1858955" y="260547"/>
-                  </a:lnTo>
-                  <a:lnTo>
-                    <a:pt x="1781321" y="271687"/>
-                  </a:lnTo>
-                  <a:lnTo>
-                    <a:pt x="1703687" y="282604"/>
-                  </a:lnTo>
-                  <a:lnTo>
-                    <a:pt x="1626053" y="293303"/>
-                  </a:lnTo>
-                  <a:lnTo>
-                    <a:pt x="1548419" y="303789"/>
-                  </a:lnTo>
-                  <a:lnTo>
-                    <a:pt x="1470785" y="314065"/>
-                  </a:lnTo>
-                  <a:lnTo>
-                    <a:pt x="1393151" y="324135"/>
-                  </a:lnTo>
-                  <a:lnTo>
-                    <a:pt x="1315517" y="334005"/>
-                  </a:lnTo>
-                  <a:lnTo>
-                    <a:pt x="1237883" y="343677"/>
-                  </a:lnTo>
-                  <a:lnTo>
-                    <a:pt x="1160249" y="353157"/>
-                  </a:lnTo>
-                  <a:lnTo>
-                    <a:pt x="1082615" y="362447"/>
-                  </a:lnTo>
-                  <a:lnTo>
-                    <a:pt x="1004981" y="371551"/>
-                  </a:lnTo>
-                  <a:lnTo>
-                    <a:pt x="927346" y="380474"/>
-                  </a:lnTo>
-                  <a:lnTo>
-                    <a:pt x="849712" y="389218"/>
-                  </a:lnTo>
-                  <a:lnTo>
-                    <a:pt x="772078" y="397788"/>
-                  </a:lnTo>
-                  <a:lnTo>
-                    <a:pt x="694444" y="406186"/>
-                  </a:lnTo>
-                  <a:lnTo>
-                    <a:pt x="616810" y="414417"/>
-                  </a:lnTo>
-                  <a:lnTo>
-                    <a:pt x="539176" y="422483"/>
-                  </a:lnTo>
-                  <a:lnTo>
-                    <a:pt x="461542" y="430389"/>
-                  </a:lnTo>
-                  <a:lnTo>
-                    <a:pt x="383908" y="438136"/>
-                  </a:lnTo>
-                  <a:lnTo>
-                    <a:pt x="306274" y="445729"/>
-                  </a:lnTo>
-                  <a:lnTo>
-                    <a:pt x="228640" y="453170"/>
-                  </a:lnTo>
-                  <a:lnTo>
-                    <a:pt x="151006" y="460463"/>
-                  </a:lnTo>
-                  <a:lnTo>
-                    <a:pt x="73372" y="467609"/>
-                  </a:lnTo>
-                  <a:lnTo>
-                    <a:pt x="0" y="474229"/>
+                    <a:pt x="7183835" y="696953"/>
+                  </a:lnTo>
+                  <a:lnTo>
+                    <a:pt x="7107366" y="693636"/>
+                  </a:lnTo>
+                  <a:lnTo>
+                    <a:pt x="7030898" y="690153"/>
+                  </a:lnTo>
+                  <a:lnTo>
+                    <a:pt x="6954429" y="686496"/>
+                  </a:lnTo>
+                  <a:lnTo>
+                    <a:pt x="6877961" y="682655"/>
+                  </a:lnTo>
+                  <a:lnTo>
+                    <a:pt x="6801492" y="678623"/>
+                  </a:lnTo>
+                  <a:lnTo>
+                    <a:pt x="6725024" y="674389"/>
+                  </a:lnTo>
+                  <a:lnTo>
+                    <a:pt x="6648556" y="669943"/>
+                  </a:lnTo>
+                  <a:lnTo>
+                    <a:pt x="6572087" y="665275"/>
+                  </a:lnTo>
+                  <a:lnTo>
+                    <a:pt x="6495619" y="660373"/>
+                  </a:lnTo>
+                  <a:lnTo>
+                    <a:pt x="6419150" y="655226"/>
+                  </a:lnTo>
+                  <a:lnTo>
+                    <a:pt x="6342682" y="649822"/>
+                  </a:lnTo>
+                  <a:lnTo>
+                    <a:pt x="6266213" y="644147"/>
+                  </a:lnTo>
+                  <a:lnTo>
+                    <a:pt x="6189745" y="638188"/>
+                  </a:lnTo>
+                  <a:lnTo>
+                    <a:pt x="6113277" y="631931"/>
+                  </a:lnTo>
+                  <a:lnTo>
+                    <a:pt x="6036808" y="625361"/>
+                  </a:lnTo>
+                  <a:lnTo>
+                    <a:pt x="5960340" y="618462"/>
+                  </a:lnTo>
+                  <a:lnTo>
+                    <a:pt x="5883871" y="611218"/>
+                  </a:lnTo>
+                  <a:lnTo>
+                    <a:pt x="5807403" y="603612"/>
+                  </a:lnTo>
+                  <a:lnTo>
+                    <a:pt x="5730934" y="595625"/>
+                  </a:lnTo>
+                  <a:lnTo>
+                    <a:pt x="5654466" y="587239"/>
+                  </a:lnTo>
+                  <a:lnTo>
+                    <a:pt x="5577998" y="578433"/>
+                  </a:lnTo>
+                  <a:lnTo>
+                    <a:pt x="5501529" y="569186"/>
+                  </a:lnTo>
+                  <a:lnTo>
+                    <a:pt x="5425061" y="559477"/>
+                  </a:lnTo>
+                  <a:lnTo>
+                    <a:pt x="5348592" y="549282"/>
+                  </a:lnTo>
+                  <a:lnTo>
+                    <a:pt x="5272124" y="538577"/>
+                  </a:lnTo>
+                  <a:lnTo>
+                    <a:pt x="5195655" y="527337"/>
+                  </a:lnTo>
+                  <a:lnTo>
+                    <a:pt x="5119187" y="515534"/>
+                  </a:lnTo>
+                  <a:lnTo>
+                    <a:pt x="5042719" y="503141"/>
+                  </a:lnTo>
+                  <a:lnTo>
+                    <a:pt x="4966250" y="490127"/>
+                  </a:lnTo>
+                  <a:lnTo>
+                    <a:pt x="4889782" y="476463"/>
+                  </a:lnTo>
+                  <a:lnTo>
+                    <a:pt x="4813313" y="462115"/>
+                  </a:lnTo>
+                  <a:lnTo>
+                    <a:pt x="4736845" y="447049"/>
+                  </a:lnTo>
+                  <a:lnTo>
+                    <a:pt x="4660376" y="431229"/>
+                  </a:lnTo>
+                  <a:lnTo>
+                    <a:pt x="4583908" y="414618"/>
+                  </a:lnTo>
+                  <a:lnTo>
+                    <a:pt x="4507439" y="397176"/>
+                  </a:lnTo>
+                  <a:lnTo>
+                    <a:pt x="4430971" y="378862"/>
+                  </a:lnTo>
+                  <a:lnTo>
+                    <a:pt x="4354503" y="359631"/>
+                  </a:lnTo>
+                  <a:lnTo>
+                    <a:pt x="4278034" y="339437"/>
+                  </a:lnTo>
+                  <a:lnTo>
+                    <a:pt x="4201566" y="318234"/>
+                  </a:lnTo>
+                  <a:lnTo>
+                    <a:pt x="4125097" y="295970"/>
+                  </a:lnTo>
+                  <a:lnTo>
+                    <a:pt x="4048629" y="272592"/>
+                  </a:lnTo>
+                  <a:lnTo>
+                    <a:pt x="3972160" y="248044"/>
+                  </a:lnTo>
+                  <a:lnTo>
+                    <a:pt x="3895692" y="222268"/>
+                  </a:lnTo>
+                  <a:lnTo>
+                    <a:pt x="3819224" y="195203"/>
+                  </a:lnTo>
+                  <a:lnTo>
+                    <a:pt x="3742755" y="166784"/>
+                  </a:lnTo>
+                  <a:lnTo>
+                    <a:pt x="3666287" y="136943"/>
+                  </a:lnTo>
+                  <a:lnTo>
+                    <a:pt x="3589818" y="105609"/>
+                  </a:lnTo>
+                  <a:lnTo>
+                    <a:pt x="3513350" y="72707"/>
+                  </a:lnTo>
+                  <a:lnTo>
+                    <a:pt x="3436881" y="38159"/>
+                  </a:lnTo>
+                  <a:lnTo>
+                    <a:pt x="3360413" y="1883"/>
+                  </a:lnTo>
+                  <a:lnTo>
+                    <a:pt x="3283945" y="0"/>
+                  </a:lnTo>
+                  <a:lnTo>
+                    <a:pt x="3207476" y="15243"/>
+                  </a:lnTo>
+                  <a:lnTo>
+                    <a:pt x="3131008" y="30183"/>
+                  </a:lnTo>
+                  <a:lnTo>
+                    <a:pt x="3054539" y="44824"/>
+                  </a:lnTo>
+                  <a:lnTo>
+                    <a:pt x="2978071" y="59173"/>
+                  </a:lnTo>
+                  <a:lnTo>
+                    <a:pt x="2901602" y="73235"/>
+                  </a:lnTo>
+                  <a:lnTo>
+                    <a:pt x="2825134" y="87016"/>
+                  </a:lnTo>
+                  <a:lnTo>
+                    <a:pt x="2748666" y="100522"/>
+                  </a:lnTo>
+                  <a:lnTo>
+                    <a:pt x="2672197" y="113759"/>
+                  </a:lnTo>
+                  <a:lnTo>
+                    <a:pt x="2595729" y="126731"/>
+                  </a:lnTo>
+                  <a:lnTo>
+                    <a:pt x="2519260" y="139444"/>
+                  </a:lnTo>
+                  <a:lnTo>
+                    <a:pt x="2442792" y="151902"/>
+                  </a:lnTo>
+                  <a:lnTo>
+                    <a:pt x="2366323" y="164113"/>
+                  </a:lnTo>
+                  <a:lnTo>
+                    <a:pt x="2289855" y="176079"/>
+                  </a:lnTo>
+                  <a:lnTo>
+                    <a:pt x="2213386" y="187806"/>
+                  </a:lnTo>
+                  <a:lnTo>
+                    <a:pt x="2136918" y="199299"/>
+                  </a:lnTo>
+                  <a:lnTo>
+                    <a:pt x="2060450" y="210563"/>
+                  </a:lnTo>
+                  <a:lnTo>
+                    <a:pt x="1983981" y="221601"/>
+                  </a:lnTo>
+                  <a:lnTo>
+                    <a:pt x="1907513" y="232419"/>
+                  </a:lnTo>
+                  <a:lnTo>
+                    <a:pt x="1831044" y="243021"/>
+                  </a:lnTo>
+                  <a:lnTo>
+                    <a:pt x="1754576" y="253412"/>
+                  </a:lnTo>
+                  <a:lnTo>
+                    <a:pt x="1678107" y="263594"/>
+                  </a:lnTo>
+                  <a:lnTo>
+                    <a:pt x="1601639" y="273574"/>
+                  </a:lnTo>
+                  <a:lnTo>
+                    <a:pt x="1525171" y="283354"/>
+                  </a:lnTo>
+                  <a:lnTo>
+                    <a:pt x="1448702" y="292939"/>
+                  </a:lnTo>
+                  <a:lnTo>
+                    <a:pt x="1372234" y="302332"/>
+                  </a:lnTo>
+                  <a:lnTo>
+                    <a:pt x="1295765" y="311538"/>
+                  </a:lnTo>
+                  <a:lnTo>
+                    <a:pt x="1219297" y="320559"/>
+                  </a:lnTo>
+                  <a:lnTo>
+                    <a:pt x="1142828" y="329401"/>
+                  </a:lnTo>
+                  <a:lnTo>
+                    <a:pt x="1066360" y="338066"/>
+                  </a:lnTo>
+                  <a:lnTo>
+                    <a:pt x="989892" y="346558"/>
+                  </a:lnTo>
+                  <a:lnTo>
+                    <a:pt x="913423" y="354880"/>
+                  </a:lnTo>
+                  <a:lnTo>
+                    <a:pt x="836955" y="363037"/>
+                  </a:lnTo>
+                  <a:lnTo>
+                    <a:pt x="760486" y="371030"/>
+                  </a:lnTo>
+                  <a:lnTo>
+                    <a:pt x="684018" y="378864"/>
+                  </a:lnTo>
+                  <a:lnTo>
+                    <a:pt x="607549" y="386541"/>
+                  </a:lnTo>
+                  <a:lnTo>
+                    <a:pt x="531081" y="394065"/>
+                  </a:lnTo>
+                  <a:lnTo>
+                    <a:pt x="454613" y="401438"/>
+                  </a:lnTo>
+                  <a:lnTo>
+                    <a:pt x="378144" y="408664"/>
+                  </a:lnTo>
+                  <a:lnTo>
+                    <a:pt x="301676" y="415746"/>
+                  </a:lnTo>
+                  <a:lnTo>
+                    <a:pt x="225207" y="422687"/>
+                  </a:lnTo>
+                  <a:lnTo>
+                    <a:pt x="148739" y="429489"/>
+                  </a:lnTo>
+                  <a:lnTo>
+                    <a:pt x="72270" y="436155"/>
+                  </a:lnTo>
+                  <a:lnTo>
+                    <a:pt x="0" y="442329"/>
                   </a:lnTo>
                 </a:path>
               </a:pathLst>
@@ -4151,300 +4151,300 @@
           </p:nvSpPr>
           <p:spPr>
             <a:xfrm>
-              <a:off x="817517" y="4008097"/>
-              <a:ext cx="7370972" cy="1151468"/>
+              <a:off x="915645" y="4013630"/>
+              <a:ext cx="7260303" cy="1074012"/>
             </a:xfrm>
             <a:custGeom>
               <a:avLst/>
               <a:pathLst>
-                <a:path w="7370972" h="1151468">
+                <a:path w="7260303" h="1074012">
                   <a:moveTo>
                     <a:pt x="0" y="0"/>
                   </a:moveTo>
                   <a:lnTo>
-                    <a:pt x="73372" y="20835"/>
-                  </a:lnTo>
-                  <a:lnTo>
-                    <a:pt x="151006" y="42568"/>
-                  </a:lnTo>
-                  <a:lnTo>
-                    <a:pt x="228640" y="63991"/>
-                  </a:lnTo>
-                  <a:lnTo>
-                    <a:pt x="306274" y="85110"/>
-                  </a:lnTo>
-                  <a:lnTo>
-                    <a:pt x="383908" y="105929"/>
-                  </a:lnTo>
-                  <a:lnTo>
-                    <a:pt x="461542" y="126451"/>
-                  </a:lnTo>
-                  <a:lnTo>
-                    <a:pt x="539176" y="146682"/>
-                  </a:lnTo>
-                  <a:lnTo>
-                    <a:pt x="616810" y="166625"/>
-                  </a:lnTo>
-                  <a:lnTo>
-                    <a:pt x="694444" y="186284"/>
-                  </a:lnTo>
-                  <a:lnTo>
-                    <a:pt x="772078" y="205664"/>
-                  </a:lnTo>
-                  <a:lnTo>
-                    <a:pt x="849712" y="224768"/>
-                  </a:lnTo>
-                  <a:lnTo>
-                    <a:pt x="927346" y="243601"/>
-                  </a:lnTo>
-                  <a:lnTo>
-                    <a:pt x="1004981" y="262165"/>
-                  </a:lnTo>
-                  <a:lnTo>
-                    <a:pt x="1082615" y="280466"/>
-                  </a:lnTo>
-                  <a:lnTo>
-                    <a:pt x="1160249" y="298507"/>
-                  </a:lnTo>
-                  <a:lnTo>
-                    <a:pt x="1237883" y="316291"/>
-                  </a:lnTo>
-                  <a:lnTo>
-                    <a:pt x="1315517" y="333822"/>
-                  </a:lnTo>
-                  <a:lnTo>
-                    <a:pt x="1393151" y="351104"/>
-                  </a:lnTo>
-                  <a:lnTo>
-                    <a:pt x="1470785" y="368140"/>
-                  </a:lnTo>
-                  <a:lnTo>
-                    <a:pt x="1548419" y="384934"/>
-                  </a:lnTo>
-                  <a:lnTo>
-                    <a:pt x="1626053" y="401489"/>
-                  </a:lnTo>
-                  <a:lnTo>
-                    <a:pt x="1703687" y="417808"/>
-                  </a:lnTo>
-                  <a:lnTo>
-                    <a:pt x="1781321" y="433896"/>
-                  </a:lnTo>
-                  <a:lnTo>
-                    <a:pt x="1858955" y="449755"/>
-                  </a:lnTo>
-                  <a:lnTo>
-                    <a:pt x="1936589" y="465388"/>
-                  </a:lnTo>
-                  <a:lnTo>
-                    <a:pt x="2014223" y="480799"/>
-                  </a:lnTo>
-                  <a:lnTo>
-                    <a:pt x="2091857" y="495991"/>
-                  </a:lnTo>
-                  <a:lnTo>
-                    <a:pt x="2169491" y="510967"/>
-                  </a:lnTo>
-                  <a:lnTo>
-                    <a:pt x="2247125" y="525730"/>
-                  </a:lnTo>
-                  <a:lnTo>
-                    <a:pt x="2324759" y="540282"/>
-                  </a:lnTo>
-                  <a:lnTo>
-                    <a:pt x="2402393" y="554628"/>
-                  </a:lnTo>
-                  <a:lnTo>
-                    <a:pt x="2480027" y="568770"/>
-                  </a:lnTo>
-                  <a:lnTo>
-                    <a:pt x="2557661" y="582711"/>
-                  </a:lnTo>
-                  <a:lnTo>
-                    <a:pt x="2635295" y="596454"/>
-                  </a:lnTo>
-                  <a:lnTo>
-                    <a:pt x="2712930" y="610001"/>
-                  </a:lnTo>
-                  <a:lnTo>
-                    <a:pt x="2790564" y="623356"/>
-                  </a:lnTo>
-                  <a:lnTo>
-                    <a:pt x="2868198" y="636521"/>
-                  </a:lnTo>
-                  <a:lnTo>
-                    <a:pt x="2945832" y="649498"/>
-                  </a:lnTo>
-                  <a:lnTo>
-                    <a:pt x="3023466" y="662291"/>
-                  </a:lnTo>
-                  <a:lnTo>
-                    <a:pt x="3101100" y="674902"/>
-                  </a:lnTo>
-                  <a:lnTo>
-                    <a:pt x="3178734" y="687334"/>
-                  </a:lnTo>
-                  <a:lnTo>
-                    <a:pt x="3256368" y="699589"/>
-                  </a:lnTo>
-                  <a:lnTo>
-                    <a:pt x="3334002" y="711670"/>
-                  </a:lnTo>
-                  <a:lnTo>
-                    <a:pt x="3411636" y="723578"/>
-                  </a:lnTo>
-                  <a:lnTo>
-                    <a:pt x="3489270" y="735318"/>
-                  </a:lnTo>
-                  <a:lnTo>
-                    <a:pt x="3566904" y="746891"/>
-                  </a:lnTo>
-                  <a:lnTo>
-                    <a:pt x="3644538" y="758299"/>
-                  </a:lnTo>
-                  <a:lnTo>
-                    <a:pt x="3722172" y="769544"/>
-                  </a:lnTo>
-                  <a:lnTo>
-                    <a:pt x="3799806" y="780630"/>
-                  </a:lnTo>
-                  <a:lnTo>
-                    <a:pt x="3877440" y="791559"/>
-                  </a:lnTo>
-                  <a:lnTo>
-                    <a:pt x="3955074" y="802332"/>
-                  </a:lnTo>
-                  <a:lnTo>
-                    <a:pt x="4032708" y="812951"/>
-                  </a:lnTo>
-                  <a:lnTo>
-                    <a:pt x="4110342" y="823420"/>
-                  </a:lnTo>
-                  <a:lnTo>
-                    <a:pt x="4187976" y="833740"/>
-                  </a:lnTo>
-                  <a:lnTo>
-                    <a:pt x="4265610" y="843913"/>
-                  </a:lnTo>
-                  <a:lnTo>
-                    <a:pt x="4343244" y="853941"/>
-                  </a:lnTo>
-                  <a:lnTo>
-                    <a:pt x="4420879" y="863827"/>
-                  </a:lnTo>
-                  <a:lnTo>
-                    <a:pt x="4498513" y="873572"/>
-                  </a:lnTo>
-                  <a:lnTo>
-                    <a:pt x="4576147" y="883179"/>
-                  </a:lnTo>
-                  <a:lnTo>
-                    <a:pt x="4653781" y="892649"/>
-                  </a:lnTo>
-                  <a:lnTo>
-                    <a:pt x="4731415" y="901984"/>
-                  </a:lnTo>
-                  <a:lnTo>
-                    <a:pt x="4809049" y="911187"/>
-                  </a:lnTo>
-                  <a:lnTo>
-                    <a:pt x="4886683" y="920259"/>
-                  </a:lnTo>
-                  <a:lnTo>
-                    <a:pt x="4964317" y="929202"/>
-                  </a:lnTo>
-                  <a:lnTo>
-                    <a:pt x="5041951" y="938017"/>
-                  </a:lnTo>
-                  <a:lnTo>
-                    <a:pt x="5119585" y="946708"/>
-                  </a:lnTo>
-                  <a:lnTo>
-                    <a:pt x="5197219" y="955274"/>
-                  </a:lnTo>
-                  <a:lnTo>
-                    <a:pt x="5274853" y="963719"/>
-                  </a:lnTo>
-                  <a:lnTo>
-                    <a:pt x="5352487" y="972044"/>
-                  </a:lnTo>
-                  <a:lnTo>
-                    <a:pt x="5430121" y="980250"/>
-                  </a:lnTo>
-                  <a:lnTo>
-                    <a:pt x="5507755" y="988340"/>
-                  </a:lnTo>
-                  <a:lnTo>
-                    <a:pt x="5585389" y="996315"/>
-                  </a:lnTo>
-                  <a:lnTo>
-                    <a:pt x="5663023" y="1004176"/>
-                  </a:lnTo>
-                  <a:lnTo>
-                    <a:pt x="5740657" y="1011925"/>
-                  </a:lnTo>
-                  <a:lnTo>
-                    <a:pt x="5818291" y="1019565"/>
-                  </a:lnTo>
-                  <a:lnTo>
-                    <a:pt x="5895925" y="1027095"/>
-                  </a:lnTo>
-                  <a:lnTo>
-                    <a:pt x="5973559" y="1034519"/>
-                  </a:lnTo>
-                  <a:lnTo>
-                    <a:pt x="6051193" y="1041837"/>
-                  </a:lnTo>
-                  <a:lnTo>
-                    <a:pt x="6128827" y="1049051"/>
-                  </a:lnTo>
-                  <a:lnTo>
-                    <a:pt x="6206462" y="1056162"/>
-                  </a:lnTo>
-                  <a:lnTo>
-                    <a:pt x="6284096" y="1063173"/>
-                  </a:lnTo>
-                  <a:lnTo>
-                    <a:pt x="6361730" y="1070083"/>
-                  </a:lnTo>
-                  <a:lnTo>
-                    <a:pt x="6439364" y="1076895"/>
-                  </a:lnTo>
-                  <a:lnTo>
-                    <a:pt x="6516998" y="1083611"/>
-                  </a:lnTo>
-                  <a:lnTo>
-                    <a:pt x="6594632" y="1090231"/>
-                  </a:lnTo>
-                  <a:lnTo>
-                    <a:pt x="6672266" y="1096757"/>
-                  </a:lnTo>
-                  <a:lnTo>
-                    <a:pt x="6749900" y="1103190"/>
-                  </a:lnTo>
-                  <a:lnTo>
-                    <a:pt x="6827534" y="1109531"/>
-                  </a:lnTo>
-                  <a:lnTo>
-                    <a:pt x="6905168" y="1115783"/>
-                  </a:lnTo>
-                  <a:lnTo>
-                    <a:pt x="6982802" y="1121945"/>
-                  </a:lnTo>
-                  <a:lnTo>
-                    <a:pt x="7060436" y="1128020"/>
-                  </a:lnTo>
-                  <a:lnTo>
-                    <a:pt x="7138070" y="1134008"/>
-                  </a:lnTo>
-                  <a:lnTo>
-                    <a:pt x="7215704" y="1139912"/>
-                  </a:lnTo>
-                  <a:lnTo>
-                    <a:pt x="7293338" y="1145731"/>
-                  </a:lnTo>
-                  <a:lnTo>
-                    <a:pt x="7370972" y="1151468"/>
+                    <a:pt x="72270" y="19434"/>
+                  </a:lnTo>
+                  <a:lnTo>
+                    <a:pt x="148739" y="39704"/>
+                  </a:lnTo>
+                  <a:lnTo>
+                    <a:pt x="225207" y="59687"/>
+                  </a:lnTo>
+                  <a:lnTo>
+                    <a:pt x="301676" y="79385"/>
+                  </a:lnTo>
+                  <a:lnTo>
+                    <a:pt x="378144" y="98803"/>
+                  </a:lnTo>
+                  <a:lnTo>
+                    <a:pt x="454613" y="117945"/>
+                  </a:lnTo>
+                  <a:lnTo>
+                    <a:pt x="531081" y="136815"/>
+                  </a:lnTo>
+                  <a:lnTo>
+                    <a:pt x="607549" y="155416"/>
+                  </a:lnTo>
+                  <a:lnTo>
+                    <a:pt x="684018" y="173753"/>
+                  </a:lnTo>
+                  <a:lnTo>
+                    <a:pt x="760486" y="191829"/>
+                  </a:lnTo>
+                  <a:lnTo>
+                    <a:pt x="836955" y="209649"/>
+                  </a:lnTo>
+                  <a:lnTo>
+                    <a:pt x="913423" y="227214"/>
+                  </a:lnTo>
+                  <a:lnTo>
+                    <a:pt x="989892" y="244530"/>
+                  </a:lnTo>
+                  <a:lnTo>
+                    <a:pt x="1066360" y="261600"/>
+                  </a:lnTo>
+                  <a:lnTo>
+                    <a:pt x="1142828" y="278427"/>
+                  </a:lnTo>
+                  <a:lnTo>
+                    <a:pt x="1219297" y="295015"/>
+                  </a:lnTo>
+                  <a:lnTo>
+                    <a:pt x="1295765" y="311367"/>
+                  </a:lnTo>
+                  <a:lnTo>
+                    <a:pt x="1372234" y="327486"/>
+                  </a:lnTo>
+                  <a:lnTo>
+                    <a:pt x="1448702" y="343376"/>
+                  </a:lnTo>
+                  <a:lnTo>
+                    <a:pt x="1525171" y="359041"/>
+                  </a:lnTo>
+                  <a:lnTo>
+                    <a:pt x="1601639" y="374482"/>
+                  </a:lnTo>
+                  <a:lnTo>
+                    <a:pt x="1678107" y="389704"/>
+                  </a:lnTo>
+                  <a:lnTo>
+                    <a:pt x="1754576" y="404709"/>
+                  </a:lnTo>
+                  <a:lnTo>
+                    <a:pt x="1831044" y="419501"/>
+                  </a:lnTo>
+                  <a:lnTo>
+                    <a:pt x="1907513" y="434083"/>
+                  </a:lnTo>
+                  <a:lnTo>
+                    <a:pt x="1983981" y="448457"/>
+                  </a:lnTo>
+                  <a:lnTo>
+                    <a:pt x="2060450" y="462627"/>
+                  </a:lnTo>
+                  <a:lnTo>
+                    <a:pt x="2136918" y="476596"/>
+                  </a:lnTo>
+                  <a:lnTo>
+                    <a:pt x="2213386" y="490366"/>
+                  </a:lnTo>
+                  <a:lnTo>
+                    <a:pt x="2289855" y="503940"/>
+                  </a:lnTo>
+                  <a:lnTo>
+                    <a:pt x="2366323" y="517321"/>
+                  </a:lnTo>
+                  <a:lnTo>
+                    <a:pt x="2442792" y="530511"/>
+                  </a:lnTo>
+                  <a:lnTo>
+                    <a:pt x="2519260" y="543515"/>
+                  </a:lnTo>
+                  <a:lnTo>
+                    <a:pt x="2595729" y="556333"/>
+                  </a:lnTo>
+                  <a:lnTo>
+                    <a:pt x="2672197" y="568969"/>
+                  </a:lnTo>
+                  <a:lnTo>
+                    <a:pt x="2748666" y="581425"/>
+                  </a:lnTo>
+                  <a:lnTo>
+                    <a:pt x="2825134" y="593704"/>
+                  </a:lnTo>
+                  <a:lnTo>
+                    <a:pt x="2901602" y="605809"/>
+                  </a:lnTo>
+                  <a:lnTo>
+                    <a:pt x="2978071" y="617741"/>
+                  </a:lnTo>
+                  <a:lnTo>
+                    <a:pt x="3054539" y="629504"/>
+                  </a:lnTo>
+                  <a:lnTo>
+                    <a:pt x="3131008" y="641099"/>
+                  </a:lnTo>
+                  <a:lnTo>
+                    <a:pt x="3207476" y="652530"/>
+                  </a:lnTo>
+                  <a:lnTo>
+                    <a:pt x="3283945" y="663798"/>
+                  </a:lnTo>
+                  <a:lnTo>
+                    <a:pt x="3360413" y="674906"/>
+                  </a:lnTo>
+                  <a:lnTo>
+                    <a:pt x="3436881" y="685856"/>
+                  </a:lnTo>
+                  <a:lnTo>
+                    <a:pt x="3513350" y="696650"/>
+                  </a:lnTo>
+                  <a:lnTo>
+                    <a:pt x="3589818" y="707291"/>
+                  </a:lnTo>
+                  <a:lnTo>
+                    <a:pt x="3666287" y="717780"/>
+                  </a:lnTo>
+                  <a:lnTo>
+                    <a:pt x="3742755" y="728120"/>
+                  </a:lnTo>
+                  <a:lnTo>
+                    <a:pt x="3819224" y="738313"/>
+                  </a:lnTo>
+                  <a:lnTo>
+                    <a:pt x="3895692" y="748362"/>
+                  </a:lnTo>
+                  <a:lnTo>
+                    <a:pt x="3972160" y="758267"/>
+                  </a:lnTo>
+                  <a:lnTo>
+                    <a:pt x="4048629" y="768031"/>
+                  </a:lnTo>
+                  <a:lnTo>
+                    <a:pt x="4125097" y="777657"/>
+                  </a:lnTo>
+                  <a:lnTo>
+                    <a:pt x="4201566" y="787146"/>
+                  </a:lnTo>
+                  <a:lnTo>
+                    <a:pt x="4278034" y="796500"/>
+                  </a:lnTo>
+                  <a:lnTo>
+                    <a:pt x="4354503" y="805721"/>
+                  </a:lnTo>
+                  <a:lnTo>
+                    <a:pt x="4430971" y="814810"/>
+                  </a:lnTo>
+                  <a:lnTo>
+                    <a:pt x="4507439" y="823771"/>
+                  </a:lnTo>
+                  <a:lnTo>
+                    <a:pt x="4583908" y="832604"/>
+                  </a:lnTo>
+                  <a:lnTo>
+                    <a:pt x="4660376" y="841311"/>
+                  </a:lnTo>
+                  <a:lnTo>
+                    <a:pt x="4736845" y="849895"/>
+                  </a:lnTo>
+                  <a:lnTo>
+                    <a:pt x="4813313" y="858356"/>
+                  </a:lnTo>
+                  <a:lnTo>
+                    <a:pt x="4889782" y="866698"/>
+                  </a:lnTo>
+                  <a:lnTo>
+                    <a:pt x="4966250" y="874920"/>
+                  </a:lnTo>
+                  <a:lnTo>
+                    <a:pt x="5042719" y="883026"/>
+                  </a:lnTo>
+                  <a:lnTo>
+                    <a:pt x="5119187" y="891016"/>
+                  </a:lnTo>
+                  <a:lnTo>
+                    <a:pt x="5195655" y="898893"/>
+                  </a:lnTo>
+                  <a:lnTo>
+                    <a:pt x="5272124" y="906658"/>
+                  </a:lnTo>
+                  <a:lnTo>
+                    <a:pt x="5348592" y="914312"/>
+                  </a:lnTo>
+                  <a:lnTo>
+                    <a:pt x="5425061" y="921858"/>
+                  </a:lnTo>
+                  <a:lnTo>
+                    <a:pt x="5501529" y="929296"/>
+                  </a:lnTo>
+                  <a:lnTo>
+                    <a:pt x="5577998" y="936629"/>
+                  </a:lnTo>
+                  <a:lnTo>
+                    <a:pt x="5654466" y="943857"/>
+                  </a:lnTo>
+                  <a:lnTo>
+                    <a:pt x="5730934" y="950982"/>
+                  </a:lnTo>
+                  <a:lnTo>
+                    <a:pt x="5807403" y="958006"/>
+                  </a:lnTo>
+                  <a:lnTo>
+                    <a:pt x="5883871" y="964931"/>
+                  </a:lnTo>
+                  <a:lnTo>
+                    <a:pt x="5960340" y="971756"/>
+                  </a:lnTo>
+                  <a:lnTo>
+                    <a:pt x="6036808" y="978485"/>
+                  </a:lnTo>
+                  <a:lnTo>
+                    <a:pt x="6113277" y="985118"/>
+                  </a:lnTo>
+                  <a:lnTo>
+                    <a:pt x="6189745" y="991657"/>
+                  </a:lnTo>
+                  <a:lnTo>
+                    <a:pt x="6266213" y="998103"/>
+                  </a:lnTo>
+                  <a:lnTo>
+                    <a:pt x="6342682" y="1004457"/>
+                  </a:lnTo>
+                  <a:lnTo>
+                    <a:pt x="6419150" y="1010720"/>
+                  </a:lnTo>
+                  <a:lnTo>
+                    <a:pt x="6495619" y="1016895"/>
+                  </a:lnTo>
+                  <a:lnTo>
+                    <a:pt x="6572087" y="1022982"/>
+                  </a:lnTo>
+                  <a:lnTo>
+                    <a:pt x="6648556" y="1028982"/>
+                  </a:lnTo>
+                  <a:lnTo>
+                    <a:pt x="6725024" y="1034897"/>
+                  </a:lnTo>
+                  <a:lnTo>
+                    <a:pt x="6801492" y="1040728"/>
+                  </a:lnTo>
+                  <a:lnTo>
+                    <a:pt x="6877961" y="1046476"/>
+                  </a:lnTo>
+                  <a:lnTo>
+                    <a:pt x="6954429" y="1052142"/>
+                  </a:lnTo>
+                  <a:lnTo>
+                    <a:pt x="7030898" y="1057728"/>
+                  </a:lnTo>
+                  <a:lnTo>
+                    <a:pt x="7107366" y="1063234"/>
+                  </a:lnTo>
+                  <a:lnTo>
+                    <a:pt x="7183835" y="1068662"/>
+                  </a:lnTo>
+                  <a:lnTo>
+                    <a:pt x="7260303" y="1074012"/>
                   </a:lnTo>
                 </a:path>
               </a:pathLst>
@@ -4473,21 +4473,21 @@
           </p:nvSpPr>
           <p:spPr>
             <a:xfrm>
-              <a:off x="817517" y="4727786"/>
-              <a:ext cx="7799693" cy="0"/>
+              <a:off x="915645" y="4684908"/>
+              <a:ext cx="7682587" cy="0"/>
             </a:xfrm>
             <a:custGeom>
               <a:avLst/>
               <a:pathLst>
-                <a:path w="7799693" h="0">
+                <a:path w="7682587" h="0">
                   <a:moveTo>
                     <a:pt x="0" y="0"/>
                   </a:moveTo>
                   <a:lnTo>
-                    <a:pt x="7799693" y="0"/>
-                  </a:lnTo>
-                  <a:lnTo>
-                    <a:pt x="7799693" y="0"/>
+                    <a:pt x="7682587" y="0"/>
+                  </a:lnTo>
+                  <a:lnTo>
+                    <a:pt x="7682587" y="0"/>
                   </a:lnTo>
                 </a:path>
               </a:pathLst>
@@ -4516,15 +4516,15 @@
           </p:nvSpPr>
           <p:spPr>
             <a:xfrm>
-              <a:off x="4203673" y="2073503"/>
-              <a:ext cx="0" cy="3649639"/>
+              <a:off x="4250960" y="2209169"/>
+              <a:ext cx="0" cy="3404141"/>
             </a:xfrm>
             <a:custGeom>
               <a:avLst/>
               <a:pathLst>
-                <a:path w="0" h="3649639">
+                <a:path w="0" h="3404141">
                   <a:moveTo>
-                    <a:pt x="0" y="3649639"/>
+                    <a:pt x="0" y="3404141"/>
                   </a:moveTo>
                   <a:lnTo>
                     <a:pt x="0" y="0"/>
@@ -4559,8 +4559,8 @@
           </p:nvSpPr>
           <p:spPr>
             <a:xfrm>
-              <a:off x="692708" y="5517199"/>
-              <a:ext cx="62179" cy="80101"/>
+              <a:off x="756929" y="5407599"/>
+              <a:ext cx="79004" cy="101955"/>
             </a:xfrm>
             <a:prstGeom prst="rect">
               <a:avLst/>
@@ -4573,7 +4573,7 @@
             <a:p>
               <a:pPr algn="l" marL="0" marR="0" indent="0">
                 <a:lnSpc>
-                  <a:spcPts val="880"/>
+                  <a:spcPts val="1120"/>
                 </a:lnSpc>
                 <a:spcBef>
                   <a:spcPts val="0"/>
@@ -4583,7 +4583,7 @@
                 </a:spcAft>
               </a:pPr>
               <a:r>
-                <a:rPr sz="880">
+                <a:rPr sz="1120">
                   <a:solidFill>
                     <a:srgbClr val="4D4D4D">
                       <a:alpha val="100000"/>
@@ -4605,8 +4605,8 @@
           </p:nvSpPr>
           <p:spPr>
             <a:xfrm>
-              <a:off x="692708" y="4687735"/>
-              <a:ext cx="62179" cy="80101"/>
+              <a:off x="756929" y="4633931"/>
+              <a:ext cx="79004" cy="101955"/>
             </a:xfrm>
             <a:prstGeom prst="rect">
               <a:avLst/>
@@ -4619,7 +4619,7 @@
             <a:p>
               <a:pPr algn="l" marL="0" marR="0" indent="0">
                 <a:lnSpc>
-                  <a:spcPts val="880"/>
+                  <a:spcPts val="1120"/>
                 </a:lnSpc>
                 <a:spcBef>
                   <a:spcPts val="0"/>
@@ -4629,7 +4629,7 @@
                 </a:spcAft>
               </a:pPr>
               <a:r>
-                <a:rPr sz="880">
+                <a:rPr sz="1120">
                   <a:solidFill>
                     <a:srgbClr val="4D4D4D">
                       <a:alpha val="100000"/>
@@ -4651,8 +4651,8 @@
           </p:nvSpPr>
           <p:spPr>
             <a:xfrm>
-              <a:off x="692708" y="3858272"/>
-              <a:ext cx="62179" cy="80101"/>
+              <a:off x="756929" y="3860262"/>
+              <a:ext cx="79004" cy="101955"/>
             </a:xfrm>
             <a:prstGeom prst="rect">
               <a:avLst/>
@@ -4665,7 +4665,7 @@
             <a:p>
               <a:pPr algn="l" marL="0" marR="0" indent="0">
                 <a:lnSpc>
-                  <a:spcPts val="880"/>
+                  <a:spcPts val="1120"/>
                 </a:lnSpc>
                 <a:spcBef>
                   <a:spcPts val="0"/>
@@ -4675,7 +4675,7 @@
                 </a:spcAft>
               </a:pPr>
               <a:r>
-                <a:rPr sz="880">
+                <a:rPr sz="1120">
                   <a:solidFill>
                     <a:srgbClr val="4D4D4D">
                       <a:alpha val="100000"/>
@@ -4697,8 +4697,8 @@
           </p:nvSpPr>
           <p:spPr>
             <a:xfrm>
-              <a:off x="692708" y="3028808"/>
-              <a:ext cx="62179" cy="80101"/>
+              <a:off x="756929" y="3086593"/>
+              <a:ext cx="79004" cy="101955"/>
             </a:xfrm>
             <a:prstGeom prst="rect">
               <a:avLst/>
@@ -4711,7 +4711,7 @@
             <a:p>
               <a:pPr algn="l" marL="0" marR="0" indent="0">
                 <a:lnSpc>
-                  <a:spcPts val="880"/>
+                  <a:spcPts val="1120"/>
                 </a:lnSpc>
                 <a:spcBef>
                   <a:spcPts val="0"/>
@@ -4721,7 +4721,7 @@
                 </a:spcAft>
               </a:pPr>
               <a:r>
-                <a:rPr sz="880">
+                <a:rPr sz="1120">
                   <a:solidFill>
                     <a:srgbClr val="4D4D4D">
                       <a:alpha val="100000"/>
@@ -4743,8 +4743,8 @@
           </p:nvSpPr>
           <p:spPr>
             <a:xfrm>
-              <a:off x="692708" y="2199345"/>
-              <a:ext cx="62179" cy="80101"/>
+              <a:off x="756929" y="2312925"/>
+              <a:ext cx="79004" cy="101955"/>
             </a:xfrm>
             <a:prstGeom prst="rect">
               <a:avLst/>
@@ -4757,7 +4757,7 @@
             <a:p>
               <a:pPr algn="l" marL="0" marR="0" indent="0">
                 <a:lnSpc>
-                  <a:spcPts val="880"/>
+                  <a:spcPts val="1120"/>
                 </a:lnSpc>
                 <a:spcBef>
                   <a:spcPts val="0"/>
@@ -4767,7 +4767,7 @@
                 </a:spcAft>
               </a:pPr>
               <a:r>
-                <a:rPr sz="880">
+                <a:rPr sz="1120">
                   <a:solidFill>
                     <a:srgbClr val="4D4D4D">
                       <a:alpha val="100000"/>
@@ -4789,8 +4789,8 @@
           </p:nvSpPr>
           <p:spPr>
             <a:xfrm>
-              <a:off x="2423864" y="5785772"/>
-              <a:ext cx="155356" cy="80101"/>
+              <a:off x="2475630" y="5693022"/>
+              <a:ext cx="197510" cy="101955"/>
             </a:xfrm>
             <a:prstGeom prst="rect">
               <a:avLst/>
@@ -4803,7 +4803,7 @@
             <a:p>
               <a:pPr algn="l" marL="0" marR="0" indent="0">
                 <a:lnSpc>
-                  <a:spcPts val="880"/>
+                  <a:spcPts val="1120"/>
                 </a:lnSpc>
                 <a:spcBef>
                   <a:spcPts val="0"/>
@@ -4813,7 +4813,7 @@
                 </a:spcAft>
               </a:pPr>
               <a:r>
-                <a:rPr sz="880">
+                <a:rPr sz="1120">
                   <a:solidFill>
                     <a:srgbClr val="4D4D4D">
                       <a:alpha val="100000"/>
@@ -4835,8 +4835,8 @@
           </p:nvSpPr>
           <p:spPr>
             <a:xfrm>
-              <a:off x="4196521" y="5785772"/>
-              <a:ext cx="155356" cy="80101"/>
+              <a:off x="4221672" y="5693022"/>
+              <a:ext cx="197510" cy="101955"/>
             </a:xfrm>
             <a:prstGeom prst="rect">
               <a:avLst/>
@@ -4849,7 +4849,7 @@
             <a:p>
               <a:pPr algn="l" marL="0" marR="0" indent="0">
                 <a:lnSpc>
-                  <a:spcPts val="880"/>
+                  <a:spcPts val="1120"/>
                 </a:lnSpc>
                 <a:spcBef>
                   <a:spcPts val="0"/>
@@ -4859,7 +4859,7 @@
                 </a:spcAft>
               </a:pPr>
               <a:r>
-                <a:rPr sz="880">
+                <a:rPr sz="1120">
                   <a:solidFill>
                     <a:srgbClr val="4D4D4D">
                       <a:alpha val="100000"/>
@@ -4881,8 +4881,8 @@
           </p:nvSpPr>
           <p:spPr>
             <a:xfrm>
-              <a:off x="5969179" y="5785772"/>
-              <a:ext cx="155356" cy="80101"/>
+              <a:off x="5967715" y="5693022"/>
+              <a:ext cx="197510" cy="101955"/>
             </a:xfrm>
             <a:prstGeom prst="rect">
               <a:avLst/>
@@ -4895,7 +4895,7 @@
             <a:p>
               <a:pPr algn="l" marL="0" marR="0" indent="0">
                 <a:lnSpc>
-                  <a:spcPts val="880"/>
+                  <a:spcPts val="1120"/>
                 </a:lnSpc>
                 <a:spcBef>
                   <a:spcPts val="0"/>
@@ -4905,7 +4905,7 @@
                 </a:spcAft>
               </a:pPr>
               <a:r>
-                <a:rPr sz="880">
+                <a:rPr sz="1120">
                   <a:solidFill>
                     <a:srgbClr val="4D4D4D">
                       <a:alpha val="100000"/>
@@ -4927,8 +4927,8 @@
           </p:nvSpPr>
           <p:spPr>
             <a:xfrm>
-              <a:off x="7741836" y="5785772"/>
-              <a:ext cx="155356" cy="80101"/>
+              <a:off x="7713757" y="5693022"/>
+              <a:ext cx="197510" cy="101955"/>
             </a:xfrm>
             <a:prstGeom prst="rect">
               <a:avLst/>
@@ -4941,7 +4941,7 @@
             <a:p>
               <a:pPr algn="l" marL="0" marR="0" indent="0">
                 <a:lnSpc>
-                  <a:spcPts val="880"/>
+                  <a:spcPts val="1120"/>
                 </a:lnSpc>
                 <a:spcBef>
                   <a:spcPts val="0"/>
@@ -4951,7 +4951,7 @@
                 </a:spcAft>
               </a:pPr>
               <a:r>
-                <a:rPr sz="880">
+                <a:rPr sz="1120">
                   <a:solidFill>
                     <a:srgbClr val="4D4D4D">
                       <a:alpha val="100000"/>
@@ -4973,8 +4973,8 @@
           </p:nvSpPr>
           <p:spPr>
             <a:xfrm>
-              <a:off x="3879271" y="5925448"/>
-              <a:ext cx="1676186" cy="100218"/>
+              <a:off x="3690153" y="5870717"/>
+              <a:ext cx="2133569" cy="127558"/>
             </a:xfrm>
             <a:prstGeom prst="rect">
               <a:avLst/>
@@ -4987,7 +4987,7 @@
             <a:p>
               <a:pPr algn="l" marL="0" marR="0" indent="0">
                 <a:lnSpc>
-                  <a:spcPts val="1100"/>
+                  <a:spcPts val="1400"/>
                 </a:lnSpc>
                 <a:spcBef>
                   <a:spcPts val="0"/>
@@ -4997,7 +4997,7 @@
                 </a:spcAft>
               </a:pPr>
               <a:r>
-                <a:rPr sz="1100">
+                <a:rPr sz="1400">
                   <a:solidFill>
                     <a:srgbClr val="000000">
                       <a:alpha val="100000"/>
@@ -5019,8 +5019,8 @@
           </p:nvSpPr>
           <p:spPr>
             <a:xfrm rot="-5400000">
-              <a:off x="68446" y="3848213"/>
-              <a:ext cx="1016904" cy="100218"/>
+              <a:off x="-37527" y="3847460"/>
+              <a:ext cx="1294150" cy="127558"/>
             </a:xfrm>
             <a:prstGeom prst="rect">
               <a:avLst/>
@@ -5033,7 +5033,7 @@
             <a:p>
               <a:pPr algn="l" marL="0" marR="0" indent="0">
                 <a:lnSpc>
-                  <a:spcPts val="1100"/>
+                  <a:spcPts val="1400"/>
                 </a:lnSpc>
                 <a:spcBef>
                   <a:spcPts val="0"/>
@@ -5043,7 +5043,7 @@
                 </a:spcAft>
               </a:pPr>
               <a:r>
-                <a:rPr sz="1100">
+                <a:rPr sz="1400">
                   <a:solidFill>
                     <a:srgbClr val="000000">
                       <a:alpha val="100000"/>
@@ -5065,8 +5065,8 @@
           </p:nvSpPr>
           <p:spPr>
             <a:xfrm>
-              <a:off x="817517" y="1896563"/>
-              <a:ext cx="4166463" cy="82021"/>
+              <a:off x="915645" y="1977589"/>
+              <a:ext cx="5556900" cy="109362"/>
             </a:xfrm>
             <a:prstGeom prst="rect">
               <a:avLst/>
@@ -5079,7 +5079,7 @@
             <a:p>
               <a:pPr algn="l" marL="0" marR="0" indent="0">
                 <a:lnSpc>
-                  <a:spcPts val="900"/>
+                  <a:spcPts val="1200"/>
                 </a:lnSpc>
                 <a:spcBef>
                   <a:spcPts val="0"/>
@@ -5089,7 +5089,7 @@
                 </a:spcAft>
               </a:pPr>
               <a:r>
-                <a:rPr sz="900">
+                <a:rPr sz="1200">
                   <a:solidFill>
                     <a:srgbClr val="404040">
                       <a:alpha val="100000"/>
@@ -5111,8 +5111,8 @@
           </p:nvSpPr>
           <p:spPr>
             <a:xfrm>
-              <a:off x="817517" y="1669789"/>
-              <a:ext cx="1936790" cy="120152"/>
+              <a:off x="915645" y="1688767"/>
+              <a:ext cx="2465771" cy="153070"/>
             </a:xfrm>
             <a:prstGeom prst="rect">
               <a:avLst/>
@@ -5125,7 +5125,7 @@
             <a:p>
               <a:pPr algn="l" marL="0" marR="0" indent="0">
                 <a:lnSpc>
-                  <a:spcPts val="1320"/>
+                  <a:spcPts val="1680"/>
                 </a:lnSpc>
                 <a:spcBef>
                   <a:spcPts val="0"/>
@@ -5135,7 +5135,7 @@
                 </a:spcAft>
               </a:pPr>
               <a:r>
-                <a:rPr sz="1320">
+                <a:rPr sz="1680">
                   <a:solidFill>
                     <a:srgbClr val="000000">
                       <a:alpha val="100000"/>
